--- a/assets/investor-deck/Tecnotitan-Investor-Deck-JA.pptx
+++ b/assets/investor-deck/Tecnotitan-Investor-Deck-JA.pptx
@@ -2,24 +2,24 @@
 <file path=ppt/presentation.xml><?xml version="1.0" encoding="utf-8"?>
 <p:presentation xmlns:p="http://schemas.openxmlformats.org/presentationml/2006/main">
   <p:sldMasterIdLst>
-    <p:sldMasterId xmlns:r="http://schemas.openxmlformats.org/officeDocument/2006/relationships" id="2147483648" r:id="R3bd72f71e1dd4af5"/>
+    <p:sldMasterId xmlns:r="http://schemas.openxmlformats.org/officeDocument/2006/relationships" id="2147483648" r:id="R57d3eb55bc2e46bc"/>
   </p:sldMasterIdLst>
   <p:notesMasterIdLst>
-    <p:notesMasterId xmlns:r="http://schemas.openxmlformats.org/officeDocument/2006/relationships" r:id="R19d8a7b6b65d43f1"/>
+    <p:notesMasterId xmlns:r="http://schemas.openxmlformats.org/officeDocument/2006/relationships" r:id="R391506e5feda4f37"/>
   </p:notesMasterIdLst>
   <p:sldIdLst>
-    <p:sldId xmlns:r="http://schemas.openxmlformats.org/officeDocument/2006/relationships" id="256" r:id="R09c031d8693945cf"/>
-    <p:sldId xmlns:r="http://schemas.openxmlformats.org/officeDocument/2006/relationships" id="257" r:id="Re5f006620ac84fcd"/>
-    <p:sldId xmlns:r="http://schemas.openxmlformats.org/officeDocument/2006/relationships" id="258" r:id="R61ba38e5dbee4777"/>
-    <p:sldId xmlns:r="http://schemas.openxmlformats.org/officeDocument/2006/relationships" id="259" r:id="R736bd9438604446c"/>
-    <p:sldId xmlns:r="http://schemas.openxmlformats.org/officeDocument/2006/relationships" id="260" r:id="Rc4f86185fd8f4834"/>
-    <p:sldId xmlns:r="http://schemas.openxmlformats.org/officeDocument/2006/relationships" id="261" r:id="Rb96fdf836a0e49d2"/>
-    <p:sldId xmlns:r="http://schemas.openxmlformats.org/officeDocument/2006/relationships" id="262" r:id="Rb6afe8d7c99e4698"/>
-    <p:sldId xmlns:r="http://schemas.openxmlformats.org/officeDocument/2006/relationships" id="263" r:id="R180dc99955c54a0f"/>
-    <p:sldId xmlns:r="http://schemas.openxmlformats.org/officeDocument/2006/relationships" id="264" r:id="Raeb7bf4a374e4047"/>
-    <p:sldId xmlns:r="http://schemas.openxmlformats.org/officeDocument/2006/relationships" id="265" r:id="R909e1f03c2e44b78"/>
-    <p:sldId xmlns:r="http://schemas.openxmlformats.org/officeDocument/2006/relationships" id="266" r:id="R2dc8d0de1e1d4cd7"/>
-    <p:sldId xmlns:r="http://schemas.openxmlformats.org/officeDocument/2006/relationships" id="267" r:id="Rdb0ad43a4b7d4e0f"/>
+    <p:sldId xmlns:r="http://schemas.openxmlformats.org/officeDocument/2006/relationships" id="256" r:id="Rb112584d57c14f24"/>
+    <p:sldId xmlns:r="http://schemas.openxmlformats.org/officeDocument/2006/relationships" id="257" r:id="R533fd4ca78844598"/>
+    <p:sldId xmlns:r="http://schemas.openxmlformats.org/officeDocument/2006/relationships" id="258" r:id="Rbcf6b3bd33d84f05"/>
+    <p:sldId xmlns:r="http://schemas.openxmlformats.org/officeDocument/2006/relationships" id="259" r:id="R8c4249a60c0f4fe8"/>
+    <p:sldId xmlns:r="http://schemas.openxmlformats.org/officeDocument/2006/relationships" id="260" r:id="R4dcf071de7ac4845"/>
+    <p:sldId xmlns:r="http://schemas.openxmlformats.org/officeDocument/2006/relationships" id="261" r:id="Ra0b51fc1198c44c1"/>
+    <p:sldId xmlns:r="http://schemas.openxmlformats.org/officeDocument/2006/relationships" id="262" r:id="R0c7ee13b3dbd45dc"/>
+    <p:sldId xmlns:r="http://schemas.openxmlformats.org/officeDocument/2006/relationships" id="263" r:id="Recdbb5d47bf74e64"/>
+    <p:sldId xmlns:r="http://schemas.openxmlformats.org/officeDocument/2006/relationships" id="264" r:id="R7db5027b35c2460c"/>
+    <p:sldId xmlns:r="http://schemas.openxmlformats.org/officeDocument/2006/relationships" id="265" r:id="Rb3c8763e1edd406c"/>
+    <p:sldId xmlns:r="http://schemas.openxmlformats.org/officeDocument/2006/relationships" id="266" r:id="R44d391fab0624483"/>
+    <p:sldId xmlns:r="http://schemas.openxmlformats.org/officeDocument/2006/relationships" id="267" r:id="R2300b2ae9d7d4c0c"/>
   </p:sldIdLst>
   <p:sldSz cx="12192000" cy="6858000"/>
   <p:notesSz cx="6858000" cy="9144000"/>
@@ -1292,7 +1292,7 @@
   </p:cSld>
   <p:clrMap bg1="lt1" tx1="dk1" bg2="lt2" tx2="dk2" accent1="accent1" accent2="accent2" accent3="accent3" accent4="accent4" accent5="accent5" accent6="accent6" hlink="hlink" folHlink="folHlink"/>
   <p:sldLayoutIdLst>
-    <p:sldLayoutId xmlns:r="http://schemas.openxmlformats.org/officeDocument/2006/relationships" id="2147483649" r:id="Rb0673b2d3a764bba"/>
+    <p:sldLayoutId xmlns:r="http://schemas.openxmlformats.org/officeDocument/2006/relationships" id="2147483649" r:id="Re32f4aa86f9c44f7"/>
   </p:sldLayoutIdLst>
   <p:txStyles>
     <p:titleStyle>
@@ -1794,7 +1794,7 @@
           <p:nvPr/>
         </p:nvPicPr>
         <p:blipFill>
-          <a:blip xmlns:r="http://schemas.openxmlformats.org/officeDocument/2006/relationships" xmlns:a="http://schemas.openxmlformats.org/drawingml/2006/main" r:embed="Rb268c10169164def"/>
+          <a:blip xmlns:r="http://schemas.openxmlformats.org/officeDocument/2006/relationships" xmlns:a="http://schemas.openxmlformats.org/drawingml/2006/main" r:embed="R309f0135333e40ad"/>
           <a:srcRect xmlns:a="http://schemas.openxmlformats.org/drawingml/2006/main" l="0" t="7813" r="0" b="7813"/>
           <a:stretch xmlns:a="http://schemas.openxmlformats.org/drawingml/2006/main">
             <a:fillRect l="0" t="0" r="0" b="0"/>
@@ -1815,7 +1815,7 @@
           <p:cNvPr id="2" name="">
             <a:extLst xmlns:a="http://schemas.openxmlformats.org/drawingml/2006/main">
               <a:ext uri="{FF2B5EF4-FFF2-40B4-BE49-F238E27FC236}">
-                <a16:creationId xmlns:a16="http://schemas.microsoft.com/office/drawing/2014/main" id="{3F48FD38-241F-45F2-BBEE-9BC153232596}"/>
+                <a16:creationId xmlns:a16="http://schemas.microsoft.com/office/drawing/2014/main" id="{58EDD28D-B5AF-4178-9EC7-4BBB7410C3CC}"/>
               </a:ext>
             </a:extLst>
           </p:cNvPr>
@@ -1852,7 +1852,7 @@
           <p:cNvPr id="3" name="">
             <a:extLst xmlns:a="http://schemas.openxmlformats.org/drawingml/2006/main">
               <a:ext uri="{FF2B5EF4-FFF2-40B4-BE49-F238E27FC236}">
-                <a16:creationId xmlns:a16="http://schemas.microsoft.com/office/drawing/2014/main" id="{1BE5F36F-DD04-4C40-8583-BE9736C5402C}"/>
+                <a16:creationId xmlns:a16="http://schemas.microsoft.com/office/drawing/2014/main" id="{908C4A0A-5DF0-47C2-B9BA-AF075B7F94AA}"/>
               </a:ext>
             </a:extLst>
           </p:cNvPr>
@@ -1889,7 +1889,7 @@
           <p:cNvPr id="4" name="">
             <a:extLst xmlns:a="http://schemas.openxmlformats.org/drawingml/2006/main">
               <a:ext uri="{FF2B5EF4-FFF2-40B4-BE49-F238E27FC236}">
-                <a16:creationId xmlns:a16="http://schemas.microsoft.com/office/drawing/2014/main" id="{C3B3F9C3-59CE-4C55-8E62-FA5FB8BF06B3}"/>
+                <a16:creationId xmlns:a16="http://schemas.microsoft.com/office/drawing/2014/main" id="{0188114E-EB79-4355-80E3-13BB746BEA6F}"/>
               </a:ext>
             </a:extLst>
           </p:cNvPr>
@@ -1953,7 +1953,7 @@
           <p:cNvPr id="5" name="">
             <a:extLst xmlns:a="http://schemas.openxmlformats.org/drawingml/2006/main">
               <a:ext uri="{FF2B5EF4-FFF2-40B4-BE49-F238E27FC236}">
-                <a16:creationId xmlns:a16="http://schemas.microsoft.com/office/drawing/2014/main" id="{729B63BC-D56A-4954-9F67-9F1DE5E027ED}"/>
+                <a16:creationId xmlns:a16="http://schemas.microsoft.com/office/drawing/2014/main" id="{99D1F16B-B9F2-4379-B75D-AFB46F211447}"/>
               </a:ext>
             </a:extLst>
           </p:cNvPr>
@@ -2017,7 +2017,7 @@
           <p:cNvPr id="6" name="">
             <a:extLst xmlns:a="http://schemas.openxmlformats.org/drawingml/2006/main">
               <a:ext uri="{FF2B5EF4-FFF2-40B4-BE49-F238E27FC236}">
-                <a16:creationId xmlns:a16="http://schemas.microsoft.com/office/drawing/2014/main" id="{0369E394-3ED1-4228-BB5E-001E466FB6B3}"/>
+                <a16:creationId xmlns:a16="http://schemas.microsoft.com/office/drawing/2014/main" id="{EF990EC9-0FF4-4985-B87E-53E3E9B8C759}"/>
               </a:ext>
             </a:extLst>
           </p:cNvPr>
@@ -2050,7 +2050,7 @@
           <p:cNvPr id="7" name="">
             <a:extLst xmlns:a="http://schemas.openxmlformats.org/drawingml/2006/main">
               <a:ext uri="{FF2B5EF4-FFF2-40B4-BE49-F238E27FC236}">
-                <a16:creationId xmlns:a16="http://schemas.microsoft.com/office/drawing/2014/main" id="{8AA99F54-A7C7-485A-9C68-66319622A3B0}"/>
+                <a16:creationId xmlns:a16="http://schemas.microsoft.com/office/drawing/2014/main" id="{1B1678E3-C029-4116-AD74-7A7DF13AE649}"/>
               </a:ext>
             </a:extLst>
           </p:cNvPr>
@@ -2114,7 +2114,7 @@
           <p:cNvPr id="8" name="">
             <a:extLst xmlns:a="http://schemas.openxmlformats.org/drawingml/2006/main">
               <a:ext uri="{FF2B5EF4-FFF2-40B4-BE49-F238E27FC236}">
-                <a16:creationId xmlns:a16="http://schemas.microsoft.com/office/drawing/2014/main" id="{1309DBF9-6F0D-4248-96F3-31104BF174CD}"/>
+                <a16:creationId xmlns:a16="http://schemas.microsoft.com/office/drawing/2014/main" id="{3C3590B6-7467-44BC-A50D-10C67D345021}"/>
               </a:ext>
             </a:extLst>
           </p:cNvPr>
@@ -2178,7 +2178,7 @@
           <p:cNvPr id="9" name="">
             <a:extLst xmlns:a="http://schemas.openxmlformats.org/drawingml/2006/main">
               <a:ext uri="{FF2B5EF4-FFF2-40B4-BE49-F238E27FC236}">
-                <a16:creationId xmlns:a16="http://schemas.microsoft.com/office/drawing/2014/main" id="{D07214ED-6D38-4A7C-A8CA-49D3017779A6}"/>
+                <a16:creationId xmlns:a16="http://schemas.microsoft.com/office/drawing/2014/main" id="{E5187916-DF34-4312-9698-CA6ECA5F9049}"/>
               </a:ext>
             </a:extLst>
           </p:cNvPr>
@@ -2213,7 +2213,7 @@
           <p:cNvPr id="10" name="">
             <a:extLst xmlns:a="http://schemas.openxmlformats.org/drawingml/2006/main">
               <a:ext uri="{FF2B5EF4-FFF2-40B4-BE49-F238E27FC236}">
-                <a16:creationId xmlns:a16="http://schemas.microsoft.com/office/drawing/2014/main" id="{A393BEED-7CCE-402A-931F-2865641BF67F}"/>
+                <a16:creationId xmlns:a16="http://schemas.microsoft.com/office/drawing/2014/main" id="{07B4AACA-7F35-44CE-947C-B30C0CE7B671}"/>
               </a:ext>
             </a:extLst>
           </p:cNvPr>
@@ -2277,7 +2277,7 @@
           <p:cNvPr id="11" name="">
             <a:extLst xmlns:a="http://schemas.openxmlformats.org/drawingml/2006/main">
               <a:ext uri="{FF2B5EF4-FFF2-40B4-BE49-F238E27FC236}">
-                <a16:creationId xmlns:a16="http://schemas.microsoft.com/office/drawing/2014/main" id="{638AC721-6927-434C-B5B8-0C90D3121709}"/>
+                <a16:creationId xmlns:a16="http://schemas.microsoft.com/office/drawing/2014/main" id="{F4DE61C1-3569-47DD-97A7-ECDD40125B9B}"/>
               </a:ext>
             </a:extLst>
           </p:cNvPr>
@@ -2312,7 +2312,7 @@
           <p:cNvPr id="12" name="">
             <a:extLst xmlns:a="http://schemas.openxmlformats.org/drawingml/2006/main">
               <a:ext uri="{FF2B5EF4-FFF2-40B4-BE49-F238E27FC236}">
-                <a16:creationId xmlns:a16="http://schemas.microsoft.com/office/drawing/2014/main" id="{C9EEE650-230F-456D-A1ED-97F0522C3995}"/>
+                <a16:creationId xmlns:a16="http://schemas.microsoft.com/office/drawing/2014/main" id="{E0710B5C-064E-4CAD-92B3-27487E1956FA}"/>
               </a:ext>
             </a:extLst>
           </p:cNvPr>
@@ -2376,7 +2376,7 @@
           <p:cNvPr id="13" name="">
             <a:extLst xmlns:a="http://schemas.openxmlformats.org/drawingml/2006/main">
               <a:ext uri="{FF2B5EF4-FFF2-40B4-BE49-F238E27FC236}">
-                <a16:creationId xmlns:a16="http://schemas.microsoft.com/office/drawing/2014/main" id="{8C1B496F-DD10-4FBC-A36D-4D9C00803E14}"/>
+                <a16:creationId xmlns:a16="http://schemas.microsoft.com/office/drawing/2014/main" id="{4AB803D8-614B-429C-BF5D-D0E66C5A5668}"/>
               </a:ext>
             </a:extLst>
           </p:cNvPr>
@@ -2411,7 +2411,7 @@
           <p:cNvPr id="14" name="">
             <a:extLst xmlns:a="http://schemas.openxmlformats.org/drawingml/2006/main">
               <a:ext uri="{FF2B5EF4-FFF2-40B4-BE49-F238E27FC236}">
-                <a16:creationId xmlns:a16="http://schemas.microsoft.com/office/drawing/2014/main" id="{B3AB1065-E04F-411D-8A9F-54FDA23B0BAE}"/>
+                <a16:creationId xmlns:a16="http://schemas.microsoft.com/office/drawing/2014/main" id="{BFD8ED98-C3F8-4217-99D5-34A79BF76F23}"/>
               </a:ext>
             </a:extLst>
           </p:cNvPr>
@@ -2475,7 +2475,7 @@
           <p:cNvPr id="15" name="">
             <a:extLst xmlns:a="http://schemas.openxmlformats.org/drawingml/2006/main">
               <a:ext uri="{FF2B5EF4-FFF2-40B4-BE49-F238E27FC236}">
-                <a16:creationId xmlns:a16="http://schemas.microsoft.com/office/drawing/2014/main" id="{C0F01941-0C7E-409B-BEB8-E97B49437FAA}"/>
+                <a16:creationId xmlns:a16="http://schemas.microsoft.com/office/drawing/2014/main" id="{5DFB7A74-CDF5-4F2F-BD20-7E5A175322DE}"/>
               </a:ext>
             </a:extLst>
           </p:cNvPr>
@@ -2539,7 +2539,7 @@
           <p:cNvPr id="16" name="">
             <a:extLst xmlns:a="http://schemas.openxmlformats.org/drawingml/2006/main">
               <a:ext uri="{FF2B5EF4-FFF2-40B4-BE49-F238E27FC236}">
-                <a16:creationId xmlns:a16="http://schemas.microsoft.com/office/drawing/2014/main" id="{C525E01D-7B42-4CD3-B57C-86FD3A60A7C3}"/>
+                <a16:creationId xmlns:a16="http://schemas.microsoft.com/office/drawing/2014/main" id="{0B40C433-F42B-4632-A316-0FF41C0EEF7E}"/>
               </a:ext>
             </a:extLst>
           </p:cNvPr>
@@ -2574,7 +2574,7 @@
           <p:cNvPr id="17" name="">
             <a:extLst xmlns:a="http://schemas.openxmlformats.org/drawingml/2006/main">
               <a:ext uri="{FF2B5EF4-FFF2-40B4-BE49-F238E27FC236}">
-                <a16:creationId xmlns:a16="http://schemas.microsoft.com/office/drawing/2014/main" id="{DDE16884-6167-4D70-8647-6DF4A153CE2C}"/>
+                <a16:creationId xmlns:a16="http://schemas.microsoft.com/office/drawing/2014/main" id="{78AD1FD6-0DF2-4506-9C6E-B83C5D212138}"/>
               </a:ext>
             </a:extLst>
           </p:cNvPr>
@@ -2638,7 +2638,7 @@
           <p:cNvPr id="18" name="">
             <a:extLst xmlns:a="http://schemas.openxmlformats.org/drawingml/2006/main">
               <a:ext uri="{FF2B5EF4-FFF2-40B4-BE49-F238E27FC236}">
-                <a16:creationId xmlns:a16="http://schemas.microsoft.com/office/drawing/2014/main" id="{D3E99D3C-07CA-4E69-95C4-AB3802E1B447}"/>
+                <a16:creationId xmlns:a16="http://schemas.microsoft.com/office/drawing/2014/main" id="{2F078105-90F4-45FD-BB47-37607870C072}"/>
               </a:ext>
             </a:extLst>
           </p:cNvPr>
@@ -2702,7 +2702,7 @@
           <p:cNvPr id="19" name="">
             <a:extLst xmlns:a="http://schemas.openxmlformats.org/drawingml/2006/main">
               <a:ext uri="{FF2B5EF4-FFF2-40B4-BE49-F238E27FC236}">
-                <a16:creationId xmlns:a16="http://schemas.microsoft.com/office/drawing/2014/main" id="{99CA44F3-D628-4CCE-ABC9-645EBEE45E9D}"/>
+                <a16:creationId xmlns:a16="http://schemas.microsoft.com/office/drawing/2014/main" id="{340846BB-6813-41B1-B0E2-C29232051DD1}"/>
               </a:ext>
             </a:extLst>
           </p:cNvPr>
@@ -2737,7 +2737,7 @@
           <p:cNvPr id="20" name="">
             <a:extLst xmlns:a="http://schemas.openxmlformats.org/drawingml/2006/main">
               <a:ext uri="{FF2B5EF4-FFF2-40B4-BE49-F238E27FC236}">
-                <a16:creationId xmlns:a16="http://schemas.microsoft.com/office/drawing/2014/main" id="{19A1D475-E5A7-4184-945E-47111441D06A}"/>
+                <a16:creationId xmlns:a16="http://schemas.microsoft.com/office/drawing/2014/main" id="{FE406E4B-2978-4612-923F-42B385F718C3}"/>
               </a:ext>
             </a:extLst>
           </p:cNvPr>
@@ -2801,7 +2801,7 @@
           <p:cNvPr id="21" name="">
             <a:extLst xmlns:a="http://schemas.openxmlformats.org/drawingml/2006/main">
               <a:ext uri="{FF2B5EF4-FFF2-40B4-BE49-F238E27FC236}">
-                <a16:creationId xmlns:a16="http://schemas.microsoft.com/office/drawing/2014/main" id="{3F4FF349-72E3-499D-B533-C33CFB8526A7}"/>
+                <a16:creationId xmlns:a16="http://schemas.microsoft.com/office/drawing/2014/main" id="{16FAC6B9-A582-4FEC-A9B1-6EAE8D72B596}"/>
               </a:ext>
             </a:extLst>
           </p:cNvPr>
@@ -2865,7 +2865,7 @@
           <p:cNvPr id="22" name="">
             <a:extLst xmlns:a="http://schemas.openxmlformats.org/drawingml/2006/main">
               <a:ext uri="{FF2B5EF4-FFF2-40B4-BE49-F238E27FC236}">
-                <a16:creationId xmlns:a16="http://schemas.microsoft.com/office/drawing/2014/main" id="{66399F3B-7697-409D-91B8-63DC07D827F4}"/>
+                <a16:creationId xmlns:a16="http://schemas.microsoft.com/office/drawing/2014/main" id="{AAEC6A06-302E-4BF6-BBE4-D989B6822A86}"/>
               </a:ext>
             </a:extLst>
           </p:cNvPr>
@@ -2929,7 +2929,7 @@
           <p:cNvPr id="23" name="">
             <a:extLst xmlns:a="http://schemas.openxmlformats.org/drawingml/2006/main">
               <a:ext uri="{FF2B5EF4-FFF2-40B4-BE49-F238E27FC236}">
-                <a16:creationId xmlns:a16="http://schemas.microsoft.com/office/drawing/2014/main" id="{C894BFC2-FE2B-4DA2-A196-EA258F0E1001}"/>
+                <a16:creationId xmlns:a16="http://schemas.microsoft.com/office/drawing/2014/main" id="{D259D8B9-BC46-4F61-A0C0-7D623FB35078}"/>
               </a:ext>
             </a:extLst>
           </p:cNvPr>
@@ -2962,7 +2962,7 @@
           <p:cNvPr id="24" name="">
             <a:extLst xmlns:a="http://schemas.openxmlformats.org/drawingml/2006/main">
               <a:ext uri="{FF2B5EF4-FFF2-40B4-BE49-F238E27FC236}">
-                <a16:creationId xmlns:a16="http://schemas.microsoft.com/office/drawing/2014/main" id="{1BC10453-3EDA-44BE-A164-1C2DA7AED9D1}"/>
+                <a16:creationId xmlns:a16="http://schemas.microsoft.com/office/drawing/2014/main" id="{95686F4E-3893-4722-B5A4-2F071C3906C9}"/>
               </a:ext>
             </a:extLst>
           </p:cNvPr>
@@ -3026,7 +3026,7 @@
           <p:cNvPr id="25" name="">
             <a:extLst xmlns:a="http://schemas.openxmlformats.org/drawingml/2006/main">
               <a:ext uri="{FF2B5EF4-FFF2-40B4-BE49-F238E27FC236}">
-                <a16:creationId xmlns:a16="http://schemas.microsoft.com/office/drawing/2014/main" id="{AD5C13D3-F432-4647-8DB8-B9405D37979E}"/>
+                <a16:creationId xmlns:a16="http://schemas.microsoft.com/office/drawing/2014/main" id="{291D58A7-1B19-4FC0-80D3-ADA9013926EE}"/>
               </a:ext>
             </a:extLst>
           </p:cNvPr>
@@ -3088,7 +3088,7 @@
     </p:spTree>
     <p:extLst>
       <p:ext uri="{BB962C8B-B14F-4D97-AF65-F5344CB8AC3E}">
-        <p14:creationId xmlns:p14="http://schemas.microsoft.com/office/powerpoint/2010/main" val="1534925875"/>
+        <p14:creationId xmlns:p14="http://schemas.microsoft.com/office/powerpoint/2010/main" val="1900408864"/>
       </p:ext>
     </p:extLst>
   </p:cSld>
@@ -3116,7 +3116,7 @@
           <p:nvPr/>
         </p:nvPicPr>
         <p:blipFill>
-          <a:blip xmlns:r="http://schemas.openxmlformats.org/officeDocument/2006/relationships" xmlns:a="http://schemas.openxmlformats.org/drawingml/2006/main" r:embed="Ra901fbe1d6d84eb3"/>
+          <a:blip xmlns:r="http://schemas.openxmlformats.org/officeDocument/2006/relationships" xmlns:a="http://schemas.openxmlformats.org/drawingml/2006/main" r:embed="Rb222781c1df14c25"/>
           <a:srcRect xmlns:a="http://schemas.openxmlformats.org/drawingml/2006/main" l="0" t="27" r="0" b="27"/>
           <a:stretch xmlns:a="http://schemas.openxmlformats.org/drawingml/2006/main">
             <a:fillRect l="0" t="0" r="0" b="0"/>
@@ -3137,7 +3137,7 @@
           <p:cNvPr id="2" name="">
             <a:extLst xmlns:a="http://schemas.openxmlformats.org/drawingml/2006/main">
               <a:ext uri="{FF2B5EF4-FFF2-40B4-BE49-F238E27FC236}">
-                <a16:creationId xmlns:a16="http://schemas.microsoft.com/office/drawing/2014/main" id="{E277BF74-7EB8-4C71-9CB4-DCB6B0A05031}"/>
+                <a16:creationId xmlns:a16="http://schemas.microsoft.com/office/drawing/2014/main" id="{4D808571-93C1-4E1D-8EBF-FBA88C613EA2}"/>
               </a:ext>
             </a:extLst>
           </p:cNvPr>
@@ -3174,7 +3174,7 @@
           <p:cNvPr id="3" name="">
             <a:extLst xmlns:a="http://schemas.openxmlformats.org/drawingml/2006/main">
               <a:ext uri="{FF2B5EF4-FFF2-40B4-BE49-F238E27FC236}">
-                <a16:creationId xmlns:a16="http://schemas.microsoft.com/office/drawing/2014/main" id="{5CDCEDFE-A650-4B6A-8165-D3226F1A020C}"/>
+                <a16:creationId xmlns:a16="http://schemas.microsoft.com/office/drawing/2014/main" id="{523BE05B-3936-4C05-A7F9-F99423665417}"/>
               </a:ext>
             </a:extLst>
           </p:cNvPr>
@@ -3211,7 +3211,7 @@
           <p:cNvPr id="4" name="">
             <a:extLst xmlns:a="http://schemas.openxmlformats.org/drawingml/2006/main">
               <a:ext uri="{FF2B5EF4-FFF2-40B4-BE49-F238E27FC236}">
-                <a16:creationId xmlns:a16="http://schemas.microsoft.com/office/drawing/2014/main" id="{BAD28CBF-5A55-4918-8D3D-208D46C6C507}"/>
+                <a16:creationId xmlns:a16="http://schemas.microsoft.com/office/drawing/2014/main" id="{C63AD897-8D21-4E11-9413-3415CBCBDFA8}"/>
               </a:ext>
             </a:extLst>
           </p:cNvPr>
@@ -3275,7 +3275,7 @@
           <p:cNvPr id="5" name="">
             <a:extLst xmlns:a="http://schemas.openxmlformats.org/drawingml/2006/main">
               <a:ext uri="{FF2B5EF4-FFF2-40B4-BE49-F238E27FC236}">
-                <a16:creationId xmlns:a16="http://schemas.microsoft.com/office/drawing/2014/main" id="{26B19B95-9F7F-4729-95E0-A06C6E2BDA06}"/>
+                <a16:creationId xmlns:a16="http://schemas.microsoft.com/office/drawing/2014/main" id="{7FF7D861-85CD-4D6E-BF98-467345404BA4}"/>
               </a:ext>
             </a:extLst>
           </p:cNvPr>
@@ -3339,7 +3339,7 @@
           <p:cNvPr id="6" name="">
             <a:extLst xmlns:a="http://schemas.openxmlformats.org/drawingml/2006/main">
               <a:ext uri="{FF2B5EF4-FFF2-40B4-BE49-F238E27FC236}">
-                <a16:creationId xmlns:a16="http://schemas.microsoft.com/office/drawing/2014/main" id="{B3C08BEA-D786-4D99-801B-A04FA9C23C06}"/>
+                <a16:creationId xmlns:a16="http://schemas.microsoft.com/office/drawing/2014/main" id="{70A60620-5E8F-40A1-8C49-865B48F48281}"/>
               </a:ext>
             </a:extLst>
           </p:cNvPr>
@@ -3403,7 +3403,7 @@
           <p:cNvPr id="7" name="">
             <a:extLst xmlns:a="http://schemas.openxmlformats.org/drawingml/2006/main">
               <a:ext uri="{FF2B5EF4-FFF2-40B4-BE49-F238E27FC236}">
-                <a16:creationId xmlns:a16="http://schemas.microsoft.com/office/drawing/2014/main" id="{BD98102E-EF15-449B-9336-8F05006D0834}"/>
+                <a16:creationId xmlns:a16="http://schemas.microsoft.com/office/drawing/2014/main" id="{E40B39BD-E16D-4252-8C7A-21162686E7A4}"/>
               </a:ext>
             </a:extLst>
           </p:cNvPr>
@@ -3438,7 +3438,7 @@
           <p:cNvPr id="8" name="">
             <a:extLst xmlns:a="http://schemas.openxmlformats.org/drawingml/2006/main">
               <a:ext uri="{FF2B5EF4-FFF2-40B4-BE49-F238E27FC236}">
-                <a16:creationId xmlns:a16="http://schemas.microsoft.com/office/drawing/2014/main" id="{E042137B-89FA-43BE-843D-AD495E38E99E}"/>
+                <a16:creationId xmlns:a16="http://schemas.microsoft.com/office/drawing/2014/main" id="{115AAF94-38E1-499A-8F0A-A2181D8EF899}"/>
               </a:ext>
             </a:extLst>
           </p:cNvPr>
@@ -3502,7 +3502,7 @@
           <p:cNvPr id="9" name="">
             <a:extLst xmlns:a="http://schemas.openxmlformats.org/drawingml/2006/main">
               <a:ext uri="{FF2B5EF4-FFF2-40B4-BE49-F238E27FC236}">
-                <a16:creationId xmlns:a16="http://schemas.microsoft.com/office/drawing/2014/main" id="{B2267FC8-CAF5-47BF-BDE8-F3E2B3A4AA45}"/>
+                <a16:creationId xmlns:a16="http://schemas.microsoft.com/office/drawing/2014/main" id="{C57B0AAF-94EC-46FF-BDF6-5F72E6BE41D9}"/>
               </a:ext>
             </a:extLst>
           </p:cNvPr>
@@ -3537,7 +3537,7 @@
           <p:cNvPr id="10" name="">
             <a:extLst xmlns:a="http://schemas.openxmlformats.org/drawingml/2006/main">
               <a:ext uri="{FF2B5EF4-FFF2-40B4-BE49-F238E27FC236}">
-                <a16:creationId xmlns:a16="http://schemas.microsoft.com/office/drawing/2014/main" id="{75B51466-99DE-488C-94F1-DE560B1B820B}"/>
+                <a16:creationId xmlns:a16="http://schemas.microsoft.com/office/drawing/2014/main" id="{DEA97153-2885-429E-82D5-1F7E36FEEAA3}"/>
               </a:ext>
             </a:extLst>
           </p:cNvPr>
@@ -3601,7 +3601,7 @@
           <p:cNvPr id="11" name="">
             <a:extLst xmlns:a="http://schemas.openxmlformats.org/drawingml/2006/main">
               <a:ext uri="{FF2B5EF4-FFF2-40B4-BE49-F238E27FC236}">
-                <a16:creationId xmlns:a16="http://schemas.microsoft.com/office/drawing/2014/main" id="{C1C0C1DC-55A9-4B98-9AFA-06D33A90777C}"/>
+                <a16:creationId xmlns:a16="http://schemas.microsoft.com/office/drawing/2014/main" id="{DFF8C44A-8B4B-4A74-9679-9106122A7E41}"/>
               </a:ext>
             </a:extLst>
           </p:cNvPr>
@@ -3636,7 +3636,7 @@
           <p:cNvPr id="12" name="">
             <a:extLst xmlns:a="http://schemas.openxmlformats.org/drawingml/2006/main">
               <a:ext uri="{FF2B5EF4-FFF2-40B4-BE49-F238E27FC236}">
-                <a16:creationId xmlns:a16="http://schemas.microsoft.com/office/drawing/2014/main" id="{2704F16B-EF6A-4F18-BA34-52FD4DFACB80}"/>
+                <a16:creationId xmlns:a16="http://schemas.microsoft.com/office/drawing/2014/main" id="{8DE10D64-D426-40A6-A063-A401419518AD}"/>
               </a:ext>
             </a:extLst>
           </p:cNvPr>
@@ -3700,7 +3700,7 @@
           <p:cNvPr id="13" name="">
             <a:extLst xmlns:a="http://schemas.openxmlformats.org/drawingml/2006/main">
               <a:ext uri="{FF2B5EF4-FFF2-40B4-BE49-F238E27FC236}">
-                <a16:creationId xmlns:a16="http://schemas.microsoft.com/office/drawing/2014/main" id="{3F70BCAA-5D15-434D-927D-3C2A0AC816DC}"/>
+                <a16:creationId xmlns:a16="http://schemas.microsoft.com/office/drawing/2014/main" id="{DF8494EA-1B3D-40A7-93A1-D3601B8ED751}"/>
               </a:ext>
             </a:extLst>
           </p:cNvPr>
@@ -3735,7 +3735,7 @@
           <p:cNvPr id="14" name="">
             <a:extLst xmlns:a="http://schemas.openxmlformats.org/drawingml/2006/main">
               <a:ext uri="{FF2B5EF4-FFF2-40B4-BE49-F238E27FC236}">
-                <a16:creationId xmlns:a16="http://schemas.microsoft.com/office/drawing/2014/main" id="{E2AD55F8-5FB6-4807-89A9-065568BEE129}"/>
+                <a16:creationId xmlns:a16="http://schemas.microsoft.com/office/drawing/2014/main" id="{1081CD64-FFCB-452F-B054-F6A68BC8818D}"/>
               </a:ext>
             </a:extLst>
           </p:cNvPr>
@@ -3799,7 +3799,7 @@
           <p:cNvPr id="15" name="">
             <a:extLst xmlns:a="http://schemas.openxmlformats.org/drawingml/2006/main">
               <a:ext uri="{FF2B5EF4-FFF2-40B4-BE49-F238E27FC236}">
-                <a16:creationId xmlns:a16="http://schemas.microsoft.com/office/drawing/2014/main" id="{A1F29144-04B4-488D-8820-FF5AFF1BF56C}"/>
+                <a16:creationId xmlns:a16="http://schemas.microsoft.com/office/drawing/2014/main" id="{7D680BD3-B117-4251-AB00-B2CEB27C5E65}"/>
               </a:ext>
             </a:extLst>
           </p:cNvPr>
@@ -3863,7 +3863,7 @@
           <p:cNvPr id="16" name="">
             <a:extLst xmlns:a="http://schemas.openxmlformats.org/drawingml/2006/main">
               <a:ext uri="{FF2B5EF4-FFF2-40B4-BE49-F238E27FC236}">
-                <a16:creationId xmlns:a16="http://schemas.microsoft.com/office/drawing/2014/main" id="{790C881F-3B97-4AD5-AE49-AF7F04E4679A}"/>
+                <a16:creationId xmlns:a16="http://schemas.microsoft.com/office/drawing/2014/main" id="{F2E840F4-6F77-4A06-BB78-5CE065AA12D1}"/>
               </a:ext>
             </a:extLst>
           </p:cNvPr>
@@ -3927,7 +3927,7 @@
           <p:cNvPr id="17" name="">
             <a:extLst xmlns:a="http://schemas.openxmlformats.org/drawingml/2006/main">
               <a:ext uri="{FF2B5EF4-FFF2-40B4-BE49-F238E27FC236}">
-                <a16:creationId xmlns:a16="http://schemas.microsoft.com/office/drawing/2014/main" id="{7DDC1181-4D00-404A-A21A-04A322DA058E}"/>
+                <a16:creationId xmlns:a16="http://schemas.microsoft.com/office/drawing/2014/main" id="{61A59909-2DAF-462E-A136-C62D7BD53E37}"/>
               </a:ext>
             </a:extLst>
           </p:cNvPr>
@@ -3960,7 +3960,7 @@
           <p:cNvPr id="18" name="">
             <a:extLst xmlns:a="http://schemas.openxmlformats.org/drawingml/2006/main">
               <a:ext uri="{FF2B5EF4-FFF2-40B4-BE49-F238E27FC236}">
-                <a16:creationId xmlns:a16="http://schemas.microsoft.com/office/drawing/2014/main" id="{D6AEDD9C-978A-4B39-AFF3-FFE9CDFADE26}"/>
+                <a16:creationId xmlns:a16="http://schemas.microsoft.com/office/drawing/2014/main" id="{93585744-035D-4B0A-AE01-C33DBEB1A147}"/>
               </a:ext>
             </a:extLst>
           </p:cNvPr>
@@ -4024,7 +4024,7 @@
           <p:cNvPr id="19" name="">
             <a:extLst xmlns:a="http://schemas.openxmlformats.org/drawingml/2006/main">
               <a:ext uri="{FF2B5EF4-FFF2-40B4-BE49-F238E27FC236}">
-                <a16:creationId xmlns:a16="http://schemas.microsoft.com/office/drawing/2014/main" id="{00CB2935-9A0A-4F8D-B5AB-CD5D2BE58B38}"/>
+                <a16:creationId xmlns:a16="http://schemas.microsoft.com/office/drawing/2014/main" id="{CC5B306D-FB58-4D73-B6F7-2467C3E236B6}"/>
               </a:ext>
             </a:extLst>
           </p:cNvPr>
@@ -4086,7 +4086,7 @@
     </p:spTree>
     <p:extLst>
       <p:ext uri="{BB962C8B-B14F-4D97-AF65-F5344CB8AC3E}">
-        <p14:creationId xmlns:p14="http://schemas.microsoft.com/office/powerpoint/2010/main" val="1100473959"/>
+        <p14:creationId xmlns:p14="http://schemas.microsoft.com/office/powerpoint/2010/main" val="1598167799"/>
       </p:ext>
     </p:extLst>
   </p:cSld>
@@ -4114,7 +4114,7 @@
           <p:nvPr/>
         </p:nvPicPr>
         <p:blipFill>
-          <a:blip xmlns:r="http://schemas.openxmlformats.org/officeDocument/2006/relationships" xmlns:a="http://schemas.openxmlformats.org/drawingml/2006/main" r:embed="Refbc5b6a2ff942f8"/>
+          <a:blip xmlns:r="http://schemas.openxmlformats.org/officeDocument/2006/relationships" xmlns:a="http://schemas.openxmlformats.org/drawingml/2006/main" r:embed="R3be6702fcb894c8e"/>
           <a:srcRect xmlns:a="http://schemas.openxmlformats.org/drawingml/2006/main" l="0" t="27" r="0" b="27"/>
           <a:stretch xmlns:a="http://schemas.openxmlformats.org/drawingml/2006/main">
             <a:fillRect l="0" t="0" r="0" b="0"/>
@@ -4135,7 +4135,7 @@
           <p:cNvPr id="2" name="">
             <a:extLst xmlns:a="http://schemas.openxmlformats.org/drawingml/2006/main">
               <a:ext uri="{FF2B5EF4-FFF2-40B4-BE49-F238E27FC236}">
-                <a16:creationId xmlns:a16="http://schemas.microsoft.com/office/drawing/2014/main" id="{5A7195B7-4E34-432D-8CCF-4007AF5346A1}"/>
+                <a16:creationId xmlns:a16="http://schemas.microsoft.com/office/drawing/2014/main" id="{4606D637-300A-4347-9692-66C4072EC936}"/>
               </a:ext>
             </a:extLst>
           </p:cNvPr>
@@ -4172,7 +4172,7 @@
           <p:cNvPr id="3" name="">
             <a:extLst xmlns:a="http://schemas.openxmlformats.org/drawingml/2006/main">
               <a:ext uri="{FF2B5EF4-FFF2-40B4-BE49-F238E27FC236}">
-                <a16:creationId xmlns:a16="http://schemas.microsoft.com/office/drawing/2014/main" id="{C7B3CCCA-3B9D-4C52-8172-21A8DBD96934}"/>
+                <a16:creationId xmlns:a16="http://schemas.microsoft.com/office/drawing/2014/main" id="{6AD7A16D-1F63-4605-8612-669A7C15B489}"/>
               </a:ext>
             </a:extLst>
           </p:cNvPr>
@@ -4209,7 +4209,7 @@
           <p:cNvPr id="4" name="">
             <a:extLst xmlns:a="http://schemas.openxmlformats.org/drawingml/2006/main">
               <a:ext uri="{FF2B5EF4-FFF2-40B4-BE49-F238E27FC236}">
-                <a16:creationId xmlns:a16="http://schemas.microsoft.com/office/drawing/2014/main" id="{9E0E810F-507A-4575-8605-C8D2F3C0E6BB}"/>
+                <a16:creationId xmlns:a16="http://schemas.microsoft.com/office/drawing/2014/main" id="{C7324A3F-418C-4DB9-B932-E680E16C880D}"/>
               </a:ext>
             </a:extLst>
           </p:cNvPr>
@@ -4273,7 +4273,7 @@
           <p:cNvPr id="5" name="">
             <a:extLst xmlns:a="http://schemas.openxmlformats.org/drawingml/2006/main">
               <a:ext uri="{FF2B5EF4-FFF2-40B4-BE49-F238E27FC236}">
-                <a16:creationId xmlns:a16="http://schemas.microsoft.com/office/drawing/2014/main" id="{C6C9CC87-2B9C-4A35-B76D-966518B15655}"/>
+                <a16:creationId xmlns:a16="http://schemas.microsoft.com/office/drawing/2014/main" id="{33536A66-85E8-44BD-B58F-A50671CFF063}"/>
               </a:ext>
             </a:extLst>
           </p:cNvPr>
@@ -4337,7 +4337,7 @@
           <p:cNvPr id="6" name="">
             <a:extLst xmlns:a="http://schemas.openxmlformats.org/drawingml/2006/main">
               <a:ext uri="{FF2B5EF4-FFF2-40B4-BE49-F238E27FC236}">
-                <a16:creationId xmlns:a16="http://schemas.microsoft.com/office/drawing/2014/main" id="{0CA8C659-CEDF-489D-B33E-CA580FFCDA15}"/>
+                <a16:creationId xmlns:a16="http://schemas.microsoft.com/office/drawing/2014/main" id="{66129025-9080-4DFF-B283-BAE3FFC3D6B4}"/>
               </a:ext>
             </a:extLst>
           </p:cNvPr>
@@ -4401,7 +4401,7 @@
           <p:cNvPr id="7" name="">
             <a:extLst xmlns:a="http://schemas.openxmlformats.org/drawingml/2006/main">
               <a:ext uri="{FF2B5EF4-FFF2-40B4-BE49-F238E27FC236}">
-                <a16:creationId xmlns:a16="http://schemas.microsoft.com/office/drawing/2014/main" id="{B199A9BB-550A-4BB9-872C-DBA9387B85A7}"/>
+                <a16:creationId xmlns:a16="http://schemas.microsoft.com/office/drawing/2014/main" id="{98AA0B26-661F-4962-BCDC-0D130AD11ECE}"/>
               </a:ext>
             </a:extLst>
           </p:cNvPr>
@@ -4436,7 +4436,7 @@
           <p:cNvPr id="8" name="">
             <a:extLst xmlns:a="http://schemas.openxmlformats.org/drawingml/2006/main">
               <a:ext uri="{FF2B5EF4-FFF2-40B4-BE49-F238E27FC236}">
-                <a16:creationId xmlns:a16="http://schemas.microsoft.com/office/drawing/2014/main" id="{AE4BB39E-F45C-47BF-BB49-1514E13CB5BA}"/>
+                <a16:creationId xmlns:a16="http://schemas.microsoft.com/office/drawing/2014/main" id="{92E0A4F1-A265-4826-AB2F-AFF37A040E05}"/>
               </a:ext>
             </a:extLst>
           </p:cNvPr>
@@ -4500,7 +4500,7 @@
           <p:cNvPr id="9" name="">
             <a:extLst xmlns:a="http://schemas.openxmlformats.org/drawingml/2006/main">
               <a:ext uri="{FF2B5EF4-FFF2-40B4-BE49-F238E27FC236}">
-                <a16:creationId xmlns:a16="http://schemas.microsoft.com/office/drawing/2014/main" id="{445DE491-4655-4823-ADB7-79C6C2C37282}"/>
+                <a16:creationId xmlns:a16="http://schemas.microsoft.com/office/drawing/2014/main" id="{8064884D-E1D2-41E5-B16C-B8F80B0B007B}"/>
               </a:ext>
             </a:extLst>
           </p:cNvPr>
@@ -4564,7 +4564,7 @@
           <p:cNvPr id="10" name="">
             <a:extLst xmlns:a="http://schemas.openxmlformats.org/drawingml/2006/main">
               <a:ext uri="{FF2B5EF4-FFF2-40B4-BE49-F238E27FC236}">
-                <a16:creationId xmlns:a16="http://schemas.microsoft.com/office/drawing/2014/main" id="{0AFF8785-3B13-4C7B-A0F0-7AEFC385F9E4}"/>
+                <a16:creationId xmlns:a16="http://schemas.microsoft.com/office/drawing/2014/main" id="{77D7F72F-D871-4D9D-ADE6-56B550085075}"/>
               </a:ext>
             </a:extLst>
           </p:cNvPr>
@@ -4597,7 +4597,7 @@
           <p:cNvPr id="11" name="">
             <a:extLst xmlns:a="http://schemas.openxmlformats.org/drawingml/2006/main">
               <a:ext uri="{FF2B5EF4-FFF2-40B4-BE49-F238E27FC236}">
-                <a16:creationId xmlns:a16="http://schemas.microsoft.com/office/drawing/2014/main" id="{3D652EB3-EF5C-45B2-A758-0A92837B93E3}"/>
+                <a16:creationId xmlns:a16="http://schemas.microsoft.com/office/drawing/2014/main" id="{EB9D611E-04CC-4D22-861C-F00BFF0DB42C}"/>
               </a:ext>
             </a:extLst>
           </p:cNvPr>
@@ -4632,7 +4632,7 @@
           <p:cNvPr id="12" name="">
             <a:extLst xmlns:a="http://schemas.openxmlformats.org/drawingml/2006/main">
               <a:ext uri="{FF2B5EF4-FFF2-40B4-BE49-F238E27FC236}">
-                <a16:creationId xmlns:a16="http://schemas.microsoft.com/office/drawing/2014/main" id="{8A0682D6-BC0E-4BC4-BF06-ECA920EB5B16}"/>
+                <a16:creationId xmlns:a16="http://schemas.microsoft.com/office/drawing/2014/main" id="{2F367079-DE8E-405E-BBD0-EBF39DC361B1}"/>
               </a:ext>
             </a:extLst>
           </p:cNvPr>
@@ -4696,7 +4696,7 @@
           <p:cNvPr id="13" name="">
             <a:extLst xmlns:a="http://schemas.openxmlformats.org/drawingml/2006/main">
               <a:ext uri="{FF2B5EF4-FFF2-40B4-BE49-F238E27FC236}">
-                <a16:creationId xmlns:a16="http://schemas.microsoft.com/office/drawing/2014/main" id="{809ACB97-ED2B-40EB-96DA-F0A1BC71EDE9}"/>
+                <a16:creationId xmlns:a16="http://schemas.microsoft.com/office/drawing/2014/main" id="{AA3F5355-B9EB-47CA-B4B0-F331B44F3951}"/>
               </a:ext>
             </a:extLst>
           </p:cNvPr>
@@ -4760,7 +4760,7 @@
           <p:cNvPr id="14" name="">
             <a:extLst xmlns:a="http://schemas.openxmlformats.org/drawingml/2006/main">
               <a:ext uri="{FF2B5EF4-FFF2-40B4-BE49-F238E27FC236}">
-                <a16:creationId xmlns:a16="http://schemas.microsoft.com/office/drawing/2014/main" id="{E6EAB66E-EB40-4A86-ACF5-8A3825D1AD16}"/>
+                <a16:creationId xmlns:a16="http://schemas.microsoft.com/office/drawing/2014/main" id="{F71ACE8F-0CAF-403B-B4AD-821A5CA01978}"/>
               </a:ext>
             </a:extLst>
           </p:cNvPr>
@@ -4793,7 +4793,7 @@
           <p:cNvPr id="15" name="">
             <a:extLst xmlns:a="http://schemas.openxmlformats.org/drawingml/2006/main">
               <a:ext uri="{FF2B5EF4-FFF2-40B4-BE49-F238E27FC236}">
-                <a16:creationId xmlns:a16="http://schemas.microsoft.com/office/drawing/2014/main" id="{D9AB2AFC-FC4A-432B-A91E-613DE7324407}"/>
+                <a16:creationId xmlns:a16="http://schemas.microsoft.com/office/drawing/2014/main" id="{D184A219-895A-4629-89E2-73D8FD2B2D2B}"/>
               </a:ext>
             </a:extLst>
           </p:cNvPr>
@@ -4828,7 +4828,7 @@
           <p:cNvPr id="16" name="">
             <a:extLst xmlns:a="http://schemas.openxmlformats.org/drawingml/2006/main">
               <a:ext uri="{FF2B5EF4-FFF2-40B4-BE49-F238E27FC236}">
-                <a16:creationId xmlns:a16="http://schemas.microsoft.com/office/drawing/2014/main" id="{F9E5DFEC-E7C5-49E9-9BCC-D7CA4615DBED}"/>
+                <a16:creationId xmlns:a16="http://schemas.microsoft.com/office/drawing/2014/main" id="{C5A93EB2-4EA7-4436-97D7-7436F1F925D2}"/>
               </a:ext>
             </a:extLst>
           </p:cNvPr>
@@ -4892,7 +4892,7 @@
           <p:cNvPr id="17" name="">
             <a:extLst xmlns:a="http://schemas.openxmlformats.org/drawingml/2006/main">
               <a:ext uri="{FF2B5EF4-FFF2-40B4-BE49-F238E27FC236}">
-                <a16:creationId xmlns:a16="http://schemas.microsoft.com/office/drawing/2014/main" id="{91B7EE15-2770-4919-A25A-EA2EC251E390}"/>
+                <a16:creationId xmlns:a16="http://schemas.microsoft.com/office/drawing/2014/main" id="{C06A91B6-156E-446D-BF73-D33A2DC4B462}"/>
               </a:ext>
             </a:extLst>
           </p:cNvPr>
@@ -4956,7 +4956,7 @@
           <p:cNvPr id="18" name="">
             <a:extLst xmlns:a="http://schemas.openxmlformats.org/drawingml/2006/main">
               <a:ext uri="{FF2B5EF4-FFF2-40B4-BE49-F238E27FC236}">
-                <a16:creationId xmlns:a16="http://schemas.microsoft.com/office/drawing/2014/main" id="{ED4562B4-45F0-4412-A06E-9E08594A7B15}"/>
+                <a16:creationId xmlns:a16="http://schemas.microsoft.com/office/drawing/2014/main" id="{10FE8191-9C1B-4725-B820-92EC8B9848CE}"/>
               </a:ext>
             </a:extLst>
           </p:cNvPr>
@@ -5020,7 +5020,7 @@
           <p:cNvPr id="19" name="">
             <a:extLst xmlns:a="http://schemas.openxmlformats.org/drawingml/2006/main">
               <a:ext uri="{FF2B5EF4-FFF2-40B4-BE49-F238E27FC236}">
-                <a16:creationId xmlns:a16="http://schemas.microsoft.com/office/drawing/2014/main" id="{C9DF552C-D4CF-41E1-9F5A-9F90C0C0F036}"/>
+                <a16:creationId xmlns:a16="http://schemas.microsoft.com/office/drawing/2014/main" id="{8FAB334A-1BDE-4200-B46C-92E18898BA7B}"/>
               </a:ext>
             </a:extLst>
           </p:cNvPr>
@@ -5053,7 +5053,7 @@
           <p:cNvPr id="20" name="">
             <a:extLst xmlns:a="http://schemas.openxmlformats.org/drawingml/2006/main">
               <a:ext uri="{FF2B5EF4-FFF2-40B4-BE49-F238E27FC236}">
-                <a16:creationId xmlns:a16="http://schemas.microsoft.com/office/drawing/2014/main" id="{8254F983-E0A3-4D2B-A4FD-0F12226952EB}"/>
+                <a16:creationId xmlns:a16="http://schemas.microsoft.com/office/drawing/2014/main" id="{518259C8-9CE6-4261-B164-FFA6C5F48171}"/>
               </a:ext>
             </a:extLst>
           </p:cNvPr>
@@ -5117,7 +5117,7 @@
           <p:cNvPr id="21" name="">
             <a:extLst xmlns:a="http://schemas.openxmlformats.org/drawingml/2006/main">
               <a:ext uri="{FF2B5EF4-FFF2-40B4-BE49-F238E27FC236}">
-                <a16:creationId xmlns:a16="http://schemas.microsoft.com/office/drawing/2014/main" id="{43ED2A3C-841F-4B17-973B-CFA185E8473A}"/>
+                <a16:creationId xmlns:a16="http://schemas.microsoft.com/office/drawing/2014/main" id="{14AEFB02-6E7B-4A52-9F7D-759F83369201}"/>
               </a:ext>
             </a:extLst>
           </p:cNvPr>
@@ -5179,7 +5179,7 @@
     </p:spTree>
     <p:extLst>
       <p:ext uri="{BB962C8B-B14F-4D97-AF65-F5344CB8AC3E}">
-        <p14:creationId xmlns:p14="http://schemas.microsoft.com/office/powerpoint/2010/main" val="1289920862"/>
+        <p14:creationId xmlns:p14="http://schemas.microsoft.com/office/powerpoint/2010/main" val="99286632"/>
       </p:ext>
     </p:extLst>
   </p:cSld>
@@ -5207,7 +5207,7 @@
           <p:nvPr/>
         </p:nvPicPr>
         <p:blipFill>
-          <a:blip xmlns:r="http://schemas.openxmlformats.org/officeDocument/2006/relationships" xmlns:a="http://schemas.openxmlformats.org/drawingml/2006/main" r:embed="Rd741cf69efa14f0f"/>
+          <a:blip xmlns:r="http://schemas.openxmlformats.org/officeDocument/2006/relationships" xmlns:a="http://schemas.openxmlformats.org/drawingml/2006/main" r:embed="R0257c2d0833e47b3"/>
           <a:srcRect xmlns:a="http://schemas.openxmlformats.org/drawingml/2006/main" l="0" t="27" r="0" b="27"/>
           <a:stretch xmlns:a="http://schemas.openxmlformats.org/drawingml/2006/main">
             <a:fillRect l="0" t="0" r="0" b="0"/>
@@ -5228,7 +5228,7 @@
           <p:cNvPr id="2" name="">
             <a:extLst xmlns:a="http://schemas.openxmlformats.org/drawingml/2006/main">
               <a:ext uri="{FF2B5EF4-FFF2-40B4-BE49-F238E27FC236}">
-                <a16:creationId xmlns:a16="http://schemas.microsoft.com/office/drawing/2014/main" id="{13A6446A-8807-4642-9493-4248CFB58048}"/>
+                <a16:creationId xmlns:a16="http://schemas.microsoft.com/office/drawing/2014/main" id="{3129B2E3-6492-4926-B328-9AA7D8C45E88}"/>
               </a:ext>
             </a:extLst>
           </p:cNvPr>
@@ -5265,7 +5265,7 @@
           <p:cNvPr id="3" name="">
             <a:extLst xmlns:a="http://schemas.openxmlformats.org/drawingml/2006/main">
               <a:ext uri="{FF2B5EF4-FFF2-40B4-BE49-F238E27FC236}">
-                <a16:creationId xmlns:a16="http://schemas.microsoft.com/office/drawing/2014/main" id="{99442235-FE49-4B74-9407-1251C4092536}"/>
+                <a16:creationId xmlns:a16="http://schemas.microsoft.com/office/drawing/2014/main" id="{19FC3CCD-4E5D-481B-9E8D-914B4174B99F}"/>
               </a:ext>
             </a:extLst>
           </p:cNvPr>
@@ -5302,7 +5302,7 @@
           <p:cNvPr id="4" name="">
             <a:extLst xmlns:a="http://schemas.openxmlformats.org/drawingml/2006/main">
               <a:ext uri="{FF2B5EF4-FFF2-40B4-BE49-F238E27FC236}">
-                <a16:creationId xmlns:a16="http://schemas.microsoft.com/office/drawing/2014/main" id="{9EE94F7F-531E-44D4-9DF7-3899F0705BBA}"/>
+                <a16:creationId xmlns:a16="http://schemas.microsoft.com/office/drawing/2014/main" id="{21FD6951-9A3A-4BC9-919B-86AA3FEABE5E}"/>
               </a:ext>
             </a:extLst>
           </p:cNvPr>
@@ -5366,7 +5366,7 @@
           <p:cNvPr id="5" name="">
             <a:extLst xmlns:a="http://schemas.openxmlformats.org/drawingml/2006/main">
               <a:ext uri="{FF2B5EF4-FFF2-40B4-BE49-F238E27FC236}">
-                <a16:creationId xmlns:a16="http://schemas.microsoft.com/office/drawing/2014/main" id="{2A1BD826-B19F-43D5-9880-070E7B71D40A}"/>
+                <a16:creationId xmlns:a16="http://schemas.microsoft.com/office/drawing/2014/main" id="{D9D08739-4EC8-4768-AA4B-DA2382A6842F}"/>
               </a:ext>
             </a:extLst>
           </p:cNvPr>
@@ -5430,7 +5430,7 @@
           <p:cNvPr id="6" name="">
             <a:extLst xmlns:a="http://schemas.openxmlformats.org/drawingml/2006/main">
               <a:ext uri="{FF2B5EF4-FFF2-40B4-BE49-F238E27FC236}">
-                <a16:creationId xmlns:a16="http://schemas.microsoft.com/office/drawing/2014/main" id="{12BFB5AD-6E4B-41BC-8E70-79051800D7B1}"/>
+                <a16:creationId xmlns:a16="http://schemas.microsoft.com/office/drawing/2014/main" id="{7574830F-C525-4A80-B383-53CED4252EEC}"/>
               </a:ext>
             </a:extLst>
           </p:cNvPr>
@@ -5494,7 +5494,7 @@
           <p:cNvPr id="7" name="">
             <a:extLst xmlns:a="http://schemas.openxmlformats.org/drawingml/2006/main">
               <a:ext uri="{FF2B5EF4-FFF2-40B4-BE49-F238E27FC236}">
-                <a16:creationId xmlns:a16="http://schemas.microsoft.com/office/drawing/2014/main" id="{CCEF71EF-B735-44B3-872E-36947EBDDEAD}"/>
+                <a16:creationId xmlns:a16="http://schemas.microsoft.com/office/drawing/2014/main" id="{9A481DCC-AEF8-4C91-8BB2-2580C1AD6CFB}"/>
               </a:ext>
             </a:extLst>
           </p:cNvPr>
@@ -5529,7 +5529,7 @@
           <p:cNvPr id="8" name="">
             <a:extLst xmlns:a="http://schemas.openxmlformats.org/drawingml/2006/main">
               <a:ext uri="{FF2B5EF4-FFF2-40B4-BE49-F238E27FC236}">
-                <a16:creationId xmlns:a16="http://schemas.microsoft.com/office/drawing/2014/main" id="{AA672D0E-2D44-4183-AD45-F36DC7AC7410}"/>
+                <a16:creationId xmlns:a16="http://schemas.microsoft.com/office/drawing/2014/main" id="{2ED5BFBB-BF35-44BC-B83A-FD210F5D0B20}"/>
               </a:ext>
             </a:extLst>
           </p:cNvPr>
@@ -5593,7 +5593,7 @@
           <p:cNvPr id="9" name="">
             <a:extLst xmlns:a="http://schemas.openxmlformats.org/drawingml/2006/main">
               <a:ext uri="{FF2B5EF4-FFF2-40B4-BE49-F238E27FC236}">
-                <a16:creationId xmlns:a16="http://schemas.microsoft.com/office/drawing/2014/main" id="{8FD90B1A-32DD-45A5-BAEA-F880AA6D92B8}"/>
+                <a16:creationId xmlns:a16="http://schemas.microsoft.com/office/drawing/2014/main" id="{9740B989-0A98-40AA-A1CD-0E9B80EDBF38}"/>
               </a:ext>
             </a:extLst>
           </p:cNvPr>
@@ -5657,7 +5657,7 @@
           <p:cNvPr id="10" name="">
             <a:extLst xmlns:a="http://schemas.openxmlformats.org/drawingml/2006/main">
               <a:ext uri="{FF2B5EF4-FFF2-40B4-BE49-F238E27FC236}">
-                <a16:creationId xmlns:a16="http://schemas.microsoft.com/office/drawing/2014/main" id="{33A23F62-8304-43B1-8937-06D5A460EA82}"/>
+                <a16:creationId xmlns:a16="http://schemas.microsoft.com/office/drawing/2014/main" id="{EC849B36-3910-43B5-9A92-39E69851B7B6}"/>
               </a:ext>
             </a:extLst>
           </p:cNvPr>
@@ -5692,7 +5692,7 @@
           <p:cNvPr id="11" name="">
             <a:extLst xmlns:a="http://schemas.openxmlformats.org/drawingml/2006/main">
               <a:ext uri="{FF2B5EF4-FFF2-40B4-BE49-F238E27FC236}">
-                <a16:creationId xmlns:a16="http://schemas.microsoft.com/office/drawing/2014/main" id="{2938B2DD-B123-4C6E-91EE-AB2A43F64EEB}"/>
+                <a16:creationId xmlns:a16="http://schemas.microsoft.com/office/drawing/2014/main" id="{E2483A74-851E-41F7-9500-BE6EED28AE2A}"/>
               </a:ext>
             </a:extLst>
           </p:cNvPr>
@@ -5756,7 +5756,7 @@
           <p:cNvPr id="12" name="">
             <a:extLst xmlns:a="http://schemas.openxmlformats.org/drawingml/2006/main">
               <a:ext uri="{FF2B5EF4-FFF2-40B4-BE49-F238E27FC236}">
-                <a16:creationId xmlns:a16="http://schemas.microsoft.com/office/drawing/2014/main" id="{6C06A6A3-ECE8-49AB-8C04-3847F6D04917}"/>
+                <a16:creationId xmlns:a16="http://schemas.microsoft.com/office/drawing/2014/main" id="{708E8D7F-7EDE-41DA-8139-2B5C47A09318}"/>
               </a:ext>
             </a:extLst>
           </p:cNvPr>
@@ -5820,7 +5820,7 @@
           <p:cNvPr id="13" name="">
             <a:extLst xmlns:a="http://schemas.openxmlformats.org/drawingml/2006/main">
               <a:ext uri="{FF2B5EF4-FFF2-40B4-BE49-F238E27FC236}">
-                <a16:creationId xmlns:a16="http://schemas.microsoft.com/office/drawing/2014/main" id="{FFA96813-3A62-4B89-8228-7A32E329D508}"/>
+                <a16:creationId xmlns:a16="http://schemas.microsoft.com/office/drawing/2014/main" id="{18D7424F-85A1-465F-A2AC-9E3D2FACD733}"/>
               </a:ext>
             </a:extLst>
           </p:cNvPr>
@@ -5855,7 +5855,7 @@
           <p:cNvPr id="14" name="">
             <a:extLst xmlns:a="http://schemas.openxmlformats.org/drawingml/2006/main">
               <a:ext uri="{FF2B5EF4-FFF2-40B4-BE49-F238E27FC236}">
-                <a16:creationId xmlns:a16="http://schemas.microsoft.com/office/drawing/2014/main" id="{E31CA2E6-33F1-45E7-B053-2E274B46436A}"/>
+                <a16:creationId xmlns:a16="http://schemas.microsoft.com/office/drawing/2014/main" id="{F26AC35F-54D3-4A24-8AEB-99583225456C}"/>
               </a:ext>
             </a:extLst>
           </p:cNvPr>
@@ -5919,7 +5919,7 @@
           <p:cNvPr id="15" name="">
             <a:extLst xmlns:a="http://schemas.openxmlformats.org/drawingml/2006/main">
               <a:ext uri="{FF2B5EF4-FFF2-40B4-BE49-F238E27FC236}">
-                <a16:creationId xmlns:a16="http://schemas.microsoft.com/office/drawing/2014/main" id="{3BD6FBBF-BEE7-4151-9249-3E2F0CA4952F}"/>
+                <a16:creationId xmlns:a16="http://schemas.microsoft.com/office/drawing/2014/main" id="{290DE233-DFAE-493E-BE9E-11465A47CB0F}"/>
               </a:ext>
             </a:extLst>
           </p:cNvPr>
@@ -5983,7 +5983,7 @@
           <p:cNvPr id="16" name="">
             <a:extLst xmlns:a="http://schemas.openxmlformats.org/drawingml/2006/main">
               <a:ext uri="{FF2B5EF4-FFF2-40B4-BE49-F238E27FC236}">
-                <a16:creationId xmlns:a16="http://schemas.microsoft.com/office/drawing/2014/main" id="{C18E5B3B-E6EF-40AF-8104-A04541A62268}"/>
+                <a16:creationId xmlns:a16="http://schemas.microsoft.com/office/drawing/2014/main" id="{A154AB03-DF37-4E86-8CD9-8F5EA4F32361}"/>
               </a:ext>
             </a:extLst>
           </p:cNvPr>
@@ -6018,7 +6018,7 @@
           <p:cNvPr id="17" name="">
             <a:extLst xmlns:a="http://schemas.openxmlformats.org/drawingml/2006/main">
               <a:ext uri="{FF2B5EF4-FFF2-40B4-BE49-F238E27FC236}">
-                <a16:creationId xmlns:a16="http://schemas.microsoft.com/office/drawing/2014/main" id="{960B0A0D-AD31-4785-AE78-75354BA0CF57}"/>
+                <a16:creationId xmlns:a16="http://schemas.microsoft.com/office/drawing/2014/main" id="{7666D2C3-8EEC-40FA-BD34-4BF38039FD44}"/>
               </a:ext>
             </a:extLst>
           </p:cNvPr>
@@ -6082,7 +6082,7 @@
           <p:cNvPr id="18" name="">
             <a:extLst xmlns:a="http://schemas.openxmlformats.org/drawingml/2006/main">
               <a:ext uri="{FF2B5EF4-FFF2-40B4-BE49-F238E27FC236}">
-                <a16:creationId xmlns:a16="http://schemas.microsoft.com/office/drawing/2014/main" id="{4966A1A5-E247-43B1-9EB1-26C4FE981D80}"/>
+                <a16:creationId xmlns:a16="http://schemas.microsoft.com/office/drawing/2014/main" id="{96C307DE-436C-4A17-BF48-9AA31D0E984B}"/>
               </a:ext>
             </a:extLst>
           </p:cNvPr>
@@ -6146,7 +6146,7 @@
           <p:cNvPr id="19" name="">
             <a:extLst xmlns:a="http://schemas.openxmlformats.org/drawingml/2006/main">
               <a:ext uri="{FF2B5EF4-FFF2-40B4-BE49-F238E27FC236}">
-                <a16:creationId xmlns:a16="http://schemas.microsoft.com/office/drawing/2014/main" id="{F0ED3C95-826B-42FF-B32C-A43FDEEAA45C}"/>
+                <a16:creationId xmlns:a16="http://schemas.microsoft.com/office/drawing/2014/main" id="{03F85B5B-7CF2-4F67-BC3A-60B430E97F73}"/>
               </a:ext>
             </a:extLst>
           </p:cNvPr>
@@ -6181,7 +6181,7 @@
           <p:cNvPr id="20" name="">
             <a:extLst xmlns:a="http://schemas.openxmlformats.org/drawingml/2006/main">
               <a:ext uri="{FF2B5EF4-FFF2-40B4-BE49-F238E27FC236}">
-                <a16:creationId xmlns:a16="http://schemas.microsoft.com/office/drawing/2014/main" id="{6CC309A6-2B7D-467D-A257-4F566B6E0812}"/>
+                <a16:creationId xmlns:a16="http://schemas.microsoft.com/office/drawing/2014/main" id="{325E8BEB-CFDB-4768-B30A-A2B082351964}"/>
               </a:ext>
             </a:extLst>
           </p:cNvPr>
@@ -6245,7 +6245,7 @@
           <p:cNvPr id="21" name="">
             <a:extLst xmlns:a="http://schemas.openxmlformats.org/drawingml/2006/main">
               <a:ext uri="{FF2B5EF4-FFF2-40B4-BE49-F238E27FC236}">
-                <a16:creationId xmlns:a16="http://schemas.microsoft.com/office/drawing/2014/main" id="{3DFCED78-6904-499B-8F6A-43838F4CCE47}"/>
+                <a16:creationId xmlns:a16="http://schemas.microsoft.com/office/drawing/2014/main" id="{51019338-DB1B-46DF-A37B-4BCCB85518AE}"/>
               </a:ext>
             </a:extLst>
           </p:cNvPr>
@@ -6309,7 +6309,7 @@
           <p:cNvPr id="22" name="">
             <a:extLst xmlns:a="http://schemas.openxmlformats.org/drawingml/2006/main">
               <a:ext uri="{FF2B5EF4-FFF2-40B4-BE49-F238E27FC236}">
-                <a16:creationId xmlns:a16="http://schemas.microsoft.com/office/drawing/2014/main" id="{954C3852-5D1D-497E-91DC-52DAC038609D}"/>
+                <a16:creationId xmlns:a16="http://schemas.microsoft.com/office/drawing/2014/main" id="{9B1C83AD-102C-41D5-B187-B9C0D729A2E9}"/>
               </a:ext>
             </a:extLst>
           </p:cNvPr>
@@ -6342,7 +6342,7 @@
           <p:cNvPr id="23" name="">
             <a:extLst xmlns:a="http://schemas.openxmlformats.org/drawingml/2006/main">
               <a:ext uri="{FF2B5EF4-FFF2-40B4-BE49-F238E27FC236}">
-                <a16:creationId xmlns:a16="http://schemas.microsoft.com/office/drawing/2014/main" id="{F28B8777-C84B-4A92-9FEE-EFCE0C55A5B4}"/>
+                <a16:creationId xmlns:a16="http://schemas.microsoft.com/office/drawing/2014/main" id="{FB19DE0A-9FDA-4FB3-8DC4-35114C19645E}"/>
               </a:ext>
             </a:extLst>
           </p:cNvPr>
@@ -6406,7 +6406,7 @@
           <p:cNvPr id="24" name="">
             <a:extLst xmlns:a="http://schemas.openxmlformats.org/drawingml/2006/main">
               <a:ext uri="{FF2B5EF4-FFF2-40B4-BE49-F238E27FC236}">
-                <a16:creationId xmlns:a16="http://schemas.microsoft.com/office/drawing/2014/main" id="{B3BD8062-35A9-4F00-9262-4E8561EAE2B5}"/>
+                <a16:creationId xmlns:a16="http://schemas.microsoft.com/office/drawing/2014/main" id="{3EAA79BC-A1F5-4043-AA36-ED3D097E52CB}"/>
               </a:ext>
             </a:extLst>
           </p:cNvPr>
@@ -6468,7 +6468,7 @@
     </p:spTree>
     <p:extLst>
       <p:ext uri="{BB962C8B-B14F-4D97-AF65-F5344CB8AC3E}">
-        <p14:creationId xmlns:p14="http://schemas.microsoft.com/office/powerpoint/2010/main" val="468783916"/>
+        <p14:creationId xmlns:p14="http://schemas.microsoft.com/office/powerpoint/2010/main" val="20088759"/>
       </p:ext>
     </p:extLst>
   </p:cSld>
@@ -6496,7 +6496,7 @@
           <p:nvPr/>
         </p:nvPicPr>
         <p:blipFill>
-          <a:blip xmlns:r="http://schemas.openxmlformats.org/officeDocument/2006/relationships" xmlns:a="http://schemas.openxmlformats.org/drawingml/2006/main" r:embed="R274274a7e6bd4652"/>
+          <a:blip xmlns:r="http://schemas.openxmlformats.org/officeDocument/2006/relationships" xmlns:a="http://schemas.openxmlformats.org/drawingml/2006/main" r:embed="R5365c9f8023c4145"/>
           <a:srcRect xmlns:a="http://schemas.openxmlformats.org/drawingml/2006/main" l="0" t="27" r="0" b="27"/>
           <a:stretch xmlns:a="http://schemas.openxmlformats.org/drawingml/2006/main">
             <a:fillRect l="0" t="0" r="0" b="0"/>
@@ -6517,7 +6517,7 @@
           <p:cNvPr id="2" name="">
             <a:extLst xmlns:a="http://schemas.openxmlformats.org/drawingml/2006/main">
               <a:ext uri="{FF2B5EF4-FFF2-40B4-BE49-F238E27FC236}">
-                <a16:creationId xmlns:a16="http://schemas.microsoft.com/office/drawing/2014/main" id="{6C3C7763-34A0-43FC-AA3C-E883C036D2B0}"/>
+                <a16:creationId xmlns:a16="http://schemas.microsoft.com/office/drawing/2014/main" id="{F3D0A550-4B72-4304-83B6-29B1556C387B}"/>
               </a:ext>
             </a:extLst>
           </p:cNvPr>
@@ -6554,7 +6554,7 @@
           <p:cNvPr id="3" name="">
             <a:extLst xmlns:a="http://schemas.openxmlformats.org/drawingml/2006/main">
               <a:ext uri="{FF2B5EF4-FFF2-40B4-BE49-F238E27FC236}">
-                <a16:creationId xmlns:a16="http://schemas.microsoft.com/office/drawing/2014/main" id="{AA57198F-F2A0-4330-A8D5-A84C330C8BE2}"/>
+                <a16:creationId xmlns:a16="http://schemas.microsoft.com/office/drawing/2014/main" id="{CCE69F99-6490-425F-B048-54D5D56538F4}"/>
               </a:ext>
             </a:extLst>
           </p:cNvPr>
@@ -6591,7 +6591,7 @@
           <p:cNvPr id="4" name="">
             <a:extLst xmlns:a="http://schemas.openxmlformats.org/drawingml/2006/main">
               <a:ext uri="{FF2B5EF4-FFF2-40B4-BE49-F238E27FC236}">
-                <a16:creationId xmlns:a16="http://schemas.microsoft.com/office/drawing/2014/main" id="{DCB9B311-9DAA-48E3-B3A7-ED4878B36F9A}"/>
+                <a16:creationId xmlns:a16="http://schemas.microsoft.com/office/drawing/2014/main" id="{D8632A67-F12B-4AF4-BBC9-F800CF84B5EB}"/>
               </a:ext>
             </a:extLst>
           </p:cNvPr>
@@ -6655,7 +6655,7 @@
           <p:cNvPr id="5" name="">
             <a:extLst xmlns:a="http://schemas.openxmlformats.org/drawingml/2006/main">
               <a:ext uri="{FF2B5EF4-FFF2-40B4-BE49-F238E27FC236}">
-                <a16:creationId xmlns:a16="http://schemas.microsoft.com/office/drawing/2014/main" id="{1AF80CEF-CA46-44EE-9368-ACA8C2871A39}"/>
+                <a16:creationId xmlns:a16="http://schemas.microsoft.com/office/drawing/2014/main" id="{3F7EFB04-0B0A-4F81-A9EB-66A420E4A571}"/>
               </a:ext>
             </a:extLst>
           </p:cNvPr>
@@ -6719,7 +6719,7 @@
           <p:cNvPr id="6" name="">
             <a:extLst xmlns:a="http://schemas.openxmlformats.org/drawingml/2006/main">
               <a:ext uri="{FF2B5EF4-FFF2-40B4-BE49-F238E27FC236}">
-                <a16:creationId xmlns:a16="http://schemas.microsoft.com/office/drawing/2014/main" id="{62023C68-5328-4DB3-AC0A-9B3FBA55B8FC}"/>
+                <a16:creationId xmlns:a16="http://schemas.microsoft.com/office/drawing/2014/main" id="{A9D2E701-5BE7-4A2D-A44C-8FAB4DCFA78F}"/>
               </a:ext>
             </a:extLst>
           </p:cNvPr>
@@ -6783,7 +6783,7 @@
           <p:cNvPr id="7" name="">
             <a:extLst xmlns:a="http://schemas.openxmlformats.org/drawingml/2006/main">
               <a:ext uri="{FF2B5EF4-FFF2-40B4-BE49-F238E27FC236}">
-                <a16:creationId xmlns:a16="http://schemas.microsoft.com/office/drawing/2014/main" id="{6FA02330-424A-429C-A09E-8F1F6EFEDA65}"/>
+                <a16:creationId xmlns:a16="http://schemas.microsoft.com/office/drawing/2014/main" id="{EBFBD22C-14C5-4819-A79A-9E5EDD2EC9CB}"/>
               </a:ext>
             </a:extLst>
           </p:cNvPr>
@@ -6818,7 +6818,7 @@
           <p:cNvPr id="8" name="">
             <a:extLst xmlns:a="http://schemas.openxmlformats.org/drawingml/2006/main">
               <a:ext uri="{FF2B5EF4-FFF2-40B4-BE49-F238E27FC236}">
-                <a16:creationId xmlns:a16="http://schemas.microsoft.com/office/drawing/2014/main" id="{C74B50B2-F812-42C5-A979-6FE40B625FBB}"/>
+                <a16:creationId xmlns:a16="http://schemas.microsoft.com/office/drawing/2014/main" id="{03FFA0A9-94F2-4FCC-9D00-DA1A1C52E8B6}"/>
               </a:ext>
             </a:extLst>
           </p:cNvPr>
@@ -6882,7 +6882,7 @@
           <p:cNvPr id="9" name="">
             <a:extLst xmlns:a="http://schemas.openxmlformats.org/drawingml/2006/main">
               <a:ext uri="{FF2B5EF4-FFF2-40B4-BE49-F238E27FC236}">
-                <a16:creationId xmlns:a16="http://schemas.microsoft.com/office/drawing/2014/main" id="{53CEF049-8BAC-4CEE-9619-8C2667C082A2}"/>
+                <a16:creationId xmlns:a16="http://schemas.microsoft.com/office/drawing/2014/main" id="{3C56E749-7548-4063-93BD-8E7533A6A9D2}"/>
               </a:ext>
             </a:extLst>
           </p:cNvPr>
@@ -6946,7 +6946,7 @@
           <p:cNvPr id="10" name="">
             <a:extLst xmlns:a="http://schemas.openxmlformats.org/drawingml/2006/main">
               <a:ext uri="{FF2B5EF4-FFF2-40B4-BE49-F238E27FC236}">
-                <a16:creationId xmlns:a16="http://schemas.microsoft.com/office/drawing/2014/main" id="{A959876A-237B-49B2-B874-871325F7A5B0}"/>
+                <a16:creationId xmlns:a16="http://schemas.microsoft.com/office/drawing/2014/main" id="{1EB79122-43CC-4845-ABAD-3A25776F9E22}"/>
               </a:ext>
             </a:extLst>
           </p:cNvPr>
@@ -6979,7 +6979,7 @@
           <p:cNvPr id="11" name="">
             <a:extLst xmlns:a="http://schemas.openxmlformats.org/drawingml/2006/main">
               <a:ext uri="{FF2B5EF4-FFF2-40B4-BE49-F238E27FC236}">
-                <a16:creationId xmlns:a16="http://schemas.microsoft.com/office/drawing/2014/main" id="{9CD3D985-B49E-4DD4-82FB-834099DED6C9}"/>
+                <a16:creationId xmlns:a16="http://schemas.microsoft.com/office/drawing/2014/main" id="{C875ABB1-E380-47EB-A222-B016A11DC5BC}"/>
               </a:ext>
             </a:extLst>
           </p:cNvPr>
@@ -7014,7 +7014,7 @@
           <p:cNvPr id="12" name="">
             <a:extLst xmlns:a="http://schemas.openxmlformats.org/drawingml/2006/main">
               <a:ext uri="{FF2B5EF4-FFF2-40B4-BE49-F238E27FC236}">
-                <a16:creationId xmlns:a16="http://schemas.microsoft.com/office/drawing/2014/main" id="{6FF471E8-7B76-44C2-825C-1D62DBEC4E34}"/>
+                <a16:creationId xmlns:a16="http://schemas.microsoft.com/office/drawing/2014/main" id="{1B5B64FF-7681-463C-BF84-B2478D9D894B}"/>
               </a:ext>
             </a:extLst>
           </p:cNvPr>
@@ -7078,7 +7078,7 @@
           <p:cNvPr id="13" name="">
             <a:extLst xmlns:a="http://schemas.openxmlformats.org/drawingml/2006/main">
               <a:ext uri="{FF2B5EF4-FFF2-40B4-BE49-F238E27FC236}">
-                <a16:creationId xmlns:a16="http://schemas.microsoft.com/office/drawing/2014/main" id="{C54881BA-CA7C-4E7C-95BB-2767AC159DEE}"/>
+                <a16:creationId xmlns:a16="http://schemas.microsoft.com/office/drawing/2014/main" id="{05B0001C-6C2B-4784-8686-098A48580609}"/>
               </a:ext>
             </a:extLst>
           </p:cNvPr>
@@ -7142,7 +7142,7 @@
           <p:cNvPr id="14" name="">
             <a:extLst xmlns:a="http://schemas.openxmlformats.org/drawingml/2006/main">
               <a:ext uri="{FF2B5EF4-FFF2-40B4-BE49-F238E27FC236}">
-                <a16:creationId xmlns:a16="http://schemas.microsoft.com/office/drawing/2014/main" id="{7089EE32-09E9-4C17-AFEF-F4865EBCDC49}"/>
+                <a16:creationId xmlns:a16="http://schemas.microsoft.com/office/drawing/2014/main" id="{37C06DC6-A2EB-443F-91EA-532B0B3DC819}"/>
               </a:ext>
             </a:extLst>
           </p:cNvPr>
@@ -7175,7 +7175,7 @@
           <p:cNvPr id="15" name="">
             <a:extLst xmlns:a="http://schemas.openxmlformats.org/drawingml/2006/main">
               <a:ext uri="{FF2B5EF4-FFF2-40B4-BE49-F238E27FC236}">
-                <a16:creationId xmlns:a16="http://schemas.microsoft.com/office/drawing/2014/main" id="{99AEA6E7-7F56-498E-BBCA-EBD591EC3E28}"/>
+                <a16:creationId xmlns:a16="http://schemas.microsoft.com/office/drawing/2014/main" id="{9DC8A4AD-7122-4B31-97F6-BF51F4C84652}"/>
               </a:ext>
             </a:extLst>
           </p:cNvPr>
@@ -7210,7 +7210,7 @@
           <p:cNvPr id="16" name="">
             <a:extLst xmlns:a="http://schemas.openxmlformats.org/drawingml/2006/main">
               <a:ext uri="{FF2B5EF4-FFF2-40B4-BE49-F238E27FC236}">
-                <a16:creationId xmlns:a16="http://schemas.microsoft.com/office/drawing/2014/main" id="{54B175EA-2D5F-4D37-BDC4-78EBB8635AC3}"/>
+                <a16:creationId xmlns:a16="http://schemas.microsoft.com/office/drawing/2014/main" id="{50187DA9-534E-4FE9-989F-9A509ABBFA62}"/>
               </a:ext>
             </a:extLst>
           </p:cNvPr>
@@ -7274,7 +7274,7 @@
           <p:cNvPr id="17" name="">
             <a:extLst xmlns:a="http://schemas.openxmlformats.org/drawingml/2006/main">
               <a:ext uri="{FF2B5EF4-FFF2-40B4-BE49-F238E27FC236}">
-                <a16:creationId xmlns:a16="http://schemas.microsoft.com/office/drawing/2014/main" id="{6B87B0E9-0606-48B7-B2B6-50778A2C17BD}"/>
+                <a16:creationId xmlns:a16="http://schemas.microsoft.com/office/drawing/2014/main" id="{0DBA30D0-665E-4675-A30F-71ED9680BD59}"/>
               </a:ext>
             </a:extLst>
           </p:cNvPr>
@@ -7338,7 +7338,7 @@
           <p:cNvPr id="18" name="">
             <a:extLst xmlns:a="http://schemas.openxmlformats.org/drawingml/2006/main">
               <a:ext uri="{FF2B5EF4-FFF2-40B4-BE49-F238E27FC236}">
-                <a16:creationId xmlns:a16="http://schemas.microsoft.com/office/drawing/2014/main" id="{D85AE36D-8E8F-42EC-BB98-166EA646499D}"/>
+                <a16:creationId xmlns:a16="http://schemas.microsoft.com/office/drawing/2014/main" id="{394BDAEA-702A-4CA4-A5C7-2505C81D953E}"/>
               </a:ext>
             </a:extLst>
           </p:cNvPr>
@@ -7402,7 +7402,7 @@
           <p:cNvPr id="19" name="">
             <a:extLst xmlns:a="http://schemas.openxmlformats.org/drawingml/2006/main">
               <a:ext uri="{FF2B5EF4-FFF2-40B4-BE49-F238E27FC236}">
-                <a16:creationId xmlns:a16="http://schemas.microsoft.com/office/drawing/2014/main" id="{FE52FA66-8451-46E7-93F3-D7C971DDDEFF}"/>
+                <a16:creationId xmlns:a16="http://schemas.microsoft.com/office/drawing/2014/main" id="{F03B6A2D-7B40-408B-9A05-6E5AD3E9C16B}"/>
               </a:ext>
             </a:extLst>
           </p:cNvPr>
@@ -7435,7 +7435,7 @@
           <p:cNvPr id="20" name="">
             <a:extLst xmlns:a="http://schemas.openxmlformats.org/drawingml/2006/main">
               <a:ext uri="{FF2B5EF4-FFF2-40B4-BE49-F238E27FC236}">
-                <a16:creationId xmlns:a16="http://schemas.microsoft.com/office/drawing/2014/main" id="{BCDCF7F5-28F6-4A5E-B06E-B9ACEC28E0EE}"/>
+                <a16:creationId xmlns:a16="http://schemas.microsoft.com/office/drawing/2014/main" id="{8CE7B3F9-7AE2-4315-B745-EB5BE8E2C6ED}"/>
               </a:ext>
             </a:extLst>
           </p:cNvPr>
@@ -7499,7 +7499,7 @@
           <p:cNvPr id="21" name="">
             <a:extLst xmlns:a="http://schemas.openxmlformats.org/drawingml/2006/main">
               <a:ext uri="{FF2B5EF4-FFF2-40B4-BE49-F238E27FC236}">
-                <a16:creationId xmlns:a16="http://schemas.microsoft.com/office/drawing/2014/main" id="{1E3A4463-7E38-4341-9DE7-3CA417ED4B65}"/>
+                <a16:creationId xmlns:a16="http://schemas.microsoft.com/office/drawing/2014/main" id="{3D9B291C-5DB2-4154-85D9-648180CEFAAB}"/>
               </a:ext>
             </a:extLst>
           </p:cNvPr>
@@ -7561,7 +7561,7 @@
     </p:spTree>
     <p:extLst>
       <p:ext uri="{BB962C8B-B14F-4D97-AF65-F5344CB8AC3E}">
-        <p14:creationId xmlns:p14="http://schemas.microsoft.com/office/powerpoint/2010/main" val="1862866077"/>
+        <p14:creationId xmlns:p14="http://schemas.microsoft.com/office/powerpoint/2010/main" val="203227560"/>
       </p:ext>
     </p:extLst>
   </p:cSld>
@@ -7589,7 +7589,7 @@
           <p:nvPr/>
         </p:nvPicPr>
         <p:blipFill>
-          <a:blip xmlns:r="http://schemas.openxmlformats.org/officeDocument/2006/relationships" xmlns:a="http://schemas.openxmlformats.org/drawingml/2006/main" r:embed="R8cbfc66982884297"/>
+          <a:blip xmlns:r="http://schemas.openxmlformats.org/officeDocument/2006/relationships" xmlns:a="http://schemas.openxmlformats.org/drawingml/2006/main" r:embed="Rd854d6108ddb4e07"/>
           <a:srcRect xmlns:a="http://schemas.openxmlformats.org/drawingml/2006/main" l="0" t="27" r="0" b="27"/>
           <a:stretch xmlns:a="http://schemas.openxmlformats.org/drawingml/2006/main">
             <a:fillRect l="0" t="0" r="0" b="0"/>
@@ -7610,7 +7610,7 @@
           <p:cNvPr id="2" name="">
             <a:extLst xmlns:a="http://schemas.openxmlformats.org/drawingml/2006/main">
               <a:ext uri="{FF2B5EF4-FFF2-40B4-BE49-F238E27FC236}">
-                <a16:creationId xmlns:a16="http://schemas.microsoft.com/office/drawing/2014/main" id="{FC032E0D-FEEE-4661-A6A6-39FACE3B53D7}"/>
+                <a16:creationId xmlns:a16="http://schemas.microsoft.com/office/drawing/2014/main" id="{DE2F4874-8C6A-40AF-9D29-9C5AA4A937BC}"/>
               </a:ext>
             </a:extLst>
           </p:cNvPr>
@@ -7647,7 +7647,7 @@
           <p:cNvPr id="3" name="">
             <a:extLst xmlns:a="http://schemas.openxmlformats.org/drawingml/2006/main">
               <a:ext uri="{FF2B5EF4-FFF2-40B4-BE49-F238E27FC236}">
-                <a16:creationId xmlns:a16="http://schemas.microsoft.com/office/drawing/2014/main" id="{C9DA0D7B-D13C-4E16-B361-580E078474B9}"/>
+                <a16:creationId xmlns:a16="http://schemas.microsoft.com/office/drawing/2014/main" id="{00406ACC-27BB-46F0-9BDB-8DB88237ED3A}"/>
               </a:ext>
             </a:extLst>
           </p:cNvPr>
@@ -7684,7 +7684,7 @@
           <p:cNvPr id="4" name="">
             <a:extLst xmlns:a="http://schemas.openxmlformats.org/drawingml/2006/main">
               <a:ext uri="{FF2B5EF4-FFF2-40B4-BE49-F238E27FC236}">
-                <a16:creationId xmlns:a16="http://schemas.microsoft.com/office/drawing/2014/main" id="{14A9B76C-1F8A-464F-AB91-25832DD4E959}"/>
+                <a16:creationId xmlns:a16="http://schemas.microsoft.com/office/drawing/2014/main" id="{68F1A5F3-0981-4DF0-9A4D-19A3D59A4F9F}"/>
               </a:ext>
             </a:extLst>
           </p:cNvPr>
@@ -7748,7 +7748,7 @@
           <p:cNvPr id="5" name="">
             <a:extLst xmlns:a="http://schemas.openxmlformats.org/drawingml/2006/main">
               <a:ext uri="{FF2B5EF4-FFF2-40B4-BE49-F238E27FC236}">
-                <a16:creationId xmlns:a16="http://schemas.microsoft.com/office/drawing/2014/main" id="{E98C32B5-B650-4512-A903-F4B8F7E478FD}"/>
+                <a16:creationId xmlns:a16="http://schemas.microsoft.com/office/drawing/2014/main" id="{44B244B1-E890-41E3-BB67-D6E889E0F7F2}"/>
               </a:ext>
             </a:extLst>
           </p:cNvPr>
@@ -7812,7 +7812,7 @@
           <p:cNvPr id="6" name="">
             <a:extLst xmlns:a="http://schemas.openxmlformats.org/drawingml/2006/main">
               <a:ext uri="{FF2B5EF4-FFF2-40B4-BE49-F238E27FC236}">
-                <a16:creationId xmlns:a16="http://schemas.microsoft.com/office/drawing/2014/main" id="{393EF44D-CF70-4491-B25F-4E9591CF5438}"/>
+                <a16:creationId xmlns:a16="http://schemas.microsoft.com/office/drawing/2014/main" id="{A6C583DB-8072-4E84-B64D-6F8A4B06FD61}"/>
               </a:ext>
             </a:extLst>
           </p:cNvPr>
@@ -7876,7 +7876,7 @@
           <p:cNvPr id="7" name="">
             <a:extLst xmlns:a="http://schemas.openxmlformats.org/drawingml/2006/main">
               <a:ext uri="{FF2B5EF4-FFF2-40B4-BE49-F238E27FC236}">
-                <a16:creationId xmlns:a16="http://schemas.microsoft.com/office/drawing/2014/main" id="{1F8425F4-2561-4D66-BFE8-FD6FE8B5B1E4}"/>
+                <a16:creationId xmlns:a16="http://schemas.microsoft.com/office/drawing/2014/main" id="{EBE57AC7-3EC5-4FC8-ADDF-679E9EC24113}"/>
               </a:ext>
             </a:extLst>
           </p:cNvPr>
@@ -7911,7 +7911,7 @@
           <p:cNvPr id="8" name="">
             <a:extLst xmlns:a="http://schemas.openxmlformats.org/drawingml/2006/main">
               <a:ext uri="{FF2B5EF4-FFF2-40B4-BE49-F238E27FC236}">
-                <a16:creationId xmlns:a16="http://schemas.microsoft.com/office/drawing/2014/main" id="{7D2F9B36-9667-4E1F-ABEB-675494B06700}"/>
+                <a16:creationId xmlns:a16="http://schemas.microsoft.com/office/drawing/2014/main" id="{3D9A9361-2C76-40C5-8BB0-926F7A3A83A2}"/>
               </a:ext>
             </a:extLst>
           </p:cNvPr>
@@ -7975,7 +7975,7 @@
           <p:cNvPr id="9" name="">
             <a:extLst xmlns:a="http://schemas.openxmlformats.org/drawingml/2006/main">
               <a:ext uri="{FF2B5EF4-FFF2-40B4-BE49-F238E27FC236}">
-                <a16:creationId xmlns:a16="http://schemas.microsoft.com/office/drawing/2014/main" id="{DB10430C-BA17-49C4-94AE-1746F1E27BDB}"/>
+                <a16:creationId xmlns:a16="http://schemas.microsoft.com/office/drawing/2014/main" id="{411741C3-E7FE-4C51-B6C5-6933C1619A27}"/>
               </a:ext>
             </a:extLst>
           </p:cNvPr>
@@ -8039,7 +8039,7 @@
           <p:cNvPr id="10" name="">
             <a:extLst xmlns:a="http://schemas.openxmlformats.org/drawingml/2006/main">
               <a:ext uri="{FF2B5EF4-FFF2-40B4-BE49-F238E27FC236}">
-                <a16:creationId xmlns:a16="http://schemas.microsoft.com/office/drawing/2014/main" id="{3C4EA097-4DFA-4AC6-ACD2-510C858D3C2B}"/>
+                <a16:creationId xmlns:a16="http://schemas.microsoft.com/office/drawing/2014/main" id="{9454C376-DF2B-4415-AE57-3E99553862A8}"/>
               </a:ext>
             </a:extLst>
           </p:cNvPr>
@@ -8074,7 +8074,7 @@
           <p:cNvPr id="11" name="">
             <a:extLst xmlns:a="http://schemas.openxmlformats.org/drawingml/2006/main">
               <a:ext uri="{FF2B5EF4-FFF2-40B4-BE49-F238E27FC236}">
-                <a16:creationId xmlns:a16="http://schemas.microsoft.com/office/drawing/2014/main" id="{B5B8C686-2200-43CA-8D67-D0B2ADBFD15B}"/>
+                <a16:creationId xmlns:a16="http://schemas.microsoft.com/office/drawing/2014/main" id="{E1FB3E1A-5CBA-453E-BDB0-C3147ABF79DC}"/>
               </a:ext>
             </a:extLst>
           </p:cNvPr>
@@ -8138,7 +8138,7 @@
           <p:cNvPr id="12" name="">
             <a:extLst xmlns:a="http://schemas.openxmlformats.org/drawingml/2006/main">
               <a:ext uri="{FF2B5EF4-FFF2-40B4-BE49-F238E27FC236}">
-                <a16:creationId xmlns:a16="http://schemas.microsoft.com/office/drawing/2014/main" id="{C7B308A7-196D-490F-A7C6-23254F4A00E3}"/>
+                <a16:creationId xmlns:a16="http://schemas.microsoft.com/office/drawing/2014/main" id="{9FA713D3-F672-4BCB-AE24-778C5097F4C4}"/>
               </a:ext>
             </a:extLst>
           </p:cNvPr>
@@ -8202,7 +8202,7 @@
           <p:cNvPr id="13" name="">
             <a:extLst xmlns:a="http://schemas.openxmlformats.org/drawingml/2006/main">
               <a:ext uri="{FF2B5EF4-FFF2-40B4-BE49-F238E27FC236}">
-                <a16:creationId xmlns:a16="http://schemas.microsoft.com/office/drawing/2014/main" id="{D232FC1B-96F3-497C-A29B-5B0E2D4009D0}"/>
+                <a16:creationId xmlns:a16="http://schemas.microsoft.com/office/drawing/2014/main" id="{E516F0AF-0359-4EBB-A5F0-F601B1853ACF}"/>
               </a:ext>
             </a:extLst>
           </p:cNvPr>
@@ -8237,7 +8237,7 @@
           <p:cNvPr id="14" name="">
             <a:extLst xmlns:a="http://schemas.openxmlformats.org/drawingml/2006/main">
               <a:ext uri="{FF2B5EF4-FFF2-40B4-BE49-F238E27FC236}">
-                <a16:creationId xmlns:a16="http://schemas.microsoft.com/office/drawing/2014/main" id="{303BB43C-CC65-48D4-99DC-BF4AE3B296CA}"/>
+                <a16:creationId xmlns:a16="http://schemas.microsoft.com/office/drawing/2014/main" id="{AD9C59DE-71A6-43BE-93FB-E5998E9DCA34}"/>
               </a:ext>
             </a:extLst>
           </p:cNvPr>
@@ -8301,7 +8301,7 @@
           <p:cNvPr id="15" name="">
             <a:extLst xmlns:a="http://schemas.openxmlformats.org/drawingml/2006/main">
               <a:ext uri="{FF2B5EF4-FFF2-40B4-BE49-F238E27FC236}">
-                <a16:creationId xmlns:a16="http://schemas.microsoft.com/office/drawing/2014/main" id="{DC1A017A-B716-43A2-8B5E-3075652E583D}"/>
+                <a16:creationId xmlns:a16="http://schemas.microsoft.com/office/drawing/2014/main" id="{AA6F4088-88B5-43FC-A1B7-12053CD1F258}"/>
               </a:ext>
             </a:extLst>
           </p:cNvPr>
@@ -8365,7 +8365,7 @@
           <p:cNvPr id="16" name="">
             <a:extLst xmlns:a="http://schemas.openxmlformats.org/drawingml/2006/main">
               <a:ext uri="{FF2B5EF4-FFF2-40B4-BE49-F238E27FC236}">
-                <a16:creationId xmlns:a16="http://schemas.microsoft.com/office/drawing/2014/main" id="{70A48252-A790-4720-931B-3D03094AE8FB}"/>
+                <a16:creationId xmlns:a16="http://schemas.microsoft.com/office/drawing/2014/main" id="{D456FB60-5873-4BC8-91E2-C9334A3782F4}"/>
               </a:ext>
             </a:extLst>
           </p:cNvPr>
@@ -8400,7 +8400,7 @@
           <p:cNvPr id="17" name="">
             <a:extLst xmlns:a="http://schemas.openxmlformats.org/drawingml/2006/main">
               <a:ext uri="{FF2B5EF4-FFF2-40B4-BE49-F238E27FC236}">
-                <a16:creationId xmlns:a16="http://schemas.microsoft.com/office/drawing/2014/main" id="{615F7FC6-6BA7-4777-901B-7CB93B6B0360}"/>
+                <a16:creationId xmlns:a16="http://schemas.microsoft.com/office/drawing/2014/main" id="{3931A802-7049-47DB-8209-06BE1BB87BDA}"/>
               </a:ext>
             </a:extLst>
           </p:cNvPr>
@@ -8464,7 +8464,7 @@
           <p:cNvPr id="18" name="">
             <a:extLst xmlns:a="http://schemas.openxmlformats.org/drawingml/2006/main">
               <a:ext uri="{FF2B5EF4-FFF2-40B4-BE49-F238E27FC236}">
-                <a16:creationId xmlns:a16="http://schemas.microsoft.com/office/drawing/2014/main" id="{8924750D-EECD-4B73-B2EB-1520858B7797}"/>
+                <a16:creationId xmlns:a16="http://schemas.microsoft.com/office/drawing/2014/main" id="{04BB04BB-9D55-42CD-BD78-4189517F6CD1}"/>
               </a:ext>
             </a:extLst>
           </p:cNvPr>
@@ -8528,7 +8528,7 @@
           <p:cNvPr id="19" name="">
             <a:extLst xmlns:a="http://schemas.openxmlformats.org/drawingml/2006/main">
               <a:ext uri="{FF2B5EF4-FFF2-40B4-BE49-F238E27FC236}">
-                <a16:creationId xmlns:a16="http://schemas.microsoft.com/office/drawing/2014/main" id="{2FD7DE3E-6209-4DCC-8779-D576345C32D3}"/>
+                <a16:creationId xmlns:a16="http://schemas.microsoft.com/office/drawing/2014/main" id="{550CED68-A124-4C7D-9489-C4E83C95FD7D}"/>
               </a:ext>
             </a:extLst>
           </p:cNvPr>
@@ -8592,7 +8592,7 @@
           <p:cNvPr id="20" name="">
             <a:extLst xmlns:a="http://schemas.openxmlformats.org/drawingml/2006/main">
               <a:ext uri="{FF2B5EF4-FFF2-40B4-BE49-F238E27FC236}">
-                <a16:creationId xmlns:a16="http://schemas.microsoft.com/office/drawing/2014/main" id="{606AC8E9-905A-4996-832D-694EE1EA1C2F}"/>
+                <a16:creationId xmlns:a16="http://schemas.microsoft.com/office/drawing/2014/main" id="{18D2532B-5A6B-454C-A68F-6CE6A6EDA1C6}"/>
               </a:ext>
             </a:extLst>
           </p:cNvPr>
@@ -8625,7 +8625,7 @@
           <p:cNvPr id="21" name="">
             <a:extLst xmlns:a="http://schemas.openxmlformats.org/drawingml/2006/main">
               <a:ext uri="{FF2B5EF4-FFF2-40B4-BE49-F238E27FC236}">
-                <a16:creationId xmlns:a16="http://schemas.microsoft.com/office/drawing/2014/main" id="{79106343-A2A3-4322-B4BA-5BC7FC466780}"/>
+                <a16:creationId xmlns:a16="http://schemas.microsoft.com/office/drawing/2014/main" id="{6D280827-3B35-43D3-A07F-50B9E0E46ED7}"/>
               </a:ext>
             </a:extLst>
           </p:cNvPr>
@@ -8658,7 +8658,7 @@
           <p:cNvPr id="22" name="">
             <a:extLst xmlns:a="http://schemas.openxmlformats.org/drawingml/2006/main">
               <a:ext uri="{FF2B5EF4-FFF2-40B4-BE49-F238E27FC236}">
-                <a16:creationId xmlns:a16="http://schemas.microsoft.com/office/drawing/2014/main" id="{58D48820-6884-4DAF-8048-44F12801AFE0}"/>
+                <a16:creationId xmlns:a16="http://schemas.microsoft.com/office/drawing/2014/main" id="{59DE8AE4-B9A0-4E35-9113-5CE8FDB03B5B}"/>
               </a:ext>
             </a:extLst>
           </p:cNvPr>
@@ -8722,7 +8722,7 @@
           <p:cNvPr id="23" name="">
             <a:extLst xmlns:a="http://schemas.openxmlformats.org/drawingml/2006/main">
               <a:ext uri="{FF2B5EF4-FFF2-40B4-BE49-F238E27FC236}">
-                <a16:creationId xmlns:a16="http://schemas.microsoft.com/office/drawing/2014/main" id="{4C21C521-D8CF-43E0-BF33-49E49EDD4BFE}"/>
+                <a16:creationId xmlns:a16="http://schemas.microsoft.com/office/drawing/2014/main" id="{E361A534-9729-4A00-ACD3-FFF34F2D92CE}"/>
               </a:ext>
             </a:extLst>
           </p:cNvPr>
@@ -8755,7 +8755,7 @@
           <p:cNvPr id="24" name="">
             <a:extLst xmlns:a="http://schemas.openxmlformats.org/drawingml/2006/main">
               <a:ext uri="{FF2B5EF4-FFF2-40B4-BE49-F238E27FC236}">
-                <a16:creationId xmlns:a16="http://schemas.microsoft.com/office/drawing/2014/main" id="{3F2B97FA-205E-4D3E-BA96-F10ED65DF934}"/>
+                <a16:creationId xmlns:a16="http://schemas.microsoft.com/office/drawing/2014/main" id="{20F4B24B-E5B9-4E74-B715-7622A2D69A2F}"/>
               </a:ext>
             </a:extLst>
           </p:cNvPr>
@@ -8788,7 +8788,7 @@
           <p:cNvPr id="25" name="">
             <a:extLst xmlns:a="http://schemas.openxmlformats.org/drawingml/2006/main">
               <a:ext uri="{FF2B5EF4-FFF2-40B4-BE49-F238E27FC236}">
-                <a16:creationId xmlns:a16="http://schemas.microsoft.com/office/drawing/2014/main" id="{F6AF76E1-D43B-45AA-9CA5-F421998D1755}"/>
+                <a16:creationId xmlns:a16="http://schemas.microsoft.com/office/drawing/2014/main" id="{998BA122-19D4-407F-8518-A6E4A172335B}"/>
               </a:ext>
             </a:extLst>
           </p:cNvPr>
@@ -8852,7 +8852,7 @@
           <p:cNvPr id="26" name="">
             <a:extLst xmlns:a="http://schemas.openxmlformats.org/drawingml/2006/main">
               <a:ext uri="{FF2B5EF4-FFF2-40B4-BE49-F238E27FC236}">
-                <a16:creationId xmlns:a16="http://schemas.microsoft.com/office/drawing/2014/main" id="{1E338320-CF17-4B11-AF63-4823FA689003}"/>
+                <a16:creationId xmlns:a16="http://schemas.microsoft.com/office/drawing/2014/main" id="{7AB5DCAD-9C14-4093-84FB-A5E0E487CE14}"/>
               </a:ext>
             </a:extLst>
           </p:cNvPr>
@@ -8885,7 +8885,7 @@
           <p:cNvPr id="27" name="">
             <a:extLst xmlns:a="http://schemas.openxmlformats.org/drawingml/2006/main">
               <a:ext uri="{FF2B5EF4-FFF2-40B4-BE49-F238E27FC236}">
-                <a16:creationId xmlns:a16="http://schemas.microsoft.com/office/drawing/2014/main" id="{A8952ABF-747C-483C-9EDB-0AFAEC8A37DF}"/>
+                <a16:creationId xmlns:a16="http://schemas.microsoft.com/office/drawing/2014/main" id="{4058B557-A41D-44DF-8111-8C5295715362}"/>
               </a:ext>
             </a:extLst>
           </p:cNvPr>
@@ -8918,7 +8918,7 @@
           <p:cNvPr id="28" name="">
             <a:extLst xmlns:a="http://schemas.openxmlformats.org/drawingml/2006/main">
               <a:ext uri="{FF2B5EF4-FFF2-40B4-BE49-F238E27FC236}">
-                <a16:creationId xmlns:a16="http://schemas.microsoft.com/office/drawing/2014/main" id="{771B8197-08EC-4D02-8A47-04BFF40338AB}"/>
+                <a16:creationId xmlns:a16="http://schemas.microsoft.com/office/drawing/2014/main" id="{A51BD26A-52C3-47CC-9823-CD29A9C6A2C3}"/>
               </a:ext>
             </a:extLst>
           </p:cNvPr>
@@ -8982,7 +8982,7 @@
           <p:cNvPr id="29" name="">
             <a:extLst xmlns:a="http://schemas.openxmlformats.org/drawingml/2006/main">
               <a:ext uri="{FF2B5EF4-FFF2-40B4-BE49-F238E27FC236}">
-                <a16:creationId xmlns:a16="http://schemas.microsoft.com/office/drawing/2014/main" id="{E4329CA9-6739-4B74-9067-78962DE14E76}"/>
+                <a16:creationId xmlns:a16="http://schemas.microsoft.com/office/drawing/2014/main" id="{7AF85237-18B1-470B-9ED3-490D93989EC9}"/>
               </a:ext>
             </a:extLst>
           </p:cNvPr>
@@ -9015,7 +9015,7 @@
           <p:cNvPr id="30" name="">
             <a:extLst xmlns:a="http://schemas.openxmlformats.org/drawingml/2006/main">
               <a:ext uri="{FF2B5EF4-FFF2-40B4-BE49-F238E27FC236}">
-                <a16:creationId xmlns:a16="http://schemas.microsoft.com/office/drawing/2014/main" id="{72472BF4-0329-4EDB-A788-CD1CFA236E9D}"/>
+                <a16:creationId xmlns:a16="http://schemas.microsoft.com/office/drawing/2014/main" id="{9071601E-5548-4B31-B41E-7DA5356D3326}"/>
               </a:ext>
             </a:extLst>
           </p:cNvPr>
@@ -9079,7 +9079,7 @@
           <p:cNvPr id="31" name="">
             <a:extLst xmlns:a="http://schemas.openxmlformats.org/drawingml/2006/main">
               <a:ext uri="{FF2B5EF4-FFF2-40B4-BE49-F238E27FC236}">
-                <a16:creationId xmlns:a16="http://schemas.microsoft.com/office/drawing/2014/main" id="{9D582302-5247-45A8-9D68-A4FA63E2CB05}"/>
+                <a16:creationId xmlns:a16="http://schemas.microsoft.com/office/drawing/2014/main" id="{F0F5A927-66DC-4820-BC7A-B5D57E17DA06}"/>
               </a:ext>
             </a:extLst>
           </p:cNvPr>
@@ -9141,7 +9141,7 @@
     </p:spTree>
     <p:extLst>
       <p:ext uri="{BB962C8B-B14F-4D97-AF65-F5344CB8AC3E}">
-        <p14:creationId xmlns:p14="http://schemas.microsoft.com/office/powerpoint/2010/main" val="583463981"/>
+        <p14:creationId xmlns:p14="http://schemas.microsoft.com/office/powerpoint/2010/main" val="1372190552"/>
       </p:ext>
     </p:extLst>
   </p:cSld>
@@ -9169,7 +9169,7 @@
           <p:nvPr/>
         </p:nvPicPr>
         <p:blipFill>
-          <a:blip xmlns:r="http://schemas.openxmlformats.org/officeDocument/2006/relationships" xmlns:a="http://schemas.openxmlformats.org/drawingml/2006/main" r:embed="Rdb739ffb661b4f45"/>
+          <a:blip xmlns:r="http://schemas.openxmlformats.org/officeDocument/2006/relationships" xmlns:a="http://schemas.openxmlformats.org/drawingml/2006/main" r:embed="R46afe4472aae4575"/>
           <a:srcRect xmlns:a="http://schemas.openxmlformats.org/drawingml/2006/main" l="0" t="7813" r="0" b="7813"/>
           <a:stretch xmlns:a="http://schemas.openxmlformats.org/drawingml/2006/main">
             <a:fillRect l="0" t="0" r="0" b="0"/>
@@ -9190,7 +9190,7 @@
           <p:cNvPr id="2" name="">
             <a:extLst xmlns:a="http://schemas.openxmlformats.org/drawingml/2006/main">
               <a:ext uri="{FF2B5EF4-FFF2-40B4-BE49-F238E27FC236}">
-                <a16:creationId xmlns:a16="http://schemas.microsoft.com/office/drawing/2014/main" id="{653B1DE3-6B54-480D-823A-253626CDCEB2}"/>
+                <a16:creationId xmlns:a16="http://schemas.microsoft.com/office/drawing/2014/main" id="{C02BFF46-0BCE-4EE1-AAFB-1312C9746770}"/>
               </a:ext>
             </a:extLst>
           </p:cNvPr>
@@ -9227,7 +9227,7 @@
           <p:cNvPr id="3" name="">
             <a:extLst xmlns:a="http://schemas.openxmlformats.org/drawingml/2006/main">
               <a:ext uri="{FF2B5EF4-FFF2-40B4-BE49-F238E27FC236}">
-                <a16:creationId xmlns:a16="http://schemas.microsoft.com/office/drawing/2014/main" id="{7F5C0B1F-8DF8-457D-9960-B7C0E09790B9}"/>
+                <a16:creationId xmlns:a16="http://schemas.microsoft.com/office/drawing/2014/main" id="{C1D2B986-BDAB-439B-A2E8-DC979AB63E93}"/>
               </a:ext>
             </a:extLst>
           </p:cNvPr>
@@ -9264,7 +9264,7 @@
           <p:cNvPr id="4" name="">
             <a:extLst xmlns:a="http://schemas.openxmlformats.org/drawingml/2006/main">
               <a:ext uri="{FF2B5EF4-FFF2-40B4-BE49-F238E27FC236}">
-                <a16:creationId xmlns:a16="http://schemas.microsoft.com/office/drawing/2014/main" id="{2D543281-E12B-4392-BD85-3FAC5A45464D}"/>
+                <a16:creationId xmlns:a16="http://schemas.microsoft.com/office/drawing/2014/main" id="{BC00C4E7-BDDC-45B0-A212-856B2BBF3254}"/>
               </a:ext>
             </a:extLst>
           </p:cNvPr>
@@ -9328,7 +9328,7 @@
           <p:cNvPr id="5" name="">
             <a:extLst xmlns:a="http://schemas.openxmlformats.org/drawingml/2006/main">
               <a:ext uri="{FF2B5EF4-FFF2-40B4-BE49-F238E27FC236}">
-                <a16:creationId xmlns:a16="http://schemas.microsoft.com/office/drawing/2014/main" id="{8B57885C-FA11-4A9B-807B-18BD83107DF2}"/>
+                <a16:creationId xmlns:a16="http://schemas.microsoft.com/office/drawing/2014/main" id="{6DEF0E6E-CD0C-4DC1-AF0F-F16BAA34A954}"/>
               </a:ext>
             </a:extLst>
           </p:cNvPr>
@@ -9392,7 +9392,7 @@
           <p:cNvPr id="6" name="">
             <a:extLst xmlns:a="http://schemas.openxmlformats.org/drawingml/2006/main">
               <a:ext uri="{FF2B5EF4-FFF2-40B4-BE49-F238E27FC236}">
-                <a16:creationId xmlns:a16="http://schemas.microsoft.com/office/drawing/2014/main" id="{39DCB5C4-8F7A-4345-9F95-E2494E742C46}"/>
+                <a16:creationId xmlns:a16="http://schemas.microsoft.com/office/drawing/2014/main" id="{37828C22-FD7C-481D-8F3A-471968B9A6A2}"/>
               </a:ext>
             </a:extLst>
           </p:cNvPr>
@@ -9456,7 +9456,7 @@
           <p:cNvPr id="7" name="">
             <a:extLst xmlns:a="http://schemas.openxmlformats.org/drawingml/2006/main">
               <a:ext uri="{FF2B5EF4-FFF2-40B4-BE49-F238E27FC236}">
-                <a16:creationId xmlns:a16="http://schemas.microsoft.com/office/drawing/2014/main" id="{AFF75653-92C2-4009-82B7-A6C59FBEB67E}"/>
+                <a16:creationId xmlns:a16="http://schemas.microsoft.com/office/drawing/2014/main" id="{829AF4BE-0905-4288-AD92-9A6FFAFB2DFE}"/>
               </a:ext>
             </a:extLst>
           </p:cNvPr>
@@ -9491,7 +9491,7 @@
           <p:cNvPr id="8" name="">
             <a:extLst xmlns:a="http://schemas.openxmlformats.org/drawingml/2006/main">
               <a:ext uri="{FF2B5EF4-FFF2-40B4-BE49-F238E27FC236}">
-                <a16:creationId xmlns:a16="http://schemas.microsoft.com/office/drawing/2014/main" id="{7BE8E027-3EE4-4335-AD8C-3D105849C0E6}"/>
+                <a16:creationId xmlns:a16="http://schemas.microsoft.com/office/drawing/2014/main" id="{9739A88A-C863-487B-9A30-CA1A5EAEE405}"/>
               </a:ext>
             </a:extLst>
           </p:cNvPr>
@@ -9555,7 +9555,7 @@
           <p:cNvPr id="9" name="">
             <a:extLst xmlns:a="http://schemas.openxmlformats.org/drawingml/2006/main">
               <a:ext uri="{FF2B5EF4-FFF2-40B4-BE49-F238E27FC236}">
-                <a16:creationId xmlns:a16="http://schemas.microsoft.com/office/drawing/2014/main" id="{D91F88E8-6748-4834-A222-CC119E793159}"/>
+                <a16:creationId xmlns:a16="http://schemas.microsoft.com/office/drawing/2014/main" id="{D53E8B2A-D5A6-4BC0-8DD9-9A1C26D934F1}"/>
               </a:ext>
             </a:extLst>
           </p:cNvPr>
@@ -9619,7 +9619,7 @@
           <p:cNvPr id="10" name="">
             <a:extLst xmlns:a="http://schemas.openxmlformats.org/drawingml/2006/main">
               <a:ext uri="{FF2B5EF4-FFF2-40B4-BE49-F238E27FC236}">
-                <a16:creationId xmlns:a16="http://schemas.microsoft.com/office/drawing/2014/main" id="{B1D7B68B-F233-489B-98FE-27F719D891BC}"/>
+                <a16:creationId xmlns:a16="http://schemas.microsoft.com/office/drawing/2014/main" id="{7376DC5D-D855-4C8A-B1AF-E828FBF360D4}"/>
               </a:ext>
             </a:extLst>
           </p:cNvPr>
@@ -9652,7 +9652,7 @@
           <p:cNvPr id="11" name="">
             <a:extLst xmlns:a="http://schemas.openxmlformats.org/drawingml/2006/main">
               <a:ext uri="{FF2B5EF4-FFF2-40B4-BE49-F238E27FC236}">
-                <a16:creationId xmlns:a16="http://schemas.microsoft.com/office/drawing/2014/main" id="{37613EBD-44C9-4C94-A732-3A22605501B5}"/>
+                <a16:creationId xmlns:a16="http://schemas.microsoft.com/office/drawing/2014/main" id="{4BCE6EA0-5D04-4302-886F-BCAD02F90DAC}"/>
               </a:ext>
             </a:extLst>
           </p:cNvPr>
@@ -9687,7 +9687,7 @@
           <p:cNvPr id="12" name="">
             <a:extLst xmlns:a="http://schemas.openxmlformats.org/drawingml/2006/main">
               <a:ext uri="{FF2B5EF4-FFF2-40B4-BE49-F238E27FC236}">
-                <a16:creationId xmlns:a16="http://schemas.microsoft.com/office/drawing/2014/main" id="{C0B79004-621C-47BA-BF71-30821B01DA1E}"/>
+                <a16:creationId xmlns:a16="http://schemas.microsoft.com/office/drawing/2014/main" id="{EDD677F1-15A9-4D8C-8B15-726280490ABD}"/>
               </a:ext>
             </a:extLst>
           </p:cNvPr>
@@ -9751,7 +9751,7 @@
           <p:cNvPr id="13" name="">
             <a:extLst xmlns:a="http://schemas.openxmlformats.org/drawingml/2006/main">
               <a:ext uri="{FF2B5EF4-FFF2-40B4-BE49-F238E27FC236}">
-                <a16:creationId xmlns:a16="http://schemas.microsoft.com/office/drawing/2014/main" id="{CF097843-7F3C-4FED-B04B-D6B6BBFB34B7}"/>
+                <a16:creationId xmlns:a16="http://schemas.microsoft.com/office/drawing/2014/main" id="{E0DD9BF4-E3F7-4AD8-B1F2-FFFE199332D2}"/>
               </a:ext>
             </a:extLst>
           </p:cNvPr>
@@ -9815,7 +9815,7 @@
           <p:cNvPr id="14" name="">
             <a:extLst xmlns:a="http://schemas.openxmlformats.org/drawingml/2006/main">
               <a:ext uri="{FF2B5EF4-FFF2-40B4-BE49-F238E27FC236}">
-                <a16:creationId xmlns:a16="http://schemas.microsoft.com/office/drawing/2014/main" id="{2A2E5819-C7E1-441C-A83E-2AD2F1ACAEAC}"/>
+                <a16:creationId xmlns:a16="http://schemas.microsoft.com/office/drawing/2014/main" id="{5C0BD0B1-582C-4A96-8334-7F52F696CB60}"/>
               </a:ext>
             </a:extLst>
           </p:cNvPr>
@@ -9848,7 +9848,7 @@
           <p:cNvPr id="15" name="">
             <a:extLst xmlns:a="http://schemas.openxmlformats.org/drawingml/2006/main">
               <a:ext uri="{FF2B5EF4-FFF2-40B4-BE49-F238E27FC236}">
-                <a16:creationId xmlns:a16="http://schemas.microsoft.com/office/drawing/2014/main" id="{3C447927-2333-4ED2-BC02-ED71E2B915E6}"/>
+                <a16:creationId xmlns:a16="http://schemas.microsoft.com/office/drawing/2014/main" id="{876E15EB-583F-4076-B08E-90A2C5A9A374}"/>
               </a:ext>
             </a:extLst>
           </p:cNvPr>
@@ -9883,7 +9883,7 @@
           <p:cNvPr id="16" name="">
             <a:extLst xmlns:a="http://schemas.openxmlformats.org/drawingml/2006/main">
               <a:ext uri="{FF2B5EF4-FFF2-40B4-BE49-F238E27FC236}">
-                <a16:creationId xmlns:a16="http://schemas.microsoft.com/office/drawing/2014/main" id="{0CB9330C-0CFE-475F-BB88-3C601C67574A}"/>
+                <a16:creationId xmlns:a16="http://schemas.microsoft.com/office/drawing/2014/main" id="{7246D94F-14CB-4666-96C1-E51CEB091D22}"/>
               </a:ext>
             </a:extLst>
           </p:cNvPr>
@@ -9947,7 +9947,7 @@
           <p:cNvPr id="17" name="">
             <a:extLst xmlns:a="http://schemas.openxmlformats.org/drawingml/2006/main">
               <a:ext uri="{FF2B5EF4-FFF2-40B4-BE49-F238E27FC236}">
-                <a16:creationId xmlns:a16="http://schemas.microsoft.com/office/drawing/2014/main" id="{08062F15-EBBF-453F-8B5B-DE629B16ED9F}"/>
+                <a16:creationId xmlns:a16="http://schemas.microsoft.com/office/drawing/2014/main" id="{E5A71770-0B15-467C-8B32-AE1E9C997C79}"/>
               </a:ext>
             </a:extLst>
           </p:cNvPr>
@@ -10011,7 +10011,7 @@
           <p:cNvPr id="18" name="">
             <a:extLst xmlns:a="http://schemas.openxmlformats.org/drawingml/2006/main">
               <a:ext uri="{FF2B5EF4-FFF2-40B4-BE49-F238E27FC236}">
-                <a16:creationId xmlns:a16="http://schemas.microsoft.com/office/drawing/2014/main" id="{8FEFFC29-70DE-4A81-9E94-E42A082A0F0D}"/>
+                <a16:creationId xmlns:a16="http://schemas.microsoft.com/office/drawing/2014/main" id="{D4A8BF4D-9288-4167-845D-96A4FBBCB77B}"/>
               </a:ext>
             </a:extLst>
           </p:cNvPr>
@@ -10044,7 +10044,7 @@
           <p:cNvPr id="19" name="">
             <a:extLst xmlns:a="http://schemas.openxmlformats.org/drawingml/2006/main">
               <a:ext uri="{FF2B5EF4-FFF2-40B4-BE49-F238E27FC236}">
-                <a16:creationId xmlns:a16="http://schemas.microsoft.com/office/drawing/2014/main" id="{86A607E3-C702-4051-AFD1-C9CC7632DEC5}"/>
+                <a16:creationId xmlns:a16="http://schemas.microsoft.com/office/drawing/2014/main" id="{A3742166-9D68-45E1-9C27-050AF458DEA7}"/>
               </a:ext>
             </a:extLst>
           </p:cNvPr>
@@ -10079,7 +10079,7 @@
           <p:cNvPr id="20" name="">
             <a:extLst xmlns:a="http://schemas.openxmlformats.org/drawingml/2006/main">
               <a:ext uri="{FF2B5EF4-FFF2-40B4-BE49-F238E27FC236}">
-                <a16:creationId xmlns:a16="http://schemas.microsoft.com/office/drawing/2014/main" id="{EF257856-4318-46F4-98DA-9A73C1BD3138}"/>
+                <a16:creationId xmlns:a16="http://schemas.microsoft.com/office/drawing/2014/main" id="{6B5337B3-34BA-4D2B-B1B2-297ABED88CC8}"/>
               </a:ext>
             </a:extLst>
           </p:cNvPr>
@@ -10143,7 +10143,7 @@
           <p:cNvPr id="21" name="">
             <a:extLst xmlns:a="http://schemas.openxmlformats.org/drawingml/2006/main">
               <a:ext uri="{FF2B5EF4-FFF2-40B4-BE49-F238E27FC236}">
-                <a16:creationId xmlns:a16="http://schemas.microsoft.com/office/drawing/2014/main" id="{47690B39-3E1B-402A-A20E-9E331167D393}"/>
+                <a16:creationId xmlns:a16="http://schemas.microsoft.com/office/drawing/2014/main" id="{CFF1FFAC-2B36-45FD-9BFD-FF5BCBCA877B}"/>
               </a:ext>
             </a:extLst>
           </p:cNvPr>
@@ -10207,7 +10207,7 @@
           <p:cNvPr id="22" name="">
             <a:extLst xmlns:a="http://schemas.openxmlformats.org/drawingml/2006/main">
               <a:ext uri="{FF2B5EF4-FFF2-40B4-BE49-F238E27FC236}">
-                <a16:creationId xmlns:a16="http://schemas.microsoft.com/office/drawing/2014/main" id="{F2FED3C1-B13E-4F61-924F-D0CB6CCABC68}"/>
+                <a16:creationId xmlns:a16="http://schemas.microsoft.com/office/drawing/2014/main" id="{2EDF4178-99C3-45DE-9C91-05412868E6AA}"/>
               </a:ext>
             </a:extLst>
           </p:cNvPr>
@@ -10271,7 +10271,7 @@
           <p:cNvPr id="23" name="">
             <a:extLst xmlns:a="http://schemas.openxmlformats.org/drawingml/2006/main">
               <a:ext uri="{FF2B5EF4-FFF2-40B4-BE49-F238E27FC236}">
-                <a16:creationId xmlns:a16="http://schemas.microsoft.com/office/drawing/2014/main" id="{416ADCCE-9F0D-47B3-87B9-58EB8FF878BA}"/>
+                <a16:creationId xmlns:a16="http://schemas.microsoft.com/office/drawing/2014/main" id="{41F8CE8F-47C4-4AE5-A361-287627CFA4FC}"/>
               </a:ext>
             </a:extLst>
           </p:cNvPr>
@@ -10335,7 +10335,7 @@
           <p:cNvPr id="24" name="">
             <a:extLst xmlns:a="http://schemas.openxmlformats.org/drawingml/2006/main">
               <a:ext uri="{FF2B5EF4-FFF2-40B4-BE49-F238E27FC236}">
-                <a16:creationId xmlns:a16="http://schemas.microsoft.com/office/drawing/2014/main" id="{50649355-5B1D-4FEF-91BC-583076B86073}"/>
+                <a16:creationId xmlns:a16="http://schemas.microsoft.com/office/drawing/2014/main" id="{FF6089C8-7E6B-447D-BBDF-0AE4176DF092}"/>
               </a:ext>
             </a:extLst>
           </p:cNvPr>
@@ -10368,7 +10368,7 @@
           <p:cNvPr id="25" name="">
             <a:extLst xmlns:a="http://schemas.openxmlformats.org/drawingml/2006/main">
               <a:ext uri="{FF2B5EF4-FFF2-40B4-BE49-F238E27FC236}">
-                <a16:creationId xmlns:a16="http://schemas.microsoft.com/office/drawing/2014/main" id="{8247BD6A-63A9-4B96-A389-2BD9AF8DEE7A}"/>
+                <a16:creationId xmlns:a16="http://schemas.microsoft.com/office/drawing/2014/main" id="{53FE27F5-5EF2-451C-8381-4C5202DB70DD}"/>
               </a:ext>
             </a:extLst>
           </p:cNvPr>
@@ -10432,7 +10432,7 @@
           <p:cNvPr id="26" name="">
             <a:extLst xmlns:a="http://schemas.openxmlformats.org/drawingml/2006/main">
               <a:ext uri="{FF2B5EF4-FFF2-40B4-BE49-F238E27FC236}">
-                <a16:creationId xmlns:a16="http://schemas.microsoft.com/office/drawing/2014/main" id="{95DAF34D-4D44-4694-9BF7-56CC7EB6F649}"/>
+                <a16:creationId xmlns:a16="http://schemas.microsoft.com/office/drawing/2014/main" id="{C197F3A6-31DE-465A-A8B1-C166143BFF64}"/>
               </a:ext>
             </a:extLst>
           </p:cNvPr>
@@ -10494,7 +10494,7 @@
     </p:spTree>
     <p:extLst>
       <p:ext uri="{BB962C8B-B14F-4D97-AF65-F5344CB8AC3E}">
-        <p14:creationId xmlns:p14="http://schemas.microsoft.com/office/powerpoint/2010/main" val="268157828"/>
+        <p14:creationId xmlns:p14="http://schemas.microsoft.com/office/powerpoint/2010/main" val="730856684"/>
       </p:ext>
     </p:extLst>
   </p:cSld>
@@ -10522,7 +10522,7 @@
           <p:nvPr/>
         </p:nvPicPr>
         <p:blipFill>
-          <a:blip xmlns:r="http://schemas.openxmlformats.org/officeDocument/2006/relationships" xmlns:a="http://schemas.openxmlformats.org/drawingml/2006/main" r:embed="R501bd552cf704e56"/>
+          <a:blip xmlns:r="http://schemas.openxmlformats.org/officeDocument/2006/relationships" xmlns:a="http://schemas.openxmlformats.org/drawingml/2006/main" r:embed="R86904c8883b141fc"/>
           <a:srcRect xmlns:a="http://schemas.openxmlformats.org/drawingml/2006/main" l="0" t="7813" r="0" b="7813"/>
           <a:stretch xmlns:a="http://schemas.openxmlformats.org/drawingml/2006/main">
             <a:fillRect l="0" t="0" r="0" b="0"/>
@@ -10543,7 +10543,7 @@
           <p:cNvPr id="2" name="">
             <a:extLst xmlns:a="http://schemas.openxmlformats.org/drawingml/2006/main">
               <a:ext uri="{FF2B5EF4-FFF2-40B4-BE49-F238E27FC236}">
-                <a16:creationId xmlns:a16="http://schemas.microsoft.com/office/drawing/2014/main" id="{6DD7407F-8696-40E7-B049-75EF8261E5E0}"/>
+                <a16:creationId xmlns:a16="http://schemas.microsoft.com/office/drawing/2014/main" id="{E3146644-2831-4FB3-ACCB-9F497CBEF3CD}"/>
               </a:ext>
             </a:extLst>
           </p:cNvPr>
@@ -10580,7 +10580,7 @@
           <p:cNvPr id="3" name="">
             <a:extLst xmlns:a="http://schemas.openxmlformats.org/drawingml/2006/main">
               <a:ext uri="{FF2B5EF4-FFF2-40B4-BE49-F238E27FC236}">
-                <a16:creationId xmlns:a16="http://schemas.microsoft.com/office/drawing/2014/main" id="{F142E3D8-9160-4B48-BD81-81392A63F420}"/>
+                <a16:creationId xmlns:a16="http://schemas.microsoft.com/office/drawing/2014/main" id="{90679EF9-81B8-45BB-848A-1BD0CB04F11C}"/>
               </a:ext>
             </a:extLst>
           </p:cNvPr>
@@ -10617,7 +10617,7 @@
           <p:cNvPr id="4" name="">
             <a:extLst xmlns:a="http://schemas.openxmlformats.org/drawingml/2006/main">
               <a:ext uri="{FF2B5EF4-FFF2-40B4-BE49-F238E27FC236}">
-                <a16:creationId xmlns:a16="http://schemas.microsoft.com/office/drawing/2014/main" id="{3A051964-56A4-4C5B-B3F4-399E3D78EEA9}"/>
+                <a16:creationId xmlns:a16="http://schemas.microsoft.com/office/drawing/2014/main" id="{1C87B2D5-924F-494E-9CBB-1C50C6511A5A}"/>
               </a:ext>
             </a:extLst>
           </p:cNvPr>
@@ -10681,7 +10681,7 @@
           <p:cNvPr id="5" name="">
             <a:extLst xmlns:a="http://schemas.openxmlformats.org/drawingml/2006/main">
               <a:ext uri="{FF2B5EF4-FFF2-40B4-BE49-F238E27FC236}">
-                <a16:creationId xmlns:a16="http://schemas.microsoft.com/office/drawing/2014/main" id="{556B24DF-1B6C-49BA-B13E-10D1C480ABC2}"/>
+                <a16:creationId xmlns:a16="http://schemas.microsoft.com/office/drawing/2014/main" id="{3E7D24F9-4A58-48FA-B2DA-AA19697514AE}"/>
               </a:ext>
             </a:extLst>
           </p:cNvPr>
@@ -10745,7 +10745,7 @@
           <p:cNvPr id="6" name="">
             <a:extLst xmlns:a="http://schemas.openxmlformats.org/drawingml/2006/main">
               <a:ext uri="{FF2B5EF4-FFF2-40B4-BE49-F238E27FC236}">
-                <a16:creationId xmlns:a16="http://schemas.microsoft.com/office/drawing/2014/main" id="{9A62DD9E-E818-48FB-8962-2D69D79C35DE}"/>
+                <a16:creationId xmlns:a16="http://schemas.microsoft.com/office/drawing/2014/main" id="{04FFF4C2-4870-4EC4-A96C-A6E8041F152A}"/>
               </a:ext>
             </a:extLst>
           </p:cNvPr>
@@ -10809,7 +10809,7 @@
           <p:cNvPr id="7" name="">
             <a:extLst xmlns:a="http://schemas.openxmlformats.org/drawingml/2006/main">
               <a:ext uri="{FF2B5EF4-FFF2-40B4-BE49-F238E27FC236}">
-                <a16:creationId xmlns:a16="http://schemas.microsoft.com/office/drawing/2014/main" id="{6426B152-273C-47BF-AEE1-DD96C4DAC528}"/>
+                <a16:creationId xmlns:a16="http://schemas.microsoft.com/office/drawing/2014/main" id="{053CB629-D7C8-4BA3-91F1-7E5DF74BC8D2}"/>
               </a:ext>
             </a:extLst>
           </p:cNvPr>
@@ -10844,7 +10844,7 @@
           <p:cNvPr id="8" name="">
             <a:extLst xmlns:a="http://schemas.openxmlformats.org/drawingml/2006/main">
               <a:ext uri="{FF2B5EF4-FFF2-40B4-BE49-F238E27FC236}">
-                <a16:creationId xmlns:a16="http://schemas.microsoft.com/office/drawing/2014/main" id="{334468E9-426B-4B85-A8A6-37894C4A1E64}"/>
+                <a16:creationId xmlns:a16="http://schemas.microsoft.com/office/drawing/2014/main" id="{94CDDE87-8D42-450A-AAB5-80833678D0AC}"/>
               </a:ext>
             </a:extLst>
           </p:cNvPr>
@@ -10908,7 +10908,7 @@
           <p:cNvPr id="9" name="">
             <a:extLst xmlns:a="http://schemas.openxmlformats.org/drawingml/2006/main">
               <a:ext uri="{FF2B5EF4-FFF2-40B4-BE49-F238E27FC236}">
-                <a16:creationId xmlns:a16="http://schemas.microsoft.com/office/drawing/2014/main" id="{92A5A1A8-D096-4C7D-BF49-E9E9ED68455A}"/>
+                <a16:creationId xmlns:a16="http://schemas.microsoft.com/office/drawing/2014/main" id="{9C33CC49-5E51-4233-891A-3AEC19F7BD51}"/>
               </a:ext>
             </a:extLst>
           </p:cNvPr>
@@ -10943,7 +10943,7 @@
           <p:cNvPr id="10" name="">
             <a:extLst xmlns:a="http://schemas.openxmlformats.org/drawingml/2006/main">
               <a:ext uri="{FF2B5EF4-FFF2-40B4-BE49-F238E27FC236}">
-                <a16:creationId xmlns:a16="http://schemas.microsoft.com/office/drawing/2014/main" id="{9D1DBFC0-D341-4F3E-A110-D6199823FF2F}"/>
+                <a16:creationId xmlns:a16="http://schemas.microsoft.com/office/drawing/2014/main" id="{1BD0E33A-D304-4E61-8DFD-D82C2854F74A}"/>
               </a:ext>
             </a:extLst>
           </p:cNvPr>
@@ -11007,7 +11007,7 @@
           <p:cNvPr id="11" name="">
             <a:extLst xmlns:a="http://schemas.openxmlformats.org/drawingml/2006/main">
               <a:ext uri="{FF2B5EF4-FFF2-40B4-BE49-F238E27FC236}">
-                <a16:creationId xmlns:a16="http://schemas.microsoft.com/office/drawing/2014/main" id="{A1100D2A-3BA3-4E5E-8381-45DF63AABA8B}"/>
+                <a16:creationId xmlns:a16="http://schemas.microsoft.com/office/drawing/2014/main" id="{7E0A9E78-9C60-49F1-9A73-DCA0A5B04352}"/>
               </a:ext>
             </a:extLst>
           </p:cNvPr>
@@ -11042,7 +11042,7 @@
           <p:cNvPr id="12" name="">
             <a:extLst xmlns:a="http://schemas.openxmlformats.org/drawingml/2006/main">
               <a:ext uri="{FF2B5EF4-FFF2-40B4-BE49-F238E27FC236}">
-                <a16:creationId xmlns:a16="http://schemas.microsoft.com/office/drawing/2014/main" id="{14613135-D037-4073-B482-F92B350877BA}"/>
+                <a16:creationId xmlns:a16="http://schemas.microsoft.com/office/drawing/2014/main" id="{BC6D4528-F3C8-4151-BA15-854F0890E71A}"/>
               </a:ext>
             </a:extLst>
           </p:cNvPr>
@@ -11106,7 +11106,7 @@
           <p:cNvPr id="13" name="">
             <a:extLst xmlns:a="http://schemas.openxmlformats.org/drawingml/2006/main">
               <a:ext uri="{FF2B5EF4-FFF2-40B4-BE49-F238E27FC236}">
-                <a16:creationId xmlns:a16="http://schemas.microsoft.com/office/drawing/2014/main" id="{A9C3F043-031A-4CF1-9B41-50A7E9B0A624}"/>
+                <a16:creationId xmlns:a16="http://schemas.microsoft.com/office/drawing/2014/main" id="{A0AC7C36-0824-46EC-AB5A-712B64E7A5E1}"/>
               </a:ext>
             </a:extLst>
           </p:cNvPr>
@@ -11141,7 +11141,7 @@
           <p:cNvPr id="14" name="">
             <a:extLst xmlns:a="http://schemas.openxmlformats.org/drawingml/2006/main">
               <a:ext uri="{FF2B5EF4-FFF2-40B4-BE49-F238E27FC236}">
-                <a16:creationId xmlns:a16="http://schemas.microsoft.com/office/drawing/2014/main" id="{E07CB4E3-F0B9-4DE1-8C3B-29AB331B44FA}"/>
+                <a16:creationId xmlns:a16="http://schemas.microsoft.com/office/drawing/2014/main" id="{1793D95F-AA33-4194-B990-75E58FBE1A06}"/>
               </a:ext>
             </a:extLst>
           </p:cNvPr>
@@ -11205,7 +11205,7 @@
           <p:cNvPr id="15" name="">
             <a:extLst xmlns:a="http://schemas.openxmlformats.org/drawingml/2006/main">
               <a:ext uri="{FF2B5EF4-FFF2-40B4-BE49-F238E27FC236}">
-                <a16:creationId xmlns:a16="http://schemas.microsoft.com/office/drawing/2014/main" id="{6DCB1148-201B-414A-A281-645B4871F725}"/>
+                <a16:creationId xmlns:a16="http://schemas.microsoft.com/office/drawing/2014/main" id="{F7ADFFD9-B9D9-418E-A26A-769AB7E7E0EE}"/>
               </a:ext>
             </a:extLst>
           </p:cNvPr>
@@ -11240,7 +11240,7 @@
           <p:cNvPr id="16" name="">
             <a:extLst xmlns:a="http://schemas.openxmlformats.org/drawingml/2006/main">
               <a:ext uri="{FF2B5EF4-FFF2-40B4-BE49-F238E27FC236}">
-                <a16:creationId xmlns:a16="http://schemas.microsoft.com/office/drawing/2014/main" id="{DDA8C6E3-7147-42C0-967A-722AAC0AF6B6}"/>
+                <a16:creationId xmlns:a16="http://schemas.microsoft.com/office/drawing/2014/main" id="{D634E6A9-C925-4C21-BE5F-C97928E67D07}"/>
               </a:ext>
             </a:extLst>
           </p:cNvPr>
@@ -11304,7 +11304,7 @@
           <p:cNvPr id="17" name="">
             <a:extLst xmlns:a="http://schemas.openxmlformats.org/drawingml/2006/main">
               <a:ext uri="{FF2B5EF4-FFF2-40B4-BE49-F238E27FC236}">
-                <a16:creationId xmlns:a16="http://schemas.microsoft.com/office/drawing/2014/main" id="{87DC6E64-ACDF-4DC5-8C95-022DE4220F18}"/>
+                <a16:creationId xmlns:a16="http://schemas.microsoft.com/office/drawing/2014/main" id="{A1780222-4FD4-4518-A77B-08423BAA88E4}"/>
               </a:ext>
             </a:extLst>
           </p:cNvPr>
@@ -11339,7 +11339,7 @@
           <p:cNvPr id="18" name="">
             <a:extLst xmlns:a="http://schemas.openxmlformats.org/drawingml/2006/main">
               <a:ext uri="{FF2B5EF4-FFF2-40B4-BE49-F238E27FC236}">
-                <a16:creationId xmlns:a16="http://schemas.microsoft.com/office/drawing/2014/main" id="{0A017D41-3DA7-4436-8658-1415E968B98A}"/>
+                <a16:creationId xmlns:a16="http://schemas.microsoft.com/office/drawing/2014/main" id="{9A6197B6-B1CA-4C3D-8228-95E8CE9950A1}"/>
               </a:ext>
             </a:extLst>
           </p:cNvPr>
@@ -11403,7 +11403,7 @@
           <p:cNvPr id="19" name="">
             <a:extLst xmlns:a="http://schemas.openxmlformats.org/drawingml/2006/main">
               <a:ext uri="{FF2B5EF4-FFF2-40B4-BE49-F238E27FC236}">
-                <a16:creationId xmlns:a16="http://schemas.microsoft.com/office/drawing/2014/main" id="{09423E31-7993-4AB2-BA46-1B041415A47C}"/>
+                <a16:creationId xmlns:a16="http://schemas.microsoft.com/office/drawing/2014/main" id="{C8B36AA6-3E4E-4C0C-957D-57C5C3FFAD0B}"/>
               </a:ext>
             </a:extLst>
           </p:cNvPr>
@@ -11467,7 +11467,7 @@
           <p:cNvPr id="20" name="">
             <a:extLst xmlns:a="http://schemas.openxmlformats.org/drawingml/2006/main">
               <a:ext uri="{FF2B5EF4-FFF2-40B4-BE49-F238E27FC236}">
-                <a16:creationId xmlns:a16="http://schemas.microsoft.com/office/drawing/2014/main" id="{556679A7-6C5C-4B7E-8C2A-9C69B5AB278F}"/>
+                <a16:creationId xmlns:a16="http://schemas.microsoft.com/office/drawing/2014/main" id="{B095B616-4112-4D2B-8A2B-3C13F61EFDC1}"/>
               </a:ext>
             </a:extLst>
           </p:cNvPr>
@@ -11500,7 +11500,7 @@
           <p:cNvPr id="21" name="">
             <a:extLst xmlns:a="http://schemas.openxmlformats.org/drawingml/2006/main">
               <a:ext uri="{FF2B5EF4-FFF2-40B4-BE49-F238E27FC236}">
-                <a16:creationId xmlns:a16="http://schemas.microsoft.com/office/drawing/2014/main" id="{838633A9-A759-4FD5-91CB-629E13617D02}"/>
+                <a16:creationId xmlns:a16="http://schemas.microsoft.com/office/drawing/2014/main" id="{71CA5477-D644-46BA-BD43-5AD4B9A41C9F}"/>
               </a:ext>
             </a:extLst>
           </p:cNvPr>
@@ -11564,7 +11564,7 @@
           <p:cNvPr id="22" name="">
             <a:extLst xmlns:a="http://schemas.openxmlformats.org/drawingml/2006/main">
               <a:ext uri="{FF2B5EF4-FFF2-40B4-BE49-F238E27FC236}">
-                <a16:creationId xmlns:a16="http://schemas.microsoft.com/office/drawing/2014/main" id="{0729CCE4-E432-4D22-BAEE-AAC910F8F0B0}"/>
+                <a16:creationId xmlns:a16="http://schemas.microsoft.com/office/drawing/2014/main" id="{C16C3D77-407D-4038-916C-9B605413CB1F}"/>
               </a:ext>
             </a:extLst>
           </p:cNvPr>
@@ -11626,7 +11626,7 @@
     </p:spTree>
     <p:extLst>
       <p:ext uri="{BB962C8B-B14F-4D97-AF65-F5344CB8AC3E}">
-        <p14:creationId xmlns:p14="http://schemas.microsoft.com/office/powerpoint/2010/main" val="1010923298"/>
+        <p14:creationId xmlns:p14="http://schemas.microsoft.com/office/powerpoint/2010/main" val="961540741"/>
       </p:ext>
     </p:extLst>
   </p:cSld>
@@ -11654,7 +11654,7 @@
           <p:nvPr/>
         </p:nvPicPr>
         <p:blipFill>
-          <a:blip xmlns:r="http://schemas.openxmlformats.org/officeDocument/2006/relationships" xmlns:a="http://schemas.openxmlformats.org/drawingml/2006/main" r:embed="R2b15e8299b5b4054"/>
+          <a:blip xmlns:r="http://schemas.openxmlformats.org/officeDocument/2006/relationships" xmlns:a="http://schemas.openxmlformats.org/drawingml/2006/main" r:embed="R175a059fafbc4780"/>
           <a:srcRect xmlns:a="http://schemas.openxmlformats.org/drawingml/2006/main" l="0" t="27" r="0" b="27"/>
           <a:stretch xmlns:a="http://schemas.openxmlformats.org/drawingml/2006/main">
             <a:fillRect l="0" t="0" r="0" b="0"/>
@@ -11675,7 +11675,7 @@
           <p:cNvPr id="2" name="">
             <a:extLst xmlns:a="http://schemas.openxmlformats.org/drawingml/2006/main">
               <a:ext uri="{FF2B5EF4-FFF2-40B4-BE49-F238E27FC236}">
-                <a16:creationId xmlns:a16="http://schemas.microsoft.com/office/drawing/2014/main" id="{3AB1E516-FC9E-4D36-90BC-E2CDF43AD9CA}"/>
+                <a16:creationId xmlns:a16="http://schemas.microsoft.com/office/drawing/2014/main" id="{1375EC5D-7BC1-4BE4-B07F-AACF8BA02F60}"/>
               </a:ext>
             </a:extLst>
           </p:cNvPr>
@@ -11712,7 +11712,7 @@
           <p:cNvPr id="3" name="">
             <a:extLst xmlns:a="http://schemas.openxmlformats.org/drawingml/2006/main">
               <a:ext uri="{FF2B5EF4-FFF2-40B4-BE49-F238E27FC236}">
-                <a16:creationId xmlns:a16="http://schemas.microsoft.com/office/drawing/2014/main" id="{C89BECD9-2DE6-4993-87DE-2213D3B94040}"/>
+                <a16:creationId xmlns:a16="http://schemas.microsoft.com/office/drawing/2014/main" id="{1EC5388E-29CB-4410-9C0E-55FA03022F60}"/>
               </a:ext>
             </a:extLst>
           </p:cNvPr>
@@ -11749,7 +11749,7 @@
           <p:cNvPr id="4" name="">
             <a:extLst xmlns:a="http://schemas.openxmlformats.org/drawingml/2006/main">
               <a:ext uri="{FF2B5EF4-FFF2-40B4-BE49-F238E27FC236}">
-                <a16:creationId xmlns:a16="http://schemas.microsoft.com/office/drawing/2014/main" id="{212756FE-43D9-42D7-9A45-2A85149A6E62}"/>
+                <a16:creationId xmlns:a16="http://schemas.microsoft.com/office/drawing/2014/main" id="{1A5AB58F-7549-49DA-A94E-D462E91F061C}"/>
               </a:ext>
             </a:extLst>
           </p:cNvPr>
@@ -11813,7 +11813,7 @@
           <p:cNvPr id="5" name="">
             <a:extLst xmlns:a="http://schemas.openxmlformats.org/drawingml/2006/main">
               <a:ext uri="{FF2B5EF4-FFF2-40B4-BE49-F238E27FC236}">
-                <a16:creationId xmlns:a16="http://schemas.microsoft.com/office/drawing/2014/main" id="{FBF38A45-40F3-4F49-857A-55B1CC188038}"/>
+                <a16:creationId xmlns:a16="http://schemas.microsoft.com/office/drawing/2014/main" id="{1B4A67D1-E42C-4D9D-83B2-DDDA447823F3}"/>
               </a:ext>
             </a:extLst>
           </p:cNvPr>
@@ -11877,7 +11877,7 @@
           <p:cNvPr id="6" name="">
             <a:extLst xmlns:a="http://schemas.openxmlformats.org/drawingml/2006/main">
               <a:ext uri="{FF2B5EF4-FFF2-40B4-BE49-F238E27FC236}">
-                <a16:creationId xmlns:a16="http://schemas.microsoft.com/office/drawing/2014/main" id="{B87B33F9-0598-48F5-881C-C9391C0684CC}"/>
+                <a16:creationId xmlns:a16="http://schemas.microsoft.com/office/drawing/2014/main" id="{88B4B711-E2A6-434F-8485-BB54415B8BA5}"/>
               </a:ext>
             </a:extLst>
           </p:cNvPr>
@@ -11941,7 +11941,7 @@
           <p:cNvPr id="7" name="">
             <a:extLst xmlns:a="http://schemas.openxmlformats.org/drawingml/2006/main">
               <a:ext uri="{FF2B5EF4-FFF2-40B4-BE49-F238E27FC236}">
-                <a16:creationId xmlns:a16="http://schemas.microsoft.com/office/drawing/2014/main" id="{89AE619F-E2E5-4FFA-97FB-57259EA3167E}"/>
+                <a16:creationId xmlns:a16="http://schemas.microsoft.com/office/drawing/2014/main" id="{4E759EC8-480B-4CC5-BD26-3BD007ABD2FC}"/>
               </a:ext>
             </a:extLst>
           </p:cNvPr>
@@ -11976,7 +11976,7 @@
           <p:cNvPr id="8" name="">
             <a:extLst xmlns:a="http://schemas.openxmlformats.org/drawingml/2006/main">
               <a:ext uri="{FF2B5EF4-FFF2-40B4-BE49-F238E27FC236}">
-                <a16:creationId xmlns:a16="http://schemas.microsoft.com/office/drawing/2014/main" id="{0CAEC7B2-42CA-49FB-A88F-6ED67E76356E}"/>
+                <a16:creationId xmlns:a16="http://schemas.microsoft.com/office/drawing/2014/main" id="{80FC6410-A321-4181-B372-CCB1F2240A99}"/>
               </a:ext>
             </a:extLst>
           </p:cNvPr>
@@ -12040,7 +12040,7 @@
           <p:cNvPr id="9" name="">
             <a:extLst xmlns:a="http://schemas.openxmlformats.org/drawingml/2006/main">
               <a:ext uri="{FF2B5EF4-FFF2-40B4-BE49-F238E27FC236}">
-                <a16:creationId xmlns:a16="http://schemas.microsoft.com/office/drawing/2014/main" id="{E36928C2-AB4B-45EA-92E9-79AB1065F1C7}"/>
+                <a16:creationId xmlns:a16="http://schemas.microsoft.com/office/drawing/2014/main" id="{E0F0F53F-3468-48EF-AB4E-B07F426FBAD4}"/>
               </a:ext>
             </a:extLst>
           </p:cNvPr>
@@ -12104,7 +12104,7 @@
           <p:cNvPr id="10" name="">
             <a:extLst xmlns:a="http://schemas.openxmlformats.org/drawingml/2006/main">
               <a:ext uri="{FF2B5EF4-FFF2-40B4-BE49-F238E27FC236}">
-                <a16:creationId xmlns:a16="http://schemas.microsoft.com/office/drawing/2014/main" id="{4D7B224A-C3F5-4050-A1FB-205A43E0896C}"/>
+                <a16:creationId xmlns:a16="http://schemas.microsoft.com/office/drawing/2014/main" id="{48D7BF24-BE98-4B9A-B023-0D0DF5C6250E}"/>
               </a:ext>
             </a:extLst>
           </p:cNvPr>
@@ -12137,7 +12137,7 @@
           <p:cNvPr id="11" name="">
             <a:extLst xmlns:a="http://schemas.openxmlformats.org/drawingml/2006/main">
               <a:ext uri="{FF2B5EF4-FFF2-40B4-BE49-F238E27FC236}">
-                <a16:creationId xmlns:a16="http://schemas.microsoft.com/office/drawing/2014/main" id="{D71701CD-FE9E-4A78-9FE3-B62DC18EF19B}"/>
+                <a16:creationId xmlns:a16="http://schemas.microsoft.com/office/drawing/2014/main" id="{F0008BB3-714E-415D-A96C-C1507A54CD50}"/>
               </a:ext>
             </a:extLst>
           </p:cNvPr>
@@ -12172,7 +12172,7 @@
           <p:cNvPr id="12" name="">
             <a:extLst xmlns:a="http://schemas.openxmlformats.org/drawingml/2006/main">
               <a:ext uri="{FF2B5EF4-FFF2-40B4-BE49-F238E27FC236}">
-                <a16:creationId xmlns:a16="http://schemas.microsoft.com/office/drawing/2014/main" id="{A04156EF-6B18-4BDC-B356-AD64F2EC6C5E}"/>
+                <a16:creationId xmlns:a16="http://schemas.microsoft.com/office/drawing/2014/main" id="{91EADB01-C227-4670-8EA7-ACED2D591A9E}"/>
               </a:ext>
             </a:extLst>
           </p:cNvPr>
@@ -12236,7 +12236,7 @@
           <p:cNvPr id="13" name="">
             <a:extLst xmlns:a="http://schemas.openxmlformats.org/drawingml/2006/main">
               <a:ext uri="{FF2B5EF4-FFF2-40B4-BE49-F238E27FC236}">
-                <a16:creationId xmlns:a16="http://schemas.microsoft.com/office/drawing/2014/main" id="{5C27ABC8-717A-45F8-B490-D1A7D2725746}"/>
+                <a16:creationId xmlns:a16="http://schemas.microsoft.com/office/drawing/2014/main" id="{A1F72662-127F-44E9-9FA1-6000FD95E7A5}"/>
               </a:ext>
             </a:extLst>
           </p:cNvPr>
@@ -12300,7 +12300,7 @@
           <p:cNvPr id="14" name="">
             <a:extLst xmlns:a="http://schemas.openxmlformats.org/drawingml/2006/main">
               <a:ext uri="{FF2B5EF4-FFF2-40B4-BE49-F238E27FC236}">
-                <a16:creationId xmlns:a16="http://schemas.microsoft.com/office/drawing/2014/main" id="{386CCAD9-9DF8-41F7-B635-DCCC82BFC9F8}"/>
+                <a16:creationId xmlns:a16="http://schemas.microsoft.com/office/drawing/2014/main" id="{5A0D1402-6B2E-44AE-B4F1-9E2078C307E4}"/>
               </a:ext>
             </a:extLst>
           </p:cNvPr>
@@ -12333,7 +12333,7 @@
           <p:cNvPr id="15" name="">
             <a:extLst xmlns:a="http://schemas.openxmlformats.org/drawingml/2006/main">
               <a:ext uri="{FF2B5EF4-FFF2-40B4-BE49-F238E27FC236}">
-                <a16:creationId xmlns:a16="http://schemas.microsoft.com/office/drawing/2014/main" id="{0C274979-3262-44D5-A927-7E1F53D9E25E}"/>
+                <a16:creationId xmlns:a16="http://schemas.microsoft.com/office/drawing/2014/main" id="{CD1012C1-D477-4FF6-98CA-75FD30A1B6A8}"/>
               </a:ext>
             </a:extLst>
           </p:cNvPr>
@@ -12368,7 +12368,7 @@
           <p:cNvPr id="16" name="">
             <a:extLst xmlns:a="http://schemas.openxmlformats.org/drawingml/2006/main">
               <a:ext uri="{FF2B5EF4-FFF2-40B4-BE49-F238E27FC236}">
-                <a16:creationId xmlns:a16="http://schemas.microsoft.com/office/drawing/2014/main" id="{C129AF40-4B34-4640-B2F6-CE8FB298B31F}"/>
+                <a16:creationId xmlns:a16="http://schemas.microsoft.com/office/drawing/2014/main" id="{55968D98-3853-4BD4-8F93-A75893CADF60}"/>
               </a:ext>
             </a:extLst>
           </p:cNvPr>
@@ -12432,7 +12432,7 @@
           <p:cNvPr id="17" name="">
             <a:extLst xmlns:a="http://schemas.openxmlformats.org/drawingml/2006/main">
               <a:ext uri="{FF2B5EF4-FFF2-40B4-BE49-F238E27FC236}">
-                <a16:creationId xmlns:a16="http://schemas.microsoft.com/office/drawing/2014/main" id="{689074DA-7FA0-48B9-BB8E-A8F662A491B7}"/>
+                <a16:creationId xmlns:a16="http://schemas.microsoft.com/office/drawing/2014/main" id="{FAC42C71-66C3-43F9-BA47-A616B77DEC55}"/>
               </a:ext>
             </a:extLst>
           </p:cNvPr>
@@ -12496,7 +12496,7 @@
           <p:cNvPr id="18" name="">
             <a:extLst xmlns:a="http://schemas.openxmlformats.org/drawingml/2006/main">
               <a:ext uri="{FF2B5EF4-FFF2-40B4-BE49-F238E27FC236}">
-                <a16:creationId xmlns:a16="http://schemas.microsoft.com/office/drawing/2014/main" id="{38AF3A8F-1516-4B1B-992E-92FCF43CBFDB}"/>
+                <a16:creationId xmlns:a16="http://schemas.microsoft.com/office/drawing/2014/main" id="{E4A3822A-AC0C-4C74-BF0A-5B8C42A68528}"/>
               </a:ext>
             </a:extLst>
           </p:cNvPr>
@@ -12529,7 +12529,7 @@
           <p:cNvPr id="19" name="">
             <a:extLst xmlns:a="http://schemas.openxmlformats.org/drawingml/2006/main">
               <a:ext uri="{FF2B5EF4-FFF2-40B4-BE49-F238E27FC236}">
-                <a16:creationId xmlns:a16="http://schemas.microsoft.com/office/drawing/2014/main" id="{29035E75-CAE5-4186-A7E1-DBB7BAEF48DE}"/>
+                <a16:creationId xmlns:a16="http://schemas.microsoft.com/office/drawing/2014/main" id="{68A30DFA-B620-44B4-B27F-B26D852C62F7}"/>
               </a:ext>
             </a:extLst>
           </p:cNvPr>
@@ -12564,7 +12564,7 @@
           <p:cNvPr id="20" name="">
             <a:extLst xmlns:a="http://schemas.openxmlformats.org/drawingml/2006/main">
               <a:ext uri="{FF2B5EF4-FFF2-40B4-BE49-F238E27FC236}">
-                <a16:creationId xmlns:a16="http://schemas.microsoft.com/office/drawing/2014/main" id="{90F33E1B-ED46-430C-BE83-3BBA913E42E2}"/>
+                <a16:creationId xmlns:a16="http://schemas.microsoft.com/office/drawing/2014/main" id="{27AF9E64-9753-49A2-8CBC-8392900030CD}"/>
               </a:ext>
             </a:extLst>
           </p:cNvPr>
@@ -12628,7 +12628,7 @@
           <p:cNvPr id="21" name="">
             <a:extLst xmlns:a="http://schemas.openxmlformats.org/drawingml/2006/main">
               <a:ext uri="{FF2B5EF4-FFF2-40B4-BE49-F238E27FC236}">
-                <a16:creationId xmlns:a16="http://schemas.microsoft.com/office/drawing/2014/main" id="{8567FF77-989B-4F56-B3F3-0A0BD109D4BD}"/>
+                <a16:creationId xmlns:a16="http://schemas.microsoft.com/office/drawing/2014/main" id="{110189E1-A42B-4ABD-AF99-BF024996C124}"/>
               </a:ext>
             </a:extLst>
           </p:cNvPr>
@@ -12692,7 +12692,7 @@
           <p:cNvPr id="22" name="">
             <a:extLst xmlns:a="http://schemas.openxmlformats.org/drawingml/2006/main">
               <a:ext uri="{FF2B5EF4-FFF2-40B4-BE49-F238E27FC236}">
-                <a16:creationId xmlns:a16="http://schemas.microsoft.com/office/drawing/2014/main" id="{E871C6A5-E9DD-44C4-B99C-AEBEB5AA01C9}"/>
+                <a16:creationId xmlns:a16="http://schemas.microsoft.com/office/drawing/2014/main" id="{FDFAFBEF-065C-4E74-8BBC-364FFEC726A4}"/>
               </a:ext>
             </a:extLst>
           </p:cNvPr>
@@ -12756,7 +12756,7 @@
           <p:cNvPr id="23" name="">
             <a:extLst xmlns:a="http://schemas.openxmlformats.org/drawingml/2006/main">
               <a:ext uri="{FF2B5EF4-FFF2-40B4-BE49-F238E27FC236}">
-                <a16:creationId xmlns:a16="http://schemas.microsoft.com/office/drawing/2014/main" id="{F95293BD-E192-4320-AA4A-389B35579D09}"/>
+                <a16:creationId xmlns:a16="http://schemas.microsoft.com/office/drawing/2014/main" id="{52F875E6-BE64-4A83-BBE2-6B9995CFF998}"/>
               </a:ext>
             </a:extLst>
           </p:cNvPr>
@@ -12820,7 +12820,7 @@
           <p:cNvPr id="24" name="">
             <a:extLst xmlns:a="http://schemas.openxmlformats.org/drawingml/2006/main">
               <a:ext uri="{FF2B5EF4-FFF2-40B4-BE49-F238E27FC236}">
-                <a16:creationId xmlns:a16="http://schemas.microsoft.com/office/drawing/2014/main" id="{3E8148FA-60ED-4AB3-A99F-F6AAC8E853FF}"/>
+                <a16:creationId xmlns:a16="http://schemas.microsoft.com/office/drawing/2014/main" id="{6FF46C2C-F04B-407E-A0F0-076A9114D8B5}"/>
               </a:ext>
             </a:extLst>
           </p:cNvPr>
@@ -12853,7 +12853,7 @@
           <p:cNvPr id="25" name="">
             <a:extLst xmlns:a="http://schemas.openxmlformats.org/drawingml/2006/main">
               <a:ext uri="{FF2B5EF4-FFF2-40B4-BE49-F238E27FC236}">
-                <a16:creationId xmlns:a16="http://schemas.microsoft.com/office/drawing/2014/main" id="{29EA16CD-DC9E-4E7B-9877-5ED593CF03A8}"/>
+                <a16:creationId xmlns:a16="http://schemas.microsoft.com/office/drawing/2014/main" id="{D02D9514-61BF-4223-9165-11902EE6AEB9}"/>
               </a:ext>
             </a:extLst>
           </p:cNvPr>
@@ -12917,7 +12917,7 @@
           <p:cNvPr id="26" name="">
             <a:extLst xmlns:a="http://schemas.openxmlformats.org/drawingml/2006/main">
               <a:ext uri="{FF2B5EF4-FFF2-40B4-BE49-F238E27FC236}">
-                <a16:creationId xmlns:a16="http://schemas.microsoft.com/office/drawing/2014/main" id="{BFAEACD0-ABF1-405F-A77A-903AA98F0261}"/>
+                <a16:creationId xmlns:a16="http://schemas.microsoft.com/office/drawing/2014/main" id="{922E0B94-8720-4E10-A4D2-193E236F00FC}"/>
               </a:ext>
             </a:extLst>
           </p:cNvPr>
@@ -12979,7 +12979,7 @@
     </p:spTree>
     <p:extLst>
       <p:ext uri="{BB962C8B-B14F-4D97-AF65-F5344CB8AC3E}">
-        <p14:creationId xmlns:p14="http://schemas.microsoft.com/office/powerpoint/2010/main" val="107056491"/>
+        <p14:creationId xmlns:p14="http://schemas.microsoft.com/office/powerpoint/2010/main" val="1511340176"/>
       </p:ext>
     </p:extLst>
   </p:cSld>
@@ -13007,7 +13007,7 @@
           <p:nvPr/>
         </p:nvPicPr>
         <p:blipFill>
-          <a:blip xmlns:r="http://schemas.openxmlformats.org/officeDocument/2006/relationships" xmlns:a="http://schemas.openxmlformats.org/drawingml/2006/main" r:embed="Rcd0e5e63b38740a2"/>
+          <a:blip xmlns:r="http://schemas.openxmlformats.org/officeDocument/2006/relationships" xmlns:a="http://schemas.openxmlformats.org/drawingml/2006/main" r:embed="R68f90bb749ce4103"/>
           <a:srcRect xmlns:a="http://schemas.openxmlformats.org/drawingml/2006/main" l="0" t="27" r="0" b="27"/>
           <a:stretch xmlns:a="http://schemas.openxmlformats.org/drawingml/2006/main">
             <a:fillRect l="0" t="0" r="0" b="0"/>
@@ -13028,7 +13028,7 @@
           <p:cNvPr id="2" name="">
             <a:extLst xmlns:a="http://schemas.openxmlformats.org/drawingml/2006/main">
               <a:ext uri="{FF2B5EF4-FFF2-40B4-BE49-F238E27FC236}">
-                <a16:creationId xmlns:a16="http://schemas.microsoft.com/office/drawing/2014/main" id="{30B02631-583F-4552-BBF1-0D24C8764C50}"/>
+                <a16:creationId xmlns:a16="http://schemas.microsoft.com/office/drawing/2014/main" id="{A226480C-FB7A-425A-8192-E136DD8ABA7D}"/>
               </a:ext>
             </a:extLst>
           </p:cNvPr>
@@ -13065,7 +13065,7 @@
           <p:cNvPr id="3" name="">
             <a:extLst xmlns:a="http://schemas.openxmlformats.org/drawingml/2006/main">
               <a:ext uri="{FF2B5EF4-FFF2-40B4-BE49-F238E27FC236}">
-                <a16:creationId xmlns:a16="http://schemas.microsoft.com/office/drawing/2014/main" id="{9A2894B4-AB6C-41CB-B3C6-841F4B96E595}"/>
+                <a16:creationId xmlns:a16="http://schemas.microsoft.com/office/drawing/2014/main" id="{0272B2BE-908D-496F-A461-D2C303BEA71E}"/>
               </a:ext>
             </a:extLst>
           </p:cNvPr>
@@ -13102,7 +13102,7 @@
           <p:cNvPr id="4" name="">
             <a:extLst xmlns:a="http://schemas.openxmlformats.org/drawingml/2006/main">
               <a:ext uri="{FF2B5EF4-FFF2-40B4-BE49-F238E27FC236}">
-                <a16:creationId xmlns:a16="http://schemas.microsoft.com/office/drawing/2014/main" id="{E057B2E6-6E2D-4986-91B7-F1A47D8EC0A8}"/>
+                <a16:creationId xmlns:a16="http://schemas.microsoft.com/office/drawing/2014/main" id="{66B04C17-8366-45B0-97F6-3EE6AC751D69}"/>
               </a:ext>
             </a:extLst>
           </p:cNvPr>
@@ -13166,7 +13166,7 @@
           <p:cNvPr id="5" name="">
             <a:extLst xmlns:a="http://schemas.openxmlformats.org/drawingml/2006/main">
               <a:ext uri="{FF2B5EF4-FFF2-40B4-BE49-F238E27FC236}">
-                <a16:creationId xmlns:a16="http://schemas.microsoft.com/office/drawing/2014/main" id="{ED13A62E-6139-455A-8B6E-E422D48B832D}"/>
+                <a16:creationId xmlns:a16="http://schemas.microsoft.com/office/drawing/2014/main" id="{FD8128E6-6117-4CDA-9432-C680B8C97ACB}"/>
               </a:ext>
             </a:extLst>
           </p:cNvPr>
@@ -13230,7 +13230,7 @@
           <p:cNvPr id="6" name="">
             <a:extLst xmlns:a="http://schemas.openxmlformats.org/drawingml/2006/main">
               <a:ext uri="{FF2B5EF4-FFF2-40B4-BE49-F238E27FC236}">
-                <a16:creationId xmlns:a16="http://schemas.microsoft.com/office/drawing/2014/main" id="{33F349FD-D186-4F5A-87E2-86B09C63ACA3}"/>
+                <a16:creationId xmlns:a16="http://schemas.microsoft.com/office/drawing/2014/main" id="{B211129F-3988-4A4A-85AE-CD7E389F139C}"/>
               </a:ext>
             </a:extLst>
           </p:cNvPr>
@@ -13294,19 +13294,19 @@
           <p:cNvPr id="7" name="">
             <a:extLst xmlns:a="http://schemas.openxmlformats.org/drawingml/2006/main">
               <a:ext uri="{FF2B5EF4-FFF2-40B4-BE49-F238E27FC236}">
-                <a16:creationId xmlns:a16="http://schemas.microsoft.com/office/drawing/2014/main" id="{891FD472-05CA-4754-A8FD-5AF9D6D5E064}"/>
-              </a:ext>
-            </a:extLst>
-          </p:cNvPr>
-          <p:cNvSpPr>
-            <a:spLocks xmlns:a="http://schemas.openxmlformats.org/drawingml/2006/main" noGrp="1"/>
-          </p:cNvSpPr>
-          <p:nvPr/>
-        </p:nvSpPr>
-        <p:spPr>
-          <a:xfrm xmlns:a="http://schemas.openxmlformats.org/drawingml/2006/main">
-            <a:off x="4705350" y="3505200"/>
-            <a:ext cx="2247900" cy="990600"/>
+                <a16:creationId xmlns:a16="http://schemas.microsoft.com/office/drawing/2014/main" id="{6CD7AEBD-9B67-48BA-BC69-869255F4FBD8}"/>
+              </a:ext>
+            </a:extLst>
+          </p:cNvPr>
+          <p:cNvSpPr>
+            <a:spLocks xmlns:a="http://schemas.openxmlformats.org/drawingml/2006/main" noGrp="1"/>
+          </p:cNvSpPr>
+          <p:nvPr/>
+        </p:nvSpPr>
+        <p:spPr>
+          <a:xfrm xmlns:a="http://schemas.openxmlformats.org/drawingml/2006/main">
+            <a:off x="4514850" y="3371850"/>
+            <a:ext cx="3143250" cy="876300"/>
           </a:xfrm>
           <a:prstGeom xmlns:a="http://schemas.openxmlformats.org/drawingml/2006/main" prst="rect">
             <a:avLst/>
@@ -13316,7 +13316,7 @@
               <a:alpha val="93333"/>
             </a:srgbClr>
           </a:solidFill>
-          <a:ln xmlns:a="http://schemas.openxmlformats.org/drawingml/2006/main" w="9525">
+          <a:ln xmlns:a="http://schemas.openxmlformats.org/drawingml/2006/main" w="19050">
             <a:solidFill>
               <a:srgbClr val="55E6FF"/>
             </a:solidFill>
@@ -13329,19 +13329,19 @@
           <p:cNvPr id="8" name="">
             <a:extLst xmlns:a="http://schemas.openxmlformats.org/drawingml/2006/main">
               <a:ext uri="{FF2B5EF4-FFF2-40B4-BE49-F238E27FC236}">
-                <a16:creationId xmlns:a16="http://schemas.microsoft.com/office/drawing/2014/main" id="{A96DDD90-D39C-4FFC-A270-D79229E5A66A}"/>
-              </a:ext>
-            </a:extLst>
-          </p:cNvPr>
-          <p:cNvSpPr>
-            <a:spLocks xmlns:a="http://schemas.openxmlformats.org/drawingml/2006/main" noGrp="1"/>
-          </p:cNvSpPr>
-          <p:nvPr/>
-        </p:nvSpPr>
-        <p:spPr>
-          <a:xfrm xmlns:a="http://schemas.openxmlformats.org/drawingml/2006/main">
-            <a:off x="4991100" y="3676650"/>
-            <a:ext cx="1676400" cy="647700"/>
+                <a16:creationId xmlns:a16="http://schemas.microsoft.com/office/drawing/2014/main" id="{FDF2BB46-C6DB-442A-833D-A2A4EFE67CE0}"/>
+              </a:ext>
+            </a:extLst>
+          </p:cNvPr>
+          <p:cNvSpPr>
+            <a:spLocks xmlns:a="http://schemas.openxmlformats.org/drawingml/2006/main" noGrp="1"/>
+          </p:cNvSpPr>
+          <p:nvPr/>
+        </p:nvSpPr>
+        <p:spPr>
+          <a:xfrm xmlns:a="http://schemas.openxmlformats.org/drawingml/2006/main">
+            <a:off x="4953000" y="3581400"/>
+            <a:ext cx="2266950" cy="514350"/>
           </a:xfrm>
           <a:prstGeom xmlns:a="http://schemas.openxmlformats.org/drawingml/2006/main" prst="rect">
             <a:avLst/>
@@ -13365,7 +13365,7 @@
           <a:lstStyle xmlns:a="http://schemas.openxmlformats.org/drawingml/2006/main"/>
           <a:p xmlns:a="http://schemas.openxmlformats.org/drawingml/2006/main">
             <a:pPr algn="ctr">
-              <a:defRPr sz="1650" b="1">
+              <a:defRPr sz="1800" b="1">
                 <a:solidFill>
                   <a:srgbClr val="EAF8FF"/>
                 </a:solidFill>
@@ -13375,7 +13375,7 @@
               </a:defRPr>
             </a:pPr>
             <a:r>
-              <a:rPr sz="1650" b="1">
+              <a:rPr sz="1800" b="1">
                 <a:solidFill>
                   <a:srgbClr val="EAF8FF"/>
                 </a:solidFill>
@@ -13388,7 +13388,7 @@
           </a:p>
           <a:p xmlns:a="http://schemas.openxmlformats.org/drawingml/2006/main">
             <a:pPr algn="ctr">
-              <a:defRPr sz="1650" b="1">
+              <a:defRPr sz="1800" b="1">
                 <a:solidFill>
                   <a:srgbClr val="EAF8FF"/>
                 </a:solidFill>
@@ -13398,7 +13398,7 @@
               </a:defRPr>
             </a:pPr>
             <a:r>
-              <a:rPr sz="1650" b="1">
+              <a:rPr sz="1800" b="1">
                 <a:solidFill>
                   <a:srgbClr val="EAF8FF"/>
                 </a:solidFill>
@@ -13416,19 +13416,83 @@
           <p:cNvPr id="9" name="">
             <a:extLst xmlns:a="http://schemas.openxmlformats.org/drawingml/2006/main">
               <a:ext uri="{FF2B5EF4-FFF2-40B4-BE49-F238E27FC236}">
-                <a16:creationId xmlns:a16="http://schemas.microsoft.com/office/drawing/2014/main" id="{B2DC67BC-9069-46DE-8191-1C55B204FA64}"/>
-              </a:ext>
-            </a:extLst>
-          </p:cNvPr>
-          <p:cNvSpPr>
-            <a:spLocks xmlns:a="http://schemas.openxmlformats.org/drawingml/2006/main" noGrp="1"/>
-          </p:cNvSpPr>
-          <p:nvPr/>
-        </p:nvSpPr>
-        <p:spPr>
-          <a:xfrm xmlns:a="http://schemas.openxmlformats.org/drawingml/2006/main">
-            <a:off x="4781550" y="2133600"/>
-            <a:ext cx="2095500" cy="647700"/>
+                <a16:creationId xmlns:a16="http://schemas.microsoft.com/office/drawing/2014/main" id="{C85122A7-134B-4FCE-95B7-C7EB4EF0625A}"/>
+              </a:ext>
+            </a:extLst>
+          </p:cNvPr>
+          <p:cNvSpPr>
+            <a:spLocks xmlns:a="http://schemas.openxmlformats.org/drawingml/2006/main" noGrp="1"/>
+          </p:cNvSpPr>
+          <p:nvPr/>
+        </p:nvSpPr>
+        <p:spPr>
+          <a:xfrm xmlns:a="http://schemas.openxmlformats.org/drawingml/2006/main">
+            <a:off x="4171950" y="4457700"/>
+            <a:ext cx="3848100" cy="228600"/>
+          </a:xfrm>
+          <a:prstGeom xmlns:a="http://schemas.openxmlformats.org/drawingml/2006/main" prst="rect">
+            <a:avLst/>
+          </a:prstGeom>
+          <a:solidFill xmlns:a="http://schemas.openxmlformats.org/drawingml/2006/main">
+            <a:srgbClr val="000000">
+              <a:alpha val="0"/>
+            </a:srgbClr>
+          </a:solidFill>
+          <a:ln xmlns:a="http://schemas.openxmlformats.org/drawingml/2006/main" w="0">
+            <a:solidFill>
+              <a:srgbClr val="000000">
+                <a:alpha val="0"/>
+              </a:srgbClr>
+            </a:solidFill>
+            <a:prstDash val="solid"/>
+          </a:ln>
+        </p:spPr>
+        <p:txBody>
+          <a:bodyPr xmlns:a="http://schemas.openxmlformats.org/drawingml/2006/main" lIns="0" tIns="0" rIns="0" bIns="0" anchor="t"/>
+          <a:lstStyle xmlns:a="http://schemas.openxmlformats.org/drawingml/2006/main"/>
+          <a:p xmlns:a="http://schemas.openxmlformats.org/drawingml/2006/main">
+            <a:pPr algn="ctr">
+              <a:defRPr sz="1125" b="1">
+                <a:solidFill>
+                  <a:srgbClr val="55E6FF"/>
+                </a:solidFill>
+                <a:latin typeface="Aptos"/>
+                <a:ea typeface="Aptos"/>
+                <a:cs typeface="Aptos"/>
+              </a:defRPr>
+            </a:pPr>
+            <a:r>
+              <a:rPr sz="1125" b="1">
+                <a:solidFill>
+                  <a:srgbClr val="55E6FF"/>
+                </a:solidFill>
+                <a:latin typeface="Aptos"/>
+                <a:ea typeface="Aptos"/>
+                <a:cs typeface="Aptos"/>
+              </a:rPr>
+              <a:t>Shared IP, data and reusable playbooks</a:t>
+            </a:r>
+          </a:p>
+        </p:txBody>
+      </p:sp>
+      <p:sp>
+        <p:nvSpPr>
+          <p:cNvPr id="10" name="">
+            <a:extLst xmlns:a="http://schemas.openxmlformats.org/drawingml/2006/main">
+              <a:ext uri="{FF2B5EF4-FFF2-40B4-BE49-F238E27FC236}">
+                <a16:creationId xmlns:a16="http://schemas.microsoft.com/office/drawing/2014/main" id="{54016A06-ADAE-4696-8443-44EC9E3DBB01}"/>
+              </a:ext>
+            </a:extLst>
+          </p:cNvPr>
+          <p:cNvSpPr>
+            <a:spLocks xmlns:a="http://schemas.openxmlformats.org/drawingml/2006/main" noGrp="1"/>
+          </p:cNvSpPr>
+          <p:nvPr/>
+        </p:nvSpPr>
+        <p:spPr>
+          <a:xfrm xmlns:a="http://schemas.openxmlformats.org/drawingml/2006/main">
+            <a:off x="723900" y="5143500"/>
+            <a:ext cx="2038350" cy="723900"/>
           </a:xfrm>
           <a:prstGeom xmlns:a="http://schemas.openxmlformats.org/drawingml/2006/main" prst="rect">
             <a:avLst/>
@@ -13448,22 +13512,22 @@
       </p:sp>
       <p:sp>
         <p:nvSpPr>
-          <p:cNvPr id="10" name="">
-            <a:extLst xmlns:a="http://schemas.openxmlformats.org/drawingml/2006/main">
-              <a:ext uri="{FF2B5EF4-FFF2-40B4-BE49-F238E27FC236}">
-                <a16:creationId xmlns:a16="http://schemas.microsoft.com/office/drawing/2014/main" id="{E8EB63F4-171A-46A1-A40C-7C5F67C3C139}"/>
-              </a:ext>
-            </a:extLst>
-          </p:cNvPr>
-          <p:cNvSpPr>
-            <a:spLocks xmlns:a="http://schemas.openxmlformats.org/drawingml/2006/main" noGrp="1"/>
-          </p:cNvSpPr>
-          <p:nvPr/>
-        </p:nvSpPr>
-        <p:spPr>
-          <a:xfrm xmlns:a="http://schemas.openxmlformats.org/drawingml/2006/main">
-            <a:off x="4953000" y="2305050"/>
-            <a:ext cx="1752600" cy="247650"/>
+          <p:cNvPr id="11" name="">
+            <a:extLst xmlns:a="http://schemas.openxmlformats.org/drawingml/2006/main">
+              <a:ext uri="{FF2B5EF4-FFF2-40B4-BE49-F238E27FC236}">
+                <a16:creationId xmlns:a16="http://schemas.microsoft.com/office/drawing/2014/main" id="{94DD8A5F-C27F-47B7-A0A4-93B149422B22}"/>
+              </a:ext>
+            </a:extLst>
+          </p:cNvPr>
+          <p:cNvSpPr>
+            <a:spLocks xmlns:a="http://schemas.openxmlformats.org/drawingml/2006/main" noGrp="1"/>
+          </p:cNvSpPr>
+          <p:nvPr/>
+        </p:nvSpPr>
+        <p:spPr>
+          <a:xfrm xmlns:a="http://schemas.openxmlformats.org/drawingml/2006/main">
+            <a:off x="857250" y="5353050"/>
+            <a:ext cx="1771650" cy="266700"/>
           </a:xfrm>
           <a:prstGeom xmlns:a="http://schemas.openxmlformats.org/drawingml/2006/main" prst="rect">
             <a:avLst/>
@@ -13512,22 +13576,22 @@
       </p:sp>
       <p:sp>
         <p:nvSpPr>
-          <p:cNvPr id="11" name="">
-            <a:extLst xmlns:a="http://schemas.openxmlformats.org/drawingml/2006/main">
-              <a:ext uri="{FF2B5EF4-FFF2-40B4-BE49-F238E27FC236}">
-                <a16:creationId xmlns:a16="http://schemas.microsoft.com/office/drawing/2014/main" id="{9A75D9BC-E812-4609-A8E1-E3514C8947E5}"/>
-              </a:ext>
-            </a:extLst>
-          </p:cNvPr>
-          <p:cNvSpPr>
-            <a:spLocks xmlns:a="http://schemas.openxmlformats.org/drawingml/2006/main" noGrp="1"/>
-          </p:cNvSpPr>
-          <p:nvPr/>
-        </p:nvSpPr>
-        <p:spPr>
-          <a:xfrm xmlns:a="http://schemas.openxmlformats.org/drawingml/2006/main">
-            <a:off x="5829300" y="2457450"/>
-            <a:ext cx="19050" cy="19050"/>
+          <p:cNvPr id="12" name="">
+            <a:extLst xmlns:a="http://schemas.openxmlformats.org/drawingml/2006/main">
+              <a:ext uri="{FF2B5EF4-FFF2-40B4-BE49-F238E27FC236}">
+                <a16:creationId xmlns:a16="http://schemas.microsoft.com/office/drawing/2014/main" id="{D7405E01-41ED-40DD-B0CC-3ACD02168BF7}"/>
+              </a:ext>
+            </a:extLst>
+          </p:cNvPr>
+          <p:cNvSpPr>
+            <a:spLocks xmlns:a="http://schemas.openxmlformats.org/drawingml/2006/main" noGrp="1"/>
+          </p:cNvSpPr>
+          <p:nvPr/>
+        </p:nvSpPr>
+        <p:spPr>
+          <a:xfrm xmlns:a="http://schemas.openxmlformats.org/drawingml/2006/main">
+            <a:off x="1733550" y="4762500"/>
+            <a:ext cx="19050" cy="381000"/>
           </a:xfrm>
           <a:prstGeom xmlns:a="http://schemas.openxmlformats.org/drawingml/2006/main" prst="rect">
             <a:avLst/>
@@ -13545,22 +13609,22 @@
       </p:sp>
       <p:sp>
         <p:nvSpPr>
-          <p:cNvPr id="12" name="">
-            <a:extLst xmlns:a="http://schemas.openxmlformats.org/drawingml/2006/main">
-              <a:ext uri="{FF2B5EF4-FFF2-40B4-BE49-F238E27FC236}">
-                <a16:creationId xmlns:a16="http://schemas.microsoft.com/office/drawing/2014/main" id="{529B37E5-7582-4151-B630-302AB35BC345}"/>
-              </a:ext>
-            </a:extLst>
-          </p:cNvPr>
-          <p:cNvSpPr>
-            <a:spLocks xmlns:a="http://schemas.openxmlformats.org/drawingml/2006/main" noGrp="1"/>
-          </p:cNvSpPr>
-          <p:nvPr/>
-        </p:nvSpPr>
-        <p:spPr>
-          <a:xfrm xmlns:a="http://schemas.openxmlformats.org/drawingml/2006/main">
-            <a:off x="7879664" y="3199821"/>
-            <a:ext cx="2095500" cy="647700"/>
+          <p:cNvPr id="13" name="">
+            <a:extLst xmlns:a="http://schemas.openxmlformats.org/drawingml/2006/main">
+              <a:ext uri="{FF2B5EF4-FFF2-40B4-BE49-F238E27FC236}">
+                <a16:creationId xmlns:a16="http://schemas.microsoft.com/office/drawing/2014/main" id="{CB5964E3-B356-4A98-917F-CC6FF3E484D8}"/>
+              </a:ext>
+            </a:extLst>
+          </p:cNvPr>
+          <p:cNvSpPr>
+            <a:spLocks xmlns:a="http://schemas.openxmlformats.org/drawingml/2006/main" noGrp="1"/>
+          </p:cNvSpPr>
+          <p:nvPr/>
+        </p:nvSpPr>
+        <p:spPr>
+          <a:xfrm xmlns:a="http://schemas.openxmlformats.org/drawingml/2006/main">
+            <a:off x="2895600" y="5143500"/>
+            <a:ext cx="2038350" cy="723900"/>
           </a:xfrm>
           <a:prstGeom xmlns:a="http://schemas.openxmlformats.org/drawingml/2006/main" prst="rect">
             <a:avLst/>
@@ -13580,22 +13644,22 @@
       </p:sp>
       <p:sp>
         <p:nvSpPr>
-          <p:cNvPr id="13" name="">
-            <a:extLst xmlns:a="http://schemas.openxmlformats.org/drawingml/2006/main">
-              <a:ext uri="{FF2B5EF4-FFF2-40B4-BE49-F238E27FC236}">
-                <a16:creationId xmlns:a16="http://schemas.microsoft.com/office/drawing/2014/main" id="{2A128634-CF36-489C-B3AE-34C297C5C638}"/>
-              </a:ext>
-            </a:extLst>
-          </p:cNvPr>
-          <p:cNvSpPr>
-            <a:spLocks xmlns:a="http://schemas.openxmlformats.org/drawingml/2006/main" noGrp="1"/>
-          </p:cNvSpPr>
-          <p:nvPr/>
-        </p:nvSpPr>
-        <p:spPr>
-          <a:xfrm xmlns:a="http://schemas.openxmlformats.org/drawingml/2006/main">
-            <a:off x="8051114" y="3371271"/>
-            <a:ext cx="1752600" cy="247650"/>
+          <p:cNvPr id="14" name="">
+            <a:extLst xmlns:a="http://schemas.openxmlformats.org/drawingml/2006/main">
+              <a:ext uri="{FF2B5EF4-FFF2-40B4-BE49-F238E27FC236}">
+                <a16:creationId xmlns:a16="http://schemas.microsoft.com/office/drawing/2014/main" id="{D1679D94-176F-4804-A7E0-2A5AC1E2E91C}"/>
+              </a:ext>
+            </a:extLst>
+          </p:cNvPr>
+          <p:cNvSpPr>
+            <a:spLocks xmlns:a="http://schemas.openxmlformats.org/drawingml/2006/main" noGrp="1"/>
+          </p:cNvSpPr>
+          <p:nvPr/>
+        </p:nvSpPr>
+        <p:spPr>
+          <a:xfrm xmlns:a="http://schemas.openxmlformats.org/drawingml/2006/main">
+            <a:off x="3028950" y="5353050"/>
+            <a:ext cx="1771650" cy="266700"/>
           </a:xfrm>
           <a:prstGeom xmlns:a="http://schemas.openxmlformats.org/drawingml/2006/main" prst="rect">
             <a:avLst/>
@@ -13644,22 +13708,22 @@
       </p:sp>
       <p:sp>
         <p:nvSpPr>
-          <p:cNvPr id="14" name="">
-            <a:extLst xmlns:a="http://schemas.openxmlformats.org/drawingml/2006/main">
-              <a:ext uri="{FF2B5EF4-FFF2-40B4-BE49-F238E27FC236}">
-                <a16:creationId xmlns:a16="http://schemas.microsoft.com/office/drawing/2014/main" id="{B946F4D3-134C-4FD0-AC57-79C13166F0F4}"/>
-              </a:ext>
-            </a:extLst>
-          </p:cNvPr>
-          <p:cNvSpPr>
-            <a:spLocks xmlns:a="http://schemas.openxmlformats.org/drawingml/2006/main" noGrp="1"/>
-          </p:cNvSpPr>
-          <p:nvPr/>
-        </p:nvSpPr>
-        <p:spPr>
-          <a:xfrm xmlns:a="http://schemas.openxmlformats.org/drawingml/2006/main">
-            <a:off x="5829300" y="3523671"/>
-            <a:ext cx="3098114" cy="19050"/>
+          <p:cNvPr id="15" name="">
+            <a:extLst xmlns:a="http://schemas.openxmlformats.org/drawingml/2006/main">
+              <a:ext uri="{FF2B5EF4-FFF2-40B4-BE49-F238E27FC236}">
+                <a16:creationId xmlns:a16="http://schemas.microsoft.com/office/drawing/2014/main" id="{A093B30F-3CE7-4F8E-AB1D-B098F4A10972}"/>
+              </a:ext>
+            </a:extLst>
+          </p:cNvPr>
+          <p:cNvSpPr>
+            <a:spLocks xmlns:a="http://schemas.openxmlformats.org/drawingml/2006/main" noGrp="1"/>
+          </p:cNvSpPr>
+          <p:nvPr/>
+        </p:nvSpPr>
+        <p:spPr>
+          <a:xfrm xmlns:a="http://schemas.openxmlformats.org/drawingml/2006/main">
+            <a:off x="3905250" y="4762500"/>
+            <a:ext cx="19050" cy="381000"/>
           </a:xfrm>
           <a:prstGeom xmlns:a="http://schemas.openxmlformats.org/drawingml/2006/main" prst="rect">
             <a:avLst/>
@@ -13677,22 +13741,22 @@
       </p:sp>
       <p:sp>
         <p:nvSpPr>
-          <p:cNvPr id="15" name="">
-            <a:extLst xmlns:a="http://schemas.openxmlformats.org/drawingml/2006/main">
-              <a:ext uri="{FF2B5EF4-FFF2-40B4-BE49-F238E27FC236}">
-                <a16:creationId xmlns:a16="http://schemas.microsoft.com/office/drawing/2014/main" id="{236E2B94-EB75-49AF-BBDE-289441B2ED5B}"/>
-              </a:ext>
-            </a:extLst>
-          </p:cNvPr>
-          <p:cNvSpPr>
-            <a:spLocks xmlns:a="http://schemas.openxmlformats.org/drawingml/2006/main" noGrp="1"/>
-          </p:cNvSpPr>
-          <p:nvPr/>
-        </p:nvSpPr>
-        <p:spPr>
-          <a:xfrm xmlns:a="http://schemas.openxmlformats.org/drawingml/2006/main">
-            <a:off x="6696290" y="4925004"/>
-            <a:ext cx="2095500" cy="647700"/>
+          <p:cNvPr id="16" name="">
+            <a:extLst xmlns:a="http://schemas.openxmlformats.org/drawingml/2006/main">
+              <a:ext uri="{FF2B5EF4-FFF2-40B4-BE49-F238E27FC236}">
+                <a16:creationId xmlns:a16="http://schemas.microsoft.com/office/drawing/2014/main" id="{0B497CD6-09E5-45CD-9432-17187B3D1508}"/>
+              </a:ext>
+            </a:extLst>
+          </p:cNvPr>
+          <p:cNvSpPr>
+            <a:spLocks xmlns:a="http://schemas.openxmlformats.org/drawingml/2006/main" noGrp="1"/>
+          </p:cNvSpPr>
+          <p:nvPr/>
+        </p:nvSpPr>
+        <p:spPr>
+          <a:xfrm xmlns:a="http://schemas.openxmlformats.org/drawingml/2006/main">
+            <a:off x="5067300" y="5143500"/>
+            <a:ext cx="2038350" cy="723900"/>
           </a:xfrm>
           <a:prstGeom xmlns:a="http://schemas.openxmlformats.org/drawingml/2006/main" prst="rect">
             <a:avLst/>
@@ -13712,22 +13776,22 @@
       </p:sp>
       <p:sp>
         <p:nvSpPr>
-          <p:cNvPr id="16" name="">
-            <a:extLst xmlns:a="http://schemas.openxmlformats.org/drawingml/2006/main">
-              <a:ext uri="{FF2B5EF4-FFF2-40B4-BE49-F238E27FC236}">
-                <a16:creationId xmlns:a16="http://schemas.microsoft.com/office/drawing/2014/main" id="{BB09F5FB-F254-4A1D-A345-EB8820E20B1A}"/>
-              </a:ext>
-            </a:extLst>
-          </p:cNvPr>
-          <p:cNvSpPr>
-            <a:spLocks xmlns:a="http://schemas.openxmlformats.org/drawingml/2006/main" noGrp="1"/>
-          </p:cNvSpPr>
-          <p:nvPr/>
-        </p:nvSpPr>
-        <p:spPr>
-          <a:xfrm xmlns:a="http://schemas.openxmlformats.org/drawingml/2006/main">
-            <a:off x="6867740" y="5096454"/>
-            <a:ext cx="1752600" cy="247650"/>
+          <p:cNvPr id="17" name="">
+            <a:extLst xmlns:a="http://schemas.openxmlformats.org/drawingml/2006/main">
+              <a:ext uri="{FF2B5EF4-FFF2-40B4-BE49-F238E27FC236}">
+                <a16:creationId xmlns:a16="http://schemas.microsoft.com/office/drawing/2014/main" id="{B2A9A224-321F-41BC-91A5-FB4D63905AB5}"/>
+              </a:ext>
+            </a:extLst>
+          </p:cNvPr>
+          <p:cNvSpPr>
+            <a:spLocks xmlns:a="http://schemas.openxmlformats.org/drawingml/2006/main" noGrp="1"/>
+          </p:cNvSpPr>
+          <p:nvPr/>
+        </p:nvSpPr>
+        <p:spPr>
+          <a:xfrm xmlns:a="http://schemas.openxmlformats.org/drawingml/2006/main">
+            <a:off x="5200650" y="5353050"/>
+            <a:ext cx="1771650" cy="266700"/>
           </a:xfrm>
           <a:prstGeom xmlns:a="http://schemas.openxmlformats.org/drawingml/2006/main" prst="rect">
             <a:avLst/>
@@ -13776,22 +13840,22 @@
       </p:sp>
       <p:sp>
         <p:nvSpPr>
-          <p:cNvPr id="17" name="">
-            <a:extLst xmlns:a="http://schemas.openxmlformats.org/drawingml/2006/main">
-              <a:ext uri="{FF2B5EF4-FFF2-40B4-BE49-F238E27FC236}">
-                <a16:creationId xmlns:a16="http://schemas.microsoft.com/office/drawing/2014/main" id="{CE7D88D7-884D-48E2-A3CB-D63B0FB33C92}"/>
-              </a:ext>
-            </a:extLst>
-          </p:cNvPr>
-          <p:cNvSpPr>
-            <a:spLocks xmlns:a="http://schemas.openxmlformats.org/drawingml/2006/main" noGrp="1"/>
-          </p:cNvSpPr>
-          <p:nvPr/>
-        </p:nvSpPr>
-        <p:spPr>
-          <a:xfrm xmlns:a="http://schemas.openxmlformats.org/drawingml/2006/main">
-            <a:off x="5829300" y="4000500"/>
-            <a:ext cx="1914740" cy="19050"/>
+          <p:cNvPr id="18" name="">
+            <a:extLst xmlns:a="http://schemas.openxmlformats.org/drawingml/2006/main">
+              <a:ext uri="{FF2B5EF4-FFF2-40B4-BE49-F238E27FC236}">
+                <a16:creationId xmlns:a16="http://schemas.microsoft.com/office/drawing/2014/main" id="{D691C20A-71A6-424F-BC20-034B92896930}"/>
+              </a:ext>
+            </a:extLst>
+          </p:cNvPr>
+          <p:cNvSpPr>
+            <a:spLocks xmlns:a="http://schemas.openxmlformats.org/drawingml/2006/main" noGrp="1"/>
+          </p:cNvSpPr>
+          <p:nvPr/>
+        </p:nvSpPr>
+        <p:spPr>
+          <a:xfrm xmlns:a="http://schemas.openxmlformats.org/drawingml/2006/main">
+            <a:off x="6076950" y="4762500"/>
+            <a:ext cx="19050" cy="381000"/>
           </a:xfrm>
           <a:prstGeom xmlns:a="http://schemas.openxmlformats.org/drawingml/2006/main" prst="rect">
             <a:avLst/>
@@ -13809,22 +13873,22 @@
       </p:sp>
       <p:sp>
         <p:nvSpPr>
-          <p:cNvPr id="18" name="">
-            <a:extLst xmlns:a="http://schemas.openxmlformats.org/drawingml/2006/main">
-              <a:ext uri="{FF2B5EF4-FFF2-40B4-BE49-F238E27FC236}">
-                <a16:creationId xmlns:a16="http://schemas.microsoft.com/office/drawing/2014/main" id="{F7C9D4DB-688A-43EF-A575-CB19B1319DB6}"/>
-              </a:ext>
-            </a:extLst>
-          </p:cNvPr>
-          <p:cNvSpPr>
-            <a:spLocks xmlns:a="http://schemas.openxmlformats.org/drawingml/2006/main" noGrp="1"/>
-          </p:cNvSpPr>
-          <p:nvPr/>
-        </p:nvSpPr>
-        <p:spPr>
-          <a:xfrm xmlns:a="http://schemas.openxmlformats.org/drawingml/2006/main">
-            <a:off x="2866810" y="4925004"/>
-            <a:ext cx="2095500" cy="647700"/>
+          <p:cNvPr id="19" name="">
+            <a:extLst xmlns:a="http://schemas.openxmlformats.org/drawingml/2006/main">
+              <a:ext uri="{FF2B5EF4-FFF2-40B4-BE49-F238E27FC236}">
+                <a16:creationId xmlns:a16="http://schemas.microsoft.com/office/drawing/2014/main" id="{3EBB188B-BCD8-4901-91DF-170B8817964E}"/>
+              </a:ext>
+            </a:extLst>
+          </p:cNvPr>
+          <p:cNvSpPr>
+            <a:spLocks xmlns:a="http://schemas.openxmlformats.org/drawingml/2006/main" noGrp="1"/>
+          </p:cNvSpPr>
+          <p:nvPr/>
+        </p:nvSpPr>
+        <p:spPr>
+          <a:xfrm xmlns:a="http://schemas.openxmlformats.org/drawingml/2006/main">
+            <a:off x="7239000" y="5143500"/>
+            <a:ext cx="2038350" cy="723900"/>
           </a:xfrm>
           <a:prstGeom xmlns:a="http://schemas.openxmlformats.org/drawingml/2006/main" prst="rect">
             <a:avLst/>
@@ -13844,22 +13908,22 @@
       </p:sp>
       <p:sp>
         <p:nvSpPr>
-          <p:cNvPr id="19" name="">
-            <a:extLst xmlns:a="http://schemas.openxmlformats.org/drawingml/2006/main">
-              <a:ext uri="{FF2B5EF4-FFF2-40B4-BE49-F238E27FC236}">
-                <a16:creationId xmlns:a16="http://schemas.microsoft.com/office/drawing/2014/main" id="{5CDB7D34-2118-46CC-A51A-EC675ADE50E7}"/>
-              </a:ext>
-            </a:extLst>
-          </p:cNvPr>
-          <p:cNvSpPr>
-            <a:spLocks xmlns:a="http://schemas.openxmlformats.org/drawingml/2006/main" noGrp="1"/>
-          </p:cNvSpPr>
-          <p:nvPr/>
-        </p:nvSpPr>
-        <p:spPr>
-          <a:xfrm xmlns:a="http://schemas.openxmlformats.org/drawingml/2006/main">
-            <a:off x="3038260" y="5096454"/>
-            <a:ext cx="1752600" cy="247650"/>
+          <p:cNvPr id="20" name="">
+            <a:extLst xmlns:a="http://schemas.openxmlformats.org/drawingml/2006/main">
+              <a:ext uri="{FF2B5EF4-FFF2-40B4-BE49-F238E27FC236}">
+                <a16:creationId xmlns:a16="http://schemas.microsoft.com/office/drawing/2014/main" id="{AF9A7BED-F665-4C88-A224-A218AFB611EB}"/>
+              </a:ext>
+            </a:extLst>
+          </p:cNvPr>
+          <p:cNvSpPr>
+            <a:spLocks xmlns:a="http://schemas.openxmlformats.org/drawingml/2006/main" noGrp="1"/>
+          </p:cNvSpPr>
+          <p:nvPr/>
+        </p:nvSpPr>
+        <p:spPr>
+          <a:xfrm xmlns:a="http://schemas.openxmlformats.org/drawingml/2006/main">
+            <a:off x="7372350" y="5353050"/>
+            <a:ext cx="1771650" cy="266700"/>
           </a:xfrm>
           <a:prstGeom xmlns:a="http://schemas.openxmlformats.org/drawingml/2006/main" prst="rect">
             <a:avLst/>
@@ -13908,22 +13972,22 @@
       </p:sp>
       <p:sp>
         <p:nvSpPr>
-          <p:cNvPr id="20" name="">
-            <a:extLst xmlns:a="http://schemas.openxmlformats.org/drawingml/2006/main">
-              <a:ext uri="{FF2B5EF4-FFF2-40B4-BE49-F238E27FC236}">
-                <a16:creationId xmlns:a16="http://schemas.microsoft.com/office/drawing/2014/main" id="{00EFADC9-7211-40BB-B54C-6F60C9C449CC}"/>
-              </a:ext>
-            </a:extLst>
-          </p:cNvPr>
-          <p:cNvSpPr>
-            <a:spLocks xmlns:a="http://schemas.openxmlformats.org/drawingml/2006/main" noGrp="1"/>
-          </p:cNvSpPr>
-          <p:nvPr/>
-        </p:nvSpPr>
-        <p:spPr>
-          <a:xfrm xmlns:a="http://schemas.openxmlformats.org/drawingml/2006/main">
-            <a:off x="3914560" y="4000500"/>
-            <a:ext cx="1914740" cy="19050"/>
+          <p:cNvPr id="21" name="">
+            <a:extLst xmlns:a="http://schemas.openxmlformats.org/drawingml/2006/main">
+              <a:ext uri="{FF2B5EF4-FFF2-40B4-BE49-F238E27FC236}">
+                <a16:creationId xmlns:a16="http://schemas.microsoft.com/office/drawing/2014/main" id="{059CE507-6928-466F-A6F5-AC810FE3F080}"/>
+              </a:ext>
+            </a:extLst>
+          </p:cNvPr>
+          <p:cNvSpPr>
+            <a:spLocks xmlns:a="http://schemas.openxmlformats.org/drawingml/2006/main" noGrp="1"/>
+          </p:cNvSpPr>
+          <p:nvPr/>
+        </p:nvSpPr>
+        <p:spPr>
+          <a:xfrm xmlns:a="http://schemas.openxmlformats.org/drawingml/2006/main">
+            <a:off x="8248650" y="4762500"/>
+            <a:ext cx="19050" cy="381000"/>
           </a:xfrm>
           <a:prstGeom xmlns:a="http://schemas.openxmlformats.org/drawingml/2006/main" prst="rect">
             <a:avLst/>
@@ -13941,22 +14005,22 @@
       </p:sp>
       <p:sp>
         <p:nvSpPr>
-          <p:cNvPr id="21" name="">
-            <a:extLst xmlns:a="http://schemas.openxmlformats.org/drawingml/2006/main">
-              <a:ext uri="{FF2B5EF4-FFF2-40B4-BE49-F238E27FC236}">
-                <a16:creationId xmlns:a16="http://schemas.microsoft.com/office/drawing/2014/main" id="{BA9D7309-D8F2-4F02-B738-AF3A79ED14A7}"/>
-              </a:ext>
-            </a:extLst>
-          </p:cNvPr>
-          <p:cNvSpPr>
-            <a:spLocks xmlns:a="http://schemas.openxmlformats.org/drawingml/2006/main" noGrp="1"/>
-          </p:cNvSpPr>
-          <p:nvPr/>
-        </p:nvSpPr>
-        <p:spPr>
-          <a:xfrm xmlns:a="http://schemas.openxmlformats.org/drawingml/2006/main">
-            <a:off x="1683436" y="3199821"/>
-            <a:ext cx="2095500" cy="647700"/>
+          <p:cNvPr id="22" name="">
+            <a:extLst xmlns:a="http://schemas.openxmlformats.org/drawingml/2006/main">
+              <a:ext uri="{FF2B5EF4-FFF2-40B4-BE49-F238E27FC236}">
+                <a16:creationId xmlns:a16="http://schemas.microsoft.com/office/drawing/2014/main" id="{64618A3E-9B44-4E43-8FAC-2D04DB677D74}"/>
+              </a:ext>
+            </a:extLst>
+          </p:cNvPr>
+          <p:cNvSpPr>
+            <a:spLocks xmlns:a="http://schemas.openxmlformats.org/drawingml/2006/main" noGrp="1"/>
+          </p:cNvSpPr>
+          <p:nvPr/>
+        </p:nvSpPr>
+        <p:spPr>
+          <a:xfrm xmlns:a="http://schemas.openxmlformats.org/drawingml/2006/main">
+            <a:off x="9410700" y="5143500"/>
+            <a:ext cx="2038350" cy="723900"/>
           </a:xfrm>
           <a:prstGeom xmlns:a="http://schemas.openxmlformats.org/drawingml/2006/main" prst="rect">
             <a:avLst/>
@@ -13976,22 +14040,22 @@
       </p:sp>
       <p:sp>
         <p:nvSpPr>
-          <p:cNvPr id="22" name="">
-            <a:extLst xmlns:a="http://schemas.openxmlformats.org/drawingml/2006/main">
-              <a:ext uri="{FF2B5EF4-FFF2-40B4-BE49-F238E27FC236}">
-                <a16:creationId xmlns:a16="http://schemas.microsoft.com/office/drawing/2014/main" id="{A50F643F-4C31-4231-AB55-BD14186653FC}"/>
-              </a:ext>
-            </a:extLst>
-          </p:cNvPr>
-          <p:cNvSpPr>
-            <a:spLocks xmlns:a="http://schemas.openxmlformats.org/drawingml/2006/main" noGrp="1"/>
-          </p:cNvSpPr>
-          <p:nvPr/>
-        </p:nvSpPr>
-        <p:spPr>
-          <a:xfrm xmlns:a="http://schemas.openxmlformats.org/drawingml/2006/main">
-            <a:off x="1854886" y="3371271"/>
-            <a:ext cx="1752600" cy="247650"/>
+          <p:cNvPr id="23" name="">
+            <a:extLst xmlns:a="http://schemas.openxmlformats.org/drawingml/2006/main">
+              <a:ext uri="{FF2B5EF4-FFF2-40B4-BE49-F238E27FC236}">
+                <a16:creationId xmlns:a16="http://schemas.microsoft.com/office/drawing/2014/main" id="{D8EE22DA-D607-4C68-9770-75082DA8B028}"/>
+              </a:ext>
+            </a:extLst>
+          </p:cNvPr>
+          <p:cNvSpPr>
+            <a:spLocks xmlns:a="http://schemas.openxmlformats.org/drawingml/2006/main" noGrp="1"/>
+          </p:cNvSpPr>
+          <p:nvPr/>
+        </p:nvSpPr>
+        <p:spPr>
+          <a:xfrm xmlns:a="http://schemas.openxmlformats.org/drawingml/2006/main">
+            <a:off x="9544050" y="5353050"/>
+            <a:ext cx="1771650" cy="266700"/>
           </a:xfrm>
           <a:prstGeom xmlns:a="http://schemas.openxmlformats.org/drawingml/2006/main" prst="rect">
             <a:avLst/>
@@ -14040,22 +14104,22 @@
       </p:sp>
       <p:sp>
         <p:nvSpPr>
-          <p:cNvPr id="23" name="">
-            <a:extLst xmlns:a="http://schemas.openxmlformats.org/drawingml/2006/main">
-              <a:ext uri="{FF2B5EF4-FFF2-40B4-BE49-F238E27FC236}">
-                <a16:creationId xmlns:a16="http://schemas.microsoft.com/office/drawing/2014/main" id="{75645760-7074-4490-AEB9-5F35730E9C70}"/>
-              </a:ext>
-            </a:extLst>
-          </p:cNvPr>
-          <p:cNvSpPr>
-            <a:spLocks xmlns:a="http://schemas.openxmlformats.org/drawingml/2006/main" noGrp="1"/>
-          </p:cNvSpPr>
-          <p:nvPr/>
-        </p:nvSpPr>
-        <p:spPr>
-          <a:xfrm xmlns:a="http://schemas.openxmlformats.org/drawingml/2006/main">
-            <a:off x="2731186" y="3523671"/>
-            <a:ext cx="3098114" cy="19050"/>
+          <p:cNvPr id="24" name="">
+            <a:extLst xmlns:a="http://schemas.openxmlformats.org/drawingml/2006/main">
+              <a:ext uri="{FF2B5EF4-FFF2-40B4-BE49-F238E27FC236}">
+                <a16:creationId xmlns:a16="http://schemas.microsoft.com/office/drawing/2014/main" id="{2F625A00-DC8F-4F82-8D08-66B5F6926F92}"/>
+              </a:ext>
+            </a:extLst>
+          </p:cNvPr>
+          <p:cNvSpPr>
+            <a:spLocks xmlns:a="http://schemas.openxmlformats.org/drawingml/2006/main" noGrp="1"/>
+          </p:cNvSpPr>
+          <p:nvPr/>
+        </p:nvSpPr>
+        <p:spPr>
+          <a:xfrm xmlns:a="http://schemas.openxmlformats.org/drawingml/2006/main">
+            <a:off x="10420350" y="4762500"/>
+            <a:ext cx="19050" cy="381000"/>
           </a:xfrm>
           <a:prstGeom xmlns:a="http://schemas.openxmlformats.org/drawingml/2006/main" prst="rect">
             <a:avLst/>
@@ -14073,10 +14137,43 @@
       </p:sp>
       <p:sp>
         <p:nvSpPr>
-          <p:cNvPr id="24" name="">
-            <a:extLst xmlns:a="http://schemas.openxmlformats.org/drawingml/2006/main">
-              <a:ext uri="{FF2B5EF4-FFF2-40B4-BE49-F238E27FC236}">
-                <a16:creationId xmlns:a16="http://schemas.microsoft.com/office/drawing/2014/main" id="{0A546B6F-6621-41B2-A2F3-92029B5AF2D4}"/>
+          <p:cNvPr id="25" name="">
+            <a:extLst xmlns:a="http://schemas.openxmlformats.org/drawingml/2006/main">
+              <a:ext uri="{FF2B5EF4-FFF2-40B4-BE49-F238E27FC236}">
+                <a16:creationId xmlns:a16="http://schemas.microsoft.com/office/drawing/2014/main" id="{CE20FC12-29F9-4555-AB2F-ED5B6AD6FD85}"/>
+              </a:ext>
+            </a:extLst>
+          </p:cNvPr>
+          <p:cNvSpPr>
+            <a:spLocks xmlns:a="http://schemas.openxmlformats.org/drawingml/2006/main" noGrp="1"/>
+          </p:cNvSpPr>
+          <p:nvPr/>
+        </p:nvSpPr>
+        <p:spPr>
+          <a:xfrm xmlns:a="http://schemas.openxmlformats.org/drawingml/2006/main">
+            <a:off x="1743075" y="4762500"/>
+            <a:ext cx="8686800" cy="19050"/>
+          </a:xfrm>
+          <a:prstGeom xmlns:a="http://schemas.openxmlformats.org/drawingml/2006/main" prst="rect">
+            <a:avLst/>
+          </a:prstGeom>
+          <a:solidFill xmlns:a="http://schemas.openxmlformats.org/drawingml/2006/main">
+            <a:srgbClr val="285563"/>
+          </a:solidFill>
+          <a:ln xmlns:a="http://schemas.openxmlformats.org/drawingml/2006/main" w="0">
+            <a:solidFill>
+              <a:srgbClr val="285563"/>
+            </a:solidFill>
+            <a:prstDash val="solid"/>
+          </a:ln>
+        </p:spPr>
+      </p:sp>
+      <p:sp>
+        <p:nvSpPr>
+          <p:cNvPr id="26" name="">
+            <a:extLst xmlns:a="http://schemas.openxmlformats.org/drawingml/2006/main">
+              <a:ext uri="{FF2B5EF4-FFF2-40B4-BE49-F238E27FC236}">
+                <a16:creationId xmlns:a16="http://schemas.microsoft.com/office/drawing/2014/main" id="{26A35AFD-1B29-4B6C-A603-99A939BD42B4}"/>
               </a:ext>
             </a:extLst>
           </p:cNvPr>
@@ -14137,10 +14234,10 @@
       </p:sp>
       <p:sp>
         <p:nvSpPr>
-          <p:cNvPr id="25" name="">
-            <a:extLst xmlns:a="http://schemas.openxmlformats.org/drawingml/2006/main">
-              <a:ext uri="{FF2B5EF4-FFF2-40B4-BE49-F238E27FC236}">
-                <a16:creationId xmlns:a16="http://schemas.microsoft.com/office/drawing/2014/main" id="{79C2EA12-3865-4F59-9309-F611EA6B2D29}"/>
+          <p:cNvPr id="27" name="">
+            <a:extLst xmlns:a="http://schemas.openxmlformats.org/drawingml/2006/main">
+              <a:ext uri="{FF2B5EF4-FFF2-40B4-BE49-F238E27FC236}">
+                <a16:creationId xmlns:a16="http://schemas.microsoft.com/office/drawing/2014/main" id="{9C001287-1C44-4120-A474-958B92BF3A2A}"/>
               </a:ext>
             </a:extLst>
           </p:cNvPr>
@@ -14170,10 +14267,10 @@
       </p:sp>
       <p:sp>
         <p:nvSpPr>
-          <p:cNvPr id="26" name="">
-            <a:extLst xmlns:a="http://schemas.openxmlformats.org/drawingml/2006/main">
-              <a:ext uri="{FF2B5EF4-FFF2-40B4-BE49-F238E27FC236}">
-                <a16:creationId xmlns:a16="http://schemas.microsoft.com/office/drawing/2014/main" id="{BB858EB1-726A-4F85-8EDC-D1F2F49EA3A7}"/>
+          <p:cNvPr id="28" name="">
+            <a:extLst xmlns:a="http://schemas.openxmlformats.org/drawingml/2006/main">
+              <a:ext uri="{FF2B5EF4-FFF2-40B4-BE49-F238E27FC236}">
+                <a16:creationId xmlns:a16="http://schemas.microsoft.com/office/drawing/2014/main" id="{23EFCDCC-231C-4CC4-8F2D-59AB37A976E4}"/>
               </a:ext>
             </a:extLst>
           </p:cNvPr>
@@ -14234,10 +14331,10 @@
       </p:sp>
       <p:sp>
         <p:nvSpPr>
-          <p:cNvPr id="27" name="">
-            <a:extLst xmlns:a="http://schemas.openxmlformats.org/drawingml/2006/main">
-              <a:ext uri="{FF2B5EF4-FFF2-40B4-BE49-F238E27FC236}">
-                <a16:creationId xmlns:a16="http://schemas.microsoft.com/office/drawing/2014/main" id="{4ADF31DD-75C2-4C72-817A-90215C1A81F6}"/>
+          <p:cNvPr id="29" name="">
+            <a:extLst xmlns:a="http://schemas.openxmlformats.org/drawingml/2006/main">
+              <a:ext uri="{FF2B5EF4-FFF2-40B4-BE49-F238E27FC236}">
+                <a16:creationId xmlns:a16="http://schemas.microsoft.com/office/drawing/2014/main" id="{4A0D6F92-04EF-48BD-A1E9-5841EDC6AC37}"/>
               </a:ext>
             </a:extLst>
           </p:cNvPr>
@@ -14299,7 +14396,7 @@
     </p:spTree>
     <p:extLst>
       <p:ext uri="{BB962C8B-B14F-4D97-AF65-F5344CB8AC3E}">
-        <p14:creationId xmlns:p14="http://schemas.microsoft.com/office/powerpoint/2010/main" val="1351677652"/>
+        <p14:creationId xmlns:p14="http://schemas.microsoft.com/office/powerpoint/2010/main" val="1943890976"/>
       </p:ext>
     </p:extLst>
   </p:cSld>
@@ -14327,7 +14424,7 @@
           <p:nvPr/>
         </p:nvPicPr>
         <p:blipFill>
-          <a:blip xmlns:r="http://schemas.openxmlformats.org/officeDocument/2006/relationships" xmlns:a="http://schemas.openxmlformats.org/drawingml/2006/main" r:embed="R58bc1aaa842a48fd"/>
+          <a:blip xmlns:r="http://schemas.openxmlformats.org/officeDocument/2006/relationships" xmlns:a="http://schemas.openxmlformats.org/drawingml/2006/main" r:embed="R944f2f3c33ec4be6"/>
           <a:srcRect xmlns:a="http://schemas.openxmlformats.org/drawingml/2006/main" l="0" t="27" r="0" b="27"/>
           <a:stretch xmlns:a="http://schemas.openxmlformats.org/drawingml/2006/main">
             <a:fillRect l="0" t="0" r="0" b="0"/>
@@ -14348,7 +14445,7 @@
           <p:cNvPr id="2" name="">
             <a:extLst xmlns:a="http://schemas.openxmlformats.org/drawingml/2006/main">
               <a:ext uri="{FF2B5EF4-FFF2-40B4-BE49-F238E27FC236}">
-                <a16:creationId xmlns:a16="http://schemas.microsoft.com/office/drawing/2014/main" id="{7E758B5A-18E6-4C25-972A-8ED7DC4F0524}"/>
+                <a16:creationId xmlns:a16="http://schemas.microsoft.com/office/drawing/2014/main" id="{333985C0-485C-480D-A546-FEC546FA93B5}"/>
               </a:ext>
             </a:extLst>
           </p:cNvPr>
@@ -14385,7 +14482,7 @@
           <p:cNvPr id="3" name="">
             <a:extLst xmlns:a="http://schemas.openxmlformats.org/drawingml/2006/main">
               <a:ext uri="{FF2B5EF4-FFF2-40B4-BE49-F238E27FC236}">
-                <a16:creationId xmlns:a16="http://schemas.microsoft.com/office/drawing/2014/main" id="{79F68896-3C23-47B7-BD28-426FAFE688C6}"/>
+                <a16:creationId xmlns:a16="http://schemas.microsoft.com/office/drawing/2014/main" id="{11182700-8454-41AC-8A9C-3C7AA5A59971}"/>
               </a:ext>
             </a:extLst>
           </p:cNvPr>
@@ -14422,7 +14519,7 @@
           <p:cNvPr id="4" name="">
             <a:extLst xmlns:a="http://schemas.openxmlformats.org/drawingml/2006/main">
               <a:ext uri="{FF2B5EF4-FFF2-40B4-BE49-F238E27FC236}">
-                <a16:creationId xmlns:a16="http://schemas.microsoft.com/office/drawing/2014/main" id="{3F3973B6-A38C-431E-98E8-40C01026ED9F}"/>
+                <a16:creationId xmlns:a16="http://schemas.microsoft.com/office/drawing/2014/main" id="{EFDA6E90-D309-456E-8687-C2F7EAA7BC0C}"/>
               </a:ext>
             </a:extLst>
           </p:cNvPr>
@@ -14486,7 +14583,7 @@
           <p:cNvPr id="5" name="">
             <a:extLst xmlns:a="http://schemas.openxmlformats.org/drawingml/2006/main">
               <a:ext uri="{FF2B5EF4-FFF2-40B4-BE49-F238E27FC236}">
-                <a16:creationId xmlns:a16="http://schemas.microsoft.com/office/drawing/2014/main" id="{FB408AC3-C3F8-4F21-9231-63482532B38F}"/>
+                <a16:creationId xmlns:a16="http://schemas.microsoft.com/office/drawing/2014/main" id="{731F0797-366C-4D70-A635-311A099AC7E8}"/>
               </a:ext>
             </a:extLst>
           </p:cNvPr>
@@ -14550,7 +14647,7 @@
           <p:cNvPr id="6" name="">
             <a:extLst xmlns:a="http://schemas.openxmlformats.org/drawingml/2006/main">
               <a:ext uri="{FF2B5EF4-FFF2-40B4-BE49-F238E27FC236}">
-                <a16:creationId xmlns:a16="http://schemas.microsoft.com/office/drawing/2014/main" id="{181648DC-EFF0-48CF-A966-007A154166A1}"/>
+                <a16:creationId xmlns:a16="http://schemas.microsoft.com/office/drawing/2014/main" id="{762AE59C-33D2-47C4-89E8-E70D95CBA8D2}"/>
               </a:ext>
             </a:extLst>
           </p:cNvPr>
@@ -14614,7 +14711,7 @@
           <p:cNvPr id="7" name="">
             <a:extLst xmlns:a="http://schemas.openxmlformats.org/drawingml/2006/main">
               <a:ext uri="{FF2B5EF4-FFF2-40B4-BE49-F238E27FC236}">
-                <a16:creationId xmlns:a16="http://schemas.microsoft.com/office/drawing/2014/main" id="{0F63A295-61DB-4340-8985-385083267BDF}"/>
+                <a16:creationId xmlns:a16="http://schemas.microsoft.com/office/drawing/2014/main" id="{09C0F548-CFE4-46CF-B2D5-A5E9B6DE9C03}"/>
               </a:ext>
             </a:extLst>
           </p:cNvPr>
@@ -14649,7 +14746,7 @@
           <p:cNvPr id="8" name="">
             <a:extLst xmlns:a="http://schemas.openxmlformats.org/drawingml/2006/main">
               <a:ext uri="{FF2B5EF4-FFF2-40B4-BE49-F238E27FC236}">
-                <a16:creationId xmlns:a16="http://schemas.microsoft.com/office/drawing/2014/main" id="{059807E9-8978-461D-9D78-34DC69530FDA}"/>
+                <a16:creationId xmlns:a16="http://schemas.microsoft.com/office/drawing/2014/main" id="{41BD5DA7-207C-4097-8159-866268D9C6DC}"/>
               </a:ext>
             </a:extLst>
           </p:cNvPr>
@@ -14713,7 +14810,7 @@
           <p:cNvPr id="9" name="">
             <a:extLst xmlns:a="http://schemas.openxmlformats.org/drawingml/2006/main">
               <a:ext uri="{FF2B5EF4-FFF2-40B4-BE49-F238E27FC236}">
-                <a16:creationId xmlns:a16="http://schemas.microsoft.com/office/drawing/2014/main" id="{2EA82DA3-BF2E-4CF6-8978-2E14B2B9FF66}"/>
+                <a16:creationId xmlns:a16="http://schemas.microsoft.com/office/drawing/2014/main" id="{8D015DE7-1258-4C11-A9E7-D131B954D149}"/>
               </a:ext>
             </a:extLst>
           </p:cNvPr>
@@ -14777,7 +14874,7 @@
           <p:cNvPr id="10" name="">
             <a:extLst xmlns:a="http://schemas.openxmlformats.org/drawingml/2006/main">
               <a:ext uri="{FF2B5EF4-FFF2-40B4-BE49-F238E27FC236}">
-                <a16:creationId xmlns:a16="http://schemas.microsoft.com/office/drawing/2014/main" id="{D8372D09-AB6E-45E6-A4B8-C6AC9BA50A2C}"/>
+                <a16:creationId xmlns:a16="http://schemas.microsoft.com/office/drawing/2014/main" id="{1C062300-36B9-4E91-B472-E2AB5E1FF566}"/>
               </a:ext>
             </a:extLst>
           </p:cNvPr>
@@ -14810,7 +14907,7 @@
           <p:cNvPr id="11" name="">
             <a:extLst xmlns:a="http://schemas.openxmlformats.org/drawingml/2006/main">
               <a:ext uri="{FF2B5EF4-FFF2-40B4-BE49-F238E27FC236}">
-                <a16:creationId xmlns:a16="http://schemas.microsoft.com/office/drawing/2014/main" id="{111BD553-252D-48E9-B8B7-222CDA45125D}"/>
+                <a16:creationId xmlns:a16="http://schemas.microsoft.com/office/drawing/2014/main" id="{E3819C4B-F9E0-4936-AE6C-8AC1B363295A}"/>
               </a:ext>
             </a:extLst>
           </p:cNvPr>
@@ -14845,7 +14942,7 @@
           <p:cNvPr id="12" name="">
             <a:extLst xmlns:a="http://schemas.openxmlformats.org/drawingml/2006/main">
               <a:ext uri="{FF2B5EF4-FFF2-40B4-BE49-F238E27FC236}">
-                <a16:creationId xmlns:a16="http://schemas.microsoft.com/office/drawing/2014/main" id="{2011CC2F-ACA1-47D1-A68E-8221FB567142}"/>
+                <a16:creationId xmlns:a16="http://schemas.microsoft.com/office/drawing/2014/main" id="{51C3C6FC-7EAF-47E4-BD60-D7802C8DD6DB}"/>
               </a:ext>
             </a:extLst>
           </p:cNvPr>
@@ -14909,7 +15006,7 @@
           <p:cNvPr id="13" name="">
             <a:extLst xmlns:a="http://schemas.openxmlformats.org/drawingml/2006/main">
               <a:ext uri="{FF2B5EF4-FFF2-40B4-BE49-F238E27FC236}">
-                <a16:creationId xmlns:a16="http://schemas.microsoft.com/office/drawing/2014/main" id="{798B9805-9648-4E34-849A-DAE211000FF3}"/>
+                <a16:creationId xmlns:a16="http://schemas.microsoft.com/office/drawing/2014/main" id="{C3D46EE1-7EC4-46C1-837A-C9465F14432B}"/>
               </a:ext>
             </a:extLst>
           </p:cNvPr>
@@ -14973,7 +15070,7 @@
           <p:cNvPr id="14" name="">
             <a:extLst xmlns:a="http://schemas.openxmlformats.org/drawingml/2006/main">
               <a:ext uri="{FF2B5EF4-FFF2-40B4-BE49-F238E27FC236}">
-                <a16:creationId xmlns:a16="http://schemas.microsoft.com/office/drawing/2014/main" id="{0BD54DDE-0466-4C10-ACD6-1C8628C1DD91}"/>
+                <a16:creationId xmlns:a16="http://schemas.microsoft.com/office/drawing/2014/main" id="{74D6CB15-5645-4365-9C9B-5FAD7505D022}"/>
               </a:ext>
             </a:extLst>
           </p:cNvPr>
@@ -15006,7 +15103,7 @@
           <p:cNvPr id="15" name="">
             <a:extLst xmlns:a="http://schemas.openxmlformats.org/drawingml/2006/main">
               <a:ext uri="{FF2B5EF4-FFF2-40B4-BE49-F238E27FC236}">
-                <a16:creationId xmlns:a16="http://schemas.microsoft.com/office/drawing/2014/main" id="{AEC514F4-6510-4319-9357-DFC82C815F93}"/>
+                <a16:creationId xmlns:a16="http://schemas.microsoft.com/office/drawing/2014/main" id="{89886BAB-93CC-4485-A376-3694C4C642E2}"/>
               </a:ext>
             </a:extLst>
           </p:cNvPr>
@@ -15041,7 +15138,7 @@
           <p:cNvPr id="16" name="">
             <a:extLst xmlns:a="http://schemas.openxmlformats.org/drawingml/2006/main">
               <a:ext uri="{FF2B5EF4-FFF2-40B4-BE49-F238E27FC236}">
-                <a16:creationId xmlns:a16="http://schemas.microsoft.com/office/drawing/2014/main" id="{238C62E4-6869-4240-AB54-78F8B4694C51}"/>
+                <a16:creationId xmlns:a16="http://schemas.microsoft.com/office/drawing/2014/main" id="{A6B666DA-BDC9-4C7B-A8FB-2A527FE91F7D}"/>
               </a:ext>
             </a:extLst>
           </p:cNvPr>
@@ -15105,7 +15202,7 @@
           <p:cNvPr id="17" name="">
             <a:extLst xmlns:a="http://schemas.openxmlformats.org/drawingml/2006/main">
               <a:ext uri="{FF2B5EF4-FFF2-40B4-BE49-F238E27FC236}">
-                <a16:creationId xmlns:a16="http://schemas.microsoft.com/office/drawing/2014/main" id="{63041715-ED8C-4D49-9F61-C7F721677B44}"/>
+                <a16:creationId xmlns:a16="http://schemas.microsoft.com/office/drawing/2014/main" id="{9E02F2F7-FDB8-4B50-87EC-78F91FC5992D}"/>
               </a:ext>
             </a:extLst>
           </p:cNvPr>
@@ -15169,7 +15266,7 @@
           <p:cNvPr id="18" name="">
             <a:extLst xmlns:a="http://schemas.openxmlformats.org/drawingml/2006/main">
               <a:ext uri="{FF2B5EF4-FFF2-40B4-BE49-F238E27FC236}">
-                <a16:creationId xmlns:a16="http://schemas.microsoft.com/office/drawing/2014/main" id="{4522769A-37FC-428F-BB73-A6DB3EAF524C}"/>
+                <a16:creationId xmlns:a16="http://schemas.microsoft.com/office/drawing/2014/main" id="{E32F1965-92B2-4D99-9E41-91E018463283}"/>
               </a:ext>
             </a:extLst>
           </p:cNvPr>
@@ -15202,7 +15299,7 @@
           <p:cNvPr id="19" name="">
             <a:extLst xmlns:a="http://schemas.openxmlformats.org/drawingml/2006/main">
               <a:ext uri="{FF2B5EF4-FFF2-40B4-BE49-F238E27FC236}">
-                <a16:creationId xmlns:a16="http://schemas.microsoft.com/office/drawing/2014/main" id="{E840C4F6-36F8-4BE6-A3BE-995DF1C23D23}"/>
+                <a16:creationId xmlns:a16="http://schemas.microsoft.com/office/drawing/2014/main" id="{40C808FD-F912-40FE-989A-89C65B141829}"/>
               </a:ext>
             </a:extLst>
           </p:cNvPr>
@@ -15237,7 +15334,7 @@
           <p:cNvPr id="20" name="">
             <a:extLst xmlns:a="http://schemas.openxmlformats.org/drawingml/2006/main">
               <a:ext uri="{FF2B5EF4-FFF2-40B4-BE49-F238E27FC236}">
-                <a16:creationId xmlns:a16="http://schemas.microsoft.com/office/drawing/2014/main" id="{C5A2772B-4E0F-488C-92D5-2EFDE77AE78B}"/>
+                <a16:creationId xmlns:a16="http://schemas.microsoft.com/office/drawing/2014/main" id="{D4A0AB9A-A0C5-47BD-B4F4-8068AF900C5B}"/>
               </a:ext>
             </a:extLst>
           </p:cNvPr>
@@ -15301,7 +15398,7 @@
           <p:cNvPr id="21" name="">
             <a:extLst xmlns:a="http://schemas.openxmlformats.org/drawingml/2006/main">
               <a:ext uri="{FF2B5EF4-FFF2-40B4-BE49-F238E27FC236}">
-                <a16:creationId xmlns:a16="http://schemas.microsoft.com/office/drawing/2014/main" id="{A82F3A7F-07E4-402E-A221-CEBB6D7C1F2B}"/>
+                <a16:creationId xmlns:a16="http://schemas.microsoft.com/office/drawing/2014/main" id="{2E470E86-877C-4053-A902-ED84E608991F}"/>
               </a:ext>
             </a:extLst>
           </p:cNvPr>
@@ -15365,7 +15462,7 @@
           <p:cNvPr id="22" name="">
             <a:extLst xmlns:a="http://schemas.openxmlformats.org/drawingml/2006/main">
               <a:ext uri="{FF2B5EF4-FFF2-40B4-BE49-F238E27FC236}">
-                <a16:creationId xmlns:a16="http://schemas.microsoft.com/office/drawing/2014/main" id="{E14CF09A-E01D-4F4B-BE12-6D61C95FFC3D}"/>
+                <a16:creationId xmlns:a16="http://schemas.microsoft.com/office/drawing/2014/main" id="{8BE41444-C2EA-4F64-A14A-FF978AE399BE}"/>
               </a:ext>
             </a:extLst>
           </p:cNvPr>
@@ -15429,7 +15526,7 @@
           <p:cNvPr id="23" name="">
             <a:extLst xmlns:a="http://schemas.openxmlformats.org/drawingml/2006/main">
               <a:ext uri="{FF2B5EF4-FFF2-40B4-BE49-F238E27FC236}">
-                <a16:creationId xmlns:a16="http://schemas.microsoft.com/office/drawing/2014/main" id="{E75ED781-2A18-4EAF-A444-293F53163222}"/>
+                <a16:creationId xmlns:a16="http://schemas.microsoft.com/office/drawing/2014/main" id="{EBB96520-9E48-448C-84DC-0B0973B0D7B7}"/>
               </a:ext>
             </a:extLst>
           </p:cNvPr>
@@ -15493,7 +15590,7 @@
           <p:cNvPr id="24" name="">
             <a:extLst xmlns:a="http://schemas.openxmlformats.org/drawingml/2006/main">
               <a:ext uri="{FF2B5EF4-FFF2-40B4-BE49-F238E27FC236}">
-                <a16:creationId xmlns:a16="http://schemas.microsoft.com/office/drawing/2014/main" id="{F6F30715-9578-4095-9BD3-0D84FA9DA73A}"/>
+                <a16:creationId xmlns:a16="http://schemas.microsoft.com/office/drawing/2014/main" id="{C9F13D24-9710-41B1-8820-A1599DEFFC09}"/>
               </a:ext>
             </a:extLst>
           </p:cNvPr>
@@ -15526,7 +15623,7 @@
           <p:cNvPr id="25" name="">
             <a:extLst xmlns:a="http://schemas.openxmlformats.org/drawingml/2006/main">
               <a:ext uri="{FF2B5EF4-FFF2-40B4-BE49-F238E27FC236}">
-                <a16:creationId xmlns:a16="http://schemas.microsoft.com/office/drawing/2014/main" id="{ED01D118-E610-4F56-B828-C2776CAD38FF}"/>
+                <a16:creationId xmlns:a16="http://schemas.microsoft.com/office/drawing/2014/main" id="{70588279-0F21-47D9-91BF-9730DFBED008}"/>
               </a:ext>
             </a:extLst>
           </p:cNvPr>
@@ -15590,7 +15687,7 @@
           <p:cNvPr id="26" name="">
             <a:extLst xmlns:a="http://schemas.openxmlformats.org/drawingml/2006/main">
               <a:ext uri="{FF2B5EF4-FFF2-40B4-BE49-F238E27FC236}">
-                <a16:creationId xmlns:a16="http://schemas.microsoft.com/office/drawing/2014/main" id="{2D2BD864-67E7-4D06-8DCE-3D16E7F67FAB}"/>
+                <a16:creationId xmlns:a16="http://schemas.microsoft.com/office/drawing/2014/main" id="{94555B00-BE07-42E6-AE54-0F32DF2F6824}"/>
               </a:ext>
             </a:extLst>
           </p:cNvPr>
@@ -15652,7 +15749,7 @@
     </p:spTree>
     <p:extLst>
       <p:ext uri="{BB962C8B-B14F-4D97-AF65-F5344CB8AC3E}">
-        <p14:creationId xmlns:p14="http://schemas.microsoft.com/office/powerpoint/2010/main" val="1352542988"/>
+        <p14:creationId xmlns:p14="http://schemas.microsoft.com/office/powerpoint/2010/main" val="1303156680"/>
       </p:ext>
     </p:extLst>
   </p:cSld>
@@ -15680,7 +15777,7 @@
           <p:nvPr/>
         </p:nvPicPr>
         <p:blipFill>
-          <a:blip xmlns:r="http://schemas.openxmlformats.org/officeDocument/2006/relationships" xmlns:a="http://schemas.openxmlformats.org/drawingml/2006/main" r:embed="R162cae58bd754528"/>
+          <a:blip xmlns:r="http://schemas.openxmlformats.org/officeDocument/2006/relationships" xmlns:a="http://schemas.openxmlformats.org/drawingml/2006/main" r:embed="Rd9e0c4275c054d3e"/>
           <a:srcRect xmlns:a="http://schemas.openxmlformats.org/drawingml/2006/main" l="0" t="7813" r="0" b="7813"/>
           <a:stretch xmlns:a="http://schemas.openxmlformats.org/drawingml/2006/main">
             <a:fillRect l="0" t="0" r="0" b="0"/>
@@ -15701,7 +15798,7 @@
           <p:cNvPr id="2" name="">
             <a:extLst xmlns:a="http://schemas.openxmlformats.org/drawingml/2006/main">
               <a:ext uri="{FF2B5EF4-FFF2-40B4-BE49-F238E27FC236}">
-                <a16:creationId xmlns:a16="http://schemas.microsoft.com/office/drawing/2014/main" id="{2AF1E652-CBBE-4EF1-8611-43C2E973A176}"/>
+                <a16:creationId xmlns:a16="http://schemas.microsoft.com/office/drawing/2014/main" id="{45899BB7-A0F3-45DA-83EF-CCE81E8A433D}"/>
               </a:ext>
             </a:extLst>
           </p:cNvPr>
@@ -15738,7 +15835,7 @@
           <p:cNvPr id="3" name="">
             <a:extLst xmlns:a="http://schemas.openxmlformats.org/drawingml/2006/main">
               <a:ext uri="{FF2B5EF4-FFF2-40B4-BE49-F238E27FC236}">
-                <a16:creationId xmlns:a16="http://schemas.microsoft.com/office/drawing/2014/main" id="{8EE3C15A-56E2-4A2B-8696-5348A20F6CE6}"/>
+                <a16:creationId xmlns:a16="http://schemas.microsoft.com/office/drawing/2014/main" id="{1BAD6F17-527B-4480-826F-05B9161D144C}"/>
               </a:ext>
             </a:extLst>
           </p:cNvPr>
@@ -15775,7 +15872,7 @@
           <p:cNvPr id="4" name="">
             <a:extLst xmlns:a="http://schemas.openxmlformats.org/drawingml/2006/main">
               <a:ext uri="{FF2B5EF4-FFF2-40B4-BE49-F238E27FC236}">
-                <a16:creationId xmlns:a16="http://schemas.microsoft.com/office/drawing/2014/main" id="{608CA42B-00D4-4B26-8023-A5F340DE5B7B}"/>
+                <a16:creationId xmlns:a16="http://schemas.microsoft.com/office/drawing/2014/main" id="{03B9771F-056B-498B-8912-3CCC96BFA43E}"/>
               </a:ext>
             </a:extLst>
           </p:cNvPr>
@@ -15839,7 +15936,7 @@
           <p:cNvPr id="5" name="">
             <a:extLst xmlns:a="http://schemas.openxmlformats.org/drawingml/2006/main">
               <a:ext uri="{FF2B5EF4-FFF2-40B4-BE49-F238E27FC236}">
-                <a16:creationId xmlns:a16="http://schemas.microsoft.com/office/drawing/2014/main" id="{D552E7BF-4A18-448F-A6CF-0DE975E933B3}"/>
+                <a16:creationId xmlns:a16="http://schemas.microsoft.com/office/drawing/2014/main" id="{242C1A80-CA0C-4D76-8F2B-ABE9A79D1148}"/>
               </a:ext>
             </a:extLst>
           </p:cNvPr>
@@ -15903,7 +16000,7 @@
           <p:cNvPr id="6" name="">
             <a:extLst xmlns:a="http://schemas.openxmlformats.org/drawingml/2006/main">
               <a:ext uri="{FF2B5EF4-FFF2-40B4-BE49-F238E27FC236}">
-                <a16:creationId xmlns:a16="http://schemas.microsoft.com/office/drawing/2014/main" id="{980AF7D7-5973-495D-A8B1-D4EFECCCC4E0}"/>
+                <a16:creationId xmlns:a16="http://schemas.microsoft.com/office/drawing/2014/main" id="{CA9F7850-328C-4DED-98DD-7E7E723770E9}"/>
               </a:ext>
             </a:extLst>
           </p:cNvPr>
@@ -15967,7 +16064,7 @@
           <p:cNvPr id="7" name="">
             <a:extLst xmlns:a="http://schemas.openxmlformats.org/drawingml/2006/main">
               <a:ext uri="{FF2B5EF4-FFF2-40B4-BE49-F238E27FC236}">
-                <a16:creationId xmlns:a16="http://schemas.microsoft.com/office/drawing/2014/main" id="{12ED5513-5757-4899-8015-9F1146CF732F}"/>
+                <a16:creationId xmlns:a16="http://schemas.microsoft.com/office/drawing/2014/main" id="{CD2842BB-2540-4BD8-A306-AD7C7FB2D9BD}"/>
               </a:ext>
             </a:extLst>
           </p:cNvPr>
@@ -16002,7 +16099,7 @@
           <p:cNvPr id="8" name="">
             <a:extLst xmlns:a="http://schemas.openxmlformats.org/drawingml/2006/main">
               <a:ext uri="{FF2B5EF4-FFF2-40B4-BE49-F238E27FC236}">
-                <a16:creationId xmlns:a16="http://schemas.microsoft.com/office/drawing/2014/main" id="{D4B19C59-0170-4C93-BAC0-FFE6D06F2A39}"/>
+                <a16:creationId xmlns:a16="http://schemas.microsoft.com/office/drawing/2014/main" id="{47D1859C-740E-497B-9A71-511E06468E3F}"/>
               </a:ext>
             </a:extLst>
           </p:cNvPr>
@@ -16066,7 +16163,7 @@
           <p:cNvPr id="9" name="">
             <a:extLst xmlns:a="http://schemas.openxmlformats.org/drawingml/2006/main">
               <a:ext uri="{FF2B5EF4-FFF2-40B4-BE49-F238E27FC236}">
-                <a16:creationId xmlns:a16="http://schemas.microsoft.com/office/drawing/2014/main" id="{FE634BD8-C7BC-4B6C-9858-B77D2F1BFEDB}"/>
+                <a16:creationId xmlns:a16="http://schemas.microsoft.com/office/drawing/2014/main" id="{DD515EEB-E41A-470F-A30B-19B2CB95D046}"/>
               </a:ext>
             </a:extLst>
           </p:cNvPr>
@@ -16130,7 +16227,7 @@
           <p:cNvPr id="10" name="">
             <a:extLst xmlns:a="http://schemas.openxmlformats.org/drawingml/2006/main">
               <a:ext uri="{FF2B5EF4-FFF2-40B4-BE49-F238E27FC236}">
-                <a16:creationId xmlns:a16="http://schemas.microsoft.com/office/drawing/2014/main" id="{D8F25698-CF98-4657-915B-A9BA41FF26BB}"/>
+                <a16:creationId xmlns:a16="http://schemas.microsoft.com/office/drawing/2014/main" id="{EC4590ED-A8F7-40B2-83AA-695E37597E7C}"/>
               </a:ext>
             </a:extLst>
           </p:cNvPr>
@@ -16165,7 +16262,7 @@
           <p:cNvPr id="11" name="">
             <a:extLst xmlns:a="http://schemas.openxmlformats.org/drawingml/2006/main">
               <a:ext uri="{FF2B5EF4-FFF2-40B4-BE49-F238E27FC236}">
-                <a16:creationId xmlns:a16="http://schemas.microsoft.com/office/drawing/2014/main" id="{8F2A7E33-28BE-4F1B-8D70-39C7D6924BC4}"/>
+                <a16:creationId xmlns:a16="http://schemas.microsoft.com/office/drawing/2014/main" id="{456E2D28-56C9-475B-A915-D3863651E137}"/>
               </a:ext>
             </a:extLst>
           </p:cNvPr>
@@ -16229,7 +16326,7 @@
           <p:cNvPr id="12" name="">
             <a:extLst xmlns:a="http://schemas.openxmlformats.org/drawingml/2006/main">
               <a:ext uri="{FF2B5EF4-FFF2-40B4-BE49-F238E27FC236}">
-                <a16:creationId xmlns:a16="http://schemas.microsoft.com/office/drawing/2014/main" id="{A03C3332-E209-4D07-93A3-A6319BE4AC03}"/>
+                <a16:creationId xmlns:a16="http://schemas.microsoft.com/office/drawing/2014/main" id="{B3C33562-48C2-4516-BECB-A5103CF0CE6F}"/>
               </a:ext>
             </a:extLst>
           </p:cNvPr>
@@ -16293,7 +16390,7 @@
           <p:cNvPr id="13" name="">
             <a:extLst xmlns:a="http://schemas.openxmlformats.org/drawingml/2006/main">
               <a:ext uri="{FF2B5EF4-FFF2-40B4-BE49-F238E27FC236}">
-                <a16:creationId xmlns:a16="http://schemas.microsoft.com/office/drawing/2014/main" id="{5C2DF834-32B7-4AC3-B826-F97EABFCF415}"/>
+                <a16:creationId xmlns:a16="http://schemas.microsoft.com/office/drawing/2014/main" id="{C0E15D42-21D7-43BD-A3D3-B9F81805EA22}"/>
               </a:ext>
             </a:extLst>
           </p:cNvPr>
@@ -16328,7 +16425,7 @@
           <p:cNvPr id="14" name="">
             <a:extLst xmlns:a="http://schemas.openxmlformats.org/drawingml/2006/main">
               <a:ext uri="{FF2B5EF4-FFF2-40B4-BE49-F238E27FC236}">
-                <a16:creationId xmlns:a16="http://schemas.microsoft.com/office/drawing/2014/main" id="{D1D6AEB6-E5B3-45FA-AE09-5D9A6F652A8D}"/>
+                <a16:creationId xmlns:a16="http://schemas.microsoft.com/office/drawing/2014/main" id="{7DC51FA0-7074-49F8-B851-3E0947AC0225}"/>
               </a:ext>
             </a:extLst>
           </p:cNvPr>
@@ -16392,7 +16489,7 @@
           <p:cNvPr id="15" name="">
             <a:extLst xmlns:a="http://schemas.openxmlformats.org/drawingml/2006/main">
               <a:ext uri="{FF2B5EF4-FFF2-40B4-BE49-F238E27FC236}">
-                <a16:creationId xmlns:a16="http://schemas.microsoft.com/office/drawing/2014/main" id="{4A191EF6-6FDF-4C48-A702-1BBB03D639FD}"/>
+                <a16:creationId xmlns:a16="http://schemas.microsoft.com/office/drawing/2014/main" id="{9C3FE5A2-2633-416B-B0E9-F6A41B4C8387}"/>
               </a:ext>
             </a:extLst>
           </p:cNvPr>
@@ -16456,7 +16553,7 @@
           <p:cNvPr id="16" name="">
             <a:extLst xmlns:a="http://schemas.openxmlformats.org/drawingml/2006/main">
               <a:ext uri="{FF2B5EF4-FFF2-40B4-BE49-F238E27FC236}">
-                <a16:creationId xmlns:a16="http://schemas.microsoft.com/office/drawing/2014/main" id="{75FF6F61-253F-426F-8D21-B36F8D77756E}"/>
+                <a16:creationId xmlns:a16="http://schemas.microsoft.com/office/drawing/2014/main" id="{A80CEAA9-2A57-4969-BFEE-761F632DEFD8}"/>
               </a:ext>
             </a:extLst>
           </p:cNvPr>
@@ -16491,7 +16588,7 @@
           <p:cNvPr id="17" name="">
             <a:extLst xmlns:a="http://schemas.openxmlformats.org/drawingml/2006/main">
               <a:ext uri="{FF2B5EF4-FFF2-40B4-BE49-F238E27FC236}">
-                <a16:creationId xmlns:a16="http://schemas.microsoft.com/office/drawing/2014/main" id="{180C9AFA-2C01-4183-931D-192B6EEF26A2}"/>
+                <a16:creationId xmlns:a16="http://schemas.microsoft.com/office/drawing/2014/main" id="{0A643DFB-3A11-401C-BBDE-76BF35B47879}"/>
               </a:ext>
             </a:extLst>
           </p:cNvPr>
@@ -16555,7 +16652,7 @@
           <p:cNvPr id="18" name="">
             <a:extLst xmlns:a="http://schemas.openxmlformats.org/drawingml/2006/main">
               <a:ext uri="{FF2B5EF4-FFF2-40B4-BE49-F238E27FC236}">
-                <a16:creationId xmlns:a16="http://schemas.microsoft.com/office/drawing/2014/main" id="{3B61BFC4-CFCD-4D8C-BC06-88FA0BCDB62A}"/>
+                <a16:creationId xmlns:a16="http://schemas.microsoft.com/office/drawing/2014/main" id="{CE6483A9-B45D-47CD-88CF-4812310D15EA}"/>
               </a:ext>
             </a:extLst>
           </p:cNvPr>
@@ -16619,7 +16716,7 @@
           <p:cNvPr id="19" name="">
             <a:extLst xmlns:a="http://schemas.openxmlformats.org/drawingml/2006/main">
               <a:ext uri="{FF2B5EF4-FFF2-40B4-BE49-F238E27FC236}">
-                <a16:creationId xmlns:a16="http://schemas.microsoft.com/office/drawing/2014/main" id="{4BE57B28-034F-424B-B0EF-2CE9B715929E}"/>
+                <a16:creationId xmlns:a16="http://schemas.microsoft.com/office/drawing/2014/main" id="{401584D9-A759-45A5-A6C1-7EDE0977AB56}"/>
               </a:ext>
             </a:extLst>
           </p:cNvPr>
@@ -16654,7 +16751,7 @@
           <p:cNvPr id="20" name="">
             <a:extLst xmlns:a="http://schemas.openxmlformats.org/drawingml/2006/main">
               <a:ext uri="{FF2B5EF4-FFF2-40B4-BE49-F238E27FC236}">
-                <a16:creationId xmlns:a16="http://schemas.microsoft.com/office/drawing/2014/main" id="{273A58DC-CF07-4C23-9E1C-692B75B314C5}"/>
+                <a16:creationId xmlns:a16="http://schemas.microsoft.com/office/drawing/2014/main" id="{BB1722E2-B3B9-41B6-BB36-86FAB99CE49C}"/>
               </a:ext>
             </a:extLst>
           </p:cNvPr>
@@ -16718,7 +16815,7 @@
           <p:cNvPr id="21" name="">
             <a:extLst xmlns:a="http://schemas.openxmlformats.org/drawingml/2006/main">
               <a:ext uri="{FF2B5EF4-FFF2-40B4-BE49-F238E27FC236}">
-                <a16:creationId xmlns:a16="http://schemas.microsoft.com/office/drawing/2014/main" id="{08512FB5-06EA-4AFD-94CB-8661F94D81EB}"/>
+                <a16:creationId xmlns:a16="http://schemas.microsoft.com/office/drawing/2014/main" id="{52EBC30D-096C-4129-A0F1-853CA3AAE2B8}"/>
               </a:ext>
             </a:extLst>
           </p:cNvPr>
@@ -16782,7 +16879,7 @@
           <p:cNvPr id="22" name="">
             <a:extLst xmlns:a="http://schemas.openxmlformats.org/drawingml/2006/main">
               <a:ext uri="{FF2B5EF4-FFF2-40B4-BE49-F238E27FC236}">
-                <a16:creationId xmlns:a16="http://schemas.microsoft.com/office/drawing/2014/main" id="{82B2CBAF-15E3-4CDB-942E-36F134C4B4F1}"/>
+                <a16:creationId xmlns:a16="http://schemas.microsoft.com/office/drawing/2014/main" id="{EE609116-9562-4407-8A70-2092FD36689C}"/>
               </a:ext>
             </a:extLst>
           </p:cNvPr>
@@ -16815,7 +16912,7 @@
           <p:cNvPr id="23" name="">
             <a:extLst xmlns:a="http://schemas.openxmlformats.org/drawingml/2006/main">
               <a:ext uri="{FF2B5EF4-FFF2-40B4-BE49-F238E27FC236}">
-                <a16:creationId xmlns:a16="http://schemas.microsoft.com/office/drawing/2014/main" id="{3A9EE855-0400-4D4E-B0D7-B6FFAF21CBBE}"/>
+                <a16:creationId xmlns:a16="http://schemas.microsoft.com/office/drawing/2014/main" id="{AE2E7D33-3B20-45AE-BAF2-FCE19C79AEA1}"/>
               </a:ext>
             </a:extLst>
           </p:cNvPr>
@@ -16850,7 +16947,7 @@
           <p:cNvPr id="24" name="">
             <a:extLst xmlns:a="http://schemas.openxmlformats.org/drawingml/2006/main">
               <a:ext uri="{FF2B5EF4-FFF2-40B4-BE49-F238E27FC236}">
-                <a16:creationId xmlns:a16="http://schemas.microsoft.com/office/drawing/2014/main" id="{6F06ED85-D013-4C61-8A08-5EA712D72E08}"/>
+                <a16:creationId xmlns:a16="http://schemas.microsoft.com/office/drawing/2014/main" id="{E030ECE2-754A-4168-BE7B-133FAAF8A82C}"/>
               </a:ext>
             </a:extLst>
           </p:cNvPr>
@@ -16914,7 +17011,7 @@
           <p:cNvPr id="25" name="">
             <a:extLst xmlns:a="http://schemas.openxmlformats.org/drawingml/2006/main">
               <a:ext uri="{FF2B5EF4-FFF2-40B4-BE49-F238E27FC236}">
-                <a16:creationId xmlns:a16="http://schemas.microsoft.com/office/drawing/2014/main" id="{C40E9BFE-28A0-4693-A48D-E3D91FCD7B24}"/>
+                <a16:creationId xmlns:a16="http://schemas.microsoft.com/office/drawing/2014/main" id="{26D3E791-41F7-4843-AC51-30509C4ABB39}"/>
               </a:ext>
             </a:extLst>
           </p:cNvPr>
@@ -16978,7 +17075,7 @@
           <p:cNvPr id="26" name="">
             <a:extLst xmlns:a="http://schemas.openxmlformats.org/drawingml/2006/main">
               <a:ext uri="{FF2B5EF4-FFF2-40B4-BE49-F238E27FC236}">
-                <a16:creationId xmlns:a16="http://schemas.microsoft.com/office/drawing/2014/main" id="{5DEB4B86-AEDD-4B34-9EF5-A24DD73BD87E}"/>
+                <a16:creationId xmlns:a16="http://schemas.microsoft.com/office/drawing/2014/main" id="{F1ABCA99-7521-4EAB-BF04-3A0C27DC853A}"/>
               </a:ext>
             </a:extLst>
           </p:cNvPr>
@@ -17011,7 +17108,7 @@
           <p:cNvPr id="27" name="">
             <a:extLst xmlns:a="http://schemas.openxmlformats.org/drawingml/2006/main">
               <a:ext uri="{FF2B5EF4-FFF2-40B4-BE49-F238E27FC236}">
-                <a16:creationId xmlns:a16="http://schemas.microsoft.com/office/drawing/2014/main" id="{EB118E66-333D-425A-BA92-AA3036E39EE0}"/>
+                <a16:creationId xmlns:a16="http://schemas.microsoft.com/office/drawing/2014/main" id="{556DE464-AF20-4180-90CA-667412B68013}"/>
               </a:ext>
             </a:extLst>
           </p:cNvPr>
@@ -17046,7 +17143,7 @@
           <p:cNvPr id="28" name="">
             <a:extLst xmlns:a="http://schemas.openxmlformats.org/drawingml/2006/main">
               <a:ext uri="{FF2B5EF4-FFF2-40B4-BE49-F238E27FC236}">
-                <a16:creationId xmlns:a16="http://schemas.microsoft.com/office/drawing/2014/main" id="{89CE7BC2-0AE2-4F46-88D6-0D858230A8AC}"/>
+                <a16:creationId xmlns:a16="http://schemas.microsoft.com/office/drawing/2014/main" id="{E1BBE7CF-4E77-40B8-8022-F904D95003E6}"/>
               </a:ext>
             </a:extLst>
           </p:cNvPr>
@@ -17110,7 +17207,7 @@
           <p:cNvPr id="29" name="">
             <a:extLst xmlns:a="http://schemas.openxmlformats.org/drawingml/2006/main">
               <a:ext uri="{FF2B5EF4-FFF2-40B4-BE49-F238E27FC236}">
-                <a16:creationId xmlns:a16="http://schemas.microsoft.com/office/drawing/2014/main" id="{7D8051C0-B36B-46AF-83C1-2A5D299D943A}"/>
+                <a16:creationId xmlns:a16="http://schemas.microsoft.com/office/drawing/2014/main" id="{4F89F2E9-0D7E-4A9B-9CDD-8124F9895B2B}"/>
               </a:ext>
             </a:extLst>
           </p:cNvPr>
@@ -17174,7 +17271,7 @@
           <p:cNvPr id="30" name="">
             <a:extLst xmlns:a="http://schemas.openxmlformats.org/drawingml/2006/main">
               <a:ext uri="{FF2B5EF4-FFF2-40B4-BE49-F238E27FC236}">
-                <a16:creationId xmlns:a16="http://schemas.microsoft.com/office/drawing/2014/main" id="{0CC39FAD-9A41-4058-A40D-A483F978176F}"/>
+                <a16:creationId xmlns:a16="http://schemas.microsoft.com/office/drawing/2014/main" id="{5E315625-D3CA-40CA-9D97-7E5BAD551D4D}"/>
               </a:ext>
             </a:extLst>
           </p:cNvPr>
@@ -17207,7 +17304,7 @@
           <p:cNvPr id="31" name="">
             <a:extLst xmlns:a="http://schemas.openxmlformats.org/drawingml/2006/main">
               <a:ext uri="{FF2B5EF4-FFF2-40B4-BE49-F238E27FC236}">
-                <a16:creationId xmlns:a16="http://schemas.microsoft.com/office/drawing/2014/main" id="{5332CD5C-4B10-4419-B17B-E057C99E77F3}"/>
+                <a16:creationId xmlns:a16="http://schemas.microsoft.com/office/drawing/2014/main" id="{8923EAF7-198A-42F2-AF24-02EC1E255DE4}"/>
               </a:ext>
             </a:extLst>
           </p:cNvPr>
@@ -17242,7 +17339,7 @@
           <p:cNvPr id="32" name="">
             <a:extLst xmlns:a="http://schemas.openxmlformats.org/drawingml/2006/main">
               <a:ext uri="{FF2B5EF4-FFF2-40B4-BE49-F238E27FC236}">
-                <a16:creationId xmlns:a16="http://schemas.microsoft.com/office/drawing/2014/main" id="{0B9EB5FA-8B38-4945-A27E-3908C0F11808}"/>
+                <a16:creationId xmlns:a16="http://schemas.microsoft.com/office/drawing/2014/main" id="{84369D30-E5F8-4477-8A37-E8516C8A15E3}"/>
               </a:ext>
             </a:extLst>
           </p:cNvPr>
@@ -17306,7 +17403,7 @@
           <p:cNvPr id="33" name="">
             <a:extLst xmlns:a="http://schemas.openxmlformats.org/drawingml/2006/main">
               <a:ext uri="{FF2B5EF4-FFF2-40B4-BE49-F238E27FC236}">
-                <a16:creationId xmlns:a16="http://schemas.microsoft.com/office/drawing/2014/main" id="{ECCBBEB1-8BCD-4667-A44C-D312CEF8820D}"/>
+                <a16:creationId xmlns:a16="http://schemas.microsoft.com/office/drawing/2014/main" id="{9E685894-1A7C-47FC-88D5-ABF69E533D12}"/>
               </a:ext>
             </a:extLst>
           </p:cNvPr>
@@ -17370,7 +17467,7 @@
           <p:cNvPr id="34" name="">
             <a:extLst xmlns:a="http://schemas.openxmlformats.org/drawingml/2006/main">
               <a:ext uri="{FF2B5EF4-FFF2-40B4-BE49-F238E27FC236}">
-                <a16:creationId xmlns:a16="http://schemas.microsoft.com/office/drawing/2014/main" id="{5A4A5BFC-1A18-4F37-89F5-7234AE114129}"/>
+                <a16:creationId xmlns:a16="http://schemas.microsoft.com/office/drawing/2014/main" id="{28C395D3-D875-423F-A318-2E7F55075384}"/>
               </a:ext>
             </a:extLst>
           </p:cNvPr>
@@ -17434,7 +17531,7 @@
           <p:cNvPr id="35" name="">
             <a:extLst xmlns:a="http://schemas.openxmlformats.org/drawingml/2006/main">
               <a:ext uri="{FF2B5EF4-FFF2-40B4-BE49-F238E27FC236}">
-                <a16:creationId xmlns:a16="http://schemas.microsoft.com/office/drawing/2014/main" id="{DE14E932-2BBD-4EA5-A016-A4EF14895FCD}"/>
+                <a16:creationId xmlns:a16="http://schemas.microsoft.com/office/drawing/2014/main" id="{380CEC16-B03C-4735-8CE1-D266E583B48C}"/>
               </a:ext>
             </a:extLst>
           </p:cNvPr>
@@ -17467,7 +17564,7 @@
           <p:cNvPr id="36" name="">
             <a:extLst xmlns:a="http://schemas.openxmlformats.org/drawingml/2006/main">
               <a:ext uri="{FF2B5EF4-FFF2-40B4-BE49-F238E27FC236}">
-                <a16:creationId xmlns:a16="http://schemas.microsoft.com/office/drawing/2014/main" id="{A2400223-9FB9-41F2-95B3-47FEEFD37A7E}"/>
+                <a16:creationId xmlns:a16="http://schemas.microsoft.com/office/drawing/2014/main" id="{15B1511E-A1AC-4EDC-95D6-E2C03A7AE072}"/>
               </a:ext>
             </a:extLst>
           </p:cNvPr>
@@ -17531,7 +17628,7 @@
           <p:cNvPr id="37" name="">
             <a:extLst xmlns:a="http://schemas.openxmlformats.org/drawingml/2006/main">
               <a:ext uri="{FF2B5EF4-FFF2-40B4-BE49-F238E27FC236}">
-                <a16:creationId xmlns:a16="http://schemas.microsoft.com/office/drawing/2014/main" id="{951A12FD-D82A-4922-9C32-C9D60564D9CE}"/>
+                <a16:creationId xmlns:a16="http://schemas.microsoft.com/office/drawing/2014/main" id="{0E18C57A-6A55-4C85-91DC-78936CFF8026}"/>
               </a:ext>
             </a:extLst>
           </p:cNvPr>
@@ -17593,7 +17690,7 @@
     </p:spTree>
     <p:extLst>
       <p:ext uri="{BB962C8B-B14F-4D97-AF65-F5344CB8AC3E}">
-        <p14:creationId xmlns:p14="http://schemas.microsoft.com/office/powerpoint/2010/main" val="586113093"/>
+        <p14:creationId xmlns:p14="http://schemas.microsoft.com/office/powerpoint/2010/main" val="1859184288"/>
       </p:ext>
     </p:extLst>
   </p:cSld>

--- a/assets/investor-deck/Tecnotitan-Investor-Deck-JA.pptx
+++ b/assets/investor-deck/Tecnotitan-Investor-Deck-JA.pptx
@@ -2,24 +2,24 @@
 <file path=ppt/presentation.xml><?xml version="1.0" encoding="utf-8"?>
 <p:presentation xmlns:p="http://schemas.openxmlformats.org/presentationml/2006/main">
   <p:sldMasterIdLst>
-    <p:sldMasterId xmlns:r="http://schemas.openxmlformats.org/officeDocument/2006/relationships" id="2147483648" r:id="R57d3eb55bc2e46bc"/>
+    <p:sldMasterId xmlns:r="http://schemas.openxmlformats.org/officeDocument/2006/relationships" id="2147483648" r:id="R48f6e74f77194e1d"/>
   </p:sldMasterIdLst>
   <p:notesMasterIdLst>
-    <p:notesMasterId xmlns:r="http://schemas.openxmlformats.org/officeDocument/2006/relationships" r:id="R391506e5feda4f37"/>
+    <p:notesMasterId xmlns:r="http://schemas.openxmlformats.org/officeDocument/2006/relationships" r:id="R4da570fccf664450"/>
   </p:notesMasterIdLst>
   <p:sldIdLst>
-    <p:sldId xmlns:r="http://schemas.openxmlformats.org/officeDocument/2006/relationships" id="256" r:id="Rb112584d57c14f24"/>
-    <p:sldId xmlns:r="http://schemas.openxmlformats.org/officeDocument/2006/relationships" id="257" r:id="R533fd4ca78844598"/>
-    <p:sldId xmlns:r="http://schemas.openxmlformats.org/officeDocument/2006/relationships" id="258" r:id="Rbcf6b3bd33d84f05"/>
-    <p:sldId xmlns:r="http://schemas.openxmlformats.org/officeDocument/2006/relationships" id="259" r:id="R8c4249a60c0f4fe8"/>
-    <p:sldId xmlns:r="http://schemas.openxmlformats.org/officeDocument/2006/relationships" id="260" r:id="R4dcf071de7ac4845"/>
-    <p:sldId xmlns:r="http://schemas.openxmlformats.org/officeDocument/2006/relationships" id="261" r:id="Ra0b51fc1198c44c1"/>
-    <p:sldId xmlns:r="http://schemas.openxmlformats.org/officeDocument/2006/relationships" id="262" r:id="R0c7ee13b3dbd45dc"/>
-    <p:sldId xmlns:r="http://schemas.openxmlformats.org/officeDocument/2006/relationships" id="263" r:id="Recdbb5d47bf74e64"/>
-    <p:sldId xmlns:r="http://schemas.openxmlformats.org/officeDocument/2006/relationships" id="264" r:id="R7db5027b35c2460c"/>
-    <p:sldId xmlns:r="http://schemas.openxmlformats.org/officeDocument/2006/relationships" id="265" r:id="Rb3c8763e1edd406c"/>
-    <p:sldId xmlns:r="http://schemas.openxmlformats.org/officeDocument/2006/relationships" id="266" r:id="R44d391fab0624483"/>
-    <p:sldId xmlns:r="http://schemas.openxmlformats.org/officeDocument/2006/relationships" id="267" r:id="R2300b2ae9d7d4c0c"/>
+    <p:sldId xmlns:r="http://schemas.openxmlformats.org/officeDocument/2006/relationships" id="256" r:id="R3c3defcbc72f46bd"/>
+    <p:sldId xmlns:r="http://schemas.openxmlformats.org/officeDocument/2006/relationships" id="257" r:id="R5fadf678b18e49e5"/>
+    <p:sldId xmlns:r="http://schemas.openxmlformats.org/officeDocument/2006/relationships" id="258" r:id="Re76db14f40db4754"/>
+    <p:sldId xmlns:r="http://schemas.openxmlformats.org/officeDocument/2006/relationships" id="259" r:id="R4977734a9c024ca2"/>
+    <p:sldId xmlns:r="http://schemas.openxmlformats.org/officeDocument/2006/relationships" id="260" r:id="R1a9bac6566d54411"/>
+    <p:sldId xmlns:r="http://schemas.openxmlformats.org/officeDocument/2006/relationships" id="261" r:id="R7ede43b7c5e54389"/>
+    <p:sldId xmlns:r="http://schemas.openxmlformats.org/officeDocument/2006/relationships" id="262" r:id="R1bc5bce6402d4007"/>
+    <p:sldId xmlns:r="http://schemas.openxmlformats.org/officeDocument/2006/relationships" id="263" r:id="R070460dbabd74b52"/>
+    <p:sldId xmlns:r="http://schemas.openxmlformats.org/officeDocument/2006/relationships" id="264" r:id="R4bdda48ab281480a"/>
+    <p:sldId xmlns:r="http://schemas.openxmlformats.org/officeDocument/2006/relationships" id="265" r:id="Rdccd00b71aa54742"/>
+    <p:sldId xmlns:r="http://schemas.openxmlformats.org/officeDocument/2006/relationships" id="266" r:id="R53d11b5c368444bf"/>
+    <p:sldId xmlns:r="http://schemas.openxmlformats.org/officeDocument/2006/relationships" id="267" r:id="R837659e196db4d27"/>
   </p:sldIdLst>
   <p:sldSz cx="12192000" cy="6858000"/>
   <p:notesSz cx="6858000" cy="9144000"/>
@@ -1292,7 +1292,7 @@
   </p:cSld>
   <p:clrMap bg1="lt1" tx1="dk1" bg2="lt2" tx2="dk2" accent1="accent1" accent2="accent2" accent3="accent3" accent4="accent4" accent5="accent5" accent6="accent6" hlink="hlink" folHlink="folHlink"/>
   <p:sldLayoutIdLst>
-    <p:sldLayoutId xmlns:r="http://schemas.openxmlformats.org/officeDocument/2006/relationships" id="2147483649" r:id="Re32f4aa86f9c44f7"/>
+    <p:sldLayoutId xmlns:r="http://schemas.openxmlformats.org/officeDocument/2006/relationships" id="2147483649" r:id="Rcf95e135e4314c37"/>
   </p:sldLayoutIdLst>
   <p:txStyles>
     <p:titleStyle>
@@ -1794,7 +1794,7 @@
           <p:nvPr/>
         </p:nvPicPr>
         <p:blipFill>
-          <a:blip xmlns:r="http://schemas.openxmlformats.org/officeDocument/2006/relationships" xmlns:a="http://schemas.openxmlformats.org/drawingml/2006/main" r:embed="R309f0135333e40ad"/>
+          <a:blip xmlns:r="http://schemas.openxmlformats.org/officeDocument/2006/relationships" xmlns:a="http://schemas.openxmlformats.org/drawingml/2006/main" r:embed="Rc465e97292a64fbe"/>
           <a:srcRect xmlns:a="http://schemas.openxmlformats.org/drawingml/2006/main" l="0" t="7813" r="0" b="7813"/>
           <a:stretch xmlns:a="http://schemas.openxmlformats.org/drawingml/2006/main">
             <a:fillRect l="0" t="0" r="0" b="0"/>
@@ -1815,7 +1815,7 @@
           <p:cNvPr id="2" name="">
             <a:extLst xmlns:a="http://schemas.openxmlformats.org/drawingml/2006/main">
               <a:ext uri="{FF2B5EF4-FFF2-40B4-BE49-F238E27FC236}">
-                <a16:creationId xmlns:a16="http://schemas.microsoft.com/office/drawing/2014/main" id="{58EDD28D-B5AF-4178-9EC7-4BBB7410C3CC}"/>
+                <a16:creationId xmlns:a16="http://schemas.microsoft.com/office/drawing/2014/main" id="{6FC4CA7C-E909-4579-B227-FD02A2FD35F7}"/>
               </a:ext>
             </a:extLst>
           </p:cNvPr>
@@ -1852,7 +1852,7 @@
           <p:cNvPr id="3" name="">
             <a:extLst xmlns:a="http://schemas.openxmlformats.org/drawingml/2006/main">
               <a:ext uri="{FF2B5EF4-FFF2-40B4-BE49-F238E27FC236}">
-                <a16:creationId xmlns:a16="http://schemas.microsoft.com/office/drawing/2014/main" id="{908C4A0A-5DF0-47C2-B9BA-AF075B7F94AA}"/>
+                <a16:creationId xmlns:a16="http://schemas.microsoft.com/office/drawing/2014/main" id="{EBDB7161-EA99-44D0-9A24-F41FFD4B5222}"/>
               </a:ext>
             </a:extLst>
           </p:cNvPr>
@@ -1889,7 +1889,7 @@
           <p:cNvPr id="4" name="">
             <a:extLst xmlns:a="http://schemas.openxmlformats.org/drawingml/2006/main">
               <a:ext uri="{FF2B5EF4-FFF2-40B4-BE49-F238E27FC236}">
-                <a16:creationId xmlns:a16="http://schemas.microsoft.com/office/drawing/2014/main" id="{0188114E-EB79-4355-80E3-13BB746BEA6F}"/>
+                <a16:creationId xmlns:a16="http://schemas.microsoft.com/office/drawing/2014/main" id="{4453DA42-AE3C-4C92-B891-500087FCAF8A}"/>
               </a:ext>
             </a:extLst>
           </p:cNvPr>
@@ -1953,7 +1953,7 @@
           <p:cNvPr id="5" name="">
             <a:extLst xmlns:a="http://schemas.openxmlformats.org/drawingml/2006/main">
               <a:ext uri="{FF2B5EF4-FFF2-40B4-BE49-F238E27FC236}">
-                <a16:creationId xmlns:a16="http://schemas.microsoft.com/office/drawing/2014/main" id="{99D1F16B-B9F2-4379-B75D-AFB46F211447}"/>
+                <a16:creationId xmlns:a16="http://schemas.microsoft.com/office/drawing/2014/main" id="{7D9ED713-997B-498F-A19E-6111F4143F72}"/>
               </a:ext>
             </a:extLst>
           </p:cNvPr>
@@ -2017,7 +2017,7 @@
           <p:cNvPr id="6" name="">
             <a:extLst xmlns:a="http://schemas.openxmlformats.org/drawingml/2006/main">
               <a:ext uri="{FF2B5EF4-FFF2-40B4-BE49-F238E27FC236}">
-                <a16:creationId xmlns:a16="http://schemas.microsoft.com/office/drawing/2014/main" id="{EF990EC9-0FF4-4985-B87E-53E3E9B8C759}"/>
+                <a16:creationId xmlns:a16="http://schemas.microsoft.com/office/drawing/2014/main" id="{3F93F11C-EC7F-4730-B262-F779013983E7}"/>
               </a:ext>
             </a:extLst>
           </p:cNvPr>
@@ -2050,7 +2050,7 @@
           <p:cNvPr id="7" name="">
             <a:extLst xmlns:a="http://schemas.openxmlformats.org/drawingml/2006/main">
               <a:ext uri="{FF2B5EF4-FFF2-40B4-BE49-F238E27FC236}">
-                <a16:creationId xmlns:a16="http://schemas.microsoft.com/office/drawing/2014/main" id="{1B1678E3-C029-4116-AD74-7A7DF13AE649}"/>
+                <a16:creationId xmlns:a16="http://schemas.microsoft.com/office/drawing/2014/main" id="{20A2FAFC-C568-499D-917F-32714342201C}"/>
               </a:ext>
             </a:extLst>
           </p:cNvPr>
@@ -2114,7 +2114,7 @@
           <p:cNvPr id="8" name="">
             <a:extLst xmlns:a="http://schemas.openxmlformats.org/drawingml/2006/main">
               <a:ext uri="{FF2B5EF4-FFF2-40B4-BE49-F238E27FC236}">
-                <a16:creationId xmlns:a16="http://schemas.microsoft.com/office/drawing/2014/main" id="{3C3590B6-7467-44BC-A50D-10C67D345021}"/>
+                <a16:creationId xmlns:a16="http://schemas.microsoft.com/office/drawing/2014/main" id="{8C99EC9A-F36F-4D80-BBF6-EEF067347573}"/>
               </a:ext>
             </a:extLst>
           </p:cNvPr>
@@ -2178,7 +2178,7 @@
           <p:cNvPr id="9" name="">
             <a:extLst xmlns:a="http://schemas.openxmlformats.org/drawingml/2006/main">
               <a:ext uri="{FF2B5EF4-FFF2-40B4-BE49-F238E27FC236}">
-                <a16:creationId xmlns:a16="http://schemas.microsoft.com/office/drawing/2014/main" id="{E5187916-DF34-4312-9698-CA6ECA5F9049}"/>
+                <a16:creationId xmlns:a16="http://schemas.microsoft.com/office/drawing/2014/main" id="{7C01C8AD-B0C7-4CDE-B080-A6C450E9100D}"/>
               </a:ext>
             </a:extLst>
           </p:cNvPr>
@@ -2213,7 +2213,7 @@
           <p:cNvPr id="10" name="">
             <a:extLst xmlns:a="http://schemas.openxmlformats.org/drawingml/2006/main">
               <a:ext uri="{FF2B5EF4-FFF2-40B4-BE49-F238E27FC236}">
-                <a16:creationId xmlns:a16="http://schemas.microsoft.com/office/drawing/2014/main" id="{07B4AACA-7F35-44CE-947C-B30C0CE7B671}"/>
+                <a16:creationId xmlns:a16="http://schemas.microsoft.com/office/drawing/2014/main" id="{A45B6DC9-675B-4698-A0F1-EFBA52F8A188}"/>
               </a:ext>
             </a:extLst>
           </p:cNvPr>
@@ -2277,7 +2277,7 @@
           <p:cNvPr id="11" name="">
             <a:extLst xmlns:a="http://schemas.openxmlformats.org/drawingml/2006/main">
               <a:ext uri="{FF2B5EF4-FFF2-40B4-BE49-F238E27FC236}">
-                <a16:creationId xmlns:a16="http://schemas.microsoft.com/office/drawing/2014/main" id="{F4DE61C1-3569-47DD-97A7-ECDD40125B9B}"/>
+                <a16:creationId xmlns:a16="http://schemas.microsoft.com/office/drawing/2014/main" id="{78276E42-61A6-4891-9D56-7C6CE27C8597}"/>
               </a:ext>
             </a:extLst>
           </p:cNvPr>
@@ -2312,7 +2312,7 @@
           <p:cNvPr id="12" name="">
             <a:extLst xmlns:a="http://schemas.openxmlformats.org/drawingml/2006/main">
               <a:ext uri="{FF2B5EF4-FFF2-40B4-BE49-F238E27FC236}">
-                <a16:creationId xmlns:a16="http://schemas.microsoft.com/office/drawing/2014/main" id="{E0710B5C-064E-4CAD-92B3-27487E1956FA}"/>
+                <a16:creationId xmlns:a16="http://schemas.microsoft.com/office/drawing/2014/main" id="{6E44666E-0DD5-4BE2-BE81-17FD719B74F1}"/>
               </a:ext>
             </a:extLst>
           </p:cNvPr>
@@ -2376,7 +2376,7 @@
           <p:cNvPr id="13" name="">
             <a:extLst xmlns:a="http://schemas.openxmlformats.org/drawingml/2006/main">
               <a:ext uri="{FF2B5EF4-FFF2-40B4-BE49-F238E27FC236}">
-                <a16:creationId xmlns:a16="http://schemas.microsoft.com/office/drawing/2014/main" id="{4AB803D8-614B-429C-BF5D-D0E66C5A5668}"/>
+                <a16:creationId xmlns:a16="http://schemas.microsoft.com/office/drawing/2014/main" id="{2C3823C5-A59C-4D56-ABE0-897A8812374F}"/>
               </a:ext>
             </a:extLst>
           </p:cNvPr>
@@ -2411,7 +2411,7 @@
           <p:cNvPr id="14" name="">
             <a:extLst xmlns:a="http://schemas.openxmlformats.org/drawingml/2006/main">
               <a:ext uri="{FF2B5EF4-FFF2-40B4-BE49-F238E27FC236}">
-                <a16:creationId xmlns:a16="http://schemas.microsoft.com/office/drawing/2014/main" id="{BFD8ED98-C3F8-4217-99D5-34A79BF76F23}"/>
+                <a16:creationId xmlns:a16="http://schemas.microsoft.com/office/drawing/2014/main" id="{A39CC30D-F49E-4C16-BF72-A794E034AE71}"/>
               </a:ext>
             </a:extLst>
           </p:cNvPr>
@@ -2475,7 +2475,7 @@
           <p:cNvPr id="15" name="">
             <a:extLst xmlns:a="http://schemas.openxmlformats.org/drawingml/2006/main">
               <a:ext uri="{FF2B5EF4-FFF2-40B4-BE49-F238E27FC236}">
-                <a16:creationId xmlns:a16="http://schemas.microsoft.com/office/drawing/2014/main" id="{5DFB7A74-CDF5-4F2F-BD20-7E5A175322DE}"/>
+                <a16:creationId xmlns:a16="http://schemas.microsoft.com/office/drawing/2014/main" id="{E66413E4-C28B-4FAF-95CD-7AF3C02AC6CC}"/>
               </a:ext>
             </a:extLst>
           </p:cNvPr>
@@ -2529,7 +2529,7 @@
                 <a:ea typeface="Aptos"/>
                 <a:cs typeface="Aptos"/>
               </a:rPr>
-              <a:t>6つの製品ライン</a:t>
+              <a:t>US$500K pre-seed</a:t>
             </a:r>
           </a:p>
         </p:txBody>
@@ -2539,7 +2539,7 @@
           <p:cNvPr id="16" name="">
             <a:extLst xmlns:a="http://schemas.openxmlformats.org/drawingml/2006/main">
               <a:ext uri="{FF2B5EF4-FFF2-40B4-BE49-F238E27FC236}">
-                <a16:creationId xmlns:a16="http://schemas.microsoft.com/office/drawing/2014/main" id="{0B40C433-F42B-4632-A316-0FF41C0EEF7E}"/>
+                <a16:creationId xmlns:a16="http://schemas.microsoft.com/office/drawing/2014/main" id="{D9A5FFF5-08C3-4BD9-85F9-247843E54DE9}"/>
               </a:ext>
             </a:extLst>
           </p:cNvPr>
@@ -2574,7 +2574,7 @@
           <p:cNvPr id="17" name="">
             <a:extLst xmlns:a="http://schemas.openxmlformats.org/drawingml/2006/main">
               <a:ext uri="{FF2B5EF4-FFF2-40B4-BE49-F238E27FC236}">
-                <a16:creationId xmlns:a16="http://schemas.microsoft.com/office/drawing/2014/main" id="{78AD1FD6-0DF2-4506-9C6E-B83C5D212138}"/>
+                <a16:creationId xmlns:a16="http://schemas.microsoft.com/office/drawing/2014/main" id="{86810D5B-6E64-456B-A607-ACC4DCCAC98E}"/>
               </a:ext>
             </a:extLst>
           </p:cNvPr>
@@ -2638,7 +2638,7 @@
           <p:cNvPr id="18" name="">
             <a:extLst xmlns:a="http://schemas.openxmlformats.org/drawingml/2006/main">
               <a:ext uri="{FF2B5EF4-FFF2-40B4-BE49-F238E27FC236}">
-                <a16:creationId xmlns:a16="http://schemas.microsoft.com/office/drawing/2014/main" id="{2F078105-90F4-45FD-BB47-37607870C072}"/>
+                <a16:creationId xmlns:a16="http://schemas.microsoft.com/office/drawing/2014/main" id="{F3575A0A-315F-4958-A84C-CAA6EB5CF102}"/>
               </a:ext>
             </a:extLst>
           </p:cNvPr>
@@ -2692,7 +2692,7 @@
                 <a:ea typeface="Aptos"/>
                 <a:cs typeface="Aptos"/>
               </a:rPr>
-              <a:t>5つの技術部門</a:t>
+              <a:t>18か月の runway</a:t>
             </a:r>
           </a:p>
         </p:txBody>
@@ -2702,7 +2702,7 @@
           <p:cNvPr id="19" name="">
             <a:extLst xmlns:a="http://schemas.openxmlformats.org/drawingml/2006/main">
               <a:ext uri="{FF2B5EF4-FFF2-40B4-BE49-F238E27FC236}">
-                <a16:creationId xmlns:a16="http://schemas.microsoft.com/office/drawing/2014/main" id="{340846BB-6813-41B1-B0E2-C29232051DD1}"/>
+                <a16:creationId xmlns:a16="http://schemas.microsoft.com/office/drawing/2014/main" id="{4B64E50F-8AA2-4EF7-9C26-55D4A2403870}"/>
               </a:ext>
             </a:extLst>
           </p:cNvPr>
@@ -2737,7 +2737,7 @@
           <p:cNvPr id="20" name="">
             <a:extLst xmlns:a="http://schemas.openxmlformats.org/drawingml/2006/main">
               <a:ext uri="{FF2B5EF4-FFF2-40B4-BE49-F238E27FC236}">
-                <a16:creationId xmlns:a16="http://schemas.microsoft.com/office/drawing/2014/main" id="{FE406E4B-2978-4612-923F-42B385F718C3}"/>
+                <a16:creationId xmlns:a16="http://schemas.microsoft.com/office/drawing/2014/main" id="{413BBDF9-1FAE-4879-8325-226123F0FF06}"/>
               </a:ext>
             </a:extLst>
           </p:cNvPr>
@@ -2801,7 +2801,7 @@
           <p:cNvPr id="21" name="">
             <a:extLst xmlns:a="http://schemas.openxmlformats.org/drawingml/2006/main">
               <a:ext uri="{FF2B5EF4-FFF2-40B4-BE49-F238E27FC236}">
-                <a16:creationId xmlns:a16="http://schemas.microsoft.com/office/drawing/2014/main" id="{16FAC6B9-A582-4FEC-A9B1-6EAE8D72B596}"/>
+                <a16:creationId xmlns:a16="http://schemas.microsoft.com/office/drawing/2014/main" id="{5F966D30-B5D2-4E64-8D89-FA99BD19D3B0}"/>
               </a:ext>
             </a:extLst>
           </p:cNvPr>
@@ -2855,7 +2855,7 @@
                 <a:ea typeface="Aptos"/>
                 <a:cs typeface="Aptos"/>
               </a:rPr>
-              <a:t>実行重視のリーンチーム</a:t>
+              <a:t>6つの製品ライン</a:t>
             </a:r>
           </a:p>
         </p:txBody>
@@ -2865,7 +2865,7 @@
           <p:cNvPr id="22" name="">
             <a:extLst xmlns:a="http://schemas.openxmlformats.org/drawingml/2006/main">
               <a:ext uri="{FF2B5EF4-FFF2-40B4-BE49-F238E27FC236}">
-                <a16:creationId xmlns:a16="http://schemas.microsoft.com/office/drawing/2014/main" id="{AAEC6A06-302E-4BF6-BBE4-D989B6822A86}"/>
+                <a16:creationId xmlns:a16="http://schemas.microsoft.com/office/drawing/2014/main" id="{F886DA54-D648-4FC1-817A-BFA1989D4B48}"/>
               </a:ext>
             </a:extLst>
           </p:cNvPr>
@@ -2929,7 +2929,7 @@
           <p:cNvPr id="23" name="">
             <a:extLst xmlns:a="http://schemas.openxmlformats.org/drawingml/2006/main">
               <a:ext uri="{FF2B5EF4-FFF2-40B4-BE49-F238E27FC236}">
-                <a16:creationId xmlns:a16="http://schemas.microsoft.com/office/drawing/2014/main" id="{D259D8B9-BC46-4F61-A0C0-7D623FB35078}"/>
+                <a16:creationId xmlns:a16="http://schemas.microsoft.com/office/drawing/2014/main" id="{224D5173-71C2-4B11-ACB6-94D4A39E1157}"/>
               </a:ext>
             </a:extLst>
           </p:cNvPr>
@@ -2962,7 +2962,7 @@
           <p:cNvPr id="24" name="">
             <a:extLst xmlns:a="http://schemas.openxmlformats.org/drawingml/2006/main">
               <a:ext uri="{FF2B5EF4-FFF2-40B4-BE49-F238E27FC236}">
-                <a16:creationId xmlns:a16="http://schemas.microsoft.com/office/drawing/2014/main" id="{95686F4E-3893-4722-B5A4-2F071C3906C9}"/>
+                <a16:creationId xmlns:a16="http://schemas.microsoft.com/office/drawing/2014/main" id="{A98B1D68-C064-41A9-9B4C-06D5983FB451}"/>
               </a:ext>
             </a:extLst>
           </p:cNvPr>
@@ -3026,7 +3026,7 @@
           <p:cNvPr id="25" name="">
             <a:extLst xmlns:a="http://schemas.openxmlformats.org/drawingml/2006/main">
               <a:ext uri="{FF2B5EF4-FFF2-40B4-BE49-F238E27FC236}">
-                <a16:creationId xmlns:a16="http://schemas.microsoft.com/office/drawing/2014/main" id="{291D58A7-1B19-4FC0-80D3-ADA9013926EE}"/>
+                <a16:creationId xmlns:a16="http://schemas.microsoft.com/office/drawing/2014/main" id="{0180650A-2E37-4748-8422-CB27B39F655B}"/>
               </a:ext>
             </a:extLst>
           </p:cNvPr>
@@ -3088,7 +3088,7 @@
     </p:spTree>
     <p:extLst>
       <p:ext uri="{BB962C8B-B14F-4D97-AF65-F5344CB8AC3E}">
-        <p14:creationId xmlns:p14="http://schemas.microsoft.com/office/powerpoint/2010/main" val="1900408864"/>
+        <p14:creationId xmlns:p14="http://schemas.microsoft.com/office/powerpoint/2010/main" val="354646048"/>
       </p:ext>
     </p:extLst>
   </p:cSld>
@@ -3116,7 +3116,7 @@
           <p:nvPr/>
         </p:nvPicPr>
         <p:blipFill>
-          <a:blip xmlns:r="http://schemas.openxmlformats.org/officeDocument/2006/relationships" xmlns:a="http://schemas.openxmlformats.org/drawingml/2006/main" r:embed="Rb222781c1df14c25"/>
+          <a:blip xmlns:r="http://schemas.openxmlformats.org/officeDocument/2006/relationships" xmlns:a="http://schemas.openxmlformats.org/drawingml/2006/main" r:embed="R9831f8787ffa466f"/>
           <a:srcRect xmlns:a="http://schemas.openxmlformats.org/drawingml/2006/main" l="0" t="27" r="0" b="27"/>
           <a:stretch xmlns:a="http://schemas.openxmlformats.org/drawingml/2006/main">
             <a:fillRect l="0" t="0" r="0" b="0"/>
@@ -3137,7 +3137,7 @@
           <p:cNvPr id="2" name="">
             <a:extLst xmlns:a="http://schemas.openxmlformats.org/drawingml/2006/main">
               <a:ext uri="{FF2B5EF4-FFF2-40B4-BE49-F238E27FC236}">
-                <a16:creationId xmlns:a16="http://schemas.microsoft.com/office/drawing/2014/main" id="{4D808571-93C1-4E1D-8EBF-FBA88C613EA2}"/>
+                <a16:creationId xmlns:a16="http://schemas.microsoft.com/office/drawing/2014/main" id="{1DCFD128-01F8-4DAD-BCDA-3759CAA0C165}"/>
               </a:ext>
             </a:extLst>
           </p:cNvPr>
@@ -3174,7 +3174,7 @@
           <p:cNvPr id="3" name="">
             <a:extLst xmlns:a="http://schemas.openxmlformats.org/drawingml/2006/main">
               <a:ext uri="{FF2B5EF4-FFF2-40B4-BE49-F238E27FC236}">
-                <a16:creationId xmlns:a16="http://schemas.microsoft.com/office/drawing/2014/main" id="{523BE05B-3936-4C05-A7F9-F99423665417}"/>
+                <a16:creationId xmlns:a16="http://schemas.microsoft.com/office/drawing/2014/main" id="{FDB28DB4-47FA-454C-87D2-91921B328AA1}"/>
               </a:ext>
             </a:extLst>
           </p:cNvPr>
@@ -3211,7 +3211,7 @@
           <p:cNvPr id="4" name="">
             <a:extLst xmlns:a="http://schemas.openxmlformats.org/drawingml/2006/main">
               <a:ext uri="{FF2B5EF4-FFF2-40B4-BE49-F238E27FC236}">
-                <a16:creationId xmlns:a16="http://schemas.microsoft.com/office/drawing/2014/main" id="{C63AD897-8D21-4E11-9413-3415CBCBDFA8}"/>
+                <a16:creationId xmlns:a16="http://schemas.microsoft.com/office/drawing/2014/main" id="{1DD3FA56-411D-4240-AFFB-7E829390F4A2}"/>
               </a:ext>
             </a:extLst>
           </p:cNvPr>
@@ -3275,7 +3275,7 @@
           <p:cNvPr id="5" name="">
             <a:extLst xmlns:a="http://schemas.openxmlformats.org/drawingml/2006/main">
               <a:ext uri="{FF2B5EF4-FFF2-40B4-BE49-F238E27FC236}">
-                <a16:creationId xmlns:a16="http://schemas.microsoft.com/office/drawing/2014/main" id="{7FF7D861-85CD-4D6E-BF98-467345404BA4}"/>
+                <a16:creationId xmlns:a16="http://schemas.microsoft.com/office/drawing/2014/main" id="{1184D4D0-D8C9-439B-8F8E-CD2B87D3DF33}"/>
               </a:ext>
             </a:extLst>
           </p:cNvPr>
@@ -3339,7 +3339,7 @@
           <p:cNvPr id="6" name="">
             <a:extLst xmlns:a="http://schemas.openxmlformats.org/drawingml/2006/main">
               <a:ext uri="{FF2B5EF4-FFF2-40B4-BE49-F238E27FC236}">
-                <a16:creationId xmlns:a16="http://schemas.microsoft.com/office/drawing/2014/main" id="{70A60620-5E8F-40A1-8C49-865B48F48281}"/>
+                <a16:creationId xmlns:a16="http://schemas.microsoft.com/office/drawing/2014/main" id="{8970FDB1-3443-4F77-AC9D-8B494D8BA09E}"/>
               </a:ext>
             </a:extLst>
           </p:cNvPr>
@@ -3403,7 +3403,7 @@
           <p:cNvPr id="7" name="">
             <a:extLst xmlns:a="http://schemas.openxmlformats.org/drawingml/2006/main">
               <a:ext uri="{FF2B5EF4-FFF2-40B4-BE49-F238E27FC236}">
-                <a16:creationId xmlns:a16="http://schemas.microsoft.com/office/drawing/2014/main" id="{E40B39BD-E16D-4252-8C7A-21162686E7A4}"/>
+                <a16:creationId xmlns:a16="http://schemas.microsoft.com/office/drawing/2014/main" id="{2C5EE1D3-E7BC-4A9C-95AF-A410462F702B}"/>
               </a:ext>
             </a:extLst>
           </p:cNvPr>
@@ -3438,7 +3438,7 @@
           <p:cNvPr id="8" name="">
             <a:extLst xmlns:a="http://schemas.openxmlformats.org/drawingml/2006/main">
               <a:ext uri="{FF2B5EF4-FFF2-40B4-BE49-F238E27FC236}">
-                <a16:creationId xmlns:a16="http://schemas.microsoft.com/office/drawing/2014/main" id="{115AAF94-38E1-499A-8F0A-A2181D8EF899}"/>
+                <a16:creationId xmlns:a16="http://schemas.microsoft.com/office/drawing/2014/main" id="{08BB194A-91FF-46F9-93C8-0C78C2461A09}"/>
               </a:ext>
             </a:extLst>
           </p:cNvPr>
@@ -3502,7 +3502,7 @@
           <p:cNvPr id="9" name="">
             <a:extLst xmlns:a="http://schemas.openxmlformats.org/drawingml/2006/main">
               <a:ext uri="{FF2B5EF4-FFF2-40B4-BE49-F238E27FC236}">
-                <a16:creationId xmlns:a16="http://schemas.microsoft.com/office/drawing/2014/main" id="{C57B0AAF-94EC-46FF-BDF6-5F72E6BE41D9}"/>
+                <a16:creationId xmlns:a16="http://schemas.microsoft.com/office/drawing/2014/main" id="{EB3100A2-5CCB-4692-AEDA-5F6BBEE8D935}"/>
               </a:ext>
             </a:extLst>
           </p:cNvPr>
@@ -3537,7 +3537,7 @@
           <p:cNvPr id="10" name="">
             <a:extLst xmlns:a="http://schemas.openxmlformats.org/drawingml/2006/main">
               <a:ext uri="{FF2B5EF4-FFF2-40B4-BE49-F238E27FC236}">
-                <a16:creationId xmlns:a16="http://schemas.microsoft.com/office/drawing/2014/main" id="{DEA97153-2885-429E-82D5-1F7E36FEEAA3}"/>
+                <a16:creationId xmlns:a16="http://schemas.microsoft.com/office/drawing/2014/main" id="{B10AAB81-085F-4CF8-892E-B870C5272F3B}"/>
               </a:ext>
             </a:extLst>
           </p:cNvPr>
@@ -3601,7 +3601,7 @@
           <p:cNvPr id="11" name="">
             <a:extLst xmlns:a="http://schemas.openxmlformats.org/drawingml/2006/main">
               <a:ext uri="{FF2B5EF4-FFF2-40B4-BE49-F238E27FC236}">
-                <a16:creationId xmlns:a16="http://schemas.microsoft.com/office/drawing/2014/main" id="{DFF8C44A-8B4B-4A74-9679-9106122A7E41}"/>
+                <a16:creationId xmlns:a16="http://schemas.microsoft.com/office/drawing/2014/main" id="{295E1C8B-B21D-4CA6-9DC9-C65C7515AA44}"/>
               </a:ext>
             </a:extLst>
           </p:cNvPr>
@@ -3636,7 +3636,7 @@
           <p:cNvPr id="12" name="">
             <a:extLst xmlns:a="http://schemas.openxmlformats.org/drawingml/2006/main">
               <a:ext uri="{FF2B5EF4-FFF2-40B4-BE49-F238E27FC236}">
-                <a16:creationId xmlns:a16="http://schemas.microsoft.com/office/drawing/2014/main" id="{8DE10D64-D426-40A6-A063-A401419518AD}"/>
+                <a16:creationId xmlns:a16="http://schemas.microsoft.com/office/drawing/2014/main" id="{CD160E8E-F935-4891-8433-313F3281505D}"/>
               </a:ext>
             </a:extLst>
           </p:cNvPr>
@@ -3700,7 +3700,7 @@
           <p:cNvPr id="13" name="">
             <a:extLst xmlns:a="http://schemas.openxmlformats.org/drawingml/2006/main">
               <a:ext uri="{FF2B5EF4-FFF2-40B4-BE49-F238E27FC236}">
-                <a16:creationId xmlns:a16="http://schemas.microsoft.com/office/drawing/2014/main" id="{DF8494EA-1B3D-40A7-93A1-D3601B8ED751}"/>
+                <a16:creationId xmlns:a16="http://schemas.microsoft.com/office/drawing/2014/main" id="{D70E020E-3E76-4F19-B95B-E5EE986145DA}"/>
               </a:ext>
             </a:extLst>
           </p:cNvPr>
@@ -3735,7 +3735,7 @@
           <p:cNvPr id="14" name="">
             <a:extLst xmlns:a="http://schemas.openxmlformats.org/drawingml/2006/main">
               <a:ext uri="{FF2B5EF4-FFF2-40B4-BE49-F238E27FC236}">
-                <a16:creationId xmlns:a16="http://schemas.microsoft.com/office/drawing/2014/main" id="{1081CD64-FFCB-452F-B054-F6A68BC8818D}"/>
+                <a16:creationId xmlns:a16="http://schemas.microsoft.com/office/drawing/2014/main" id="{2D8AA5AB-62EF-479C-961C-59AEC02BDCBC}"/>
               </a:ext>
             </a:extLst>
           </p:cNvPr>
@@ -3799,7 +3799,7 @@
           <p:cNvPr id="15" name="">
             <a:extLst xmlns:a="http://schemas.openxmlformats.org/drawingml/2006/main">
               <a:ext uri="{FF2B5EF4-FFF2-40B4-BE49-F238E27FC236}">
-                <a16:creationId xmlns:a16="http://schemas.microsoft.com/office/drawing/2014/main" id="{7D680BD3-B117-4251-AB00-B2CEB27C5E65}"/>
+                <a16:creationId xmlns:a16="http://schemas.microsoft.com/office/drawing/2014/main" id="{90E8F372-AE58-4CBA-B745-EF1C0B1F3D23}"/>
               </a:ext>
             </a:extLst>
           </p:cNvPr>
@@ -3863,7 +3863,7 @@
           <p:cNvPr id="16" name="">
             <a:extLst xmlns:a="http://schemas.openxmlformats.org/drawingml/2006/main">
               <a:ext uri="{FF2B5EF4-FFF2-40B4-BE49-F238E27FC236}">
-                <a16:creationId xmlns:a16="http://schemas.microsoft.com/office/drawing/2014/main" id="{F2E840F4-6F77-4A06-BB78-5CE065AA12D1}"/>
+                <a16:creationId xmlns:a16="http://schemas.microsoft.com/office/drawing/2014/main" id="{DFC85BAE-8893-49C7-B019-BEC1715B96D7}"/>
               </a:ext>
             </a:extLst>
           </p:cNvPr>
@@ -3927,7 +3927,7 @@
           <p:cNvPr id="17" name="">
             <a:extLst xmlns:a="http://schemas.openxmlformats.org/drawingml/2006/main">
               <a:ext uri="{FF2B5EF4-FFF2-40B4-BE49-F238E27FC236}">
-                <a16:creationId xmlns:a16="http://schemas.microsoft.com/office/drawing/2014/main" id="{61A59909-2DAF-462E-A136-C62D7BD53E37}"/>
+                <a16:creationId xmlns:a16="http://schemas.microsoft.com/office/drawing/2014/main" id="{DB4EA3E8-ECF5-4383-BEC3-352243AB0026}"/>
               </a:ext>
             </a:extLst>
           </p:cNvPr>
@@ -3960,7 +3960,7 @@
           <p:cNvPr id="18" name="">
             <a:extLst xmlns:a="http://schemas.openxmlformats.org/drawingml/2006/main">
               <a:ext uri="{FF2B5EF4-FFF2-40B4-BE49-F238E27FC236}">
-                <a16:creationId xmlns:a16="http://schemas.microsoft.com/office/drawing/2014/main" id="{93585744-035D-4B0A-AE01-C33DBEB1A147}"/>
+                <a16:creationId xmlns:a16="http://schemas.microsoft.com/office/drawing/2014/main" id="{F9586135-2357-42C3-A93D-CDCA1E39A28A}"/>
               </a:ext>
             </a:extLst>
           </p:cNvPr>
@@ -4024,7 +4024,7 @@
           <p:cNvPr id="19" name="">
             <a:extLst xmlns:a="http://schemas.openxmlformats.org/drawingml/2006/main">
               <a:ext uri="{FF2B5EF4-FFF2-40B4-BE49-F238E27FC236}">
-                <a16:creationId xmlns:a16="http://schemas.microsoft.com/office/drawing/2014/main" id="{CC5B306D-FB58-4D73-B6F7-2467C3E236B6}"/>
+                <a16:creationId xmlns:a16="http://schemas.microsoft.com/office/drawing/2014/main" id="{0D7D3375-4943-404D-AB94-448BF6D87988}"/>
               </a:ext>
             </a:extLst>
           </p:cNvPr>
@@ -4086,7 +4086,7 @@
     </p:spTree>
     <p:extLst>
       <p:ext uri="{BB962C8B-B14F-4D97-AF65-F5344CB8AC3E}">
-        <p14:creationId xmlns:p14="http://schemas.microsoft.com/office/powerpoint/2010/main" val="1598167799"/>
+        <p14:creationId xmlns:p14="http://schemas.microsoft.com/office/powerpoint/2010/main" val="697362218"/>
       </p:ext>
     </p:extLst>
   </p:cSld>
@@ -4114,7 +4114,7 @@
           <p:nvPr/>
         </p:nvPicPr>
         <p:blipFill>
-          <a:blip xmlns:r="http://schemas.openxmlformats.org/officeDocument/2006/relationships" xmlns:a="http://schemas.openxmlformats.org/drawingml/2006/main" r:embed="R3be6702fcb894c8e"/>
+          <a:blip xmlns:r="http://schemas.openxmlformats.org/officeDocument/2006/relationships" xmlns:a="http://schemas.openxmlformats.org/drawingml/2006/main" r:embed="Rbae4fdc801cf468c"/>
           <a:srcRect xmlns:a="http://schemas.openxmlformats.org/drawingml/2006/main" l="0" t="27" r="0" b="27"/>
           <a:stretch xmlns:a="http://schemas.openxmlformats.org/drawingml/2006/main">
             <a:fillRect l="0" t="0" r="0" b="0"/>
@@ -4135,7 +4135,7 @@
           <p:cNvPr id="2" name="">
             <a:extLst xmlns:a="http://schemas.openxmlformats.org/drawingml/2006/main">
               <a:ext uri="{FF2B5EF4-FFF2-40B4-BE49-F238E27FC236}">
-                <a16:creationId xmlns:a16="http://schemas.microsoft.com/office/drawing/2014/main" id="{4606D637-300A-4347-9692-66C4072EC936}"/>
+                <a16:creationId xmlns:a16="http://schemas.microsoft.com/office/drawing/2014/main" id="{79546D3C-3E16-44DA-8A50-D8896610CD2E}"/>
               </a:ext>
             </a:extLst>
           </p:cNvPr>
@@ -4172,7 +4172,7 @@
           <p:cNvPr id="3" name="">
             <a:extLst xmlns:a="http://schemas.openxmlformats.org/drawingml/2006/main">
               <a:ext uri="{FF2B5EF4-FFF2-40B4-BE49-F238E27FC236}">
-                <a16:creationId xmlns:a16="http://schemas.microsoft.com/office/drawing/2014/main" id="{6AD7A16D-1F63-4605-8612-669A7C15B489}"/>
+                <a16:creationId xmlns:a16="http://schemas.microsoft.com/office/drawing/2014/main" id="{631CF69E-F8CA-4402-B4E3-28E00FFAEC89}"/>
               </a:ext>
             </a:extLst>
           </p:cNvPr>
@@ -4209,7 +4209,7 @@
           <p:cNvPr id="4" name="">
             <a:extLst xmlns:a="http://schemas.openxmlformats.org/drawingml/2006/main">
               <a:ext uri="{FF2B5EF4-FFF2-40B4-BE49-F238E27FC236}">
-                <a16:creationId xmlns:a16="http://schemas.microsoft.com/office/drawing/2014/main" id="{C7324A3F-418C-4DB9-B932-E680E16C880D}"/>
+                <a16:creationId xmlns:a16="http://schemas.microsoft.com/office/drawing/2014/main" id="{E8D40677-F1B2-49F9-9907-1C6876BB0964}"/>
               </a:ext>
             </a:extLst>
           </p:cNvPr>
@@ -4273,7 +4273,7 @@
           <p:cNvPr id="5" name="">
             <a:extLst xmlns:a="http://schemas.openxmlformats.org/drawingml/2006/main">
               <a:ext uri="{FF2B5EF4-FFF2-40B4-BE49-F238E27FC236}">
-                <a16:creationId xmlns:a16="http://schemas.microsoft.com/office/drawing/2014/main" id="{33536A66-85E8-44BD-B58F-A50671CFF063}"/>
+                <a16:creationId xmlns:a16="http://schemas.microsoft.com/office/drawing/2014/main" id="{AF1DCEE8-8259-475F-BC4A-B7C10591B83F}"/>
               </a:ext>
             </a:extLst>
           </p:cNvPr>
@@ -4337,7 +4337,7 @@
           <p:cNvPr id="6" name="">
             <a:extLst xmlns:a="http://schemas.openxmlformats.org/drawingml/2006/main">
               <a:ext uri="{FF2B5EF4-FFF2-40B4-BE49-F238E27FC236}">
-                <a16:creationId xmlns:a16="http://schemas.microsoft.com/office/drawing/2014/main" id="{66129025-9080-4DFF-B283-BAE3FFC3D6B4}"/>
+                <a16:creationId xmlns:a16="http://schemas.microsoft.com/office/drawing/2014/main" id="{BAA23FD7-2444-481C-A307-32AB0C275CF7}"/>
               </a:ext>
             </a:extLst>
           </p:cNvPr>
@@ -4401,7 +4401,7 @@
           <p:cNvPr id="7" name="">
             <a:extLst xmlns:a="http://schemas.openxmlformats.org/drawingml/2006/main">
               <a:ext uri="{FF2B5EF4-FFF2-40B4-BE49-F238E27FC236}">
-                <a16:creationId xmlns:a16="http://schemas.microsoft.com/office/drawing/2014/main" id="{98AA0B26-661F-4962-BCDC-0D130AD11ECE}"/>
+                <a16:creationId xmlns:a16="http://schemas.microsoft.com/office/drawing/2014/main" id="{1ABD26A6-0F4F-4634-BFD4-969ACDECDB17}"/>
               </a:ext>
             </a:extLst>
           </p:cNvPr>
@@ -4436,7 +4436,7 @@
           <p:cNvPr id="8" name="">
             <a:extLst xmlns:a="http://schemas.openxmlformats.org/drawingml/2006/main">
               <a:ext uri="{FF2B5EF4-FFF2-40B4-BE49-F238E27FC236}">
-                <a16:creationId xmlns:a16="http://schemas.microsoft.com/office/drawing/2014/main" id="{92E0A4F1-A265-4826-AB2F-AFF37A040E05}"/>
+                <a16:creationId xmlns:a16="http://schemas.microsoft.com/office/drawing/2014/main" id="{A3C8C912-7BAC-4506-86BF-5ADCADCAFE1B}"/>
               </a:ext>
             </a:extLst>
           </p:cNvPr>
@@ -4500,7 +4500,7 @@
           <p:cNvPr id="9" name="">
             <a:extLst xmlns:a="http://schemas.openxmlformats.org/drawingml/2006/main">
               <a:ext uri="{FF2B5EF4-FFF2-40B4-BE49-F238E27FC236}">
-                <a16:creationId xmlns:a16="http://schemas.microsoft.com/office/drawing/2014/main" id="{8064884D-E1D2-41E5-B16C-B8F80B0B007B}"/>
+                <a16:creationId xmlns:a16="http://schemas.microsoft.com/office/drawing/2014/main" id="{92B2547F-B1AE-4F6C-B87A-802DDBC94675}"/>
               </a:ext>
             </a:extLst>
           </p:cNvPr>
@@ -4564,7 +4564,7 @@
           <p:cNvPr id="10" name="">
             <a:extLst xmlns:a="http://schemas.openxmlformats.org/drawingml/2006/main">
               <a:ext uri="{FF2B5EF4-FFF2-40B4-BE49-F238E27FC236}">
-                <a16:creationId xmlns:a16="http://schemas.microsoft.com/office/drawing/2014/main" id="{77D7F72F-D871-4D9D-ADE6-56B550085075}"/>
+                <a16:creationId xmlns:a16="http://schemas.microsoft.com/office/drawing/2014/main" id="{7D1A2F75-0B37-4C39-B9F3-1B40D4D0C193}"/>
               </a:ext>
             </a:extLst>
           </p:cNvPr>
@@ -4597,7 +4597,7 @@
           <p:cNvPr id="11" name="">
             <a:extLst xmlns:a="http://schemas.openxmlformats.org/drawingml/2006/main">
               <a:ext uri="{FF2B5EF4-FFF2-40B4-BE49-F238E27FC236}">
-                <a16:creationId xmlns:a16="http://schemas.microsoft.com/office/drawing/2014/main" id="{EB9D611E-04CC-4D22-861C-F00BFF0DB42C}"/>
+                <a16:creationId xmlns:a16="http://schemas.microsoft.com/office/drawing/2014/main" id="{33A9016A-B655-4B1A-9869-5760CBDE7CC4}"/>
               </a:ext>
             </a:extLst>
           </p:cNvPr>
@@ -4632,7 +4632,7 @@
           <p:cNvPr id="12" name="">
             <a:extLst xmlns:a="http://schemas.openxmlformats.org/drawingml/2006/main">
               <a:ext uri="{FF2B5EF4-FFF2-40B4-BE49-F238E27FC236}">
-                <a16:creationId xmlns:a16="http://schemas.microsoft.com/office/drawing/2014/main" id="{2F367079-DE8E-405E-BBD0-EBF39DC361B1}"/>
+                <a16:creationId xmlns:a16="http://schemas.microsoft.com/office/drawing/2014/main" id="{87715DAE-9005-45B6-B4E1-4FCF8E2329E6}"/>
               </a:ext>
             </a:extLst>
           </p:cNvPr>
@@ -4696,7 +4696,7 @@
           <p:cNvPr id="13" name="">
             <a:extLst xmlns:a="http://schemas.openxmlformats.org/drawingml/2006/main">
               <a:ext uri="{FF2B5EF4-FFF2-40B4-BE49-F238E27FC236}">
-                <a16:creationId xmlns:a16="http://schemas.microsoft.com/office/drawing/2014/main" id="{AA3F5355-B9EB-47CA-B4B0-F331B44F3951}"/>
+                <a16:creationId xmlns:a16="http://schemas.microsoft.com/office/drawing/2014/main" id="{49D2CF9F-478E-4F20-87FD-3247FDE1DA92}"/>
               </a:ext>
             </a:extLst>
           </p:cNvPr>
@@ -4760,7 +4760,7 @@
           <p:cNvPr id="14" name="">
             <a:extLst xmlns:a="http://schemas.openxmlformats.org/drawingml/2006/main">
               <a:ext uri="{FF2B5EF4-FFF2-40B4-BE49-F238E27FC236}">
-                <a16:creationId xmlns:a16="http://schemas.microsoft.com/office/drawing/2014/main" id="{F71ACE8F-0CAF-403B-B4AD-821A5CA01978}"/>
+                <a16:creationId xmlns:a16="http://schemas.microsoft.com/office/drawing/2014/main" id="{3FFEFCD2-9416-49F8-9B2B-04E20D2EC618}"/>
               </a:ext>
             </a:extLst>
           </p:cNvPr>
@@ -4793,7 +4793,7 @@
           <p:cNvPr id="15" name="">
             <a:extLst xmlns:a="http://schemas.openxmlformats.org/drawingml/2006/main">
               <a:ext uri="{FF2B5EF4-FFF2-40B4-BE49-F238E27FC236}">
-                <a16:creationId xmlns:a16="http://schemas.microsoft.com/office/drawing/2014/main" id="{D184A219-895A-4629-89E2-73D8FD2B2D2B}"/>
+                <a16:creationId xmlns:a16="http://schemas.microsoft.com/office/drawing/2014/main" id="{3A2A4869-CB05-4CFD-924A-8946C9B01B53}"/>
               </a:ext>
             </a:extLst>
           </p:cNvPr>
@@ -4828,7 +4828,7 @@
           <p:cNvPr id="16" name="">
             <a:extLst xmlns:a="http://schemas.openxmlformats.org/drawingml/2006/main">
               <a:ext uri="{FF2B5EF4-FFF2-40B4-BE49-F238E27FC236}">
-                <a16:creationId xmlns:a16="http://schemas.microsoft.com/office/drawing/2014/main" id="{C5A93EB2-4EA7-4436-97D7-7436F1F925D2}"/>
+                <a16:creationId xmlns:a16="http://schemas.microsoft.com/office/drawing/2014/main" id="{AB9C8A1E-327C-430D-AA94-128F6FFF1DAF}"/>
               </a:ext>
             </a:extLst>
           </p:cNvPr>
@@ -4892,7 +4892,7 @@
           <p:cNvPr id="17" name="">
             <a:extLst xmlns:a="http://schemas.openxmlformats.org/drawingml/2006/main">
               <a:ext uri="{FF2B5EF4-FFF2-40B4-BE49-F238E27FC236}">
-                <a16:creationId xmlns:a16="http://schemas.microsoft.com/office/drawing/2014/main" id="{C06A91B6-156E-446D-BF73-D33A2DC4B462}"/>
+                <a16:creationId xmlns:a16="http://schemas.microsoft.com/office/drawing/2014/main" id="{64C8E4C5-A4CB-40F2-A34F-D2079E93FF4F}"/>
               </a:ext>
             </a:extLst>
           </p:cNvPr>
@@ -4956,7 +4956,7 @@
           <p:cNvPr id="18" name="">
             <a:extLst xmlns:a="http://schemas.openxmlformats.org/drawingml/2006/main">
               <a:ext uri="{FF2B5EF4-FFF2-40B4-BE49-F238E27FC236}">
-                <a16:creationId xmlns:a16="http://schemas.microsoft.com/office/drawing/2014/main" id="{10FE8191-9C1B-4725-B820-92EC8B9848CE}"/>
+                <a16:creationId xmlns:a16="http://schemas.microsoft.com/office/drawing/2014/main" id="{BD1ECB52-6516-4929-AF87-2B0C02A15F16}"/>
               </a:ext>
             </a:extLst>
           </p:cNvPr>
@@ -5020,7 +5020,7 @@
           <p:cNvPr id="19" name="">
             <a:extLst xmlns:a="http://schemas.openxmlformats.org/drawingml/2006/main">
               <a:ext uri="{FF2B5EF4-FFF2-40B4-BE49-F238E27FC236}">
-                <a16:creationId xmlns:a16="http://schemas.microsoft.com/office/drawing/2014/main" id="{8FAB334A-1BDE-4200-B46C-92E18898BA7B}"/>
+                <a16:creationId xmlns:a16="http://schemas.microsoft.com/office/drawing/2014/main" id="{00F3D155-2091-4241-A342-78535414F088}"/>
               </a:ext>
             </a:extLst>
           </p:cNvPr>
@@ -5053,7 +5053,7 @@
           <p:cNvPr id="20" name="">
             <a:extLst xmlns:a="http://schemas.openxmlformats.org/drawingml/2006/main">
               <a:ext uri="{FF2B5EF4-FFF2-40B4-BE49-F238E27FC236}">
-                <a16:creationId xmlns:a16="http://schemas.microsoft.com/office/drawing/2014/main" id="{518259C8-9CE6-4261-B164-FFA6C5F48171}"/>
+                <a16:creationId xmlns:a16="http://schemas.microsoft.com/office/drawing/2014/main" id="{C59017FC-7EDD-4AF6-9415-2F108E314B4E}"/>
               </a:ext>
             </a:extLst>
           </p:cNvPr>
@@ -5117,7 +5117,7 @@
           <p:cNvPr id="21" name="">
             <a:extLst xmlns:a="http://schemas.openxmlformats.org/drawingml/2006/main">
               <a:ext uri="{FF2B5EF4-FFF2-40B4-BE49-F238E27FC236}">
-                <a16:creationId xmlns:a16="http://schemas.microsoft.com/office/drawing/2014/main" id="{14AEFB02-6E7B-4A52-9F7D-759F83369201}"/>
+                <a16:creationId xmlns:a16="http://schemas.microsoft.com/office/drawing/2014/main" id="{9C37B017-6E64-4BB8-92D9-513C97EA8F00}"/>
               </a:ext>
             </a:extLst>
           </p:cNvPr>
@@ -5179,7 +5179,7 @@
     </p:spTree>
     <p:extLst>
       <p:ext uri="{BB962C8B-B14F-4D97-AF65-F5344CB8AC3E}">
-        <p14:creationId xmlns:p14="http://schemas.microsoft.com/office/powerpoint/2010/main" val="99286632"/>
+        <p14:creationId xmlns:p14="http://schemas.microsoft.com/office/powerpoint/2010/main" val="374635160"/>
       </p:ext>
     </p:extLst>
   </p:cSld>
@@ -5207,7 +5207,7 @@
           <p:nvPr/>
         </p:nvPicPr>
         <p:blipFill>
-          <a:blip xmlns:r="http://schemas.openxmlformats.org/officeDocument/2006/relationships" xmlns:a="http://schemas.openxmlformats.org/drawingml/2006/main" r:embed="R0257c2d0833e47b3"/>
+          <a:blip xmlns:r="http://schemas.openxmlformats.org/officeDocument/2006/relationships" xmlns:a="http://schemas.openxmlformats.org/drawingml/2006/main" r:embed="R7a4a5cafc6b84b0e"/>
           <a:srcRect xmlns:a="http://schemas.openxmlformats.org/drawingml/2006/main" l="0" t="27" r="0" b="27"/>
           <a:stretch xmlns:a="http://schemas.openxmlformats.org/drawingml/2006/main">
             <a:fillRect l="0" t="0" r="0" b="0"/>
@@ -5228,7 +5228,7 @@
           <p:cNvPr id="2" name="">
             <a:extLst xmlns:a="http://schemas.openxmlformats.org/drawingml/2006/main">
               <a:ext uri="{FF2B5EF4-FFF2-40B4-BE49-F238E27FC236}">
-                <a16:creationId xmlns:a16="http://schemas.microsoft.com/office/drawing/2014/main" id="{3129B2E3-6492-4926-B328-9AA7D8C45E88}"/>
+                <a16:creationId xmlns:a16="http://schemas.microsoft.com/office/drawing/2014/main" id="{74C3908F-4EDB-489D-BE89-6E0F4E64B514}"/>
               </a:ext>
             </a:extLst>
           </p:cNvPr>
@@ -5265,7 +5265,7 @@
           <p:cNvPr id="3" name="">
             <a:extLst xmlns:a="http://schemas.openxmlformats.org/drawingml/2006/main">
               <a:ext uri="{FF2B5EF4-FFF2-40B4-BE49-F238E27FC236}">
-                <a16:creationId xmlns:a16="http://schemas.microsoft.com/office/drawing/2014/main" id="{19FC3CCD-4E5D-481B-9E8D-914B4174B99F}"/>
+                <a16:creationId xmlns:a16="http://schemas.microsoft.com/office/drawing/2014/main" id="{E02B0FA6-4EF2-46F0-851A-8E6A865DC4A9}"/>
               </a:ext>
             </a:extLst>
           </p:cNvPr>
@@ -5302,7 +5302,7 @@
           <p:cNvPr id="4" name="">
             <a:extLst xmlns:a="http://schemas.openxmlformats.org/drawingml/2006/main">
               <a:ext uri="{FF2B5EF4-FFF2-40B4-BE49-F238E27FC236}">
-                <a16:creationId xmlns:a16="http://schemas.microsoft.com/office/drawing/2014/main" id="{21FD6951-9A3A-4BC9-919B-86AA3FEABE5E}"/>
+                <a16:creationId xmlns:a16="http://schemas.microsoft.com/office/drawing/2014/main" id="{318EAD5E-E6FC-4FF5-B449-2F4145D27F86}"/>
               </a:ext>
             </a:extLst>
           </p:cNvPr>
@@ -5366,7 +5366,7 @@
           <p:cNvPr id="5" name="">
             <a:extLst xmlns:a="http://schemas.openxmlformats.org/drawingml/2006/main">
               <a:ext uri="{FF2B5EF4-FFF2-40B4-BE49-F238E27FC236}">
-                <a16:creationId xmlns:a16="http://schemas.microsoft.com/office/drawing/2014/main" id="{D9D08739-4EC8-4768-AA4B-DA2382A6842F}"/>
+                <a16:creationId xmlns:a16="http://schemas.microsoft.com/office/drawing/2014/main" id="{364182B0-F960-439D-893F-E55954EE4F07}"/>
               </a:ext>
             </a:extLst>
           </p:cNvPr>
@@ -5420,7 +5420,7 @@
                 <a:ea typeface="Aptos Display"/>
                 <a:cs typeface="Aptos Display"/>
               </a:rPr>
-              <a:t>製品、営業、人材を加速する資本とパートナーを求めています</a:t>
+              <a:t>有料パイロットと再現可能な製品に向けてUS$500K pre-seedを調達</a:t>
             </a:r>
           </a:p>
         </p:txBody>
@@ -5430,7 +5430,7 @@
           <p:cNvPr id="6" name="">
             <a:extLst xmlns:a="http://schemas.openxmlformats.org/drawingml/2006/main">
               <a:ext uri="{FF2B5EF4-FFF2-40B4-BE49-F238E27FC236}">
-                <a16:creationId xmlns:a16="http://schemas.microsoft.com/office/drawing/2014/main" id="{7574830F-C525-4A80-B383-53CED4252EEC}"/>
+                <a16:creationId xmlns:a16="http://schemas.microsoft.com/office/drawing/2014/main" id="{2F0E2B04-AAEF-4232-A52E-993C01468BA2}"/>
               </a:ext>
             </a:extLst>
           </p:cNvPr>
@@ -5484,7 +5484,7 @@
                 <a:ea typeface="Aptos"/>
                 <a:cs typeface="Aptos"/>
               </a:rPr>
-              <a:t>Tecnotitanはラテンアメリカ発でグローバルな野心を持つ複数部門型テクノロジー企業を構築しています。</a:t>
+              <a:t>このラウンドは18か月分を資金化し、AI・ソフトウェアサービスを自社製品、初期顧客、測定可能なユースケース、グローバル営業基盤へ変えます。</a:t>
             </a:r>
           </a:p>
         </p:txBody>
@@ -5494,7 +5494,7 @@
           <p:cNvPr id="7" name="">
             <a:extLst xmlns:a="http://schemas.openxmlformats.org/drawingml/2006/main">
               <a:ext uri="{FF2B5EF4-FFF2-40B4-BE49-F238E27FC236}">
-                <a16:creationId xmlns:a16="http://schemas.microsoft.com/office/drawing/2014/main" id="{9A481DCC-AEF8-4C91-8BB2-2580C1AD6CFB}"/>
+                <a16:creationId xmlns:a16="http://schemas.microsoft.com/office/drawing/2014/main" id="{753E508C-AFAD-430C-95D2-4254D70471E1}"/>
               </a:ext>
             </a:extLst>
           </p:cNvPr>
@@ -5529,7 +5529,7 @@
           <p:cNvPr id="8" name="">
             <a:extLst xmlns:a="http://schemas.openxmlformats.org/drawingml/2006/main">
               <a:ext uri="{FF2B5EF4-FFF2-40B4-BE49-F238E27FC236}">
-                <a16:creationId xmlns:a16="http://schemas.microsoft.com/office/drawing/2014/main" id="{2ED5BFBB-BF35-44BC-B83A-FD210F5D0B20}"/>
+                <a16:creationId xmlns:a16="http://schemas.microsoft.com/office/drawing/2014/main" id="{BFCBCF73-98CF-4C0C-8011-2B9497DB6513}"/>
               </a:ext>
             </a:extLst>
           </p:cNvPr>
@@ -5593,7 +5593,7 @@
           <p:cNvPr id="9" name="">
             <a:extLst xmlns:a="http://schemas.openxmlformats.org/drawingml/2006/main">
               <a:ext uri="{FF2B5EF4-FFF2-40B4-BE49-F238E27FC236}">
-                <a16:creationId xmlns:a16="http://schemas.microsoft.com/office/drawing/2014/main" id="{9740B989-0A98-40AA-A1CD-0E9B80EDBF38}"/>
+                <a16:creationId xmlns:a16="http://schemas.microsoft.com/office/drawing/2014/main" id="{527D8D4C-32F5-4132-914C-A20127DD6CED}"/>
               </a:ext>
             </a:extLst>
           </p:cNvPr>
@@ -5647,7 +5647,7 @@
                 <a:ea typeface="Aptos"/>
                 <a:cs typeface="Aptos"/>
               </a:rPr>
-              <a:t>製品</a:t>
+              <a:t>40% 製品とエンジニアリング</a:t>
             </a:r>
           </a:p>
         </p:txBody>
@@ -5657,7 +5657,7 @@
           <p:cNvPr id="10" name="">
             <a:extLst xmlns:a="http://schemas.openxmlformats.org/drawingml/2006/main">
               <a:ext uri="{FF2B5EF4-FFF2-40B4-BE49-F238E27FC236}">
-                <a16:creationId xmlns:a16="http://schemas.microsoft.com/office/drawing/2014/main" id="{EC849B36-3910-43B5-9A92-39E69851B7B6}"/>
+                <a16:creationId xmlns:a16="http://schemas.microsoft.com/office/drawing/2014/main" id="{CD2C1EEA-096E-4A5E-9AAE-AC0EC1A53A74}"/>
               </a:ext>
             </a:extLst>
           </p:cNvPr>
@@ -5692,7 +5692,7 @@
           <p:cNvPr id="11" name="">
             <a:extLst xmlns:a="http://schemas.openxmlformats.org/drawingml/2006/main">
               <a:ext uri="{FF2B5EF4-FFF2-40B4-BE49-F238E27FC236}">
-                <a16:creationId xmlns:a16="http://schemas.microsoft.com/office/drawing/2014/main" id="{E2483A74-851E-41F7-9500-BE6EED28AE2A}"/>
+                <a16:creationId xmlns:a16="http://schemas.microsoft.com/office/drawing/2014/main" id="{1F72B92F-40C9-4B52-BDDB-7C39B4D76736}"/>
               </a:ext>
             </a:extLst>
           </p:cNvPr>
@@ -5756,7 +5756,7 @@
           <p:cNvPr id="12" name="">
             <a:extLst xmlns:a="http://schemas.openxmlformats.org/drawingml/2006/main">
               <a:ext uri="{FF2B5EF4-FFF2-40B4-BE49-F238E27FC236}">
-                <a16:creationId xmlns:a16="http://schemas.microsoft.com/office/drawing/2014/main" id="{708E8D7F-7EDE-41DA-8139-2B5C47A09318}"/>
+                <a16:creationId xmlns:a16="http://schemas.microsoft.com/office/drawing/2014/main" id="{C73BCF83-F7A8-4DE2-85D0-BCFDCAEDEC23}"/>
               </a:ext>
             </a:extLst>
           </p:cNvPr>
@@ -5810,7 +5810,7 @@
                 <a:ea typeface="Aptos"/>
                 <a:cs typeface="Aptos"/>
               </a:rPr>
-              <a:t>営業</a:t>
+              <a:t>25% 営業とパイロット</a:t>
             </a:r>
           </a:p>
         </p:txBody>
@@ -5820,7 +5820,7 @@
           <p:cNvPr id="13" name="">
             <a:extLst xmlns:a="http://schemas.openxmlformats.org/drawingml/2006/main">
               <a:ext uri="{FF2B5EF4-FFF2-40B4-BE49-F238E27FC236}">
-                <a16:creationId xmlns:a16="http://schemas.microsoft.com/office/drawing/2014/main" id="{18D7424F-85A1-465F-A2AC-9E3D2FACD733}"/>
+                <a16:creationId xmlns:a16="http://schemas.microsoft.com/office/drawing/2014/main" id="{129FD915-4E68-4438-B214-7D60FAED8BAE}"/>
               </a:ext>
             </a:extLst>
           </p:cNvPr>
@@ -5855,7 +5855,7 @@
           <p:cNvPr id="14" name="">
             <a:extLst xmlns:a="http://schemas.openxmlformats.org/drawingml/2006/main">
               <a:ext uri="{FF2B5EF4-FFF2-40B4-BE49-F238E27FC236}">
-                <a16:creationId xmlns:a16="http://schemas.microsoft.com/office/drawing/2014/main" id="{F26AC35F-54D3-4A24-8AEB-99583225456C}"/>
+                <a16:creationId xmlns:a16="http://schemas.microsoft.com/office/drawing/2014/main" id="{D34077C6-8881-474C-9F90-D9E2A95229B9}"/>
               </a:ext>
             </a:extLst>
           </p:cNvPr>
@@ -5919,7 +5919,7 @@
           <p:cNvPr id="15" name="">
             <a:extLst xmlns:a="http://schemas.openxmlformats.org/drawingml/2006/main">
               <a:ext uri="{FF2B5EF4-FFF2-40B4-BE49-F238E27FC236}">
-                <a16:creationId xmlns:a16="http://schemas.microsoft.com/office/drawing/2014/main" id="{290DE233-DFAE-493E-BE9E-11465A47CB0F}"/>
+                <a16:creationId xmlns:a16="http://schemas.microsoft.com/office/drawing/2014/main" id="{D101181B-33F6-4CF3-8D11-009DE0E20179}"/>
               </a:ext>
             </a:extLst>
           </p:cNvPr>
@@ -5973,7 +5973,7 @@
                 <a:ea typeface="Aptos"/>
                 <a:cs typeface="Aptos"/>
               </a:rPr>
-              <a:t>技術人材</a:t>
+              <a:t>20% AIデリバリー</a:t>
             </a:r>
           </a:p>
         </p:txBody>
@@ -5983,7 +5983,7 @@
           <p:cNvPr id="16" name="">
             <a:extLst xmlns:a="http://schemas.openxmlformats.org/drawingml/2006/main">
               <a:ext uri="{FF2B5EF4-FFF2-40B4-BE49-F238E27FC236}">
-                <a16:creationId xmlns:a16="http://schemas.microsoft.com/office/drawing/2014/main" id="{A154AB03-DF37-4E86-8CD9-8F5EA4F32361}"/>
+                <a16:creationId xmlns:a16="http://schemas.microsoft.com/office/drawing/2014/main" id="{C232FBCD-5B53-4FEE-B089-5A3F8C5127B8}"/>
               </a:ext>
             </a:extLst>
           </p:cNvPr>
@@ -6018,7 +6018,7 @@
           <p:cNvPr id="17" name="">
             <a:extLst xmlns:a="http://schemas.openxmlformats.org/drawingml/2006/main">
               <a:ext uri="{FF2B5EF4-FFF2-40B4-BE49-F238E27FC236}">
-                <a16:creationId xmlns:a16="http://schemas.microsoft.com/office/drawing/2014/main" id="{7666D2C3-8EEC-40FA-BD34-4BF38039FD44}"/>
+                <a16:creationId xmlns:a16="http://schemas.microsoft.com/office/drawing/2014/main" id="{3440CFD4-9302-421D-A61D-4800C3C7BCDD}"/>
               </a:ext>
             </a:extLst>
           </p:cNvPr>
@@ -6082,7 +6082,7 @@
           <p:cNvPr id="18" name="">
             <a:extLst xmlns:a="http://schemas.openxmlformats.org/drawingml/2006/main">
               <a:ext uri="{FF2B5EF4-FFF2-40B4-BE49-F238E27FC236}">
-                <a16:creationId xmlns:a16="http://schemas.microsoft.com/office/drawing/2014/main" id="{96C307DE-436C-4A17-BF48-9AA31D0E984B}"/>
+                <a16:creationId xmlns:a16="http://schemas.microsoft.com/office/drawing/2014/main" id="{E5C78263-663B-4A13-817E-FCAD1578A94B}"/>
               </a:ext>
             </a:extLst>
           </p:cNvPr>
@@ -6136,7 +6136,7 @@
                 <a:ea typeface="Aptos"/>
                 <a:cs typeface="Aptos"/>
               </a:rPr>
-              <a:t>Data room</a:t>
+              <a:t>15% 運用とdata room</a:t>
             </a:r>
           </a:p>
         </p:txBody>
@@ -6146,7 +6146,7 @@
           <p:cNvPr id="19" name="">
             <a:extLst xmlns:a="http://schemas.openxmlformats.org/drawingml/2006/main">
               <a:ext uri="{FF2B5EF4-FFF2-40B4-BE49-F238E27FC236}">
-                <a16:creationId xmlns:a16="http://schemas.microsoft.com/office/drawing/2014/main" id="{03F85B5B-7CF2-4F67-BC3A-60B430E97F73}"/>
+                <a16:creationId xmlns:a16="http://schemas.microsoft.com/office/drawing/2014/main" id="{7D7B7502-6FFB-4AA2-B51A-F0EF7E42BB2F}"/>
               </a:ext>
             </a:extLst>
           </p:cNvPr>
@@ -6181,7 +6181,7 @@
           <p:cNvPr id="20" name="">
             <a:extLst xmlns:a="http://schemas.openxmlformats.org/drawingml/2006/main">
               <a:ext uri="{FF2B5EF4-FFF2-40B4-BE49-F238E27FC236}">
-                <a16:creationId xmlns:a16="http://schemas.microsoft.com/office/drawing/2014/main" id="{325E8BEB-CFDB-4768-B30A-A2B082351964}"/>
+                <a16:creationId xmlns:a16="http://schemas.microsoft.com/office/drawing/2014/main" id="{DC37DAC8-3716-40DC-A545-61223E3E7674}"/>
               </a:ext>
             </a:extLst>
           </p:cNvPr>
@@ -6245,7 +6245,7 @@
           <p:cNvPr id="21" name="">
             <a:extLst xmlns:a="http://schemas.openxmlformats.org/drawingml/2006/main">
               <a:ext uri="{FF2B5EF4-FFF2-40B4-BE49-F238E27FC236}">
-                <a16:creationId xmlns:a16="http://schemas.microsoft.com/office/drawing/2014/main" id="{51019338-DB1B-46DF-A37B-4BCCB85518AE}"/>
+                <a16:creationId xmlns:a16="http://schemas.microsoft.com/office/drawing/2014/main" id="{B7035CC5-DC83-41D0-A755-5BA19C34B72C}"/>
               </a:ext>
             </a:extLst>
           </p:cNvPr>
@@ -6309,7 +6309,7 @@
           <p:cNvPr id="22" name="">
             <a:extLst xmlns:a="http://schemas.openxmlformats.org/drawingml/2006/main">
               <a:ext uri="{FF2B5EF4-FFF2-40B4-BE49-F238E27FC236}">
-                <a16:creationId xmlns:a16="http://schemas.microsoft.com/office/drawing/2014/main" id="{9B1C83AD-102C-41D5-B187-B9C0D729A2E9}"/>
+                <a16:creationId xmlns:a16="http://schemas.microsoft.com/office/drawing/2014/main" id="{11582C4D-4749-4F32-8BF8-446DFFF7D1D9}"/>
               </a:ext>
             </a:extLst>
           </p:cNvPr>
@@ -6342,7 +6342,7 @@
           <p:cNvPr id="23" name="">
             <a:extLst xmlns:a="http://schemas.openxmlformats.org/drawingml/2006/main">
               <a:ext uri="{FF2B5EF4-FFF2-40B4-BE49-F238E27FC236}">
-                <a16:creationId xmlns:a16="http://schemas.microsoft.com/office/drawing/2014/main" id="{FB19DE0A-9FDA-4FB3-8DC4-35114C19645E}"/>
+                <a16:creationId xmlns:a16="http://schemas.microsoft.com/office/drawing/2014/main" id="{0C2657E8-9DC1-453F-BBD2-9FFB5B0BA396}"/>
               </a:ext>
             </a:extLst>
           </p:cNvPr>
@@ -6406,7 +6406,7 @@
           <p:cNvPr id="24" name="">
             <a:extLst xmlns:a="http://schemas.openxmlformats.org/drawingml/2006/main">
               <a:ext uri="{FF2B5EF4-FFF2-40B4-BE49-F238E27FC236}">
-                <a16:creationId xmlns:a16="http://schemas.microsoft.com/office/drawing/2014/main" id="{3EAA79BC-A1F5-4043-AA36-ED3D097E52CB}"/>
+                <a16:creationId xmlns:a16="http://schemas.microsoft.com/office/drawing/2014/main" id="{B162F089-8976-4F56-8C96-5CB2F4911C6B}"/>
               </a:ext>
             </a:extLst>
           </p:cNvPr>
@@ -6468,7 +6468,7 @@
     </p:spTree>
     <p:extLst>
       <p:ext uri="{BB962C8B-B14F-4D97-AF65-F5344CB8AC3E}">
-        <p14:creationId xmlns:p14="http://schemas.microsoft.com/office/powerpoint/2010/main" val="20088759"/>
+        <p14:creationId xmlns:p14="http://schemas.microsoft.com/office/powerpoint/2010/main" val="1330791136"/>
       </p:ext>
     </p:extLst>
   </p:cSld>
@@ -6496,7 +6496,7 @@
           <p:nvPr/>
         </p:nvPicPr>
         <p:blipFill>
-          <a:blip xmlns:r="http://schemas.openxmlformats.org/officeDocument/2006/relationships" xmlns:a="http://schemas.openxmlformats.org/drawingml/2006/main" r:embed="R5365c9f8023c4145"/>
+          <a:blip xmlns:r="http://schemas.openxmlformats.org/officeDocument/2006/relationships" xmlns:a="http://schemas.openxmlformats.org/drawingml/2006/main" r:embed="R67dbce3b0c394ee8"/>
           <a:srcRect xmlns:a="http://schemas.openxmlformats.org/drawingml/2006/main" l="0" t="27" r="0" b="27"/>
           <a:stretch xmlns:a="http://schemas.openxmlformats.org/drawingml/2006/main">
             <a:fillRect l="0" t="0" r="0" b="0"/>
@@ -6517,7 +6517,7 @@
           <p:cNvPr id="2" name="">
             <a:extLst xmlns:a="http://schemas.openxmlformats.org/drawingml/2006/main">
               <a:ext uri="{FF2B5EF4-FFF2-40B4-BE49-F238E27FC236}">
-                <a16:creationId xmlns:a16="http://schemas.microsoft.com/office/drawing/2014/main" id="{F3D0A550-4B72-4304-83B6-29B1556C387B}"/>
+                <a16:creationId xmlns:a16="http://schemas.microsoft.com/office/drawing/2014/main" id="{3E48A7EB-E71E-41A1-AAB7-9B38CB74B2E4}"/>
               </a:ext>
             </a:extLst>
           </p:cNvPr>
@@ -6554,7 +6554,7 @@
           <p:cNvPr id="3" name="">
             <a:extLst xmlns:a="http://schemas.openxmlformats.org/drawingml/2006/main">
               <a:ext uri="{FF2B5EF4-FFF2-40B4-BE49-F238E27FC236}">
-                <a16:creationId xmlns:a16="http://schemas.microsoft.com/office/drawing/2014/main" id="{CCE69F99-6490-425F-B048-54D5D56538F4}"/>
+                <a16:creationId xmlns:a16="http://schemas.microsoft.com/office/drawing/2014/main" id="{F51DD33F-DF84-435B-B506-BAD5D98F90A2}"/>
               </a:ext>
             </a:extLst>
           </p:cNvPr>
@@ -6591,7 +6591,7 @@
           <p:cNvPr id="4" name="">
             <a:extLst xmlns:a="http://schemas.openxmlformats.org/drawingml/2006/main">
               <a:ext uri="{FF2B5EF4-FFF2-40B4-BE49-F238E27FC236}">
-                <a16:creationId xmlns:a16="http://schemas.microsoft.com/office/drawing/2014/main" id="{D8632A67-F12B-4AF4-BBC9-F800CF84B5EB}"/>
+                <a16:creationId xmlns:a16="http://schemas.microsoft.com/office/drawing/2014/main" id="{BE58C54A-ACAA-493A-8BBE-CA5CD3E751E7}"/>
               </a:ext>
             </a:extLst>
           </p:cNvPr>
@@ -6645,7 +6645,7 @@
                 <a:ea typeface="Aptos"/>
                 <a:cs typeface="Aptos"/>
               </a:rPr>
-              <a:t>投資仮説</a:t>
+              <a:t>なぜ今か</a:t>
             </a:r>
           </a:p>
         </p:txBody>
@@ -6655,7 +6655,7 @@
           <p:cNvPr id="5" name="">
             <a:extLst xmlns:a="http://schemas.openxmlformats.org/drawingml/2006/main">
               <a:ext uri="{FF2B5EF4-FFF2-40B4-BE49-F238E27FC236}">
-                <a16:creationId xmlns:a16="http://schemas.microsoft.com/office/drawing/2014/main" id="{3F7EFB04-0B0A-4F81-A9EB-66A420E4A571}"/>
+                <a16:creationId xmlns:a16="http://schemas.microsoft.com/office/drawing/2014/main" id="{F8360988-7190-40A9-BBDC-C9D25E6603B5}"/>
               </a:ext>
             </a:extLst>
           </p:cNvPr>
@@ -6709,7 +6709,7 @@
                 <a:ea typeface="Aptos Display"/>
                 <a:cs typeface="Aptos Display"/>
               </a:rPr>
-              <a:t>企業に必要なのは助言者だけでなく、構築者です</a:t>
+              <a:t>企業に必要なのはAIの実装であり、追加の資料ではありません</a:t>
             </a:r>
           </a:p>
         </p:txBody>
@@ -6719,7 +6719,7 @@
           <p:cNvPr id="6" name="">
             <a:extLst xmlns:a="http://schemas.openxmlformats.org/drawingml/2006/main">
               <a:ext uri="{FF2B5EF4-FFF2-40B4-BE49-F238E27FC236}">
-                <a16:creationId xmlns:a16="http://schemas.microsoft.com/office/drawing/2014/main" id="{A9D2E701-5BE7-4A2D-A44C-8FAB4DCFA78F}"/>
+                <a16:creationId xmlns:a16="http://schemas.microsoft.com/office/drawing/2014/main" id="{C74EDE23-802F-4E03-922B-8D971F5D8266}"/>
               </a:ext>
             </a:extLst>
           </p:cNvPr>
@@ -6773,7 +6773,7 @@
                 <a:ea typeface="Aptos"/>
                 <a:cs typeface="Aptos"/>
               </a:rPr>
-              <a:t>本当のAI導入には、診断、ソフトウェア、データ、自動化、運用文化が一つのシステムとして機能する必要があります。</a:t>
+              <a:t>AI導入の圧力は、手作業、分散したデータ、社内構築力の不足を抱える企業にも広がっています。</a:t>
             </a:r>
           </a:p>
         </p:txBody>
@@ -6783,7 +6783,7 @@
           <p:cNvPr id="7" name="">
             <a:extLst xmlns:a="http://schemas.openxmlformats.org/drawingml/2006/main">
               <a:ext uri="{FF2B5EF4-FFF2-40B4-BE49-F238E27FC236}">
-                <a16:creationId xmlns:a16="http://schemas.microsoft.com/office/drawing/2014/main" id="{EBFBD22C-14C5-4819-A79A-9E5EDD2EC9CB}"/>
+                <a16:creationId xmlns:a16="http://schemas.microsoft.com/office/drawing/2014/main" id="{B6ECBBCF-A572-420C-A385-604249FF4A31}"/>
               </a:ext>
             </a:extLst>
           </p:cNvPr>
@@ -6818,7 +6818,7 @@
           <p:cNvPr id="8" name="">
             <a:extLst xmlns:a="http://schemas.openxmlformats.org/drawingml/2006/main">
               <a:ext uri="{FF2B5EF4-FFF2-40B4-BE49-F238E27FC236}">
-                <a16:creationId xmlns:a16="http://schemas.microsoft.com/office/drawing/2014/main" id="{03FFA0A9-94F2-4FCC-9D00-DA1A1C52E8B6}"/>
+                <a16:creationId xmlns:a16="http://schemas.microsoft.com/office/drawing/2014/main" id="{DD787FCD-873E-4972-86A5-DE78A5C94C10}"/>
               </a:ext>
             </a:extLst>
           </p:cNvPr>
@@ -6882,7 +6882,7 @@
           <p:cNvPr id="9" name="">
             <a:extLst xmlns:a="http://schemas.openxmlformats.org/drawingml/2006/main">
               <a:ext uri="{FF2B5EF4-FFF2-40B4-BE49-F238E27FC236}">
-                <a16:creationId xmlns:a16="http://schemas.microsoft.com/office/drawing/2014/main" id="{3C56E749-7548-4063-93BD-8E7533A6A9D2}"/>
+                <a16:creationId xmlns:a16="http://schemas.microsoft.com/office/drawing/2014/main" id="{8931902A-D9A8-4AFB-9AD9-229C830E3083}"/>
               </a:ext>
             </a:extLst>
           </p:cNvPr>
@@ -6936,7 +6936,7 @@
                 <a:ea typeface="Aptos"/>
                 <a:cs typeface="Aptos"/>
               </a:rPr>
-              <a:t>AI + ソフトウェア中核</a:t>
+              <a:t>明確な運用課題</a:t>
             </a:r>
           </a:p>
         </p:txBody>
@@ -6946,7 +6946,7 @@
           <p:cNvPr id="10" name="">
             <a:extLst xmlns:a="http://schemas.openxmlformats.org/drawingml/2006/main">
               <a:ext uri="{FF2B5EF4-FFF2-40B4-BE49-F238E27FC236}">
-                <a16:creationId xmlns:a16="http://schemas.microsoft.com/office/drawing/2014/main" id="{1EB79122-43CC-4845-ABAD-3A25776F9E22}"/>
+                <a16:creationId xmlns:a16="http://schemas.microsoft.com/office/drawing/2014/main" id="{3A00A254-5F59-430A-8137-704914A1AC1C}"/>
               </a:ext>
             </a:extLst>
           </p:cNvPr>
@@ -6979,7 +6979,7 @@
           <p:cNvPr id="11" name="">
             <a:extLst xmlns:a="http://schemas.openxmlformats.org/drawingml/2006/main">
               <a:ext uri="{FF2B5EF4-FFF2-40B4-BE49-F238E27FC236}">
-                <a16:creationId xmlns:a16="http://schemas.microsoft.com/office/drawing/2014/main" id="{C875ABB1-E380-47EB-A222-B016A11DC5BC}"/>
+                <a16:creationId xmlns:a16="http://schemas.microsoft.com/office/drawing/2014/main" id="{7D8BF4C8-7AC1-4AB8-A7CE-DB5A28E49012}"/>
               </a:ext>
             </a:extLst>
           </p:cNvPr>
@@ -7014,7 +7014,7 @@
           <p:cNvPr id="12" name="">
             <a:extLst xmlns:a="http://schemas.openxmlformats.org/drawingml/2006/main">
               <a:ext uri="{FF2B5EF4-FFF2-40B4-BE49-F238E27FC236}">
-                <a16:creationId xmlns:a16="http://schemas.microsoft.com/office/drawing/2014/main" id="{1B5B64FF-7681-463C-BF84-B2478D9D894B}"/>
+                <a16:creationId xmlns:a16="http://schemas.microsoft.com/office/drawing/2014/main" id="{2F2D7D3B-A8D0-49E0-BAB5-A3872A36B3BD}"/>
               </a:ext>
             </a:extLst>
           </p:cNvPr>
@@ -7078,7 +7078,7 @@
           <p:cNvPr id="13" name="">
             <a:extLst xmlns:a="http://schemas.openxmlformats.org/drawingml/2006/main">
               <a:ext uri="{FF2B5EF4-FFF2-40B4-BE49-F238E27FC236}">
-                <a16:creationId xmlns:a16="http://schemas.microsoft.com/office/drawing/2014/main" id="{05B0001C-6C2B-4784-8686-098A48580609}"/>
+                <a16:creationId xmlns:a16="http://schemas.microsoft.com/office/drawing/2014/main" id="{23742758-A696-42DD-BE63-90D656DC1124}"/>
               </a:ext>
             </a:extLst>
           </p:cNvPr>
@@ -7132,7 +7132,7 @@
                 <a:ea typeface="Aptos"/>
                 <a:cs typeface="Aptos"/>
               </a:rPr>
-              <a:t>導入を促すインタラクティブ体験</a:t>
+              <a:t>高まるAI需要</a:t>
             </a:r>
           </a:p>
         </p:txBody>
@@ -7142,7 +7142,7 @@
           <p:cNvPr id="14" name="">
             <a:extLst xmlns:a="http://schemas.openxmlformats.org/drawingml/2006/main">
               <a:ext uri="{FF2B5EF4-FFF2-40B4-BE49-F238E27FC236}">
-                <a16:creationId xmlns:a16="http://schemas.microsoft.com/office/drawing/2014/main" id="{37C06DC6-A2EB-443F-91EA-532B0B3DC819}"/>
+                <a16:creationId xmlns:a16="http://schemas.microsoft.com/office/drawing/2014/main" id="{5FFB091E-E16B-495B-9C31-0AFC65499ABF}"/>
               </a:ext>
             </a:extLst>
           </p:cNvPr>
@@ -7175,7 +7175,7 @@
           <p:cNvPr id="15" name="">
             <a:extLst xmlns:a="http://schemas.openxmlformats.org/drawingml/2006/main">
               <a:ext uri="{FF2B5EF4-FFF2-40B4-BE49-F238E27FC236}">
-                <a16:creationId xmlns:a16="http://schemas.microsoft.com/office/drawing/2014/main" id="{9DC8A4AD-7122-4B31-97F6-BF51F4C84652}"/>
+                <a16:creationId xmlns:a16="http://schemas.microsoft.com/office/drawing/2014/main" id="{A05A2975-411F-497E-A1BE-0B51537AC2ED}"/>
               </a:ext>
             </a:extLst>
           </p:cNvPr>
@@ -7210,7 +7210,7 @@
           <p:cNvPr id="16" name="">
             <a:extLst xmlns:a="http://schemas.openxmlformats.org/drawingml/2006/main">
               <a:ext uri="{FF2B5EF4-FFF2-40B4-BE49-F238E27FC236}">
-                <a16:creationId xmlns:a16="http://schemas.microsoft.com/office/drawing/2014/main" id="{50187DA9-534E-4FE9-989F-9A509ABBFA62}"/>
+                <a16:creationId xmlns:a16="http://schemas.microsoft.com/office/drawing/2014/main" id="{41ECAA2C-4E3F-4BC8-9767-859DB6B19B81}"/>
               </a:ext>
             </a:extLst>
           </p:cNvPr>
@@ -7274,7 +7274,7 @@
           <p:cNvPr id="17" name="">
             <a:extLst xmlns:a="http://schemas.openxmlformats.org/drawingml/2006/main">
               <a:ext uri="{FF2B5EF4-FFF2-40B4-BE49-F238E27FC236}">
-                <a16:creationId xmlns:a16="http://schemas.microsoft.com/office/drawing/2014/main" id="{0DBA30D0-665E-4675-A30F-71ED9680BD59}"/>
+                <a16:creationId xmlns:a16="http://schemas.microsoft.com/office/drawing/2014/main" id="{3D1DB904-DB3A-4489-888B-2F01C62A23EF}"/>
               </a:ext>
             </a:extLst>
           </p:cNvPr>
@@ -7328,7 +7328,7 @@
                 <a:ea typeface="Aptos"/>
                 <a:cs typeface="Aptos"/>
               </a:rPr>
-              <a:t>ロボティクスと自動化のフロンティア</a:t>
+              <a:t>技術実行力の必要性</a:t>
             </a:r>
           </a:p>
         </p:txBody>
@@ -7338,7 +7338,7 @@
           <p:cNvPr id="18" name="">
             <a:extLst xmlns:a="http://schemas.openxmlformats.org/drawingml/2006/main">
               <a:ext uri="{FF2B5EF4-FFF2-40B4-BE49-F238E27FC236}">
-                <a16:creationId xmlns:a16="http://schemas.microsoft.com/office/drawing/2014/main" id="{394BDAEA-702A-4CA4-A5C7-2505C81D953E}"/>
+                <a16:creationId xmlns:a16="http://schemas.microsoft.com/office/drawing/2014/main" id="{FBA8454F-78A2-46F9-811D-05172B738927}"/>
               </a:ext>
             </a:extLst>
           </p:cNvPr>
@@ -7402,7 +7402,7 @@
           <p:cNvPr id="19" name="">
             <a:extLst xmlns:a="http://schemas.openxmlformats.org/drawingml/2006/main">
               <a:ext uri="{FF2B5EF4-FFF2-40B4-BE49-F238E27FC236}">
-                <a16:creationId xmlns:a16="http://schemas.microsoft.com/office/drawing/2014/main" id="{F03B6A2D-7B40-408B-9A05-6E5AD3E9C16B}"/>
+                <a16:creationId xmlns:a16="http://schemas.microsoft.com/office/drawing/2014/main" id="{D00B4737-17A4-4A90-B64E-F428069A26A2}"/>
               </a:ext>
             </a:extLst>
           </p:cNvPr>
@@ -7435,7 +7435,7 @@
           <p:cNvPr id="20" name="">
             <a:extLst xmlns:a="http://schemas.openxmlformats.org/drawingml/2006/main">
               <a:ext uri="{FF2B5EF4-FFF2-40B4-BE49-F238E27FC236}">
-                <a16:creationId xmlns:a16="http://schemas.microsoft.com/office/drawing/2014/main" id="{8CE7B3F9-7AE2-4315-B745-EB5BE8E2C6ED}"/>
+                <a16:creationId xmlns:a16="http://schemas.microsoft.com/office/drawing/2014/main" id="{C45B4F64-2CEB-4470-9929-46C8AA113BC4}"/>
               </a:ext>
             </a:extLst>
           </p:cNvPr>
@@ -7499,7 +7499,7 @@
           <p:cNvPr id="21" name="">
             <a:extLst xmlns:a="http://schemas.openxmlformats.org/drawingml/2006/main">
               <a:ext uri="{FF2B5EF4-FFF2-40B4-BE49-F238E27FC236}">
-                <a16:creationId xmlns:a16="http://schemas.microsoft.com/office/drawing/2014/main" id="{3D9B291C-5DB2-4154-85D9-648180CEFAAB}"/>
+                <a16:creationId xmlns:a16="http://schemas.microsoft.com/office/drawing/2014/main" id="{6AA28994-CD5D-4E99-A84B-1FFD81B84025}"/>
               </a:ext>
             </a:extLst>
           </p:cNvPr>
@@ -7561,7 +7561,7 @@
     </p:spTree>
     <p:extLst>
       <p:ext uri="{BB962C8B-B14F-4D97-AF65-F5344CB8AC3E}">
-        <p14:creationId xmlns:p14="http://schemas.microsoft.com/office/powerpoint/2010/main" val="203227560"/>
+        <p14:creationId xmlns:p14="http://schemas.microsoft.com/office/powerpoint/2010/main" val="2020599040"/>
       </p:ext>
     </p:extLst>
   </p:cSld>
@@ -7589,7 +7589,7 @@
           <p:nvPr/>
         </p:nvPicPr>
         <p:blipFill>
-          <a:blip xmlns:r="http://schemas.openxmlformats.org/officeDocument/2006/relationships" xmlns:a="http://schemas.openxmlformats.org/drawingml/2006/main" r:embed="Rd854d6108ddb4e07"/>
+          <a:blip xmlns:r="http://schemas.openxmlformats.org/officeDocument/2006/relationships" xmlns:a="http://schemas.openxmlformats.org/drawingml/2006/main" r:embed="Re3bcf9f2b4264fe5"/>
           <a:srcRect xmlns:a="http://schemas.openxmlformats.org/drawingml/2006/main" l="0" t="27" r="0" b="27"/>
           <a:stretch xmlns:a="http://schemas.openxmlformats.org/drawingml/2006/main">
             <a:fillRect l="0" t="0" r="0" b="0"/>
@@ -7610,7 +7610,7 @@
           <p:cNvPr id="2" name="">
             <a:extLst xmlns:a="http://schemas.openxmlformats.org/drawingml/2006/main">
               <a:ext uri="{FF2B5EF4-FFF2-40B4-BE49-F238E27FC236}">
-                <a16:creationId xmlns:a16="http://schemas.microsoft.com/office/drawing/2014/main" id="{DE2F4874-8C6A-40AF-9D29-9C5AA4A937BC}"/>
+                <a16:creationId xmlns:a16="http://schemas.microsoft.com/office/drawing/2014/main" id="{70E390F5-201E-4549-9B0A-0F036CB4FFCD}"/>
               </a:ext>
             </a:extLst>
           </p:cNvPr>
@@ -7647,7 +7647,7 @@
           <p:cNvPr id="3" name="">
             <a:extLst xmlns:a="http://schemas.openxmlformats.org/drawingml/2006/main">
               <a:ext uri="{FF2B5EF4-FFF2-40B4-BE49-F238E27FC236}">
-                <a16:creationId xmlns:a16="http://schemas.microsoft.com/office/drawing/2014/main" id="{00406ACC-27BB-46F0-9BDB-8DB88237ED3A}"/>
+                <a16:creationId xmlns:a16="http://schemas.microsoft.com/office/drawing/2014/main" id="{B6BEAD56-3B0D-40DB-9A65-854D4A299760}"/>
               </a:ext>
             </a:extLst>
           </p:cNvPr>
@@ -7684,7 +7684,7 @@
           <p:cNvPr id="4" name="">
             <a:extLst xmlns:a="http://schemas.openxmlformats.org/drawingml/2006/main">
               <a:ext uri="{FF2B5EF4-FFF2-40B4-BE49-F238E27FC236}">
-                <a16:creationId xmlns:a16="http://schemas.microsoft.com/office/drawing/2014/main" id="{68F1A5F3-0981-4DF0-9A4D-19A3D59A4F9F}"/>
+                <a16:creationId xmlns:a16="http://schemas.microsoft.com/office/drawing/2014/main" id="{550A8145-0DA0-4BC4-9B48-C7B6CBC7200E}"/>
               </a:ext>
             </a:extLst>
           </p:cNvPr>
@@ -7748,7 +7748,7 @@
           <p:cNvPr id="5" name="">
             <a:extLst xmlns:a="http://schemas.openxmlformats.org/drawingml/2006/main">
               <a:ext uri="{FF2B5EF4-FFF2-40B4-BE49-F238E27FC236}">
-                <a16:creationId xmlns:a16="http://schemas.microsoft.com/office/drawing/2014/main" id="{44B244B1-E890-41E3-BB67-D6E889E0F7F2}"/>
+                <a16:creationId xmlns:a16="http://schemas.microsoft.com/office/drawing/2014/main" id="{3668A951-7ABC-4BCC-B374-81BC18F99E2E}"/>
               </a:ext>
             </a:extLst>
           </p:cNvPr>
@@ -7812,7 +7812,7 @@
           <p:cNvPr id="6" name="">
             <a:extLst xmlns:a="http://schemas.openxmlformats.org/drawingml/2006/main">
               <a:ext uri="{FF2B5EF4-FFF2-40B4-BE49-F238E27FC236}">
-                <a16:creationId xmlns:a16="http://schemas.microsoft.com/office/drawing/2014/main" id="{A6C583DB-8072-4E84-B64D-6F8A4B06FD61}"/>
+                <a16:creationId xmlns:a16="http://schemas.microsoft.com/office/drawing/2014/main" id="{CBB93244-7339-4A33-8906-6A01177D1114}"/>
               </a:ext>
             </a:extLst>
           </p:cNvPr>
@@ -7876,7 +7876,7 @@
           <p:cNvPr id="7" name="">
             <a:extLst xmlns:a="http://schemas.openxmlformats.org/drawingml/2006/main">
               <a:ext uri="{FF2B5EF4-FFF2-40B4-BE49-F238E27FC236}">
-                <a16:creationId xmlns:a16="http://schemas.microsoft.com/office/drawing/2014/main" id="{EBE57AC7-3EC5-4FC8-ADDF-679E9EC24113}"/>
+                <a16:creationId xmlns:a16="http://schemas.microsoft.com/office/drawing/2014/main" id="{30979ECE-24F8-4CF4-9B0C-D5FC0F16821F}"/>
               </a:ext>
             </a:extLst>
           </p:cNvPr>
@@ -7911,7 +7911,7 @@
           <p:cNvPr id="8" name="">
             <a:extLst xmlns:a="http://schemas.openxmlformats.org/drawingml/2006/main">
               <a:ext uri="{FF2B5EF4-FFF2-40B4-BE49-F238E27FC236}">
-                <a16:creationId xmlns:a16="http://schemas.microsoft.com/office/drawing/2014/main" id="{3D9A9361-2C76-40C5-8BB0-926F7A3A83A2}"/>
+                <a16:creationId xmlns:a16="http://schemas.microsoft.com/office/drawing/2014/main" id="{CF21630B-2DB0-4F6F-A5E2-9ED1E6598FD6}"/>
               </a:ext>
             </a:extLst>
           </p:cNvPr>
@@ -7975,7 +7975,7 @@
           <p:cNvPr id="9" name="">
             <a:extLst xmlns:a="http://schemas.openxmlformats.org/drawingml/2006/main">
               <a:ext uri="{FF2B5EF4-FFF2-40B4-BE49-F238E27FC236}">
-                <a16:creationId xmlns:a16="http://schemas.microsoft.com/office/drawing/2014/main" id="{411741C3-E7FE-4C51-B6C5-6933C1619A27}"/>
+                <a16:creationId xmlns:a16="http://schemas.microsoft.com/office/drawing/2014/main" id="{27F90242-DF9A-472C-9E7F-789BA7F40A42}"/>
               </a:ext>
             </a:extLst>
           </p:cNvPr>
@@ -8039,7 +8039,7 @@
           <p:cNvPr id="10" name="">
             <a:extLst xmlns:a="http://schemas.openxmlformats.org/drawingml/2006/main">
               <a:ext uri="{FF2B5EF4-FFF2-40B4-BE49-F238E27FC236}">
-                <a16:creationId xmlns:a16="http://schemas.microsoft.com/office/drawing/2014/main" id="{9454C376-DF2B-4415-AE57-3E99553862A8}"/>
+                <a16:creationId xmlns:a16="http://schemas.microsoft.com/office/drawing/2014/main" id="{9D7894D0-6537-4087-9FBD-D1A566756A63}"/>
               </a:ext>
             </a:extLst>
           </p:cNvPr>
@@ -8074,7 +8074,7 @@
           <p:cNvPr id="11" name="">
             <a:extLst xmlns:a="http://schemas.openxmlformats.org/drawingml/2006/main">
               <a:ext uri="{FF2B5EF4-FFF2-40B4-BE49-F238E27FC236}">
-                <a16:creationId xmlns:a16="http://schemas.microsoft.com/office/drawing/2014/main" id="{E1FB3E1A-5CBA-453E-BDB0-C3147ABF79DC}"/>
+                <a16:creationId xmlns:a16="http://schemas.microsoft.com/office/drawing/2014/main" id="{4766D9D2-E84F-4C8E-BF9A-9174DF381CB4}"/>
               </a:ext>
             </a:extLst>
           </p:cNvPr>
@@ -8138,7 +8138,7 @@
           <p:cNvPr id="12" name="">
             <a:extLst xmlns:a="http://schemas.openxmlformats.org/drawingml/2006/main">
               <a:ext uri="{FF2B5EF4-FFF2-40B4-BE49-F238E27FC236}">
-                <a16:creationId xmlns:a16="http://schemas.microsoft.com/office/drawing/2014/main" id="{9FA713D3-F672-4BCB-AE24-778C5097F4C4}"/>
+                <a16:creationId xmlns:a16="http://schemas.microsoft.com/office/drawing/2014/main" id="{506747F4-9C60-49AF-BD31-B273880075D6}"/>
               </a:ext>
             </a:extLst>
           </p:cNvPr>
@@ -8202,7 +8202,7 @@
           <p:cNvPr id="13" name="">
             <a:extLst xmlns:a="http://schemas.openxmlformats.org/drawingml/2006/main">
               <a:ext uri="{FF2B5EF4-FFF2-40B4-BE49-F238E27FC236}">
-                <a16:creationId xmlns:a16="http://schemas.microsoft.com/office/drawing/2014/main" id="{E516F0AF-0359-4EBB-A5F0-F601B1853ACF}"/>
+                <a16:creationId xmlns:a16="http://schemas.microsoft.com/office/drawing/2014/main" id="{70FDC350-C7BC-4A76-B0E5-F7C76B47910C}"/>
               </a:ext>
             </a:extLst>
           </p:cNvPr>
@@ -8237,7 +8237,7 @@
           <p:cNvPr id="14" name="">
             <a:extLst xmlns:a="http://schemas.openxmlformats.org/drawingml/2006/main">
               <a:ext uri="{FF2B5EF4-FFF2-40B4-BE49-F238E27FC236}">
-                <a16:creationId xmlns:a16="http://schemas.microsoft.com/office/drawing/2014/main" id="{AD9C59DE-71A6-43BE-93FB-E5998E9DCA34}"/>
+                <a16:creationId xmlns:a16="http://schemas.microsoft.com/office/drawing/2014/main" id="{860F819C-617E-4548-A8B5-260EE1F86A48}"/>
               </a:ext>
             </a:extLst>
           </p:cNvPr>
@@ -8301,7 +8301,7 @@
           <p:cNvPr id="15" name="">
             <a:extLst xmlns:a="http://schemas.openxmlformats.org/drawingml/2006/main">
               <a:ext uri="{FF2B5EF4-FFF2-40B4-BE49-F238E27FC236}">
-                <a16:creationId xmlns:a16="http://schemas.microsoft.com/office/drawing/2014/main" id="{AA6F4088-88B5-43FC-A1B7-12053CD1F258}"/>
+                <a16:creationId xmlns:a16="http://schemas.microsoft.com/office/drawing/2014/main" id="{5A683909-27F4-4481-BB84-26DB3973F16B}"/>
               </a:ext>
             </a:extLst>
           </p:cNvPr>
@@ -8365,7 +8365,7 @@
           <p:cNvPr id="16" name="">
             <a:extLst xmlns:a="http://schemas.openxmlformats.org/drawingml/2006/main">
               <a:ext uri="{FF2B5EF4-FFF2-40B4-BE49-F238E27FC236}">
-                <a16:creationId xmlns:a16="http://schemas.microsoft.com/office/drawing/2014/main" id="{D456FB60-5873-4BC8-91E2-C9334A3782F4}"/>
+                <a16:creationId xmlns:a16="http://schemas.microsoft.com/office/drawing/2014/main" id="{3E9F7A05-5526-471A-82F7-1C49C6C09E8C}"/>
               </a:ext>
             </a:extLst>
           </p:cNvPr>
@@ -8400,7 +8400,7 @@
           <p:cNvPr id="17" name="">
             <a:extLst xmlns:a="http://schemas.openxmlformats.org/drawingml/2006/main">
               <a:ext uri="{FF2B5EF4-FFF2-40B4-BE49-F238E27FC236}">
-                <a16:creationId xmlns:a16="http://schemas.microsoft.com/office/drawing/2014/main" id="{3931A802-7049-47DB-8209-06BE1BB87BDA}"/>
+                <a16:creationId xmlns:a16="http://schemas.microsoft.com/office/drawing/2014/main" id="{AB521AAC-A08F-43C5-9F31-E4F5315523BE}"/>
               </a:ext>
             </a:extLst>
           </p:cNvPr>
@@ -8464,7 +8464,7 @@
           <p:cNvPr id="18" name="">
             <a:extLst xmlns:a="http://schemas.openxmlformats.org/drawingml/2006/main">
               <a:ext uri="{FF2B5EF4-FFF2-40B4-BE49-F238E27FC236}">
-                <a16:creationId xmlns:a16="http://schemas.microsoft.com/office/drawing/2014/main" id="{04BB04BB-9D55-42CD-BD78-4189517F6CD1}"/>
+                <a16:creationId xmlns:a16="http://schemas.microsoft.com/office/drawing/2014/main" id="{9DCC7E10-8C4D-4EEA-B356-9C1BE5B649AD}"/>
               </a:ext>
             </a:extLst>
           </p:cNvPr>
@@ -8528,7 +8528,7 @@
           <p:cNvPr id="19" name="">
             <a:extLst xmlns:a="http://schemas.openxmlformats.org/drawingml/2006/main">
               <a:ext uri="{FF2B5EF4-FFF2-40B4-BE49-F238E27FC236}">
-                <a16:creationId xmlns:a16="http://schemas.microsoft.com/office/drawing/2014/main" id="{550CED68-A124-4C7D-9489-C4E83C95FD7D}"/>
+                <a16:creationId xmlns:a16="http://schemas.microsoft.com/office/drawing/2014/main" id="{71FADD9E-DFBF-40A5-977F-19D8449FC691}"/>
               </a:ext>
             </a:extLst>
           </p:cNvPr>
@@ -8592,7 +8592,7 @@
           <p:cNvPr id="20" name="">
             <a:extLst xmlns:a="http://schemas.openxmlformats.org/drawingml/2006/main">
               <a:ext uri="{FF2B5EF4-FFF2-40B4-BE49-F238E27FC236}">
-                <a16:creationId xmlns:a16="http://schemas.microsoft.com/office/drawing/2014/main" id="{18D2532B-5A6B-454C-A68F-6CE6A6EDA1C6}"/>
+                <a16:creationId xmlns:a16="http://schemas.microsoft.com/office/drawing/2014/main" id="{37FFDE19-C04E-40EF-AAB5-709911DFE97E}"/>
               </a:ext>
             </a:extLst>
           </p:cNvPr>
@@ -8625,7 +8625,7 @@
           <p:cNvPr id="21" name="">
             <a:extLst xmlns:a="http://schemas.openxmlformats.org/drawingml/2006/main">
               <a:ext uri="{FF2B5EF4-FFF2-40B4-BE49-F238E27FC236}">
-                <a16:creationId xmlns:a16="http://schemas.microsoft.com/office/drawing/2014/main" id="{6D280827-3B35-43D3-A07F-50B9E0E46ED7}"/>
+                <a16:creationId xmlns:a16="http://schemas.microsoft.com/office/drawing/2014/main" id="{5A27C818-CDA9-495D-9F71-8F6AF4ED32A8}"/>
               </a:ext>
             </a:extLst>
           </p:cNvPr>
@@ -8658,7 +8658,7 @@
           <p:cNvPr id="22" name="">
             <a:extLst xmlns:a="http://schemas.openxmlformats.org/drawingml/2006/main">
               <a:ext uri="{FF2B5EF4-FFF2-40B4-BE49-F238E27FC236}">
-                <a16:creationId xmlns:a16="http://schemas.microsoft.com/office/drawing/2014/main" id="{59DE8AE4-B9A0-4E35-9113-5CE8FDB03B5B}"/>
+                <a16:creationId xmlns:a16="http://schemas.microsoft.com/office/drawing/2014/main" id="{915211E9-5EB4-43F7-87E2-14F17B2583D5}"/>
               </a:ext>
             </a:extLst>
           </p:cNvPr>
@@ -8722,7 +8722,7 @@
           <p:cNvPr id="23" name="">
             <a:extLst xmlns:a="http://schemas.openxmlformats.org/drawingml/2006/main">
               <a:ext uri="{FF2B5EF4-FFF2-40B4-BE49-F238E27FC236}">
-                <a16:creationId xmlns:a16="http://schemas.microsoft.com/office/drawing/2014/main" id="{E361A534-9729-4A00-ACD3-FFF34F2D92CE}"/>
+                <a16:creationId xmlns:a16="http://schemas.microsoft.com/office/drawing/2014/main" id="{AB8DDD21-AD6D-4711-9774-87A5A4C8B667}"/>
               </a:ext>
             </a:extLst>
           </p:cNvPr>
@@ -8755,7 +8755,7 @@
           <p:cNvPr id="24" name="">
             <a:extLst xmlns:a="http://schemas.openxmlformats.org/drawingml/2006/main">
               <a:ext uri="{FF2B5EF4-FFF2-40B4-BE49-F238E27FC236}">
-                <a16:creationId xmlns:a16="http://schemas.microsoft.com/office/drawing/2014/main" id="{20F4B24B-E5B9-4E74-B715-7622A2D69A2F}"/>
+                <a16:creationId xmlns:a16="http://schemas.microsoft.com/office/drawing/2014/main" id="{6969DB76-355F-4857-9655-F3782DCEDCF6}"/>
               </a:ext>
             </a:extLst>
           </p:cNvPr>
@@ -8788,7 +8788,7 @@
           <p:cNvPr id="25" name="">
             <a:extLst xmlns:a="http://schemas.openxmlformats.org/drawingml/2006/main">
               <a:ext uri="{FF2B5EF4-FFF2-40B4-BE49-F238E27FC236}">
-                <a16:creationId xmlns:a16="http://schemas.microsoft.com/office/drawing/2014/main" id="{998BA122-19D4-407F-8518-A6E4A172335B}"/>
+                <a16:creationId xmlns:a16="http://schemas.microsoft.com/office/drawing/2014/main" id="{C3368DD8-2D0F-4B87-BFB2-04BF78254197}"/>
               </a:ext>
             </a:extLst>
           </p:cNvPr>
@@ -8852,7 +8852,7 @@
           <p:cNvPr id="26" name="">
             <a:extLst xmlns:a="http://schemas.openxmlformats.org/drawingml/2006/main">
               <a:ext uri="{FF2B5EF4-FFF2-40B4-BE49-F238E27FC236}">
-                <a16:creationId xmlns:a16="http://schemas.microsoft.com/office/drawing/2014/main" id="{7AB5DCAD-9C14-4093-84FB-A5E0E487CE14}"/>
+                <a16:creationId xmlns:a16="http://schemas.microsoft.com/office/drawing/2014/main" id="{D98E8948-2D7F-4BFA-9BD4-389D97B7E3AD}"/>
               </a:ext>
             </a:extLst>
           </p:cNvPr>
@@ -8885,7 +8885,7 @@
           <p:cNvPr id="27" name="">
             <a:extLst xmlns:a="http://schemas.openxmlformats.org/drawingml/2006/main">
               <a:ext uri="{FF2B5EF4-FFF2-40B4-BE49-F238E27FC236}">
-                <a16:creationId xmlns:a16="http://schemas.microsoft.com/office/drawing/2014/main" id="{4058B557-A41D-44DF-8111-8C5295715362}"/>
+                <a16:creationId xmlns:a16="http://schemas.microsoft.com/office/drawing/2014/main" id="{AB72BF32-D9CF-4124-AF61-FDC42A59E259}"/>
               </a:ext>
             </a:extLst>
           </p:cNvPr>
@@ -8918,7 +8918,7 @@
           <p:cNvPr id="28" name="">
             <a:extLst xmlns:a="http://schemas.openxmlformats.org/drawingml/2006/main">
               <a:ext uri="{FF2B5EF4-FFF2-40B4-BE49-F238E27FC236}">
-                <a16:creationId xmlns:a16="http://schemas.microsoft.com/office/drawing/2014/main" id="{A51BD26A-52C3-47CC-9823-CD29A9C6A2C3}"/>
+                <a16:creationId xmlns:a16="http://schemas.microsoft.com/office/drawing/2014/main" id="{1403F724-91AF-4611-BA35-86AEFD7F8842}"/>
               </a:ext>
             </a:extLst>
           </p:cNvPr>
@@ -8982,7 +8982,7 @@
           <p:cNvPr id="29" name="">
             <a:extLst xmlns:a="http://schemas.openxmlformats.org/drawingml/2006/main">
               <a:ext uri="{FF2B5EF4-FFF2-40B4-BE49-F238E27FC236}">
-                <a16:creationId xmlns:a16="http://schemas.microsoft.com/office/drawing/2014/main" id="{7AF85237-18B1-470B-9ED3-490D93989EC9}"/>
+                <a16:creationId xmlns:a16="http://schemas.microsoft.com/office/drawing/2014/main" id="{321B298B-41E1-4B58-8F43-7EF4908A0B99}"/>
               </a:ext>
             </a:extLst>
           </p:cNvPr>
@@ -9015,7 +9015,7 @@
           <p:cNvPr id="30" name="">
             <a:extLst xmlns:a="http://schemas.openxmlformats.org/drawingml/2006/main">
               <a:ext uri="{FF2B5EF4-FFF2-40B4-BE49-F238E27FC236}">
-                <a16:creationId xmlns:a16="http://schemas.microsoft.com/office/drawing/2014/main" id="{9071601E-5548-4B31-B41E-7DA5356D3326}"/>
+                <a16:creationId xmlns:a16="http://schemas.microsoft.com/office/drawing/2014/main" id="{CBF121E6-D8E9-4254-B872-BFE1944CB2EC}"/>
               </a:ext>
             </a:extLst>
           </p:cNvPr>
@@ -9079,7 +9079,7 @@
           <p:cNvPr id="31" name="">
             <a:extLst xmlns:a="http://schemas.openxmlformats.org/drawingml/2006/main">
               <a:ext uri="{FF2B5EF4-FFF2-40B4-BE49-F238E27FC236}">
-                <a16:creationId xmlns:a16="http://schemas.microsoft.com/office/drawing/2014/main" id="{F0F5A927-66DC-4820-BC7A-B5D57E17DA06}"/>
+                <a16:creationId xmlns:a16="http://schemas.microsoft.com/office/drawing/2014/main" id="{A8A91E6A-1AEC-412C-8086-0660660F4988}"/>
               </a:ext>
             </a:extLst>
           </p:cNvPr>
@@ -9141,7 +9141,7 @@
     </p:spTree>
     <p:extLst>
       <p:ext uri="{BB962C8B-B14F-4D97-AF65-F5344CB8AC3E}">
-        <p14:creationId xmlns:p14="http://schemas.microsoft.com/office/powerpoint/2010/main" val="1372190552"/>
+        <p14:creationId xmlns:p14="http://schemas.microsoft.com/office/powerpoint/2010/main" val="1304645696"/>
       </p:ext>
     </p:extLst>
   </p:cSld>
@@ -9169,7 +9169,7 @@
           <p:nvPr/>
         </p:nvPicPr>
         <p:blipFill>
-          <a:blip xmlns:r="http://schemas.openxmlformats.org/officeDocument/2006/relationships" xmlns:a="http://schemas.openxmlformats.org/drawingml/2006/main" r:embed="R46afe4472aae4575"/>
+          <a:blip xmlns:r="http://schemas.openxmlformats.org/officeDocument/2006/relationships" xmlns:a="http://schemas.openxmlformats.org/drawingml/2006/main" r:embed="R29ec8bdadc02428d"/>
           <a:srcRect xmlns:a="http://schemas.openxmlformats.org/drawingml/2006/main" l="0" t="7813" r="0" b="7813"/>
           <a:stretch xmlns:a="http://schemas.openxmlformats.org/drawingml/2006/main">
             <a:fillRect l="0" t="0" r="0" b="0"/>
@@ -9190,7 +9190,7 @@
           <p:cNvPr id="2" name="">
             <a:extLst xmlns:a="http://schemas.openxmlformats.org/drawingml/2006/main">
               <a:ext uri="{FF2B5EF4-FFF2-40B4-BE49-F238E27FC236}">
-                <a16:creationId xmlns:a16="http://schemas.microsoft.com/office/drawing/2014/main" id="{C02BFF46-0BCE-4EE1-AAFB-1312C9746770}"/>
+                <a16:creationId xmlns:a16="http://schemas.microsoft.com/office/drawing/2014/main" id="{91D40E1B-ED56-45D2-B078-9130179CC949}"/>
               </a:ext>
             </a:extLst>
           </p:cNvPr>
@@ -9227,7 +9227,7 @@
           <p:cNvPr id="3" name="">
             <a:extLst xmlns:a="http://schemas.openxmlformats.org/drawingml/2006/main">
               <a:ext uri="{FF2B5EF4-FFF2-40B4-BE49-F238E27FC236}">
-                <a16:creationId xmlns:a16="http://schemas.microsoft.com/office/drawing/2014/main" id="{C1D2B986-BDAB-439B-A2E8-DC979AB63E93}"/>
+                <a16:creationId xmlns:a16="http://schemas.microsoft.com/office/drawing/2014/main" id="{0671709E-2EF9-400A-8E6D-793F4CCBE4EE}"/>
               </a:ext>
             </a:extLst>
           </p:cNvPr>
@@ -9264,7 +9264,7 @@
           <p:cNvPr id="4" name="">
             <a:extLst xmlns:a="http://schemas.openxmlformats.org/drawingml/2006/main">
               <a:ext uri="{FF2B5EF4-FFF2-40B4-BE49-F238E27FC236}">
-                <a16:creationId xmlns:a16="http://schemas.microsoft.com/office/drawing/2014/main" id="{BC00C4E7-BDDC-45B0-A212-856B2BBF3254}"/>
+                <a16:creationId xmlns:a16="http://schemas.microsoft.com/office/drawing/2014/main" id="{4D1FCDBF-0690-47D3-B135-F9D1C880EBC6}"/>
               </a:ext>
             </a:extLst>
           </p:cNvPr>
@@ -9328,7 +9328,7 @@
           <p:cNvPr id="5" name="">
             <a:extLst xmlns:a="http://schemas.openxmlformats.org/drawingml/2006/main">
               <a:ext uri="{FF2B5EF4-FFF2-40B4-BE49-F238E27FC236}">
-                <a16:creationId xmlns:a16="http://schemas.microsoft.com/office/drawing/2014/main" id="{6DEF0E6E-CD0C-4DC1-AF0F-F16BAA34A954}"/>
+                <a16:creationId xmlns:a16="http://schemas.microsoft.com/office/drawing/2014/main" id="{3B26C395-FBB6-484B-97A6-C9A0B78C0C09}"/>
               </a:ext>
             </a:extLst>
           </p:cNvPr>
@@ -9392,7 +9392,7 @@
           <p:cNvPr id="6" name="">
             <a:extLst xmlns:a="http://schemas.openxmlformats.org/drawingml/2006/main">
               <a:ext uri="{FF2B5EF4-FFF2-40B4-BE49-F238E27FC236}">
-                <a16:creationId xmlns:a16="http://schemas.microsoft.com/office/drawing/2014/main" id="{37828C22-FD7C-481D-8F3A-471968B9A6A2}"/>
+                <a16:creationId xmlns:a16="http://schemas.microsoft.com/office/drawing/2014/main" id="{D79CB415-C71E-4F95-A050-B1CCF4AB37DB}"/>
               </a:ext>
             </a:extLst>
           </p:cNvPr>
@@ -9456,7 +9456,7 @@
           <p:cNvPr id="7" name="">
             <a:extLst xmlns:a="http://schemas.openxmlformats.org/drawingml/2006/main">
               <a:ext uri="{FF2B5EF4-FFF2-40B4-BE49-F238E27FC236}">
-                <a16:creationId xmlns:a16="http://schemas.microsoft.com/office/drawing/2014/main" id="{829AF4BE-0905-4288-AD92-9A6FFAFB2DFE}"/>
+                <a16:creationId xmlns:a16="http://schemas.microsoft.com/office/drawing/2014/main" id="{264FC9D3-9E90-4B2F-8818-5E1A66A51BC8}"/>
               </a:ext>
             </a:extLst>
           </p:cNvPr>
@@ -9491,7 +9491,7 @@
           <p:cNvPr id="8" name="">
             <a:extLst xmlns:a="http://schemas.openxmlformats.org/drawingml/2006/main">
               <a:ext uri="{FF2B5EF4-FFF2-40B4-BE49-F238E27FC236}">
-                <a16:creationId xmlns:a16="http://schemas.microsoft.com/office/drawing/2014/main" id="{9739A88A-C863-487B-9A30-CA1A5EAEE405}"/>
+                <a16:creationId xmlns:a16="http://schemas.microsoft.com/office/drawing/2014/main" id="{F04BD4D0-FD73-4CD8-A095-72B88AF0158F}"/>
               </a:ext>
             </a:extLst>
           </p:cNvPr>
@@ -9555,7 +9555,7 @@
           <p:cNvPr id="9" name="">
             <a:extLst xmlns:a="http://schemas.openxmlformats.org/drawingml/2006/main">
               <a:ext uri="{FF2B5EF4-FFF2-40B4-BE49-F238E27FC236}">
-                <a16:creationId xmlns:a16="http://schemas.microsoft.com/office/drawing/2014/main" id="{D53E8B2A-D5A6-4BC0-8DD9-9A1C26D934F1}"/>
+                <a16:creationId xmlns:a16="http://schemas.microsoft.com/office/drawing/2014/main" id="{60532D5A-8899-41EB-A428-943DD2676C96}"/>
               </a:ext>
             </a:extLst>
           </p:cNvPr>
@@ -9619,7 +9619,7 @@
           <p:cNvPr id="10" name="">
             <a:extLst xmlns:a="http://schemas.openxmlformats.org/drawingml/2006/main">
               <a:ext uri="{FF2B5EF4-FFF2-40B4-BE49-F238E27FC236}">
-                <a16:creationId xmlns:a16="http://schemas.microsoft.com/office/drawing/2014/main" id="{7376DC5D-D855-4C8A-B1AF-E828FBF360D4}"/>
+                <a16:creationId xmlns:a16="http://schemas.microsoft.com/office/drawing/2014/main" id="{4052CF90-FE89-4D38-A668-08FA20C8BE9E}"/>
               </a:ext>
             </a:extLst>
           </p:cNvPr>
@@ -9652,7 +9652,7 @@
           <p:cNvPr id="11" name="">
             <a:extLst xmlns:a="http://schemas.openxmlformats.org/drawingml/2006/main">
               <a:ext uri="{FF2B5EF4-FFF2-40B4-BE49-F238E27FC236}">
-                <a16:creationId xmlns:a16="http://schemas.microsoft.com/office/drawing/2014/main" id="{4BCE6EA0-5D04-4302-886F-BCAD02F90DAC}"/>
+                <a16:creationId xmlns:a16="http://schemas.microsoft.com/office/drawing/2014/main" id="{088B7D83-B65B-46AF-AA16-DDCDB2125F0E}"/>
               </a:ext>
             </a:extLst>
           </p:cNvPr>
@@ -9687,7 +9687,7 @@
           <p:cNvPr id="12" name="">
             <a:extLst xmlns:a="http://schemas.openxmlformats.org/drawingml/2006/main">
               <a:ext uri="{FF2B5EF4-FFF2-40B4-BE49-F238E27FC236}">
-                <a16:creationId xmlns:a16="http://schemas.microsoft.com/office/drawing/2014/main" id="{EDD677F1-15A9-4D8C-8B15-726280490ABD}"/>
+                <a16:creationId xmlns:a16="http://schemas.microsoft.com/office/drawing/2014/main" id="{1C3681A5-3E4E-4498-942F-25DD6D2CEBD0}"/>
               </a:ext>
             </a:extLst>
           </p:cNvPr>
@@ -9751,7 +9751,7 @@
           <p:cNvPr id="13" name="">
             <a:extLst xmlns:a="http://schemas.openxmlformats.org/drawingml/2006/main">
               <a:ext uri="{FF2B5EF4-FFF2-40B4-BE49-F238E27FC236}">
-                <a16:creationId xmlns:a16="http://schemas.microsoft.com/office/drawing/2014/main" id="{E0DD9BF4-E3F7-4AD8-B1F2-FFFE199332D2}"/>
+                <a16:creationId xmlns:a16="http://schemas.microsoft.com/office/drawing/2014/main" id="{3BE4ED70-6DD1-4426-81F0-C1861098611B}"/>
               </a:ext>
             </a:extLst>
           </p:cNvPr>
@@ -9815,7 +9815,7 @@
           <p:cNvPr id="14" name="">
             <a:extLst xmlns:a="http://schemas.openxmlformats.org/drawingml/2006/main">
               <a:ext uri="{FF2B5EF4-FFF2-40B4-BE49-F238E27FC236}">
-                <a16:creationId xmlns:a16="http://schemas.microsoft.com/office/drawing/2014/main" id="{5C0BD0B1-582C-4A96-8334-7F52F696CB60}"/>
+                <a16:creationId xmlns:a16="http://schemas.microsoft.com/office/drawing/2014/main" id="{574BA2B9-2520-4BA0-A88A-86CC517932D9}"/>
               </a:ext>
             </a:extLst>
           </p:cNvPr>
@@ -9848,7 +9848,7 @@
           <p:cNvPr id="15" name="">
             <a:extLst xmlns:a="http://schemas.openxmlformats.org/drawingml/2006/main">
               <a:ext uri="{FF2B5EF4-FFF2-40B4-BE49-F238E27FC236}">
-                <a16:creationId xmlns:a16="http://schemas.microsoft.com/office/drawing/2014/main" id="{876E15EB-583F-4076-B08E-90A2C5A9A374}"/>
+                <a16:creationId xmlns:a16="http://schemas.microsoft.com/office/drawing/2014/main" id="{CA2F68C0-DEDA-4CC6-BBC8-5FF5CC1B7D42}"/>
               </a:ext>
             </a:extLst>
           </p:cNvPr>
@@ -9883,7 +9883,7 @@
           <p:cNvPr id="16" name="">
             <a:extLst xmlns:a="http://schemas.openxmlformats.org/drawingml/2006/main">
               <a:ext uri="{FF2B5EF4-FFF2-40B4-BE49-F238E27FC236}">
-                <a16:creationId xmlns:a16="http://schemas.microsoft.com/office/drawing/2014/main" id="{7246D94F-14CB-4666-96C1-E51CEB091D22}"/>
+                <a16:creationId xmlns:a16="http://schemas.microsoft.com/office/drawing/2014/main" id="{E0C746FD-BE4B-4124-876B-039492E627BE}"/>
               </a:ext>
             </a:extLst>
           </p:cNvPr>
@@ -9947,7 +9947,7 @@
           <p:cNvPr id="17" name="">
             <a:extLst xmlns:a="http://schemas.openxmlformats.org/drawingml/2006/main">
               <a:ext uri="{FF2B5EF4-FFF2-40B4-BE49-F238E27FC236}">
-                <a16:creationId xmlns:a16="http://schemas.microsoft.com/office/drawing/2014/main" id="{E5A71770-0B15-467C-8B32-AE1E9C997C79}"/>
+                <a16:creationId xmlns:a16="http://schemas.microsoft.com/office/drawing/2014/main" id="{579C32FB-4E3C-4ED1-BA8A-6EC114A7FDE6}"/>
               </a:ext>
             </a:extLst>
           </p:cNvPr>
@@ -10011,7 +10011,7 @@
           <p:cNvPr id="18" name="">
             <a:extLst xmlns:a="http://schemas.openxmlformats.org/drawingml/2006/main">
               <a:ext uri="{FF2B5EF4-FFF2-40B4-BE49-F238E27FC236}">
-                <a16:creationId xmlns:a16="http://schemas.microsoft.com/office/drawing/2014/main" id="{D4A8BF4D-9288-4167-845D-96A4FBBCB77B}"/>
+                <a16:creationId xmlns:a16="http://schemas.microsoft.com/office/drawing/2014/main" id="{90A30E7C-789C-487D-8250-75AECCE6B619}"/>
               </a:ext>
             </a:extLst>
           </p:cNvPr>
@@ -10044,7 +10044,7 @@
           <p:cNvPr id="19" name="">
             <a:extLst xmlns:a="http://schemas.openxmlformats.org/drawingml/2006/main">
               <a:ext uri="{FF2B5EF4-FFF2-40B4-BE49-F238E27FC236}">
-                <a16:creationId xmlns:a16="http://schemas.microsoft.com/office/drawing/2014/main" id="{A3742166-9D68-45E1-9C27-050AF458DEA7}"/>
+                <a16:creationId xmlns:a16="http://schemas.microsoft.com/office/drawing/2014/main" id="{DD53E70A-D294-4EAA-B014-DC0D43E49AF6}"/>
               </a:ext>
             </a:extLst>
           </p:cNvPr>
@@ -10079,7 +10079,7 @@
           <p:cNvPr id="20" name="">
             <a:extLst xmlns:a="http://schemas.openxmlformats.org/drawingml/2006/main">
               <a:ext uri="{FF2B5EF4-FFF2-40B4-BE49-F238E27FC236}">
-                <a16:creationId xmlns:a16="http://schemas.microsoft.com/office/drawing/2014/main" id="{6B5337B3-34BA-4D2B-B1B2-297ABED88CC8}"/>
+                <a16:creationId xmlns:a16="http://schemas.microsoft.com/office/drawing/2014/main" id="{3326131C-10C5-4567-844B-4B208519228A}"/>
               </a:ext>
             </a:extLst>
           </p:cNvPr>
@@ -10143,7 +10143,7 @@
           <p:cNvPr id="21" name="">
             <a:extLst xmlns:a="http://schemas.openxmlformats.org/drawingml/2006/main">
               <a:ext uri="{FF2B5EF4-FFF2-40B4-BE49-F238E27FC236}">
-                <a16:creationId xmlns:a16="http://schemas.microsoft.com/office/drawing/2014/main" id="{CFF1FFAC-2B36-45FD-9BFD-FF5BCBCA877B}"/>
+                <a16:creationId xmlns:a16="http://schemas.microsoft.com/office/drawing/2014/main" id="{38CF8090-A468-4F41-9ED6-F01872C2C185}"/>
               </a:ext>
             </a:extLst>
           </p:cNvPr>
@@ -10207,7 +10207,7 @@
           <p:cNvPr id="22" name="">
             <a:extLst xmlns:a="http://schemas.openxmlformats.org/drawingml/2006/main">
               <a:ext uri="{FF2B5EF4-FFF2-40B4-BE49-F238E27FC236}">
-                <a16:creationId xmlns:a16="http://schemas.microsoft.com/office/drawing/2014/main" id="{2EDF4178-99C3-45DE-9C91-05412868E6AA}"/>
+                <a16:creationId xmlns:a16="http://schemas.microsoft.com/office/drawing/2014/main" id="{4C95259C-0C5C-4861-AD1E-258E627ACDD5}"/>
               </a:ext>
             </a:extLst>
           </p:cNvPr>
@@ -10271,7 +10271,7 @@
           <p:cNvPr id="23" name="">
             <a:extLst xmlns:a="http://schemas.openxmlformats.org/drawingml/2006/main">
               <a:ext uri="{FF2B5EF4-FFF2-40B4-BE49-F238E27FC236}">
-                <a16:creationId xmlns:a16="http://schemas.microsoft.com/office/drawing/2014/main" id="{41F8CE8F-47C4-4AE5-A361-287627CFA4FC}"/>
+                <a16:creationId xmlns:a16="http://schemas.microsoft.com/office/drawing/2014/main" id="{419E3A98-6F9C-4BC5-A8AF-D18D59ECEAB1}"/>
               </a:ext>
             </a:extLst>
           </p:cNvPr>
@@ -10335,7 +10335,7 @@
           <p:cNvPr id="24" name="">
             <a:extLst xmlns:a="http://schemas.openxmlformats.org/drawingml/2006/main">
               <a:ext uri="{FF2B5EF4-FFF2-40B4-BE49-F238E27FC236}">
-                <a16:creationId xmlns:a16="http://schemas.microsoft.com/office/drawing/2014/main" id="{FF6089C8-7E6B-447D-BBDF-0AE4176DF092}"/>
+                <a16:creationId xmlns:a16="http://schemas.microsoft.com/office/drawing/2014/main" id="{A7DF19E4-AA77-4820-9508-D0F06309FC75}"/>
               </a:ext>
             </a:extLst>
           </p:cNvPr>
@@ -10368,7 +10368,7 @@
           <p:cNvPr id="25" name="">
             <a:extLst xmlns:a="http://schemas.openxmlformats.org/drawingml/2006/main">
               <a:ext uri="{FF2B5EF4-FFF2-40B4-BE49-F238E27FC236}">
-                <a16:creationId xmlns:a16="http://schemas.microsoft.com/office/drawing/2014/main" id="{53FE27F5-5EF2-451C-8381-4C5202DB70DD}"/>
+                <a16:creationId xmlns:a16="http://schemas.microsoft.com/office/drawing/2014/main" id="{726073C1-CE84-42BA-91F2-938614D60D0D}"/>
               </a:ext>
             </a:extLst>
           </p:cNvPr>
@@ -10432,7 +10432,7 @@
           <p:cNvPr id="26" name="">
             <a:extLst xmlns:a="http://schemas.openxmlformats.org/drawingml/2006/main">
               <a:ext uri="{FF2B5EF4-FFF2-40B4-BE49-F238E27FC236}">
-                <a16:creationId xmlns:a16="http://schemas.microsoft.com/office/drawing/2014/main" id="{C197F3A6-31DE-465A-A8B1-C166143BFF64}"/>
+                <a16:creationId xmlns:a16="http://schemas.microsoft.com/office/drawing/2014/main" id="{BFFA9730-8348-4E56-8493-2CC976B260A4}"/>
               </a:ext>
             </a:extLst>
           </p:cNvPr>
@@ -10494,7 +10494,7 @@
     </p:spTree>
     <p:extLst>
       <p:ext uri="{BB962C8B-B14F-4D97-AF65-F5344CB8AC3E}">
-        <p14:creationId xmlns:p14="http://schemas.microsoft.com/office/powerpoint/2010/main" val="730856684"/>
+        <p14:creationId xmlns:p14="http://schemas.microsoft.com/office/powerpoint/2010/main" val="204597619"/>
       </p:ext>
     </p:extLst>
   </p:cSld>
@@ -10522,7 +10522,7 @@
           <p:nvPr/>
         </p:nvPicPr>
         <p:blipFill>
-          <a:blip xmlns:r="http://schemas.openxmlformats.org/officeDocument/2006/relationships" xmlns:a="http://schemas.openxmlformats.org/drawingml/2006/main" r:embed="R86904c8883b141fc"/>
+          <a:blip xmlns:r="http://schemas.openxmlformats.org/officeDocument/2006/relationships" xmlns:a="http://schemas.openxmlformats.org/drawingml/2006/main" r:embed="R6ab5e84f286d4b58"/>
           <a:srcRect xmlns:a="http://schemas.openxmlformats.org/drawingml/2006/main" l="0" t="7813" r="0" b="7813"/>
           <a:stretch xmlns:a="http://schemas.openxmlformats.org/drawingml/2006/main">
             <a:fillRect l="0" t="0" r="0" b="0"/>
@@ -10543,7 +10543,7 @@
           <p:cNvPr id="2" name="">
             <a:extLst xmlns:a="http://schemas.openxmlformats.org/drawingml/2006/main">
               <a:ext uri="{FF2B5EF4-FFF2-40B4-BE49-F238E27FC236}">
-                <a16:creationId xmlns:a16="http://schemas.microsoft.com/office/drawing/2014/main" id="{E3146644-2831-4FB3-ACCB-9F497CBEF3CD}"/>
+                <a16:creationId xmlns:a16="http://schemas.microsoft.com/office/drawing/2014/main" id="{CDCC58F0-280A-4A40-B9E3-38D2358B0F9B}"/>
               </a:ext>
             </a:extLst>
           </p:cNvPr>
@@ -10580,7 +10580,7 @@
           <p:cNvPr id="3" name="">
             <a:extLst xmlns:a="http://schemas.openxmlformats.org/drawingml/2006/main">
               <a:ext uri="{FF2B5EF4-FFF2-40B4-BE49-F238E27FC236}">
-                <a16:creationId xmlns:a16="http://schemas.microsoft.com/office/drawing/2014/main" id="{90679EF9-81B8-45BB-848A-1BD0CB04F11C}"/>
+                <a16:creationId xmlns:a16="http://schemas.microsoft.com/office/drawing/2014/main" id="{2560FB5F-49AD-45C9-A955-630FBCC34586}"/>
               </a:ext>
             </a:extLst>
           </p:cNvPr>
@@ -10617,7 +10617,7 @@
           <p:cNvPr id="4" name="">
             <a:extLst xmlns:a="http://schemas.openxmlformats.org/drawingml/2006/main">
               <a:ext uri="{FF2B5EF4-FFF2-40B4-BE49-F238E27FC236}">
-                <a16:creationId xmlns:a16="http://schemas.microsoft.com/office/drawing/2014/main" id="{1C87B2D5-924F-494E-9CBB-1C50C6511A5A}"/>
+                <a16:creationId xmlns:a16="http://schemas.microsoft.com/office/drawing/2014/main" id="{D644D0C6-7473-420B-B214-9EAC33275EB0}"/>
               </a:ext>
             </a:extLst>
           </p:cNvPr>
@@ -10681,7 +10681,7 @@
           <p:cNvPr id="5" name="">
             <a:extLst xmlns:a="http://schemas.openxmlformats.org/drawingml/2006/main">
               <a:ext uri="{FF2B5EF4-FFF2-40B4-BE49-F238E27FC236}">
-                <a16:creationId xmlns:a16="http://schemas.microsoft.com/office/drawing/2014/main" id="{3E7D24F9-4A58-48FA-B2DA-AA19697514AE}"/>
+                <a16:creationId xmlns:a16="http://schemas.microsoft.com/office/drawing/2014/main" id="{B81C4E71-4EED-4533-8060-F8C5CB28484F}"/>
               </a:ext>
             </a:extLst>
           </p:cNvPr>
@@ -10745,7 +10745,7 @@
           <p:cNvPr id="6" name="">
             <a:extLst xmlns:a="http://schemas.openxmlformats.org/drawingml/2006/main">
               <a:ext uri="{FF2B5EF4-FFF2-40B4-BE49-F238E27FC236}">
-                <a16:creationId xmlns:a16="http://schemas.microsoft.com/office/drawing/2014/main" id="{04FFF4C2-4870-4EC4-A96C-A6E8041F152A}"/>
+                <a16:creationId xmlns:a16="http://schemas.microsoft.com/office/drawing/2014/main" id="{84871618-113F-4FA1-921A-C062B140D6C4}"/>
               </a:ext>
             </a:extLst>
           </p:cNvPr>
@@ -10809,7 +10809,7 @@
           <p:cNvPr id="7" name="">
             <a:extLst xmlns:a="http://schemas.openxmlformats.org/drawingml/2006/main">
               <a:ext uri="{FF2B5EF4-FFF2-40B4-BE49-F238E27FC236}">
-                <a16:creationId xmlns:a16="http://schemas.microsoft.com/office/drawing/2014/main" id="{053CB629-D7C8-4BA3-91F1-7E5DF74BC8D2}"/>
+                <a16:creationId xmlns:a16="http://schemas.microsoft.com/office/drawing/2014/main" id="{0EE5CF6B-9051-4D12-B94C-DE50ADEA0288}"/>
               </a:ext>
             </a:extLst>
           </p:cNvPr>
@@ -10844,7 +10844,7 @@
           <p:cNvPr id="8" name="">
             <a:extLst xmlns:a="http://schemas.openxmlformats.org/drawingml/2006/main">
               <a:ext uri="{FF2B5EF4-FFF2-40B4-BE49-F238E27FC236}">
-                <a16:creationId xmlns:a16="http://schemas.microsoft.com/office/drawing/2014/main" id="{94CDDE87-8D42-450A-AAB5-80833678D0AC}"/>
+                <a16:creationId xmlns:a16="http://schemas.microsoft.com/office/drawing/2014/main" id="{5DFEACF4-C73D-4232-913A-ACF81067E6C1}"/>
               </a:ext>
             </a:extLst>
           </p:cNvPr>
@@ -10908,7 +10908,7 @@
           <p:cNvPr id="9" name="">
             <a:extLst xmlns:a="http://schemas.openxmlformats.org/drawingml/2006/main">
               <a:ext uri="{FF2B5EF4-FFF2-40B4-BE49-F238E27FC236}">
-                <a16:creationId xmlns:a16="http://schemas.microsoft.com/office/drawing/2014/main" id="{9C33CC49-5E51-4233-891A-3AEC19F7BD51}"/>
+                <a16:creationId xmlns:a16="http://schemas.microsoft.com/office/drawing/2014/main" id="{969227EA-F3E2-4FCD-9041-AAF925FCA220}"/>
               </a:ext>
             </a:extLst>
           </p:cNvPr>
@@ -10943,7 +10943,7 @@
           <p:cNvPr id="10" name="">
             <a:extLst xmlns:a="http://schemas.openxmlformats.org/drawingml/2006/main">
               <a:ext uri="{FF2B5EF4-FFF2-40B4-BE49-F238E27FC236}">
-                <a16:creationId xmlns:a16="http://schemas.microsoft.com/office/drawing/2014/main" id="{1BD0E33A-D304-4E61-8DFD-D82C2854F74A}"/>
+                <a16:creationId xmlns:a16="http://schemas.microsoft.com/office/drawing/2014/main" id="{F9B617B5-8FAC-4718-B499-647E4CE8A5CE}"/>
               </a:ext>
             </a:extLst>
           </p:cNvPr>
@@ -11007,7 +11007,7 @@
           <p:cNvPr id="11" name="">
             <a:extLst xmlns:a="http://schemas.openxmlformats.org/drawingml/2006/main">
               <a:ext uri="{FF2B5EF4-FFF2-40B4-BE49-F238E27FC236}">
-                <a16:creationId xmlns:a16="http://schemas.microsoft.com/office/drawing/2014/main" id="{7E0A9E78-9C60-49F1-9A73-DCA0A5B04352}"/>
+                <a16:creationId xmlns:a16="http://schemas.microsoft.com/office/drawing/2014/main" id="{47951EB1-DFD8-4E18-A0FE-8CC03C39BCC4}"/>
               </a:ext>
             </a:extLst>
           </p:cNvPr>
@@ -11042,7 +11042,7 @@
           <p:cNvPr id="12" name="">
             <a:extLst xmlns:a="http://schemas.openxmlformats.org/drawingml/2006/main">
               <a:ext uri="{FF2B5EF4-FFF2-40B4-BE49-F238E27FC236}">
-                <a16:creationId xmlns:a16="http://schemas.microsoft.com/office/drawing/2014/main" id="{BC6D4528-F3C8-4151-BA15-854F0890E71A}"/>
+                <a16:creationId xmlns:a16="http://schemas.microsoft.com/office/drawing/2014/main" id="{504FA0E2-6293-4622-B7B3-909A688D1A74}"/>
               </a:ext>
             </a:extLst>
           </p:cNvPr>
@@ -11106,7 +11106,7 @@
           <p:cNvPr id="13" name="">
             <a:extLst xmlns:a="http://schemas.openxmlformats.org/drawingml/2006/main">
               <a:ext uri="{FF2B5EF4-FFF2-40B4-BE49-F238E27FC236}">
-                <a16:creationId xmlns:a16="http://schemas.microsoft.com/office/drawing/2014/main" id="{A0AC7C36-0824-46EC-AB5A-712B64E7A5E1}"/>
+                <a16:creationId xmlns:a16="http://schemas.microsoft.com/office/drawing/2014/main" id="{B5C3CACA-B2AB-4FA3-B208-4EC9AA497FAC}"/>
               </a:ext>
             </a:extLst>
           </p:cNvPr>
@@ -11141,7 +11141,7 @@
           <p:cNvPr id="14" name="">
             <a:extLst xmlns:a="http://schemas.openxmlformats.org/drawingml/2006/main">
               <a:ext uri="{FF2B5EF4-FFF2-40B4-BE49-F238E27FC236}">
-                <a16:creationId xmlns:a16="http://schemas.microsoft.com/office/drawing/2014/main" id="{1793D95F-AA33-4194-B990-75E58FBE1A06}"/>
+                <a16:creationId xmlns:a16="http://schemas.microsoft.com/office/drawing/2014/main" id="{B8EEBC01-7D72-42B1-ADE5-F84B3ED1D4A0}"/>
               </a:ext>
             </a:extLst>
           </p:cNvPr>
@@ -11205,7 +11205,7 @@
           <p:cNvPr id="15" name="">
             <a:extLst xmlns:a="http://schemas.openxmlformats.org/drawingml/2006/main">
               <a:ext uri="{FF2B5EF4-FFF2-40B4-BE49-F238E27FC236}">
-                <a16:creationId xmlns:a16="http://schemas.microsoft.com/office/drawing/2014/main" id="{F7ADFFD9-B9D9-418E-A26A-769AB7E7E0EE}"/>
+                <a16:creationId xmlns:a16="http://schemas.microsoft.com/office/drawing/2014/main" id="{E26AB661-B7C0-4534-88A6-ECBCF6DC5CAB}"/>
               </a:ext>
             </a:extLst>
           </p:cNvPr>
@@ -11240,7 +11240,7 @@
           <p:cNvPr id="16" name="">
             <a:extLst xmlns:a="http://schemas.openxmlformats.org/drawingml/2006/main">
               <a:ext uri="{FF2B5EF4-FFF2-40B4-BE49-F238E27FC236}">
-                <a16:creationId xmlns:a16="http://schemas.microsoft.com/office/drawing/2014/main" id="{D634E6A9-C925-4C21-BE5F-C97928E67D07}"/>
+                <a16:creationId xmlns:a16="http://schemas.microsoft.com/office/drawing/2014/main" id="{54D7F97F-5E12-4F84-9536-26063A1D150A}"/>
               </a:ext>
             </a:extLst>
           </p:cNvPr>
@@ -11304,7 +11304,7 @@
           <p:cNvPr id="17" name="">
             <a:extLst xmlns:a="http://schemas.openxmlformats.org/drawingml/2006/main">
               <a:ext uri="{FF2B5EF4-FFF2-40B4-BE49-F238E27FC236}">
-                <a16:creationId xmlns:a16="http://schemas.microsoft.com/office/drawing/2014/main" id="{A1780222-4FD4-4518-A77B-08423BAA88E4}"/>
+                <a16:creationId xmlns:a16="http://schemas.microsoft.com/office/drawing/2014/main" id="{B413FC8E-16B9-4D91-A1E7-1FC9910DC2FF}"/>
               </a:ext>
             </a:extLst>
           </p:cNvPr>
@@ -11339,7 +11339,7 @@
           <p:cNvPr id="18" name="">
             <a:extLst xmlns:a="http://schemas.openxmlformats.org/drawingml/2006/main">
               <a:ext uri="{FF2B5EF4-FFF2-40B4-BE49-F238E27FC236}">
-                <a16:creationId xmlns:a16="http://schemas.microsoft.com/office/drawing/2014/main" id="{9A6197B6-B1CA-4C3D-8228-95E8CE9950A1}"/>
+                <a16:creationId xmlns:a16="http://schemas.microsoft.com/office/drawing/2014/main" id="{8A15EE31-1A46-4F1B-B274-DB9D0B1C1D08}"/>
               </a:ext>
             </a:extLst>
           </p:cNvPr>
@@ -11403,7 +11403,7 @@
           <p:cNvPr id="19" name="">
             <a:extLst xmlns:a="http://schemas.openxmlformats.org/drawingml/2006/main">
               <a:ext uri="{FF2B5EF4-FFF2-40B4-BE49-F238E27FC236}">
-                <a16:creationId xmlns:a16="http://schemas.microsoft.com/office/drawing/2014/main" id="{C8B36AA6-3E4E-4C0C-957D-57C5C3FFAD0B}"/>
+                <a16:creationId xmlns:a16="http://schemas.microsoft.com/office/drawing/2014/main" id="{F93F563F-A91B-4D3A-80FF-2E74A6A561C8}"/>
               </a:ext>
             </a:extLst>
           </p:cNvPr>
@@ -11467,7 +11467,7 @@
           <p:cNvPr id="20" name="">
             <a:extLst xmlns:a="http://schemas.openxmlformats.org/drawingml/2006/main">
               <a:ext uri="{FF2B5EF4-FFF2-40B4-BE49-F238E27FC236}">
-                <a16:creationId xmlns:a16="http://schemas.microsoft.com/office/drawing/2014/main" id="{B095B616-4112-4D2B-8A2B-3C13F61EFDC1}"/>
+                <a16:creationId xmlns:a16="http://schemas.microsoft.com/office/drawing/2014/main" id="{1804B2A6-4E2A-47FF-9D91-24EFE1D9BCF5}"/>
               </a:ext>
             </a:extLst>
           </p:cNvPr>
@@ -11500,7 +11500,7 @@
           <p:cNvPr id="21" name="">
             <a:extLst xmlns:a="http://schemas.openxmlformats.org/drawingml/2006/main">
               <a:ext uri="{FF2B5EF4-FFF2-40B4-BE49-F238E27FC236}">
-                <a16:creationId xmlns:a16="http://schemas.microsoft.com/office/drawing/2014/main" id="{71CA5477-D644-46BA-BD43-5AD4B9A41C9F}"/>
+                <a16:creationId xmlns:a16="http://schemas.microsoft.com/office/drawing/2014/main" id="{2002178C-A448-4373-A390-A46807C5FB4C}"/>
               </a:ext>
             </a:extLst>
           </p:cNvPr>
@@ -11564,7 +11564,7 @@
           <p:cNvPr id="22" name="">
             <a:extLst xmlns:a="http://schemas.openxmlformats.org/drawingml/2006/main">
               <a:ext uri="{FF2B5EF4-FFF2-40B4-BE49-F238E27FC236}">
-                <a16:creationId xmlns:a16="http://schemas.microsoft.com/office/drawing/2014/main" id="{C16C3D77-407D-4038-916C-9B605413CB1F}"/>
+                <a16:creationId xmlns:a16="http://schemas.microsoft.com/office/drawing/2014/main" id="{E897FD62-DA57-4AEF-95ED-DDE83BC7102C}"/>
               </a:ext>
             </a:extLst>
           </p:cNvPr>
@@ -11626,7 +11626,7 @@
     </p:spTree>
     <p:extLst>
       <p:ext uri="{BB962C8B-B14F-4D97-AF65-F5344CB8AC3E}">
-        <p14:creationId xmlns:p14="http://schemas.microsoft.com/office/powerpoint/2010/main" val="961540741"/>
+        <p14:creationId xmlns:p14="http://schemas.microsoft.com/office/powerpoint/2010/main" val="688892881"/>
       </p:ext>
     </p:extLst>
   </p:cSld>
@@ -11654,7 +11654,7 @@
           <p:nvPr/>
         </p:nvPicPr>
         <p:blipFill>
-          <a:blip xmlns:r="http://schemas.openxmlformats.org/officeDocument/2006/relationships" xmlns:a="http://schemas.openxmlformats.org/drawingml/2006/main" r:embed="R175a059fafbc4780"/>
+          <a:blip xmlns:r="http://schemas.openxmlformats.org/officeDocument/2006/relationships" xmlns:a="http://schemas.openxmlformats.org/drawingml/2006/main" r:embed="Rdd9d832a68aa4073"/>
           <a:srcRect xmlns:a="http://schemas.openxmlformats.org/drawingml/2006/main" l="0" t="27" r="0" b="27"/>
           <a:stretch xmlns:a="http://schemas.openxmlformats.org/drawingml/2006/main">
             <a:fillRect l="0" t="0" r="0" b="0"/>
@@ -11675,7 +11675,7 @@
           <p:cNvPr id="2" name="">
             <a:extLst xmlns:a="http://schemas.openxmlformats.org/drawingml/2006/main">
               <a:ext uri="{FF2B5EF4-FFF2-40B4-BE49-F238E27FC236}">
-                <a16:creationId xmlns:a16="http://schemas.microsoft.com/office/drawing/2014/main" id="{1375EC5D-7BC1-4BE4-B07F-AACF8BA02F60}"/>
+                <a16:creationId xmlns:a16="http://schemas.microsoft.com/office/drawing/2014/main" id="{631EC8D9-29CD-4316-956D-758F7FA8A9B3}"/>
               </a:ext>
             </a:extLst>
           </p:cNvPr>
@@ -11712,7 +11712,7 @@
           <p:cNvPr id="3" name="">
             <a:extLst xmlns:a="http://schemas.openxmlformats.org/drawingml/2006/main">
               <a:ext uri="{FF2B5EF4-FFF2-40B4-BE49-F238E27FC236}">
-                <a16:creationId xmlns:a16="http://schemas.microsoft.com/office/drawing/2014/main" id="{1EC5388E-29CB-4410-9C0E-55FA03022F60}"/>
+                <a16:creationId xmlns:a16="http://schemas.microsoft.com/office/drawing/2014/main" id="{6A273624-FE1D-4AFB-AAED-8A867CC75057}"/>
               </a:ext>
             </a:extLst>
           </p:cNvPr>
@@ -11749,7 +11749,7 @@
           <p:cNvPr id="4" name="">
             <a:extLst xmlns:a="http://schemas.openxmlformats.org/drawingml/2006/main">
               <a:ext uri="{FF2B5EF4-FFF2-40B4-BE49-F238E27FC236}">
-                <a16:creationId xmlns:a16="http://schemas.microsoft.com/office/drawing/2014/main" id="{1A5AB58F-7549-49DA-A94E-D462E91F061C}"/>
+                <a16:creationId xmlns:a16="http://schemas.microsoft.com/office/drawing/2014/main" id="{A3EBADFC-C83E-4A22-9327-1AFD92E4B3F4}"/>
               </a:ext>
             </a:extLst>
           </p:cNvPr>
@@ -11813,7 +11813,7 @@
           <p:cNvPr id="5" name="">
             <a:extLst xmlns:a="http://schemas.openxmlformats.org/drawingml/2006/main">
               <a:ext uri="{FF2B5EF4-FFF2-40B4-BE49-F238E27FC236}">
-                <a16:creationId xmlns:a16="http://schemas.microsoft.com/office/drawing/2014/main" id="{1B4A67D1-E42C-4D9D-83B2-DDDA447823F3}"/>
+                <a16:creationId xmlns:a16="http://schemas.microsoft.com/office/drawing/2014/main" id="{6D1D5C67-9FF1-4F39-892D-EC4034257371}"/>
               </a:ext>
             </a:extLst>
           </p:cNvPr>
@@ -11877,7 +11877,7 @@
           <p:cNvPr id="6" name="">
             <a:extLst xmlns:a="http://schemas.openxmlformats.org/drawingml/2006/main">
               <a:ext uri="{FF2B5EF4-FFF2-40B4-BE49-F238E27FC236}">
-                <a16:creationId xmlns:a16="http://schemas.microsoft.com/office/drawing/2014/main" id="{88B4B711-E2A6-434F-8485-BB54415B8BA5}"/>
+                <a16:creationId xmlns:a16="http://schemas.microsoft.com/office/drawing/2014/main" id="{B58F5B75-3321-4F9F-9C8D-94A903790814}"/>
               </a:ext>
             </a:extLst>
           </p:cNvPr>
@@ -11941,7 +11941,7 @@
           <p:cNvPr id="7" name="">
             <a:extLst xmlns:a="http://schemas.openxmlformats.org/drawingml/2006/main">
               <a:ext uri="{FF2B5EF4-FFF2-40B4-BE49-F238E27FC236}">
-                <a16:creationId xmlns:a16="http://schemas.microsoft.com/office/drawing/2014/main" id="{4E759EC8-480B-4CC5-BD26-3BD007ABD2FC}"/>
+                <a16:creationId xmlns:a16="http://schemas.microsoft.com/office/drawing/2014/main" id="{03ACA094-ED7F-4E8A-BB7A-73BB82348F53}"/>
               </a:ext>
             </a:extLst>
           </p:cNvPr>
@@ -11976,7 +11976,7 @@
           <p:cNvPr id="8" name="">
             <a:extLst xmlns:a="http://schemas.openxmlformats.org/drawingml/2006/main">
               <a:ext uri="{FF2B5EF4-FFF2-40B4-BE49-F238E27FC236}">
-                <a16:creationId xmlns:a16="http://schemas.microsoft.com/office/drawing/2014/main" id="{80FC6410-A321-4181-B372-CCB1F2240A99}"/>
+                <a16:creationId xmlns:a16="http://schemas.microsoft.com/office/drawing/2014/main" id="{34E38A1D-BC5E-48CC-ADB9-BEE814BCB8A7}"/>
               </a:ext>
             </a:extLst>
           </p:cNvPr>
@@ -12040,7 +12040,7 @@
           <p:cNvPr id="9" name="">
             <a:extLst xmlns:a="http://schemas.openxmlformats.org/drawingml/2006/main">
               <a:ext uri="{FF2B5EF4-FFF2-40B4-BE49-F238E27FC236}">
-                <a16:creationId xmlns:a16="http://schemas.microsoft.com/office/drawing/2014/main" id="{E0F0F53F-3468-48EF-AB4E-B07F426FBAD4}"/>
+                <a16:creationId xmlns:a16="http://schemas.microsoft.com/office/drawing/2014/main" id="{1C64FB73-52BC-4CBF-92F4-0FE22F809B45}"/>
               </a:ext>
             </a:extLst>
           </p:cNvPr>
@@ -12104,7 +12104,7 @@
           <p:cNvPr id="10" name="">
             <a:extLst xmlns:a="http://schemas.openxmlformats.org/drawingml/2006/main">
               <a:ext uri="{FF2B5EF4-FFF2-40B4-BE49-F238E27FC236}">
-                <a16:creationId xmlns:a16="http://schemas.microsoft.com/office/drawing/2014/main" id="{48D7BF24-BE98-4B9A-B023-0D0DF5C6250E}"/>
+                <a16:creationId xmlns:a16="http://schemas.microsoft.com/office/drawing/2014/main" id="{710C42A3-7BC6-48D4-A09E-62BCEB762DA6}"/>
               </a:ext>
             </a:extLst>
           </p:cNvPr>
@@ -12137,7 +12137,7 @@
           <p:cNvPr id="11" name="">
             <a:extLst xmlns:a="http://schemas.openxmlformats.org/drawingml/2006/main">
               <a:ext uri="{FF2B5EF4-FFF2-40B4-BE49-F238E27FC236}">
-                <a16:creationId xmlns:a16="http://schemas.microsoft.com/office/drawing/2014/main" id="{F0008BB3-714E-415D-A96C-C1507A54CD50}"/>
+                <a16:creationId xmlns:a16="http://schemas.microsoft.com/office/drawing/2014/main" id="{FCBD4813-6968-495C-8E74-21531A2BD2E8}"/>
               </a:ext>
             </a:extLst>
           </p:cNvPr>
@@ -12172,7 +12172,7 @@
           <p:cNvPr id="12" name="">
             <a:extLst xmlns:a="http://schemas.openxmlformats.org/drawingml/2006/main">
               <a:ext uri="{FF2B5EF4-FFF2-40B4-BE49-F238E27FC236}">
-                <a16:creationId xmlns:a16="http://schemas.microsoft.com/office/drawing/2014/main" id="{91EADB01-C227-4670-8EA7-ACED2D591A9E}"/>
+                <a16:creationId xmlns:a16="http://schemas.microsoft.com/office/drawing/2014/main" id="{1DF47CDA-99D4-4C1B-9F61-AFA89B759F7E}"/>
               </a:ext>
             </a:extLst>
           </p:cNvPr>
@@ -12236,7 +12236,7 @@
           <p:cNvPr id="13" name="">
             <a:extLst xmlns:a="http://schemas.openxmlformats.org/drawingml/2006/main">
               <a:ext uri="{FF2B5EF4-FFF2-40B4-BE49-F238E27FC236}">
-                <a16:creationId xmlns:a16="http://schemas.microsoft.com/office/drawing/2014/main" id="{A1F72662-127F-44E9-9FA1-6000FD95E7A5}"/>
+                <a16:creationId xmlns:a16="http://schemas.microsoft.com/office/drawing/2014/main" id="{695D57A0-45EC-43AB-9BCA-11089D619A2E}"/>
               </a:ext>
             </a:extLst>
           </p:cNvPr>
@@ -12300,7 +12300,7 @@
           <p:cNvPr id="14" name="">
             <a:extLst xmlns:a="http://schemas.openxmlformats.org/drawingml/2006/main">
               <a:ext uri="{FF2B5EF4-FFF2-40B4-BE49-F238E27FC236}">
-                <a16:creationId xmlns:a16="http://schemas.microsoft.com/office/drawing/2014/main" id="{5A0D1402-6B2E-44AE-B4F1-9E2078C307E4}"/>
+                <a16:creationId xmlns:a16="http://schemas.microsoft.com/office/drawing/2014/main" id="{A43E4C67-5320-41BF-B38B-EABAF6C335B5}"/>
               </a:ext>
             </a:extLst>
           </p:cNvPr>
@@ -12333,7 +12333,7 @@
           <p:cNvPr id="15" name="">
             <a:extLst xmlns:a="http://schemas.openxmlformats.org/drawingml/2006/main">
               <a:ext uri="{FF2B5EF4-FFF2-40B4-BE49-F238E27FC236}">
-                <a16:creationId xmlns:a16="http://schemas.microsoft.com/office/drawing/2014/main" id="{CD1012C1-D477-4FF6-98CA-75FD30A1B6A8}"/>
+                <a16:creationId xmlns:a16="http://schemas.microsoft.com/office/drawing/2014/main" id="{086AE771-E834-42C3-861F-06434DEE8EE1}"/>
               </a:ext>
             </a:extLst>
           </p:cNvPr>
@@ -12368,7 +12368,7 @@
           <p:cNvPr id="16" name="">
             <a:extLst xmlns:a="http://schemas.openxmlformats.org/drawingml/2006/main">
               <a:ext uri="{FF2B5EF4-FFF2-40B4-BE49-F238E27FC236}">
-                <a16:creationId xmlns:a16="http://schemas.microsoft.com/office/drawing/2014/main" id="{55968D98-3853-4BD4-8F93-A75893CADF60}"/>
+                <a16:creationId xmlns:a16="http://schemas.microsoft.com/office/drawing/2014/main" id="{AB30721D-2432-43F8-AD8C-6BA8FDF13BC6}"/>
               </a:ext>
             </a:extLst>
           </p:cNvPr>
@@ -12432,7 +12432,7 @@
           <p:cNvPr id="17" name="">
             <a:extLst xmlns:a="http://schemas.openxmlformats.org/drawingml/2006/main">
               <a:ext uri="{FF2B5EF4-FFF2-40B4-BE49-F238E27FC236}">
-                <a16:creationId xmlns:a16="http://schemas.microsoft.com/office/drawing/2014/main" id="{FAC42C71-66C3-43F9-BA47-A616B77DEC55}"/>
+                <a16:creationId xmlns:a16="http://schemas.microsoft.com/office/drawing/2014/main" id="{3263AAFB-0CC0-4CBF-9DA6-99AA518C6662}"/>
               </a:ext>
             </a:extLst>
           </p:cNvPr>
@@ -12496,7 +12496,7 @@
           <p:cNvPr id="18" name="">
             <a:extLst xmlns:a="http://schemas.openxmlformats.org/drawingml/2006/main">
               <a:ext uri="{FF2B5EF4-FFF2-40B4-BE49-F238E27FC236}">
-                <a16:creationId xmlns:a16="http://schemas.microsoft.com/office/drawing/2014/main" id="{E4A3822A-AC0C-4C74-BF0A-5B8C42A68528}"/>
+                <a16:creationId xmlns:a16="http://schemas.microsoft.com/office/drawing/2014/main" id="{9FF077A2-88D2-47EE-8927-DEEC1CFCA845}"/>
               </a:ext>
             </a:extLst>
           </p:cNvPr>
@@ -12529,7 +12529,7 @@
           <p:cNvPr id="19" name="">
             <a:extLst xmlns:a="http://schemas.openxmlformats.org/drawingml/2006/main">
               <a:ext uri="{FF2B5EF4-FFF2-40B4-BE49-F238E27FC236}">
-                <a16:creationId xmlns:a16="http://schemas.microsoft.com/office/drawing/2014/main" id="{68A30DFA-B620-44B4-B27F-B26D852C62F7}"/>
+                <a16:creationId xmlns:a16="http://schemas.microsoft.com/office/drawing/2014/main" id="{679E64CB-A84A-4F90-88ED-8076F303C7D9}"/>
               </a:ext>
             </a:extLst>
           </p:cNvPr>
@@ -12564,7 +12564,7 @@
           <p:cNvPr id="20" name="">
             <a:extLst xmlns:a="http://schemas.openxmlformats.org/drawingml/2006/main">
               <a:ext uri="{FF2B5EF4-FFF2-40B4-BE49-F238E27FC236}">
-                <a16:creationId xmlns:a16="http://schemas.microsoft.com/office/drawing/2014/main" id="{27AF9E64-9753-49A2-8CBC-8392900030CD}"/>
+                <a16:creationId xmlns:a16="http://schemas.microsoft.com/office/drawing/2014/main" id="{CC8438BE-CE78-4D86-AB27-CB6C758BE94F}"/>
               </a:ext>
             </a:extLst>
           </p:cNvPr>
@@ -12628,7 +12628,7 @@
           <p:cNvPr id="21" name="">
             <a:extLst xmlns:a="http://schemas.openxmlformats.org/drawingml/2006/main">
               <a:ext uri="{FF2B5EF4-FFF2-40B4-BE49-F238E27FC236}">
-                <a16:creationId xmlns:a16="http://schemas.microsoft.com/office/drawing/2014/main" id="{110189E1-A42B-4ABD-AF99-BF024996C124}"/>
+                <a16:creationId xmlns:a16="http://schemas.microsoft.com/office/drawing/2014/main" id="{7682B33F-EC9F-4453-865F-F0DE9B656B23}"/>
               </a:ext>
             </a:extLst>
           </p:cNvPr>
@@ -12692,7 +12692,7 @@
           <p:cNvPr id="22" name="">
             <a:extLst xmlns:a="http://schemas.openxmlformats.org/drawingml/2006/main">
               <a:ext uri="{FF2B5EF4-FFF2-40B4-BE49-F238E27FC236}">
-                <a16:creationId xmlns:a16="http://schemas.microsoft.com/office/drawing/2014/main" id="{FDFAFBEF-065C-4E74-8BBC-364FFEC726A4}"/>
+                <a16:creationId xmlns:a16="http://schemas.microsoft.com/office/drawing/2014/main" id="{6A60CD55-B491-4E03-82D6-F30823D59ED4}"/>
               </a:ext>
             </a:extLst>
           </p:cNvPr>
@@ -12756,7 +12756,7 @@
           <p:cNvPr id="23" name="">
             <a:extLst xmlns:a="http://schemas.openxmlformats.org/drawingml/2006/main">
               <a:ext uri="{FF2B5EF4-FFF2-40B4-BE49-F238E27FC236}">
-                <a16:creationId xmlns:a16="http://schemas.microsoft.com/office/drawing/2014/main" id="{52F875E6-BE64-4A83-BBE2-6B9995CFF998}"/>
+                <a16:creationId xmlns:a16="http://schemas.microsoft.com/office/drawing/2014/main" id="{5A614FDB-C047-492C-B8AE-773D4D7CBF7F}"/>
               </a:ext>
             </a:extLst>
           </p:cNvPr>
@@ -12820,7 +12820,7 @@
           <p:cNvPr id="24" name="">
             <a:extLst xmlns:a="http://schemas.openxmlformats.org/drawingml/2006/main">
               <a:ext uri="{FF2B5EF4-FFF2-40B4-BE49-F238E27FC236}">
-                <a16:creationId xmlns:a16="http://schemas.microsoft.com/office/drawing/2014/main" id="{6FF46C2C-F04B-407E-A0F0-076A9114D8B5}"/>
+                <a16:creationId xmlns:a16="http://schemas.microsoft.com/office/drawing/2014/main" id="{01F2E883-8FDB-4535-8827-A2C3AA9B1EC4}"/>
               </a:ext>
             </a:extLst>
           </p:cNvPr>
@@ -12853,7 +12853,7 @@
           <p:cNvPr id="25" name="">
             <a:extLst xmlns:a="http://schemas.openxmlformats.org/drawingml/2006/main">
               <a:ext uri="{FF2B5EF4-FFF2-40B4-BE49-F238E27FC236}">
-                <a16:creationId xmlns:a16="http://schemas.microsoft.com/office/drawing/2014/main" id="{D02D9514-61BF-4223-9165-11902EE6AEB9}"/>
+                <a16:creationId xmlns:a16="http://schemas.microsoft.com/office/drawing/2014/main" id="{0702248A-4EF5-4838-85CD-E40DD587AF61}"/>
               </a:ext>
             </a:extLst>
           </p:cNvPr>
@@ -12917,7 +12917,7 @@
           <p:cNvPr id="26" name="">
             <a:extLst xmlns:a="http://schemas.openxmlformats.org/drawingml/2006/main">
               <a:ext uri="{FF2B5EF4-FFF2-40B4-BE49-F238E27FC236}">
-                <a16:creationId xmlns:a16="http://schemas.microsoft.com/office/drawing/2014/main" id="{922E0B94-8720-4E10-A4D2-193E236F00FC}"/>
+                <a16:creationId xmlns:a16="http://schemas.microsoft.com/office/drawing/2014/main" id="{7DC40EDA-4B04-4BD9-9D1A-14E31958453E}"/>
               </a:ext>
             </a:extLst>
           </p:cNvPr>
@@ -12979,7 +12979,7 @@
     </p:spTree>
     <p:extLst>
       <p:ext uri="{BB962C8B-B14F-4D97-AF65-F5344CB8AC3E}">
-        <p14:creationId xmlns:p14="http://schemas.microsoft.com/office/powerpoint/2010/main" val="1511340176"/>
+        <p14:creationId xmlns:p14="http://schemas.microsoft.com/office/powerpoint/2010/main" val="20069448"/>
       </p:ext>
     </p:extLst>
   </p:cSld>
@@ -13007,7 +13007,7 @@
           <p:nvPr/>
         </p:nvPicPr>
         <p:blipFill>
-          <a:blip xmlns:r="http://schemas.openxmlformats.org/officeDocument/2006/relationships" xmlns:a="http://schemas.openxmlformats.org/drawingml/2006/main" r:embed="R68f90bb749ce4103"/>
+          <a:blip xmlns:r="http://schemas.openxmlformats.org/officeDocument/2006/relationships" xmlns:a="http://schemas.openxmlformats.org/drawingml/2006/main" r:embed="R9429c9466f6945d1"/>
           <a:srcRect xmlns:a="http://schemas.openxmlformats.org/drawingml/2006/main" l="0" t="27" r="0" b="27"/>
           <a:stretch xmlns:a="http://schemas.openxmlformats.org/drawingml/2006/main">
             <a:fillRect l="0" t="0" r="0" b="0"/>
@@ -13028,7 +13028,7 @@
           <p:cNvPr id="2" name="">
             <a:extLst xmlns:a="http://schemas.openxmlformats.org/drawingml/2006/main">
               <a:ext uri="{FF2B5EF4-FFF2-40B4-BE49-F238E27FC236}">
-                <a16:creationId xmlns:a16="http://schemas.microsoft.com/office/drawing/2014/main" id="{A226480C-FB7A-425A-8192-E136DD8ABA7D}"/>
+                <a16:creationId xmlns:a16="http://schemas.microsoft.com/office/drawing/2014/main" id="{2B0038F9-8418-4C8C-B3B0-9759B01F0FCD}"/>
               </a:ext>
             </a:extLst>
           </p:cNvPr>
@@ -13065,7 +13065,7 @@
           <p:cNvPr id="3" name="">
             <a:extLst xmlns:a="http://schemas.openxmlformats.org/drawingml/2006/main">
               <a:ext uri="{FF2B5EF4-FFF2-40B4-BE49-F238E27FC236}">
-                <a16:creationId xmlns:a16="http://schemas.microsoft.com/office/drawing/2014/main" id="{0272B2BE-908D-496F-A461-D2C303BEA71E}"/>
+                <a16:creationId xmlns:a16="http://schemas.microsoft.com/office/drawing/2014/main" id="{573CE36B-011C-4231-B868-6AA151FEBC38}"/>
               </a:ext>
             </a:extLst>
           </p:cNvPr>
@@ -13102,7 +13102,7 @@
           <p:cNvPr id="4" name="">
             <a:extLst xmlns:a="http://schemas.openxmlformats.org/drawingml/2006/main">
               <a:ext uri="{FF2B5EF4-FFF2-40B4-BE49-F238E27FC236}">
-                <a16:creationId xmlns:a16="http://schemas.microsoft.com/office/drawing/2014/main" id="{66B04C17-8366-45B0-97F6-3EE6AC751D69}"/>
+                <a16:creationId xmlns:a16="http://schemas.microsoft.com/office/drawing/2014/main" id="{CA0050A9-1CA4-4266-B1B0-8323ECB55344}"/>
               </a:ext>
             </a:extLst>
           </p:cNvPr>
@@ -13166,7 +13166,7 @@
           <p:cNvPr id="5" name="">
             <a:extLst xmlns:a="http://schemas.openxmlformats.org/drawingml/2006/main">
               <a:ext uri="{FF2B5EF4-FFF2-40B4-BE49-F238E27FC236}">
-                <a16:creationId xmlns:a16="http://schemas.microsoft.com/office/drawing/2014/main" id="{FD8128E6-6117-4CDA-9432-C680B8C97ACB}"/>
+                <a16:creationId xmlns:a16="http://schemas.microsoft.com/office/drawing/2014/main" id="{EC8C6CE9-1064-4CAF-A671-DA820DE9B2E3}"/>
               </a:ext>
             </a:extLst>
           </p:cNvPr>
@@ -13230,7 +13230,7 @@
           <p:cNvPr id="6" name="">
             <a:extLst xmlns:a="http://schemas.openxmlformats.org/drawingml/2006/main">
               <a:ext uri="{FF2B5EF4-FFF2-40B4-BE49-F238E27FC236}">
-                <a16:creationId xmlns:a16="http://schemas.microsoft.com/office/drawing/2014/main" id="{B211129F-3988-4A4A-85AE-CD7E389F139C}"/>
+                <a16:creationId xmlns:a16="http://schemas.microsoft.com/office/drawing/2014/main" id="{B13F9440-A6A4-447E-893B-3FE9C2BC95B6}"/>
               </a:ext>
             </a:extLst>
           </p:cNvPr>
@@ -13294,7 +13294,7 @@
           <p:cNvPr id="7" name="">
             <a:extLst xmlns:a="http://schemas.openxmlformats.org/drawingml/2006/main">
               <a:ext uri="{FF2B5EF4-FFF2-40B4-BE49-F238E27FC236}">
-                <a16:creationId xmlns:a16="http://schemas.microsoft.com/office/drawing/2014/main" id="{6CD7AEBD-9B67-48BA-BC69-869255F4FBD8}"/>
+                <a16:creationId xmlns:a16="http://schemas.microsoft.com/office/drawing/2014/main" id="{3ADF5491-1744-46D5-86B5-1B462320C33B}"/>
               </a:ext>
             </a:extLst>
           </p:cNvPr>
@@ -13329,7 +13329,7 @@
           <p:cNvPr id="8" name="">
             <a:extLst xmlns:a="http://schemas.openxmlformats.org/drawingml/2006/main">
               <a:ext uri="{FF2B5EF4-FFF2-40B4-BE49-F238E27FC236}">
-                <a16:creationId xmlns:a16="http://schemas.microsoft.com/office/drawing/2014/main" id="{FDF2BB46-C6DB-442A-833D-A2A4EFE67CE0}"/>
+                <a16:creationId xmlns:a16="http://schemas.microsoft.com/office/drawing/2014/main" id="{D643964E-0EE4-4985-91B6-FC51E1765181}"/>
               </a:ext>
             </a:extLst>
           </p:cNvPr>
@@ -13416,7 +13416,7 @@
           <p:cNvPr id="9" name="">
             <a:extLst xmlns:a="http://schemas.openxmlformats.org/drawingml/2006/main">
               <a:ext uri="{FF2B5EF4-FFF2-40B4-BE49-F238E27FC236}">
-                <a16:creationId xmlns:a16="http://schemas.microsoft.com/office/drawing/2014/main" id="{C85122A7-134B-4FCE-95B7-C7EB4EF0625A}"/>
+                <a16:creationId xmlns:a16="http://schemas.microsoft.com/office/drawing/2014/main" id="{E10B5A62-A06A-4885-B7BA-9C09713F241D}"/>
               </a:ext>
             </a:extLst>
           </p:cNvPr>
@@ -13480,7 +13480,7 @@
           <p:cNvPr id="10" name="">
             <a:extLst xmlns:a="http://schemas.openxmlformats.org/drawingml/2006/main">
               <a:ext uri="{FF2B5EF4-FFF2-40B4-BE49-F238E27FC236}">
-                <a16:creationId xmlns:a16="http://schemas.microsoft.com/office/drawing/2014/main" id="{54016A06-ADAE-4696-8443-44EC9E3DBB01}"/>
+                <a16:creationId xmlns:a16="http://schemas.microsoft.com/office/drawing/2014/main" id="{35ED3AA6-100B-40CA-BEF4-FF14A2E9E4E2}"/>
               </a:ext>
             </a:extLst>
           </p:cNvPr>
@@ -13515,7 +13515,7 @@
           <p:cNvPr id="11" name="">
             <a:extLst xmlns:a="http://schemas.openxmlformats.org/drawingml/2006/main">
               <a:ext uri="{FF2B5EF4-FFF2-40B4-BE49-F238E27FC236}">
-                <a16:creationId xmlns:a16="http://schemas.microsoft.com/office/drawing/2014/main" id="{94DD8A5F-C27F-47B7-A0A4-93B149422B22}"/>
+                <a16:creationId xmlns:a16="http://schemas.microsoft.com/office/drawing/2014/main" id="{6743D90E-A7D5-48E9-87E5-405307C76EA9}"/>
               </a:ext>
             </a:extLst>
           </p:cNvPr>
@@ -13579,7 +13579,7 @@
           <p:cNvPr id="12" name="">
             <a:extLst xmlns:a="http://schemas.openxmlformats.org/drawingml/2006/main">
               <a:ext uri="{FF2B5EF4-FFF2-40B4-BE49-F238E27FC236}">
-                <a16:creationId xmlns:a16="http://schemas.microsoft.com/office/drawing/2014/main" id="{D7405E01-41ED-40DD-B0CC-3ACD02168BF7}"/>
+                <a16:creationId xmlns:a16="http://schemas.microsoft.com/office/drawing/2014/main" id="{F2E153BE-74E6-4AB0-AAC8-8ABCC648C6B4}"/>
               </a:ext>
             </a:extLst>
           </p:cNvPr>
@@ -13612,7 +13612,7 @@
           <p:cNvPr id="13" name="">
             <a:extLst xmlns:a="http://schemas.openxmlformats.org/drawingml/2006/main">
               <a:ext uri="{FF2B5EF4-FFF2-40B4-BE49-F238E27FC236}">
-                <a16:creationId xmlns:a16="http://schemas.microsoft.com/office/drawing/2014/main" id="{CB5964E3-B356-4A98-917F-CC6FF3E484D8}"/>
+                <a16:creationId xmlns:a16="http://schemas.microsoft.com/office/drawing/2014/main" id="{EC946057-208B-471B-ABBE-9E023564B317}"/>
               </a:ext>
             </a:extLst>
           </p:cNvPr>
@@ -13647,7 +13647,7 @@
           <p:cNvPr id="14" name="">
             <a:extLst xmlns:a="http://schemas.openxmlformats.org/drawingml/2006/main">
               <a:ext uri="{FF2B5EF4-FFF2-40B4-BE49-F238E27FC236}">
-                <a16:creationId xmlns:a16="http://schemas.microsoft.com/office/drawing/2014/main" id="{D1679D94-176F-4804-A7E0-2A5AC1E2E91C}"/>
+                <a16:creationId xmlns:a16="http://schemas.microsoft.com/office/drawing/2014/main" id="{18CB4E61-2BA3-4CFC-AFE3-154333E37F74}"/>
               </a:ext>
             </a:extLst>
           </p:cNvPr>
@@ -13711,7 +13711,7 @@
           <p:cNvPr id="15" name="">
             <a:extLst xmlns:a="http://schemas.openxmlformats.org/drawingml/2006/main">
               <a:ext uri="{FF2B5EF4-FFF2-40B4-BE49-F238E27FC236}">
-                <a16:creationId xmlns:a16="http://schemas.microsoft.com/office/drawing/2014/main" id="{A093B30F-3CE7-4F8E-AB1D-B098F4A10972}"/>
+                <a16:creationId xmlns:a16="http://schemas.microsoft.com/office/drawing/2014/main" id="{F12628EF-A616-4941-8789-3F0575DED4A5}"/>
               </a:ext>
             </a:extLst>
           </p:cNvPr>
@@ -13744,7 +13744,7 @@
           <p:cNvPr id="16" name="">
             <a:extLst xmlns:a="http://schemas.openxmlformats.org/drawingml/2006/main">
               <a:ext uri="{FF2B5EF4-FFF2-40B4-BE49-F238E27FC236}">
-                <a16:creationId xmlns:a16="http://schemas.microsoft.com/office/drawing/2014/main" id="{0B497CD6-09E5-45CD-9432-17187B3D1508}"/>
+                <a16:creationId xmlns:a16="http://schemas.microsoft.com/office/drawing/2014/main" id="{CAB4ED02-FD85-4712-9561-AE1B520AFE18}"/>
               </a:ext>
             </a:extLst>
           </p:cNvPr>
@@ -13779,7 +13779,7 @@
           <p:cNvPr id="17" name="">
             <a:extLst xmlns:a="http://schemas.openxmlformats.org/drawingml/2006/main">
               <a:ext uri="{FF2B5EF4-FFF2-40B4-BE49-F238E27FC236}">
-                <a16:creationId xmlns:a16="http://schemas.microsoft.com/office/drawing/2014/main" id="{B2A9A224-321F-41BC-91A5-FB4D63905AB5}"/>
+                <a16:creationId xmlns:a16="http://schemas.microsoft.com/office/drawing/2014/main" id="{6B6B6BE3-12E8-4B83-850C-6CDF307E3F20}"/>
               </a:ext>
             </a:extLst>
           </p:cNvPr>
@@ -13843,7 +13843,7 @@
           <p:cNvPr id="18" name="">
             <a:extLst xmlns:a="http://schemas.openxmlformats.org/drawingml/2006/main">
               <a:ext uri="{FF2B5EF4-FFF2-40B4-BE49-F238E27FC236}">
-                <a16:creationId xmlns:a16="http://schemas.microsoft.com/office/drawing/2014/main" id="{D691C20A-71A6-424F-BC20-034B92896930}"/>
+                <a16:creationId xmlns:a16="http://schemas.microsoft.com/office/drawing/2014/main" id="{66937750-8404-4A62-9539-4434EE80ED3F}"/>
               </a:ext>
             </a:extLst>
           </p:cNvPr>
@@ -13876,7 +13876,7 @@
           <p:cNvPr id="19" name="">
             <a:extLst xmlns:a="http://schemas.openxmlformats.org/drawingml/2006/main">
               <a:ext uri="{FF2B5EF4-FFF2-40B4-BE49-F238E27FC236}">
-                <a16:creationId xmlns:a16="http://schemas.microsoft.com/office/drawing/2014/main" id="{3EBB188B-BCD8-4901-91DF-170B8817964E}"/>
+                <a16:creationId xmlns:a16="http://schemas.microsoft.com/office/drawing/2014/main" id="{EF3CE886-0149-43F9-AF3F-E06DC85E92C6}"/>
               </a:ext>
             </a:extLst>
           </p:cNvPr>
@@ -13911,7 +13911,7 @@
           <p:cNvPr id="20" name="">
             <a:extLst xmlns:a="http://schemas.openxmlformats.org/drawingml/2006/main">
               <a:ext uri="{FF2B5EF4-FFF2-40B4-BE49-F238E27FC236}">
-                <a16:creationId xmlns:a16="http://schemas.microsoft.com/office/drawing/2014/main" id="{AF9A7BED-F665-4C88-A224-A218AFB611EB}"/>
+                <a16:creationId xmlns:a16="http://schemas.microsoft.com/office/drawing/2014/main" id="{2C7C3037-0B38-4E7C-BBC5-F6A36A8398E8}"/>
               </a:ext>
             </a:extLst>
           </p:cNvPr>
@@ -13975,7 +13975,7 @@
           <p:cNvPr id="21" name="">
             <a:extLst xmlns:a="http://schemas.openxmlformats.org/drawingml/2006/main">
               <a:ext uri="{FF2B5EF4-FFF2-40B4-BE49-F238E27FC236}">
-                <a16:creationId xmlns:a16="http://schemas.microsoft.com/office/drawing/2014/main" id="{059CE507-6928-466F-A6F5-AC810FE3F080}"/>
+                <a16:creationId xmlns:a16="http://schemas.microsoft.com/office/drawing/2014/main" id="{467D2079-D8E9-4ED2-BD9F-FE2014E1FD7F}"/>
               </a:ext>
             </a:extLst>
           </p:cNvPr>
@@ -14008,7 +14008,7 @@
           <p:cNvPr id="22" name="">
             <a:extLst xmlns:a="http://schemas.openxmlformats.org/drawingml/2006/main">
               <a:ext uri="{FF2B5EF4-FFF2-40B4-BE49-F238E27FC236}">
-                <a16:creationId xmlns:a16="http://schemas.microsoft.com/office/drawing/2014/main" id="{64618A3E-9B44-4E43-8FAC-2D04DB677D74}"/>
+                <a16:creationId xmlns:a16="http://schemas.microsoft.com/office/drawing/2014/main" id="{64355594-9775-4E48-BE56-C2BC06FA74F8}"/>
               </a:ext>
             </a:extLst>
           </p:cNvPr>
@@ -14043,7 +14043,7 @@
           <p:cNvPr id="23" name="">
             <a:extLst xmlns:a="http://schemas.openxmlformats.org/drawingml/2006/main">
               <a:ext uri="{FF2B5EF4-FFF2-40B4-BE49-F238E27FC236}">
-                <a16:creationId xmlns:a16="http://schemas.microsoft.com/office/drawing/2014/main" id="{D8EE22DA-D607-4C68-9770-75082DA8B028}"/>
+                <a16:creationId xmlns:a16="http://schemas.microsoft.com/office/drawing/2014/main" id="{87C26B1F-58D7-4319-BDE6-D076146D142E}"/>
               </a:ext>
             </a:extLst>
           </p:cNvPr>
@@ -14107,7 +14107,7 @@
           <p:cNvPr id="24" name="">
             <a:extLst xmlns:a="http://schemas.openxmlformats.org/drawingml/2006/main">
               <a:ext uri="{FF2B5EF4-FFF2-40B4-BE49-F238E27FC236}">
-                <a16:creationId xmlns:a16="http://schemas.microsoft.com/office/drawing/2014/main" id="{2F625A00-DC8F-4F82-8D08-66B5F6926F92}"/>
+                <a16:creationId xmlns:a16="http://schemas.microsoft.com/office/drawing/2014/main" id="{3B15F958-98C2-4000-AED9-921FD75DA13B}"/>
               </a:ext>
             </a:extLst>
           </p:cNvPr>
@@ -14140,7 +14140,7 @@
           <p:cNvPr id="25" name="">
             <a:extLst xmlns:a="http://schemas.openxmlformats.org/drawingml/2006/main">
               <a:ext uri="{FF2B5EF4-FFF2-40B4-BE49-F238E27FC236}">
-                <a16:creationId xmlns:a16="http://schemas.microsoft.com/office/drawing/2014/main" id="{CE20FC12-29F9-4555-AB2F-ED5B6AD6FD85}"/>
+                <a16:creationId xmlns:a16="http://schemas.microsoft.com/office/drawing/2014/main" id="{1464BC7A-C5F2-47D1-8660-AEC3A751214B}"/>
               </a:ext>
             </a:extLst>
           </p:cNvPr>
@@ -14173,7 +14173,7 @@
           <p:cNvPr id="26" name="">
             <a:extLst xmlns:a="http://schemas.openxmlformats.org/drawingml/2006/main">
               <a:ext uri="{FF2B5EF4-FFF2-40B4-BE49-F238E27FC236}">
-                <a16:creationId xmlns:a16="http://schemas.microsoft.com/office/drawing/2014/main" id="{26A35AFD-1B29-4B6C-A603-99A939BD42B4}"/>
+                <a16:creationId xmlns:a16="http://schemas.microsoft.com/office/drawing/2014/main" id="{8CD65301-10FE-4007-88A0-98082107BDD0}"/>
               </a:ext>
             </a:extLst>
           </p:cNvPr>
@@ -14237,7 +14237,7 @@
           <p:cNvPr id="27" name="">
             <a:extLst xmlns:a="http://schemas.openxmlformats.org/drawingml/2006/main">
               <a:ext uri="{FF2B5EF4-FFF2-40B4-BE49-F238E27FC236}">
-                <a16:creationId xmlns:a16="http://schemas.microsoft.com/office/drawing/2014/main" id="{9C001287-1C44-4120-A474-958B92BF3A2A}"/>
+                <a16:creationId xmlns:a16="http://schemas.microsoft.com/office/drawing/2014/main" id="{C7893234-52A9-4565-837F-4CB06E0C364F}"/>
               </a:ext>
             </a:extLst>
           </p:cNvPr>
@@ -14270,7 +14270,7 @@
           <p:cNvPr id="28" name="">
             <a:extLst xmlns:a="http://schemas.openxmlformats.org/drawingml/2006/main">
               <a:ext uri="{FF2B5EF4-FFF2-40B4-BE49-F238E27FC236}">
-                <a16:creationId xmlns:a16="http://schemas.microsoft.com/office/drawing/2014/main" id="{23EFCDCC-231C-4CC4-8F2D-59AB37A976E4}"/>
+                <a16:creationId xmlns:a16="http://schemas.microsoft.com/office/drawing/2014/main" id="{4279C2C3-C851-4167-A236-24CFE774C173}"/>
               </a:ext>
             </a:extLst>
           </p:cNvPr>
@@ -14334,7 +14334,7 @@
           <p:cNvPr id="29" name="">
             <a:extLst xmlns:a="http://schemas.openxmlformats.org/drawingml/2006/main">
               <a:ext uri="{FF2B5EF4-FFF2-40B4-BE49-F238E27FC236}">
-                <a16:creationId xmlns:a16="http://schemas.microsoft.com/office/drawing/2014/main" id="{4A0D6F92-04EF-48BD-A1E9-5841EDC6AC37}"/>
+                <a16:creationId xmlns:a16="http://schemas.microsoft.com/office/drawing/2014/main" id="{BD3194B9-2324-4427-AECF-9F9E1CA6C907}"/>
               </a:ext>
             </a:extLst>
           </p:cNvPr>
@@ -14396,7 +14396,7 @@
     </p:spTree>
     <p:extLst>
       <p:ext uri="{BB962C8B-B14F-4D97-AF65-F5344CB8AC3E}">
-        <p14:creationId xmlns:p14="http://schemas.microsoft.com/office/powerpoint/2010/main" val="1943890976"/>
+        <p14:creationId xmlns:p14="http://schemas.microsoft.com/office/powerpoint/2010/main" val="1910758322"/>
       </p:ext>
     </p:extLst>
   </p:cSld>
@@ -14424,7 +14424,7 @@
           <p:nvPr/>
         </p:nvPicPr>
         <p:blipFill>
-          <a:blip xmlns:r="http://schemas.openxmlformats.org/officeDocument/2006/relationships" xmlns:a="http://schemas.openxmlformats.org/drawingml/2006/main" r:embed="R944f2f3c33ec4be6"/>
+          <a:blip xmlns:r="http://schemas.openxmlformats.org/officeDocument/2006/relationships" xmlns:a="http://schemas.openxmlformats.org/drawingml/2006/main" r:embed="Ref1643288f9e4959"/>
           <a:srcRect xmlns:a="http://schemas.openxmlformats.org/drawingml/2006/main" l="0" t="27" r="0" b="27"/>
           <a:stretch xmlns:a="http://schemas.openxmlformats.org/drawingml/2006/main">
             <a:fillRect l="0" t="0" r="0" b="0"/>
@@ -14445,7 +14445,7 @@
           <p:cNvPr id="2" name="">
             <a:extLst xmlns:a="http://schemas.openxmlformats.org/drawingml/2006/main">
               <a:ext uri="{FF2B5EF4-FFF2-40B4-BE49-F238E27FC236}">
-                <a16:creationId xmlns:a16="http://schemas.microsoft.com/office/drawing/2014/main" id="{333985C0-485C-480D-A546-FEC546FA93B5}"/>
+                <a16:creationId xmlns:a16="http://schemas.microsoft.com/office/drawing/2014/main" id="{6FC5D9D7-9864-4C40-B077-7A429B78BAA5}"/>
               </a:ext>
             </a:extLst>
           </p:cNvPr>
@@ -14482,7 +14482,7 @@
           <p:cNvPr id="3" name="">
             <a:extLst xmlns:a="http://schemas.openxmlformats.org/drawingml/2006/main">
               <a:ext uri="{FF2B5EF4-FFF2-40B4-BE49-F238E27FC236}">
-                <a16:creationId xmlns:a16="http://schemas.microsoft.com/office/drawing/2014/main" id="{11182700-8454-41AC-8A9C-3C7AA5A59971}"/>
+                <a16:creationId xmlns:a16="http://schemas.microsoft.com/office/drawing/2014/main" id="{DF5C4127-B00A-41B8-839C-0BD906B52804}"/>
               </a:ext>
             </a:extLst>
           </p:cNvPr>
@@ -14519,7 +14519,7 @@
           <p:cNvPr id="4" name="">
             <a:extLst xmlns:a="http://schemas.openxmlformats.org/drawingml/2006/main">
               <a:ext uri="{FF2B5EF4-FFF2-40B4-BE49-F238E27FC236}">
-                <a16:creationId xmlns:a16="http://schemas.microsoft.com/office/drawing/2014/main" id="{EFDA6E90-D309-456E-8687-C2F7EAA7BC0C}"/>
+                <a16:creationId xmlns:a16="http://schemas.microsoft.com/office/drawing/2014/main" id="{BC356DE5-949F-45B0-949D-C740A7275DE5}"/>
               </a:ext>
             </a:extLst>
           </p:cNvPr>
@@ -14583,7 +14583,7 @@
           <p:cNvPr id="5" name="">
             <a:extLst xmlns:a="http://schemas.openxmlformats.org/drawingml/2006/main">
               <a:ext uri="{FF2B5EF4-FFF2-40B4-BE49-F238E27FC236}">
-                <a16:creationId xmlns:a16="http://schemas.microsoft.com/office/drawing/2014/main" id="{731F0797-366C-4D70-A635-311A099AC7E8}"/>
+                <a16:creationId xmlns:a16="http://schemas.microsoft.com/office/drawing/2014/main" id="{4C56EB03-8E18-49C6-BF18-A9D9E8303DC9}"/>
               </a:ext>
             </a:extLst>
           </p:cNvPr>
@@ -14647,7 +14647,7 @@
           <p:cNvPr id="6" name="">
             <a:extLst xmlns:a="http://schemas.openxmlformats.org/drawingml/2006/main">
               <a:ext uri="{FF2B5EF4-FFF2-40B4-BE49-F238E27FC236}">
-                <a16:creationId xmlns:a16="http://schemas.microsoft.com/office/drawing/2014/main" id="{762AE59C-33D2-47C4-89E8-E70D95CBA8D2}"/>
+                <a16:creationId xmlns:a16="http://schemas.microsoft.com/office/drawing/2014/main" id="{87419D64-8B99-44C5-B6D8-29599BA78714}"/>
               </a:ext>
             </a:extLst>
           </p:cNvPr>
@@ -14711,7 +14711,7 @@
           <p:cNvPr id="7" name="">
             <a:extLst xmlns:a="http://schemas.openxmlformats.org/drawingml/2006/main">
               <a:ext uri="{FF2B5EF4-FFF2-40B4-BE49-F238E27FC236}">
-                <a16:creationId xmlns:a16="http://schemas.microsoft.com/office/drawing/2014/main" id="{09C0F548-CFE4-46CF-B2D5-A5E9B6DE9C03}"/>
+                <a16:creationId xmlns:a16="http://schemas.microsoft.com/office/drawing/2014/main" id="{9622FB98-FD69-40FD-A0FD-7414D12AEDF1}"/>
               </a:ext>
             </a:extLst>
           </p:cNvPr>
@@ -14746,7 +14746,7 @@
           <p:cNvPr id="8" name="">
             <a:extLst xmlns:a="http://schemas.openxmlformats.org/drawingml/2006/main">
               <a:ext uri="{FF2B5EF4-FFF2-40B4-BE49-F238E27FC236}">
-                <a16:creationId xmlns:a16="http://schemas.microsoft.com/office/drawing/2014/main" id="{41BD5DA7-207C-4097-8159-866268D9C6DC}"/>
+                <a16:creationId xmlns:a16="http://schemas.microsoft.com/office/drawing/2014/main" id="{10F552EE-E977-493B-A5B1-6E6EEA9ABC5C}"/>
               </a:ext>
             </a:extLst>
           </p:cNvPr>
@@ -14810,7 +14810,7 @@
           <p:cNvPr id="9" name="">
             <a:extLst xmlns:a="http://schemas.openxmlformats.org/drawingml/2006/main">
               <a:ext uri="{FF2B5EF4-FFF2-40B4-BE49-F238E27FC236}">
-                <a16:creationId xmlns:a16="http://schemas.microsoft.com/office/drawing/2014/main" id="{8D015DE7-1258-4C11-A9E7-D131B954D149}"/>
+                <a16:creationId xmlns:a16="http://schemas.microsoft.com/office/drawing/2014/main" id="{BE75E693-371D-4280-8325-70AD3D304F47}"/>
               </a:ext>
             </a:extLst>
           </p:cNvPr>
@@ -14874,7 +14874,7 @@
           <p:cNvPr id="10" name="">
             <a:extLst xmlns:a="http://schemas.openxmlformats.org/drawingml/2006/main">
               <a:ext uri="{FF2B5EF4-FFF2-40B4-BE49-F238E27FC236}">
-                <a16:creationId xmlns:a16="http://schemas.microsoft.com/office/drawing/2014/main" id="{1C062300-36B9-4E91-B472-E2AB5E1FF566}"/>
+                <a16:creationId xmlns:a16="http://schemas.microsoft.com/office/drawing/2014/main" id="{E79634BB-06DD-4F2F-AC4A-4E7C522AD2D4}"/>
               </a:ext>
             </a:extLst>
           </p:cNvPr>
@@ -14907,7 +14907,7 @@
           <p:cNvPr id="11" name="">
             <a:extLst xmlns:a="http://schemas.openxmlformats.org/drawingml/2006/main">
               <a:ext uri="{FF2B5EF4-FFF2-40B4-BE49-F238E27FC236}">
-                <a16:creationId xmlns:a16="http://schemas.microsoft.com/office/drawing/2014/main" id="{E3819C4B-F9E0-4936-AE6C-8AC1B363295A}"/>
+                <a16:creationId xmlns:a16="http://schemas.microsoft.com/office/drawing/2014/main" id="{2C52FEAE-886A-4D3C-95B0-790730FDB78E}"/>
               </a:ext>
             </a:extLst>
           </p:cNvPr>
@@ -14942,7 +14942,7 @@
           <p:cNvPr id="12" name="">
             <a:extLst xmlns:a="http://schemas.openxmlformats.org/drawingml/2006/main">
               <a:ext uri="{FF2B5EF4-FFF2-40B4-BE49-F238E27FC236}">
-                <a16:creationId xmlns:a16="http://schemas.microsoft.com/office/drawing/2014/main" id="{51C3C6FC-7EAF-47E4-BD60-D7802C8DD6DB}"/>
+                <a16:creationId xmlns:a16="http://schemas.microsoft.com/office/drawing/2014/main" id="{09DF8348-B915-4CE6-9CF3-60B85B159EC6}"/>
               </a:ext>
             </a:extLst>
           </p:cNvPr>
@@ -15006,7 +15006,7 @@
           <p:cNvPr id="13" name="">
             <a:extLst xmlns:a="http://schemas.openxmlformats.org/drawingml/2006/main">
               <a:ext uri="{FF2B5EF4-FFF2-40B4-BE49-F238E27FC236}">
-                <a16:creationId xmlns:a16="http://schemas.microsoft.com/office/drawing/2014/main" id="{C3D46EE1-7EC4-46C1-837A-C9465F14432B}"/>
+                <a16:creationId xmlns:a16="http://schemas.microsoft.com/office/drawing/2014/main" id="{B590BB94-C372-4FE9-8F68-3C9037AE2456}"/>
               </a:ext>
             </a:extLst>
           </p:cNvPr>
@@ -15070,7 +15070,7 @@
           <p:cNvPr id="14" name="">
             <a:extLst xmlns:a="http://schemas.openxmlformats.org/drawingml/2006/main">
               <a:ext uri="{FF2B5EF4-FFF2-40B4-BE49-F238E27FC236}">
-                <a16:creationId xmlns:a16="http://schemas.microsoft.com/office/drawing/2014/main" id="{74D6CB15-5645-4365-9C9B-5FAD7505D022}"/>
+                <a16:creationId xmlns:a16="http://schemas.microsoft.com/office/drawing/2014/main" id="{51DC6AB7-8698-4EEE-9F47-BF23F35DE6DA}"/>
               </a:ext>
             </a:extLst>
           </p:cNvPr>
@@ -15103,7 +15103,7 @@
           <p:cNvPr id="15" name="">
             <a:extLst xmlns:a="http://schemas.openxmlformats.org/drawingml/2006/main">
               <a:ext uri="{FF2B5EF4-FFF2-40B4-BE49-F238E27FC236}">
-                <a16:creationId xmlns:a16="http://schemas.microsoft.com/office/drawing/2014/main" id="{89886BAB-93CC-4485-A376-3694C4C642E2}"/>
+                <a16:creationId xmlns:a16="http://schemas.microsoft.com/office/drawing/2014/main" id="{1282BD11-9226-4FCE-8B21-8B9F48203118}"/>
               </a:ext>
             </a:extLst>
           </p:cNvPr>
@@ -15138,7 +15138,7 @@
           <p:cNvPr id="16" name="">
             <a:extLst xmlns:a="http://schemas.openxmlformats.org/drawingml/2006/main">
               <a:ext uri="{FF2B5EF4-FFF2-40B4-BE49-F238E27FC236}">
-                <a16:creationId xmlns:a16="http://schemas.microsoft.com/office/drawing/2014/main" id="{A6B666DA-BDC9-4C7B-A8FB-2A527FE91F7D}"/>
+                <a16:creationId xmlns:a16="http://schemas.microsoft.com/office/drawing/2014/main" id="{EABCF061-5BDC-4009-9362-E1C08CFE77B1}"/>
               </a:ext>
             </a:extLst>
           </p:cNvPr>
@@ -15202,7 +15202,7 @@
           <p:cNvPr id="17" name="">
             <a:extLst xmlns:a="http://schemas.openxmlformats.org/drawingml/2006/main">
               <a:ext uri="{FF2B5EF4-FFF2-40B4-BE49-F238E27FC236}">
-                <a16:creationId xmlns:a16="http://schemas.microsoft.com/office/drawing/2014/main" id="{9E02F2F7-FDB8-4B50-87EC-78F91FC5992D}"/>
+                <a16:creationId xmlns:a16="http://schemas.microsoft.com/office/drawing/2014/main" id="{90137020-01AE-4235-8A65-DDC1BEFFA566}"/>
               </a:ext>
             </a:extLst>
           </p:cNvPr>
@@ -15266,7 +15266,7 @@
           <p:cNvPr id="18" name="">
             <a:extLst xmlns:a="http://schemas.openxmlformats.org/drawingml/2006/main">
               <a:ext uri="{FF2B5EF4-FFF2-40B4-BE49-F238E27FC236}">
-                <a16:creationId xmlns:a16="http://schemas.microsoft.com/office/drawing/2014/main" id="{E32F1965-92B2-4D99-9E41-91E018463283}"/>
+                <a16:creationId xmlns:a16="http://schemas.microsoft.com/office/drawing/2014/main" id="{065A3BB5-AD7B-4646-8113-476843AE6A96}"/>
               </a:ext>
             </a:extLst>
           </p:cNvPr>
@@ -15299,7 +15299,7 @@
           <p:cNvPr id="19" name="">
             <a:extLst xmlns:a="http://schemas.openxmlformats.org/drawingml/2006/main">
               <a:ext uri="{FF2B5EF4-FFF2-40B4-BE49-F238E27FC236}">
-                <a16:creationId xmlns:a16="http://schemas.microsoft.com/office/drawing/2014/main" id="{40C808FD-F912-40FE-989A-89C65B141829}"/>
+                <a16:creationId xmlns:a16="http://schemas.microsoft.com/office/drawing/2014/main" id="{1082C87A-08EF-4E52-AEB6-F16D8845C75C}"/>
               </a:ext>
             </a:extLst>
           </p:cNvPr>
@@ -15334,7 +15334,7 @@
           <p:cNvPr id="20" name="">
             <a:extLst xmlns:a="http://schemas.openxmlformats.org/drawingml/2006/main">
               <a:ext uri="{FF2B5EF4-FFF2-40B4-BE49-F238E27FC236}">
-                <a16:creationId xmlns:a16="http://schemas.microsoft.com/office/drawing/2014/main" id="{D4A0AB9A-A0C5-47BD-B4F4-8068AF900C5B}"/>
+                <a16:creationId xmlns:a16="http://schemas.microsoft.com/office/drawing/2014/main" id="{40F3EBF6-F217-43BB-9DF7-FF687BB5ADA2}"/>
               </a:ext>
             </a:extLst>
           </p:cNvPr>
@@ -15398,7 +15398,7 @@
           <p:cNvPr id="21" name="">
             <a:extLst xmlns:a="http://schemas.openxmlformats.org/drawingml/2006/main">
               <a:ext uri="{FF2B5EF4-FFF2-40B4-BE49-F238E27FC236}">
-                <a16:creationId xmlns:a16="http://schemas.microsoft.com/office/drawing/2014/main" id="{2E470E86-877C-4053-A902-ED84E608991F}"/>
+                <a16:creationId xmlns:a16="http://schemas.microsoft.com/office/drawing/2014/main" id="{282268D2-65F9-4554-99B7-6685BC55B2F9}"/>
               </a:ext>
             </a:extLst>
           </p:cNvPr>
@@ -15462,7 +15462,7 @@
           <p:cNvPr id="22" name="">
             <a:extLst xmlns:a="http://schemas.openxmlformats.org/drawingml/2006/main">
               <a:ext uri="{FF2B5EF4-FFF2-40B4-BE49-F238E27FC236}">
-                <a16:creationId xmlns:a16="http://schemas.microsoft.com/office/drawing/2014/main" id="{8BE41444-C2EA-4F64-A14A-FF978AE399BE}"/>
+                <a16:creationId xmlns:a16="http://schemas.microsoft.com/office/drawing/2014/main" id="{2A347EB8-3649-4417-BAB2-B3CB99BCC6B1}"/>
               </a:ext>
             </a:extLst>
           </p:cNvPr>
@@ -15526,7 +15526,7 @@
           <p:cNvPr id="23" name="">
             <a:extLst xmlns:a="http://schemas.openxmlformats.org/drawingml/2006/main">
               <a:ext uri="{FF2B5EF4-FFF2-40B4-BE49-F238E27FC236}">
-                <a16:creationId xmlns:a16="http://schemas.microsoft.com/office/drawing/2014/main" id="{EBB96520-9E48-448C-84DC-0B0973B0D7B7}"/>
+                <a16:creationId xmlns:a16="http://schemas.microsoft.com/office/drawing/2014/main" id="{11EFA175-4AFF-4509-B06D-5D49802147D0}"/>
               </a:ext>
             </a:extLst>
           </p:cNvPr>
@@ -15590,7 +15590,7 @@
           <p:cNvPr id="24" name="">
             <a:extLst xmlns:a="http://schemas.openxmlformats.org/drawingml/2006/main">
               <a:ext uri="{FF2B5EF4-FFF2-40B4-BE49-F238E27FC236}">
-                <a16:creationId xmlns:a16="http://schemas.microsoft.com/office/drawing/2014/main" id="{C9F13D24-9710-41B1-8820-A1599DEFFC09}"/>
+                <a16:creationId xmlns:a16="http://schemas.microsoft.com/office/drawing/2014/main" id="{54C64528-F99C-4034-AE6B-A164720171C6}"/>
               </a:ext>
             </a:extLst>
           </p:cNvPr>
@@ -15623,7 +15623,7 @@
           <p:cNvPr id="25" name="">
             <a:extLst xmlns:a="http://schemas.openxmlformats.org/drawingml/2006/main">
               <a:ext uri="{FF2B5EF4-FFF2-40B4-BE49-F238E27FC236}">
-                <a16:creationId xmlns:a16="http://schemas.microsoft.com/office/drawing/2014/main" id="{70588279-0F21-47D9-91BF-9730DFBED008}"/>
+                <a16:creationId xmlns:a16="http://schemas.microsoft.com/office/drawing/2014/main" id="{74D29CF6-C8C7-4870-AECE-500051A7BF28}"/>
               </a:ext>
             </a:extLst>
           </p:cNvPr>
@@ -15687,7 +15687,7 @@
           <p:cNvPr id="26" name="">
             <a:extLst xmlns:a="http://schemas.openxmlformats.org/drawingml/2006/main">
               <a:ext uri="{FF2B5EF4-FFF2-40B4-BE49-F238E27FC236}">
-                <a16:creationId xmlns:a16="http://schemas.microsoft.com/office/drawing/2014/main" id="{94555B00-BE07-42E6-AE54-0F32DF2F6824}"/>
+                <a16:creationId xmlns:a16="http://schemas.microsoft.com/office/drawing/2014/main" id="{201346C2-739B-4678-8328-F65DECBBC34C}"/>
               </a:ext>
             </a:extLst>
           </p:cNvPr>
@@ -15749,7 +15749,7 @@
     </p:spTree>
     <p:extLst>
       <p:ext uri="{BB962C8B-B14F-4D97-AF65-F5344CB8AC3E}">
-        <p14:creationId xmlns:p14="http://schemas.microsoft.com/office/powerpoint/2010/main" val="1303156680"/>
+        <p14:creationId xmlns:p14="http://schemas.microsoft.com/office/powerpoint/2010/main" val="1336464254"/>
       </p:ext>
     </p:extLst>
   </p:cSld>
@@ -15777,7 +15777,7 @@
           <p:nvPr/>
         </p:nvPicPr>
         <p:blipFill>
-          <a:blip xmlns:r="http://schemas.openxmlformats.org/officeDocument/2006/relationships" xmlns:a="http://schemas.openxmlformats.org/drawingml/2006/main" r:embed="Rd9e0c4275c054d3e"/>
+          <a:blip xmlns:r="http://schemas.openxmlformats.org/officeDocument/2006/relationships" xmlns:a="http://schemas.openxmlformats.org/drawingml/2006/main" r:embed="Rd65630511e074db7"/>
           <a:srcRect xmlns:a="http://schemas.openxmlformats.org/drawingml/2006/main" l="0" t="7813" r="0" b="7813"/>
           <a:stretch xmlns:a="http://schemas.openxmlformats.org/drawingml/2006/main">
             <a:fillRect l="0" t="0" r="0" b="0"/>
@@ -15798,7 +15798,7 @@
           <p:cNvPr id="2" name="">
             <a:extLst xmlns:a="http://schemas.openxmlformats.org/drawingml/2006/main">
               <a:ext uri="{FF2B5EF4-FFF2-40B4-BE49-F238E27FC236}">
-                <a16:creationId xmlns:a16="http://schemas.microsoft.com/office/drawing/2014/main" id="{45899BB7-A0F3-45DA-83EF-CCE81E8A433D}"/>
+                <a16:creationId xmlns:a16="http://schemas.microsoft.com/office/drawing/2014/main" id="{2FB710A6-5F03-44D5-9E40-624196F36EE3}"/>
               </a:ext>
             </a:extLst>
           </p:cNvPr>
@@ -15835,7 +15835,7 @@
           <p:cNvPr id="3" name="">
             <a:extLst xmlns:a="http://schemas.openxmlformats.org/drawingml/2006/main">
               <a:ext uri="{FF2B5EF4-FFF2-40B4-BE49-F238E27FC236}">
-                <a16:creationId xmlns:a16="http://schemas.microsoft.com/office/drawing/2014/main" id="{1BAD6F17-527B-4480-826F-05B9161D144C}"/>
+                <a16:creationId xmlns:a16="http://schemas.microsoft.com/office/drawing/2014/main" id="{F4A09416-D70E-47B7-92E5-EA4608E064F7}"/>
               </a:ext>
             </a:extLst>
           </p:cNvPr>
@@ -15872,7 +15872,7 @@
           <p:cNvPr id="4" name="">
             <a:extLst xmlns:a="http://schemas.openxmlformats.org/drawingml/2006/main">
               <a:ext uri="{FF2B5EF4-FFF2-40B4-BE49-F238E27FC236}">
-                <a16:creationId xmlns:a16="http://schemas.microsoft.com/office/drawing/2014/main" id="{03B9771F-056B-498B-8912-3CCC96BFA43E}"/>
+                <a16:creationId xmlns:a16="http://schemas.microsoft.com/office/drawing/2014/main" id="{F1CBB7CA-4918-4233-923F-248942D0C961}"/>
               </a:ext>
             </a:extLst>
           </p:cNvPr>
@@ -15936,7 +15936,7 @@
           <p:cNvPr id="5" name="">
             <a:extLst xmlns:a="http://schemas.openxmlformats.org/drawingml/2006/main">
               <a:ext uri="{FF2B5EF4-FFF2-40B4-BE49-F238E27FC236}">
-                <a16:creationId xmlns:a16="http://schemas.microsoft.com/office/drawing/2014/main" id="{242C1A80-CA0C-4D76-8F2B-ABE9A79D1148}"/>
+                <a16:creationId xmlns:a16="http://schemas.microsoft.com/office/drawing/2014/main" id="{43FEB463-4428-4681-ABF6-592C11765219}"/>
               </a:ext>
             </a:extLst>
           </p:cNvPr>
@@ -16000,7 +16000,7 @@
           <p:cNvPr id="6" name="">
             <a:extLst xmlns:a="http://schemas.openxmlformats.org/drawingml/2006/main">
               <a:ext uri="{FF2B5EF4-FFF2-40B4-BE49-F238E27FC236}">
-                <a16:creationId xmlns:a16="http://schemas.microsoft.com/office/drawing/2014/main" id="{CA9F7850-328C-4DED-98DD-7E7E723770E9}"/>
+                <a16:creationId xmlns:a16="http://schemas.microsoft.com/office/drawing/2014/main" id="{31FFE192-8581-4B2A-A9AB-A8C18F2A272E}"/>
               </a:ext>
             </a:extLst>
           </p:cNvPr>
@@ -16064,7 +16064,7 @@
           <p:cNvPr id="7" name="">
             <a:extLst xmlns:a="http://schemas.openxmlformats.org/drawingml/2006/main">
               <a:ext uri="{FF2B5EF4-FFF2-40B4-BE49-F238E27FC236}">
-                <a16:creationId xmlns:a16="http://schemas.microsoft.com/office/drawing/2014/main" id="{CD2842BB-2540-4BD8-A306-AD7C7FB2D9BD}"/>
+                <a16:creationId xmlns:a16="http://schemas.microsoft.com/office/drawing/2014/main" id="{75C3952C-0E35-4EEF-B7B2-0297AE7BC0D6}"/>
               </a:ext>
             </a:extLst>
           </p:cNvPr>
@@ -16099,7 +16099,7 @@
           <p:cNvPr id="8" name="">
             <a:extLst xmlns:a="http://schemas.openxmlformats.org/drawingml/2006/main">
               <a:ext uri="{FF2B5EF4-FFF2-40B4-BE49-F238E27FC236}">
-                <a16:creationId xmlns:a16="http://schemas.microsoft.com/office/drawing/2014/main" id="{47D1859C-740E-497B-9A71-511E06468E3F}"/>
+                <a16:creationId xmlns:a16="http://schemas.microsoft.com/office/drawing/2014/main" id="{41013C47-0711-49F6-AE30-65D01FA98BC3}"/>
               </a:ext>
             </a:extLst>
           </p:cNvPr>
@@ -16163,7 +16163,7 @@
           <p:cNvPr id="9" name="">
             <a:extLst xmlns:a="http://schemas.openxmlformats.org/drawingml/2006/main">
               <a:ext uri="{FF2B5EF4-FFF2-40B4-BE49-F238E27FC236}">
-                <a16:creationId xmlns:a16="http://schemas.microsoft.com/office/drawing/2014/main" id="{DD515EEB-E41A-470F-A30B-19B2CB95D046}"/>
+                <a16:creationId xmlns:a16="http://schemas.microsoft.com/office/drawing/2014/main" id="{06AA1633-FEAC-4CE2-BAEF-2F7299ECAD29}"/>
               </a:ext>
             </a:extLst>
           </p:cNvPr>
@@ -16227,7 +16227,7 @@
           <p:cNvPr id="10" name="">
             <a:extLst xmlns:a="http://schemas.openxmlformats.org/drawingml/2006/main">
               <a:ext uri="{FF2B5EF4-FFF2-40B4-BE49-F238E27FC236}">
-                <a16:creationId xmlns:a16="http://schemas.microsoft.com/office/drawing/2014/main" id="{EC4590ED-A8F7-40B2-83AA-695E37597E7C}"/>
+                <a16:creationId xmlns:a16="http://schemas.microsoft.com/office/drawing/2014/main" id="{159B26AE-4060-4736-ACF4-17385DF7D7FB}"/>
               </a:ext>
             </a:extLst>
           </p:cNvPr>
@@ -16262,7 +16262,7 @@
           <p:cNvPr id="11" name="">
             <a:extLst xmlns:a="http://schemas.openxmlformats.org/drawingml/2006/main">
               <a:ext uri="{FF2B5EF4-FFF2-40B4-BE49-F238E27FC236}">
-                <a16:creationId xmlns:a16="http://schemas.microsoft.com/office/drawing/2014/main" id="{456E2D28-56C9-475B-A915-D3863651E137}"/>
+                <a16:creationId xmlns:a16="http://schemas.microsoft.com/office/drawing/2014/main" id="{59FAA28E-FD6F-46AA-B5FB-3295E5499D75}"/>
               </a:ext>
             </a:extLst>
           </p:cNvPr>
@@ -16326,7 +16326,7 @@
           <p:cNvPr id="12" name="">
             <a:extLst xmlns:a="http://schemas.openxmlformats.org/drawingml/2006/main">
               <a:ext uri="{FF2B5EF4-FFF2-40B4-BE49-F238E27FC236}">
-                <a16:creationId xmlns:a16="http://schemas.microsoft.com/office/drawing/2014/main" id="{B3C33562-48C2-4516-BECB-A5103CF0CE6F}"/>
+                <a16:creationId xmlns:a16="http://schemas.microsoft.com/office/drawing/2014/main" id="{AA944683-C178-4350-B010-07A5D75FBB23}"/>
               </a:ext>
             </a:extLst>
           </p:cNvPr>
@@ -16390,7 +16390,7 @@
           <p:cNvPr id="13" name="">
             <a:extLst xmlns:a="http://schemas.openxmlformats.org/drawingml/2006/main">
               <a:ext uri="{FF2B5EF4-FFF2-40B4-BE49-F238E27FC236}">
-                <a16:creationId xmlns:a16="http://schemas.microsoft.com/office/drawing/2014/main" id="{C0E15D42-21D7-43BD-A3D3-B9F81805EA22}"/>
+                <a16:creationId xmlns:a16="http://schemas.microsoft.com/office/drawing/2014/main" id="{155E8DB1-5E4B-44A5-BF6A-9D8B5C586741}"/>
               </a:ext>
             </a:extLst>
           </p:cNvPr>
@@ -16425,7 +16425,7 @@
           <p:cNvPr id="14" name="">
             <a:extLst xmlns:a="http://schemas.openxmlformats.org/drawingml/2006/main">
               <a:ext uri="{FF2B5EF4-FFF2-40B4-BE49-F238E27FC236}">
-                <a16:creationId xmlns:a16="http://schemas.microsoft.com/office/drawing/2014/main" id="{7DC51FA0-7074-49F8-B851-3E0947AC0225}"/>
+                <a16:creationId xmlns:a16="http://schemas.microsoft.com/office/drawing/2014/main" id="{67EC4DA2-3089-4247-8F24-C707334B6E85}"/>
               </a:ext>
             </a:extLst>
           </p:cNvPr>
@@ -16489,7 +16489,7 @@
           <p:cNvPr id="15" name="">
             <a:extLst xmlns:a="http://schemas.openxmlformats.org/drawingml/2006/main">
               <a:ext uri="{FF2B5EF4-FFF2-40B4-BE49-F238E27FC236}">
-                <a16:creationId xmlns:a16="http://schemas.microsoft.com/office/drawing/2014/main" id="{9C3FE5A2-2633-416B-B0E9-F6A41B4C8387}"/>
+                <a16:creationId xmlns:a16="http://schemas.microsoft.com/office/drawing/2014/main" id="{67577F30-9BB7-4EA2-8FF5-879BD334A8E5}"/>
               </a:ext>
             </a:extLst>
           </p:cNvPr>
@@ -16553,7 +16553,7 @@
           <p:cNvPr id="16" name="">
             <a:extLst xmlns:a="http://schemas.openxmlformats.org/drawingml/2006/main">
               <a:ext uri="{FF2B5EF4-FFF2-40B4-BE49-F238E27FC236}">
-                <a16:creationId xmlns:a16="http://schemas.microsoft.com/office/drawing/2014/main" id="{A80CEAA9-2A57-4969-BFEE-761F632DEFD8}"/>
+                <a16:creationId xmlns:a16="http://schemas.microsoft.com/office/drawing/2014/main" id="{D151E4C5-41A2-4321-851E-E963683B8824}"/>
               </a:ext>
             </a:extLst>
           </p:cNvPr>
@@ -16588,7 +16588,7 @@
           <p:cNvPr id="17" name="">
             <a:extLst xmlns:a="http://schemas.openxmlformats.org/drawingml/2006/main">
               <a:ext uri="{FF2B5EF4-FFF2-40B4-BE49-F238E27FC236}">
-                <a16:creationId xmlns:a16="http://schemas.microsoft.com/office/drawing/2014/main" id="{0A643DFB-3A11-401C-BBDE-76BF35B47879}"/>
+                <a16:creationId xmlns:a16="http://schemas.microsoft.com/office/drawing/2014/main" id="{C6738CDC-7558-4137-BF93-5931B33BE4D4}"/>
               </a:ext>
             </a:extLst>
           </p:cNvPr>
@@ -16652,7 +16652,7 @@
           <p:cNvPr id="18" name="">
             <a:extLst xmlns:a="http://schemas.openxmlformats.org/drawingml/2006/main">
               <a:ext uri="{FF2B5EF4-FFF2-40B4-BE49-F238E27FC236}">
-                <a16:creationId xmlns:a16="http://schemas.microsoft.com/office/drawing/2014/main" id="{CE6483A9-B45D-47CD-88CF-4812310D15EA}"/>
+                <a16:creationId xmlns:a16="http://schemas.microsoft.com/office/drawing/2014/main" id="{4C753856-4334-47B2-B305-3AA1CDEE4513}"/>
               </a:ext>
             </a:extLst>
           </p:cNvPr>
@@ -16716,7 +16716,7 @@
           <p:cNvPr id="19" name="">
             <a:extLst xmlns:a="http://schemas.openxmlformats.org/drawingml/2006/main">
               <a:ext uri="{FF2B5EF4-FFF2-40B4-BE49-F238E27FC236}">
-                <a16:creationId xmlns:a16="http://schemas.microsoft.com/office/drawing/2014/main" id="{401584D9-A759-45A5-A6C1-7EDE0977AB56}"/>
+                <a16:creationId xmlns:a16="http://schemas.microsoft.com/office/drawing/2014/main" id="{7AFB521B-9151-4A09-AF93-F74A3D3F9EA4}"/>
               </a:ext>
             </a:extLst>
           </p:cNvPr>
@@ -16751,7 +16751,7 @@
           <p:cNvPr id="20" name="">
             <a:extLst xmlns:a="http://schemas.openxmlformats.org/drawingml/2006/main">
               <a:ext uri="{FF2B5EF4-FFF2-40B4-BE49-F238E27FC236}">
-                <a16:creationId xmlns:a16="http://schemas.microsoft.com/office/drawing/2014/main" id="{BB1722E2-B3B9-41B6-BB36-86FAB99CE49C}"/>
+                <a16:creationId xmlns:a16="http://schemas.microsoft.com/office/drawing/2014/main" id="{430D857E-D79B-4027-9E70-DB1ACDA10906}"/>
               </a:ext>
             </a:extLst>
           </p:cNvPr>
@@ -16815,7 +16815,7 @@
           <p:cNvPr id="21" name="">
             <a:extLst xmlns:a="http://schemas.openxmlformats.org/drawingml/2006/main">
               <a:ext uri="{FF2B5EF4-FFF2-40B4-BE49-F238E27FC236}">
-                <a16:creationId xmlns:a16="http://schemas.microsoft.com/office/drawing/2014/main" id="{52EBC30D-096C-4129-A0F1-853CA3AAE2B8}"/>
+                <a16:creationId xmlns:a16="http://schemas.microsoft.com/office/drawing/2014/main" id="{94886558-28D8-4FBB-884A-7A435A0569ED}"/>
               </a:ext>
             </a:extLst>
           </p:cNvPr>
@@ -16879,7 +16879,7 @@
           <p:cNvPr id="22" name="">
             <a:extLst xmlns:a="http://schemas.openxmlformats.org/drawingml/2006/main">
               <a:ext uri="{FF2B5EF4-FFF2-40B4-BE49-F238E27FC236}">
-                <a16:creationId xmlns:a16="http://schemas.microsoft.com/office/drawing/2014/main" id="{EE609116-9562-4407-8A70-2092FD36689C}"/>
+                <a16:creationId xmlns:a16="http://schemas.microsoft.com/office/drawing/2014/main" id="{7BB12920-95BE-4282-B583-3A66B36ACB89}"/>
               </a:ext>
             </a:extLst>
           </p:cNvPr>
@@ -16912,7 +16912,7 @@
           <p:cNvPr id="23" name="">
             <a:extLst xmlns:a="http://schemas.openxmlformats.org/drawingml/2006/main">
               <a:ext uri="{FF2B5EF4-FFF2-40B4-BE49-F238E27FC236}">
-                <a16:creationId xmlns:a16="http://schemas.microsoft.com/office/drawing/2014/main" id="{AE2E7D33-3B20-45AE-BAF2-FCE19C79AEA1}"/>
+                <a16:creationId xmlns:a16="http://schemas.microsoft.com/office/drawing/2014/main" id="{05297CC1-D6E3-4E80-ABD1-0AC70F9EEE18}"/>
               </a:ext>
             </a:extLst>
           </p:cNvPr>
@@ -16947,7 +16947,7 @@
           <p:cNvPr id="24" name="">
             <a:extLst xmlns:a="http://schemas.openxmlformats.org/drawingml/2006/main">
               <a:ext uri="{FF2B5EF4-FFF2-40B4-BE49-F238E27FC236}">
-                <a16:creationId xmlns:a16="http://schemas.microsoft.com/office/drawing/2014/main" id="{E030ECE2-754A-4168-BE7B-133FAAF8A82C}"/>
+                <a16:creationId xmlns:a16="http://schemas.microsoft.com/office/drawing/2014/main" id="{DF6549B0-BDBB-4C12-87E9-9BCAE4516477}"/>
               </a:ext>
             </a:extLst>
           </p:cNvPr>
@@ -17011,7 +17011,7 @@
           <p:cNvPr id="25" name="">
             <a:extLst xmlns:a="http://schemas.openxmlformats.org/drawingml/2006/main">
               <a:ext uri="{FF2B5EF4-FFF2-40B4-BE49-F238E27FC236}">
-                <a16:creationId xmlns:a16="http://schemas.microsoft.com/office/drawing/2014/main" id="{26D3E791-41F7-4843-AC51-30509C4ABB39}"/>
+                <a16:creationId xmlns:a16="http://schemas.microsoft.com/office/drawing/2014/main" id="{E948DC6E-2366-4F26-AD88-AB2DC2DEC0C3}"/>
               </a:ext>
             </a:extLst>
           </p:cNvPr>
@@ -17075,7 +17075,7 @@
           <p:cNvPr id="26" name="">
             <a:extLst xmlns:a="http://schemas.openxmlformats.org/drawingml/2006/main">
               <a:ext uri="{FF2B5EF4-FFF2-40B4-BE49-F238E27FC236}">
-                <a16:creationId xmlns:a16="http://schemas.microsoft.com/office/drawing/2014/main" id="{F1ABCA99-7521-4EAB-BF04-3A0C27DC853A}"/>
+                <a16:creationId xmlns:a16="http://schemas.microsoft.com/office/drawing/2014/main" id="{A5087D22-31D3-486E-A431-12042B889D1C}"/>
               </a:ext>
             </a:extLst>
           </p:cNvPr>
@@ -17108,7 +17108,7 @@
           <p:cNvPr id="27" name="">
             <a:extLst xmlns:a="http://schemas.openxmlformats.org/drawingml/2006/main">
               <a:ext uri="{FF2B5EF4-FFF2-40B4-BE49-F238E27FC236}">
-                <a16:creationId xmlns:a16="http://schemas.microsoft.com/office/drawing/2014/main" id="{556DE464-AF20-4180-90CA-667412B68013}"/>
+                <a16:creationId xmlns:a16="http://schemas.microsoft.com/office/drawing/2014/main" id="{1E13D4B8-8E58-4617-BD81-1291760A108B}"/>
               </a:ext>
             </a:extLst>
           </p:cNvPr>
@@ -17143,7 +17143,7 @@
           <p:cNvPr id="28" name="">
             <a:extLst xmlns:a="http://schemas.openxmlformats.org/drawingml/2006/main">
               <a:ext uri="{FF2B5EF4-FFF2-40B4-BE49-F238E27FC236}">
-                <a16:creationId xmlns:a16="http://schemas.microsoft.com/office/drawing/2014/main" id="{E1BBE7CF-4E77-40B8-8022-F904D95003E6}"/>
+                <a16:creationId xmlns:a16="http://schemas.microsoft.com/office/drawing/2014/main" id="{ACF1BF46-E5D3-48C8-AF7F-D60BD7E8EB8D}"/>
               </a:ext>
             </a:extLst>
           </p:cNvPr>
@@ -17207,7 +17207,7 @@
           <p:cNvPr id="29" name="">
             <a:extLst xmlns:a="http://schemas.openxmlformats.org/drawingml/2006/main">
               <a:ext uri="{FF2B5EF4-FFF2-40B4-BE49-F238E27FC236}">
-                <a16:creationId xmlns:a16="http://schemas.microsoft.com/office/drawing/2014/main" id="{4F89F2E9-0D7E-4A9B-9CDD-8124F9895B2B}"/>
+                <a16:creationId xmlns:a16="http://schemas.microsoft.com/office/drawing/2014/main" id="{E024BCF7-2F58-4703-9308-20C0FB295432}"/>
               </a:ext>
             </a:extLst>
           </p:cNvPr>
@@ -17271,7 +17271,7 @@
           <p:cNvPr id="30" name="">
             <a:extLst xmlns:a="http://schemas.openxmlformats.org/drawingml/2006/main">
               <a:ext uri="{FF2B5EF4-FFF2-40B4-BE49-F238E27FC236}">
-                <a16:creationId xmlns:a16="http://schemas.microsoft.com/office/drawing/2014/main" id="{5E315625-D3CA-40CA-9D97-7E5BAD551D4D}"/>
+                <a16:creationId xmlns:a16="http://schemas.microsoft.com/office/drawing/2014/main" id="{655A4480-2A26-4084-8252-9670C1B14045}"/>
               </a:ext>
             </a:extLst>
           </p:cNvPr>
@@ -17304,7 +17304,7 @@
           <p:cNvPr id="31" name="">
             <a:extLst xmlns:a="http://schemas.openxmlformats.org/drawingml/2006/main">
               <a:ext uri="{FF2B5EF4-FFF2-40B4-BE49-F238E27FC236}">
-                <a16:creationId xmlns:a16="http://schemas.microsoft.com/office/drawing/2014/main" id="{8923EAF7-198A-42F2-AF24-02EC1E255DE4}"/>
+                <a16:creationId xmlns:a16="http://schemas.microsoft.com/office/drawing/2014/main" id="{8B1F3F7C-7BFB-4625-B3F5-267840B72B5C}"/>
               </a:ext>
             </a:extLst>
           </p:cNvPr>
@@ -17339,7 +17339,7 @@
           <p:cNvPr id="32" name="">
             <a:extLst xmlns:a="http://schemas.openxmlformats.org/drawingml/2006/main">
               <a:ext uri="{FF2B5EF4-FFF2-40B4-BE49-F238E27FC236}">
-                <a16:creationId xmlns:a16="http://schemas.microsoft.com/office/drawing/2014/main" id="{84369D30-E5F8-4477-8A37-E8516C8A15E3}"/>
+                <a16:creationId xmlns:a16="http://schemas.microsoft.com/office/drawing/2014/main" id="{9A33F6B8-4446-4247-A724-CDF4502D7AC8}"/>
               </a:ext>
             </a:extLst>
           </p:cNvPr>
@@ -17403,7 +17403,7 @@
           <p:cNvPr id="33" name="">
             <a:extLst xmlns:a="http://schemas.openxmlformats.org/drawingml/2006/main">
               <a:ext uri="{FF2B5EF4-FFF2-40B4-BE49-F238E27FC236}">
-                <a16:creationId xmlns:a16="http://schemas.microsoft.com/office/drawing/2014/main" id="{9E685894-1A7C-47FC-88D5-ABF69E533D12}"/>
+                <a16:creationId xmlns:a16="http://schemas.microsoft.com/office/drawing/2014/main" id="{C79A2E8E-9967-4526-8808-CC57C9531954}"/>
               </a:ext>
             </a:extLst>
           </p:cNvPr>
@@ -17467,7 +17467,7 @@
           <p:cNvPr id="34" name="">
             <a:extLst xmlns:a="http://schemas.openxmlformats.org/drawingml/2006/main">
               <a:ext uri="{FF2B5EF4-FFF2-40B4-BE49-F238E27FC236}">
-                <a16:creationId xmlns:a16="http://schemas.microsoft.com/office/drawing/2014/main" id="{28C395D3-D875-423F-A318-2E7F55075384}"/>
+                <a16:creationId xmlns:a16="http://schemas.microsoft.com/office/drawing/2014/main" id="{DC5CEF9D-18FA-4885-8A33-EAC4250A282E}"/>
               </a:ext>
             </a:extLst>
           </p:cNvPr>
@@ -17531,7 +17531,7 @@
           <p:cNvPr id="35" name="">
             <a:extLst xmlns:a="http://schemas.openxmlformats.org/drawingml/2006/main">
               <a:ext uri="{FF2B5EF4-FFF2-40B4-BE49-F238E27FC236}">
-                <a16:creationId xmlns:a16="http://schemas.microsoft.com/office/drawing/2014/main" id="{380CEC16-B03C-4735-8CE1-D266E583B48C}"/>
+                <a16:creationId xmlns:a16="http://schemas.microsoft.com/office/drawing/2014/main" id="{E4468002-56BA-401C-96B9-FC7AE9BA7CFF}"/>
               </a:ext>
             </a:extLst>
           </p:cNvPr>
@@ -17564,7 +17564,7 @@
           <p:cNvPr id="36" name="">
             <a:extLst xmlns:a="http://schemas.openxmlformats.org/drawingml/2006/main">
               <a:ext uri="{FF2B5EF4-FFF2-40B4-BE49-F238E27FC236}">
-                <a16:creationId xmlns:a16="http://schemas.microsoft.com/office/drawing/2014/main" id="{15B1511E-A1AC-4EDC-95D6-E2C03A7AE072}"/>
+                <a16:creationId xmlns:a16="http://schemas.microsoft.com/office/drawing/2014/main" id="{34841820-58C4-4156-BC75-2DEDDB143B73}"/>
               </a:ext>
             </a:extLst>
           </p:cNvPr>
@@ -17628,7 +17628,7 @@
           <p:cNvPr id="37" name="">
             <a:extLst xmlns:a="http://schemas.openxmlformats.org/drawingml/2006/main">
               <a:ext uri="{FF2B5EF4-FFF2-40B4-BE49-F238E27FC236}">
-                <a16:creationId xmlns:a16="http://schemas.microsoft.com/office/drawing/2014/main" id="{0E18C57A-6A55-4C85-91DC-78936CFF8026}"/>
+                <a16:creationId xmlns:a16="http://schemas.microsoft.com/office/drawing/2014/main" id="{D30F1729-E77D-40E2-85BA-54BE2D036A8C}"/>
               </a:ext>
             </a:extLst>
           </p:cNvPr>
@@ -17690,7 +17690,7 @@
     </p:spTree>
     <p:extLst>
       <p:ext uri="{BB962C8B-B14F-4D97-AF65-F5344CB8AC3E}">
-        <p14:creationId xmlns:p14="http://schemas.microsoft.com/office/powerpoint/2010/main" val="1859184288"/>
+        <p14:creationId xmlns:p14="http://schemas.microsoft.com/office/powerpoint/2010/main" val="1935050649"/>
       </p:ext>
     </p:extLst>
   </p:cSld>
